--- a/submission/CargoClear_AI_Builder_Cup_Submission.pptx
+++ b/submission/CargoClear_AI_Builder_Cup_Submission.pptx
@@ -7052,7 +7052,7 @@
               <a:defRPr sz="1600" b="1"/>
             </a:pPr>
             <a:r>
-              <a:t>Team name: [TEAM NAME — REQUIRED] (CargoClear Team)</a:t>
+              <a:t>Team name: CargoClear</a:t>
             </a:r>
             <a:endParaRPr sz="1800">
               <a:latin typeface="Google Sans Flex"/>
@@ -7075,7 +7075,7 @@
               <a:defRPr sz="1600" b="1"/>
             </a:pPr>
             <a:r>
-              <a:t>Team leader name: [TEAM LEADER — REQUIRED]</a:t>
+              <a:t>Team leader name: Ravi Mule (Team Member: Nikhil Pande)</a:t>
             </a:r>
             <a:endParaRPr sz="1800">
               <a:latin typeface="Google Sans Flex"/>
@@ -7407,7 +7407,7 @@
               </a:defRPr>
             </a:pPr>
             <a:r>
-              <a:t>• Cloud Run Frontend &amp; API Services: Runs on Google Cloud Run with scale-to-zero. Baseline free tier covers 2 million requests/month. Projected cost for production pilot: ~$15.00 – $25.00 / month.</a:t>
+              <a:t>• Cloud Run Frontend &amp; API Services: Deployed with --min-instances 0 (scale-to-zero), delivering $0.00 idle compute cost. Monthly compute for 5,000 assessments falls within Cloud Run Free Tier (2M requests/mo free). Projected compute: $0.00 – $2.00 / month.</a:t>
             </a:r>
           </a:p>
           <a:p>
@@ -7437,7 +7437,7 @@
               </a:defRPr>
             </a:pPr>
             <a:r>
-              <a:t>• Cloud Storage &amp; Firestore Ledger: Document storage (10 MB/shipment) + Firestore read/write operations for audit ledger. Projected cost: ~$5.00 – $10.00 / month.</a:t>
+              <a:t>• Cloud Storage &amp; Firestore Native Ledger: Document storage (10 MB/shipment) + Firestore native user registration and audit ledger read/writes. Projected cost: ~$5.00 – $10.00 / month.</a:t>
             </a:r>
           </a:p>
           <a:p>
@@ -7467,7 +7467,7 @@
               </a:defRPr>
             </a:pPr>
             <a:r>
-              <a:t>• Total Estimated Monthly Operating Cost: Estimated total for 5,000 full shipment bundle assessments: ~$26.40 – $44.40 / month (less than $0.01 per clearance assessment!).</a:t>
+              <a:t>• Total Estimated Monthly Operating Cost: Estimated total for 5,000 full shipment bundle assessments: ~$11.40 – $21.40 / month (less than $0.005 per clearance assessment!).</a:t>
             </a:r>
           </a:p>
         </p:txBody>
@@ -7695,7 +7695,7 @@
               </a:defRPr>
             </a:pPr>
             <a:r>
-              <a:t>• 1. Commercial SSO &amp; Tenant Dashboard: Google Workspace SSO integration, role-based licensing (Licensed CHA, Operator, Auditor), tenant scoping, and recent bundles table with status pills.</a:t>
+              <a:t>• 1. Commercial Auth &amp; Tenant Dashboard: Google Workspace SSO plus Cloud Firestore commercial registration (salted PBKDF2-HMAC-SHA256 password hashing), user profile menu with 3-way theme controls, and recent bundles table.</a:t>
             </a:r>
           </a:p>
           <a:p>
@@ -7710,7 +7710,7 @@
               </a:defRPr>
             </a:pPr>
             <a:r>
-              <a:t>• 2. Interactive 3-Pane Clearance Workbench: Multi-document bundle view with side-by-side high-resolution PDF rendering, document switcher, and live upload progress.</a:t>
+              <a:t>• 2. Tripartite Clearance Workbench: Next.js 15 workbench with 3-way layout switcher (Split, Viewer focus, Decision focus), auto-hiding PDF view during analysis with automated focus scrolling to live progress bar.</a:t>
             </a:r>
           </a:p>
           <a:p>
@@ -7725,7 +7725,7 @@
               </a:defRPr>
             </a:pPr>
             <a:r>
-              <a:t>• 3. Visual Evidence Grounding &amp; Bounding Boxes: Direct coordinate overlays on trade documents highlighting discrepancies (e.g. invoice gross weight vs. packing list weight) and chemistry mismatches.</a:t>
+              <a:t>• 3. Pre-Upload Staging &amp; Classification: Portaled document classification modal (z-[9999]) enabling customs brokers to categorize document types prior to ingestion.</a:t>
             </a:r>
           </a:p>
           <a:p>
@@ -7740,7 +7740,7 @@
               </a:defRPr>
             </a:pPr>
             <a:r>
-              <a:t>• 4. Tariff Valuation &amp; Anti-Dumping Calculation: Itemized duty calculation card detailing BCD, Social Welfare Surcharge, and Anti-Dumping Duties with legal notification citations.</a:t>
+              <a:t>• 4. Visual Evidence Grounding &amp; Bounding Boxes: Direct coordinate overlays on trade documents highlighting discrepancies (e.g. invoice gross weight vs. packing list weight) and chemistry mismatches.</a:t>
             </a:r>
           </a:p>
           <a:p>
@@ -7755,7 +7755,7 @@
               </a:defRPr>
             </a:pPr>
             <a:r>
-              <a:t>• 5. Human-in-the-Loop Corrections &amp; Audit Trail: Authorized override modal with instant zero-model recomputation and cryptographically signed SHA-256 audit log timeline.</a:t>
+              <a:t>• 5. Tariff Valuation, In-Place Override &amp; Audit Ledger: Itemized duty calculation card (BCD, SWS, ADD), authorized override modal with instant zero-model recomputation, and cryptographically signed SHA-256 audit log timeline.</a:t>
             </a:r>
           </a:p>
         </p:txBody>
@@ -8588,7 +8588,7 @@
               <a:defRPr sz="1600" b="1"/>
             </a:pPr>
             <a:r>
-              <a:t>GitHub Public Repository: [GITHUB REPOSITORY URL — REQUIRED] (https://github.com/ravimule93/cargoclear)</a:t>
+              <a:t>GitHub Public Repository: https://github.com/ravimule93/cargoclear (Branch: improvement-plan)</a:t>
             </a:r>
             <a:endParaRPr>
               <a:latin typeface="Google Sans Flex Medium"/>
@@ -8611,7 +8611,7 @@
               <a:defRPr sz="1600" b="1"/>
             </a:pPr>
             <a:r>
-              <a:t>Demo Video Link (3 Minutes): [DEMO VIDEO LINK — REQUIRED]</a:t>
+              <a:t>Demo Video Link (3 Minutes): [DEMO VIDEO LINK — Insert URL here] (Narrative script in submission dossier)</a:t>
             </a:r>
             <a:endParaRPr>
               <a:latin typeface="Google Sans Flex Medium"/>
@@ -10163,7 +10163,7 @@
           <a:p>
             <a:pPr>
               <a:spcAft>
-                <a:spcPts val="600"/>
+                <a:spcPts val="400"/>
               </a:spcAft>
               <a:defRPr sz="1600" b="1">
                 <a:solidFill>
@@ -10178,24 +10178,69 @@
           <a:p>
             <a:pPr>
               <a:spcAft>
-                <a:spcPts val="500"/>
-              </a:spcAft>
-              <a:defRPr sz="1200" b="0">
+                <a:spcPts val="300"/>
+              </a:spcAft>
+              <a:defRPr sz="1050" b="0">
                 <a:solidFill>
                   <a:srgbClr val="1E293B"/>
                 </a:solidFill>
               </a:defRPr>
             </a:pPr>
             <a:r>
+              <a:t>• Tripartite Clearance Layout Switcher: 3-way layout switcher (Split, Viewer focus, Decision focus), auto-hiding PDF view during analysis with automated focus scrolling to live progress bar.</a:t>
+            </a:r>
+          </a:p>
+          <a:p>
+            <a:pPr>
+              <a:spcAft>
+                <a:spcPts val="300"/>
+              </a:spcAft>
+              <a:defRPr sz="1050" b="0">
+                <a:solidFill>
+                  <a:srgbClr val="1E293B"/>
+                </a:solidFill>
+              </a:defRPr>
+            </a:pPr>
+            <a:r>
+              <a:t>• Pre-Upload Document Staging &amp; Classification: Portaled classification modal (z-[9999]) enabling customs brokers to categorize document types prior to ingestion.</a:t>
+            </a:r>
+          </a:p>
+          <a:p>
+            <a:pPr>
+              <a:spcAft>
+                <a:spcPts val="300"/>
+              </a:spcAft>
+              <a:defRPr sz="1050" b="0">
+                <a:solidFill>
+                  <a:srgbClr val="1E293B"/>
+                </a:solidFill>
+              </a:defRPr>
+            </a:pPr>
+            <a:r>
+              <a:t>• Commercial Registration &amp; Corporate Auth: Google Workspace SSO plus Cloud Firestore commercial registration with salted PBKDF2-HMAC-SHA256 password hashing and audit trails.</a:t>
+            </a:r>
+          </a:p>
+          <a:p>
+            <a:pPr>
+              <a:spcAft>
+                <a:spcPts val="300"/>
+              </a:spcAft>
+              <a:defRPr sz="1050" b="0">
+                <a:solidFill>
+                  <a:srgbClr val="1E293B"/>
+                </a:solidFill>
+              </a:defRPr>
+            </a:pPr>
+            <a:r>
               <a:t>• Multimodal Ingestion &amp; PDF Normalization: Processes multi-page trade bundles with page-level coordinate mapping and thumbnail generation.</a:t>
             </a:r>
           </a:p>
           <a:p>
             <a:pPr>
               <a:spcAft>
-                <a:spcPts val="500"/>
-              </a:spcAft>
-              <a:defRPr sz="1200" b="0">
+                <a:spcPts val="300"/>
+              </a:spcAft>
+              <a:defRPr sz="1050" b="0">
                 <a:solidFill>
                   <a:srgbClr val="1E293B"/>
                 </a:solidFill>
@@ -10208,9 +10253,9 @@
           <a:p>
             <a:pPr>
               <a:spcAft>
-                <a:spcPts val="500"/>
-              </a:spcAft>
-              <a:defRPr sz="1200" b="0">
+                <a:spcPts val="300"/>
+              </a:spcAft>
+              <a:defRPr sz="1050" b="0">
                 <a:solidFill>
                   <a:srgbClr val="1E293B"/>
                 </a:solidFill>
@@ -10223,9 +10268,9 @@
           <a:p>
             <a:pPr>
               <a:spcAft>
-                <a:spcPts val="500"/>
-              </a:spcAft>
-              <a:defRPr sz="1200" b="0">
+                <a:spcPts val="300"/>
+              </a:spcAft>
+              <a:defRPr sz="1050" b="0">
                 <a:solidFill>
                   <a:srgbClr val="1E293B"/>
                 </a:solidFill>
@@ -10238,9 +10283,9 @@
           <a:p>
             <a:pPr>
               <a:spcAft>
-                <a:spcPts val="500"/>
-              </a:spcAft>
-              <a:defRPr sz="1200" b="0">
+                <a:spcPts val="300"/>
+              </a:spcAft>
+              <a:defRPr sz="1050" b="0">
                 <a:solidFill>
                   <a:srgbClr val="1E293B"/>
                 </a:solidFill>
@@ -10253,9 +10298,9 @@
           <a:p>
             <a:pPr>
               <a:spcAft>
-                <a:spcPts val="500"/>
-              </a:spcAft>
-              <a:defRPr sz="1200" b="0">
+                <a:spcPts val="300"/>
+              </a:spcAft>
+              <a:defRPr sz="1050" b="0">
                 <a:solidFill>
                   <a:srgbClr val="1E293B"/>
                 </a:solidFill>
@@ -10268,9 +10313,9 @@
           <a:p>
             <a:pPr>
               <a:spcAft>
-                <a:spcPts val="500"/>
-              </a:spcAft>
-              <a:defRPr sz="1200" b="0">
+                <a:spcPts val="300"/>
+              </a:spcAft>
+              <a:defRPr sz="1050" b="0">
                 <a:solidFill>
                   <a:srgbClr val="1E293B"/>
                 </a:solidFill>
@@ -10283,9 +10328,9 @@
           <a:p>
             <a:pPr>
               <a:spcAft>
-                <a:spcPts val="500"/>
-              </a:spcAft>
-              <a:defRPr sz="1200" b="0">
+                <a:spcPts val="300"/>
+              </a:spcAft>
+              <a:defRPr sz="1050" b="0">
                 <a:solidFill>
                   <a:srgbClr val="1E293B"/>
                 </a:solidFill>

--- a/submission/CargoClear_AI_Builder_Cup_Submission.pptx
+++ b/submission/CargoClear_AI_Builder_Cup_Submission.pptx
@@ -1,51 +1,50 @@
 
 <file path=ppt/presentation.xml><?xml version="1.0" encoding="utf-8"?>
-<p:presentation xmlns:a="http://schemas.openxmlformats.org/drawingml/2006/main" xmlns:r="http://schemas.openxmlformats.org/officeDocument/2006/relationships" xmlns:mc="http://schemas.openxmlformats.org/markup-compatibility/2006" xmlns:mv="urn:schemas-microsoft-com:mac:vml" xmlns:p="http://schemas.openxmlformats.org/presentationml/2006/main" xmlns:c="http://schemas.openxmlformats.org/drawingml/2006/chart" xmlns:dgm="http://schemas.openxmlformats.org/drawingml/2006/diagram" xmlns:o="urn:schemas-microsoft-com:office:office" xmlns:v="urn:schemas-microsoft-com:vml" xmlns:pvml="urn:schemas-microsoft-com:office:powerpoint" xmlns:com="http://schemas.openxmlformats.org/drawingml/2006/compatibility" xmlns:p14="http://schemas.microsoft.com/office/powerpoint/2010/main" xmlns:p15="http://schemas.microsoft.com/office/powerpoint/2012/main" xmlns:ahyp="http://schemas.microsoft.com/office/drawing/2018/hyperlinkcolor" autoCompressPictures="0" embedTrueTypeFonts="1" strictFirstAndLastChars="0" saveSubsetFonts="1">
+<p:presentation xmlns:a="http://schemas.openxmlformats.org/drawingml/2006/main" xmlns:r="http://schemas.openxmlformats.org/officeDocument/2006/relationships" xmlns:p="http://schemas.openxmlformats.org/presentationml/2006/main" strictFirstAndLastChars="0" embedTrueTypeFonts="1" saveSubsetFonts="1" autoCompressPictures="0">
   <p:sldMasterIdLst>
-    <p:sldMasterId id="2147483659" r:id="rId4"/>
+    <p:sldMasterId id="2147483659" r:id="rId1"/>
   </p:sldMasterIdLst>
   <p:notesMasterIdLst>
-    <p:notesMasterId r:id="rId5"/>
+    <p:notesMasterId r:id="rId17"/>
   </p:notesMasterIdLst>
   <p:sldIdLst>
-    <p:sldId id="256" r:id="rId6"/>
-    <p:sldId id="257" r:id="rId7"/>
-    <p:sldId id="258" r:id="rId8"/>
-    <p:sldId id="259" r:id="rId9"/>
-    <p:sldId id="260" r:id="rId10"/>
-    <p:sldId id="261" r:id="rId11"/>
-    <p:sldId id="262" r:id="rId12"/>
-    <p:sldId id="263" r:id="rId13"/>
-    <p:sldId id="264" r:id="rId14"/>
-    <p:sldId id="265" r:id="rId15"/>
-    <p:sldId id="266" r:id="rId16"/>
-    <p:sldId id="267" r:id="rId17"/>
-    <p:sldId id="268" r:id="rId18"/>
-    <p:sldId id="269" r:id="rId19"/>
-    <p:sldId id="270" r:id="rId20"/>
-    <p:sldId id="271" r:id="rId21"/>
+    <p:sldId id="256" r:id="rId2"/>
+    <p:sldId id="258" r:id="rId3"/>
+    <p:sldId id="259" r:id="rId4"/>
+    <p:sldId id="260" r:id="rId5"/>
+    <p:sldId id="261" r:id="rId6"/>
+    <p:sldId id="262" r:id="rId7"/>
+    <p:sldId id="263" r:id="rId8"/>
+    <p:sldId id="264" r:id="rId9"/>
+    <p:sldId id="265" r:id="rId10"/>
+    <p:sldId id="266" r:id="rId11"/>
+    <p:sldId id="267" r:id="rId12"/>
+    <p:sldId id="268" r:id="rId13"/>
+    <p:sldId id="269" r:id="rId14"/>
+    <p:sldId id="270" r:id="rId15"/>
+    <p:sldId id="271" r:id="rId16"/>
   </p:sldIdLst>
-  <p:sldSz cy="5143500" cx="9144000"/>
+  <p:sldSz cx="9144000" cy="5143500" type="screen16x9"/>
   <p:notesSz cx="6858000" cy="9144000"/>
   <p:embeddedFontLst>
     <p:embeddedFont>
-      <p:font typeface="Google Sans Flex Medium"/>
+      <p:font typeface="Google Sans Flex" panose="020B0604020202020204" charset="0"/>
+      <p:regular r:id="rId18"/>
+      <p:bold r:id="rId19"/>
+    </p:embeddedFont>
+    <p:embeddedFont>
+      <p:font typeface="Google Sans Flex Medium" panose="020B0604020202020204" charset="0"/>
+      <p:regular r:id="rId20"/>
+      <p:bold r:id="rId21"/>
+    </p:embeddedFont>
+    <p:embeddedFont>
+      <p:font typeface="Google Sans Flex SemiBold" panose="020B0604020202020204" charset="0"/>
       <p:regular r:id="rId22"/>
       <p:bold r:id="rId23"/>
     </p:embeddedFont>
-    <p:embeddedFont>
-      <p:font typeface="Google Sans Flex"/>
-      <p:regular r:id="rId24"/>
-      <p:bold r:id="rId25"/>
-    </p:embeddedFont>
-    <p:embeddedFont>
-      <p:font typeface="Google Sans Flex SemiBold"/>
-      <p:regular r:id="rId26"/>
-      <p:bold r:id="rId27"/>
-    </p:embeddedFont>
   </p:embeddedFontLst>
   <p:defaultTextStyle>
-    <a:defPPr lvl="0" marR="0" rtl="0" algn="l">
+    <a:defPPr marR="0" lvl="0" algn="l" rtl="0">
       <a:lnSpc>
         <a:spcPct val="100000"/>
       </a:lnSpc>
@@ -56,7 +55,7 @@
         <a:spcPts val="0"/>
       </a:spcAft>
     </a:defPPr>
-    <a:lvl1pPr lvl="0" marR="0" rtl="0" algn="l">
+    <a:lvl1pPr marR="0" lvl="0" algn="l" rtl="0">
       <a:lnSpc>
         <a:spcPct val="100000"/>
       </a:lnSpc>
@@ -70,7 +69,7 @@
         <a:srgbClr val="000000"/>
       </a:buClr>
       <a:buFont typeface="Arial"/>
-      <a:defRPr b="0" i="0" spc="0" sz="1400" u="none" cap="none" strike="noStrike">
+      <a:defRPr sz="1400" b="0" i="0" u="none" strike="noStrike" cap="none" spc="0">
         <a:solidFill>
           <a:srgbClr val="000000"/>
         </a:solidFill>
@@ -80,7 +79,7 @@
         <a:sym typeface="Arial"/>
       </a:defRPr>
     </a:lvl1pPr>
-    <a:lvl2pPr lvl="1" marR="0" rtl="0" algn="l">
+    <a:lvl2pPr marR="0" lvl="1" algn="l" rtl="0">
       <a:lnSpc>
         <a:spcPct val="100000"/>
       </a:lnSpc>
@@ -94,7 +93,7 @@
         <a:srgbClr val="000000"/>
       </a:buClr>
       <a:buFont typeface="Arial"/>
-      <a:defRPr b="0" i="0" spc="0" sz="1400" u="none" cap="none" strike="noStrike">
+      <a:defRPr sz="1400" b="0" i="0" u="none" strike="noStrike" cap="none" spc="0">
         <a:solidFill>
           <a:srgbClr val="000000"/>
         </a:solidFill>
@@ -104,7 +103,7 @@
         <a:sym typeface="Arial"/>
       </a:defRPr>
     </a:lvl2pPr>
-    <a:lvl3pPr lvl="2" marR="0" rtl="0" algn="l">
+    <a:lvl3pPr marR="0" lvl="2" algn="l" rtl="0">
       <a:lnSpc>
         <a:spcPct val="100000"/>
       </a:lnSpc>
@@ -118,7 +117,7 @@
         <a:srgbClr val="000000"/>
       </a:buClr>
       <a:buFont typeface="Arial"/>
-      <a:defRPr b="0" i="0" spc="0" sz="1400" u="none" cap="none" strike="noStrike">
+      <a:defRPr sz="1400" b="0" i="0" u="none" strike="noStrike" cap="none" spc="0">
         <a:solidFill>
           <a:srgbClr val="000000"/>
         </a:solidFill>
@@ -128,7 +127,7 @@
         <a:sym typeface="Arial"/>
       </a:defRPr>
     </a:lvl3pPr>
-    <a:lvl4pPr lvl="3" marR="0" rtl="0" algn="l">
+    <a:lvl4pPr marR="0" lvl="3" algn="l" rtl="0">
       <a:lnSpc>
         <a:spcPct val="100000"/>
       </a:lnSpc>
@@ -142,7 +141,7 @@
         <a:srgbClr val="000000"/>
       </a:buClr>
       <a:buFont typeface="Arial"/>
-      <a:defRPr b="0" i="0" spc="0" sz="1400" u="none" cap="none" strike="noStrike">
+      <a:defRPr sz="1400" b="0" i="0" u="none" strike="noStrike" cap="none" spc="0">
         <a:solidFill>
           <a:srgbClr val="000000"/>
         </a:solidFill>
@@ -152,7 +151,7 @@
         <a:sym typeface="Arial"/>
       </a:defRPr>
     </a:lvl4pPr>
-    <a:lvl5pPr lvl="4" marR="0" rtl="0" algn="l">
+    <a:lvl5pPr marR="0" lvl="4" algn="l" rtl="0">
       <a:lnSpc>
         <a:spcPct val="100000"/>
       </a:lnSpc>
@@ -166,7 +165,7 @@
         <a:srgbClr val="000000"/>
       </a:buClr>
       <a:buFont typeface="Arial"/>
-      <a:defRPr b="0" i="0" spc="0" sz="1400" u="none" cap="none" strike="noStrike">
+      <a:defRPr sz="1400" b="0" i="0" u="none" strike="noStrike" cap="none" spc="0">
         <a:solidFill>
           <a:srgbClr val="000000"/>
         </a:solidFill>
@@ -176,7 +175,7 @@
         <a:sym typeface="Arial"/>
       </a:defRPr>
     </a:lvl5pPr>
-    <a:lvl6pPr lvl="5" marR="0" rtl="0" algn="l">
+    <a:lvl6pPr marR="0" lvl="5" algn="l" rtl="0">
       <a:lnSpc>
         <a:spcPct val="100000"/>
       </a:lnSpc>
@@ -190,7 +189,7 @@
         <a:srgbClr val="000000"/>
       </a:buClr>
       <a:buFont typeface="Arial"/>
-      <a:defRPr b="0" i="0" spc="0" sz="1400" u="none" cap="none" strike="noStrike">
+      <a:defRPr sz="1400" b="0" i="0" u="none" strike="noStrike" cap="none" spc="0">
         <a:solidFill>
           <a:srgbClr val="000000"/>
         </a:solidFill>
@@ -200,7 +199,7 @@
         <a:sym typeface="Arial"/>
       </a:defRPr>
     </a:lvl6pPr>
-    <a:lvl7pPr lvl="6" marR="0" rtl="0" algn="l">
+    <a:lvl7pPr marR="0" lvl="6" algn="l" rtl="0">
       <a:lnSpc>
         <a:spcPct val="100000"/>
       </a:lnSpc>
@@ -214,7 +213,7 @@
         <a:srgbClr val="000000"/>
       </a:buClr>
       <a:buFont typeface="Arial"/>
-      <a:defRPr b="0" i="0" spc="0" sz="1400" u="none" cap="none" strike="noStrike">
+      <a:defRPr sz="1400" b="0" i="0" u="none" strike="noStrike" cap="none" spc="0">
         <a:solidFill>
           <a:srgbClr val="000000"/>
         </a:solidFill>
@@ -224,7 +223,7 @@
         <a:sym typeface="Arial"/>
       </a:defRPr>
     </a:lvl7pPr>
-    <a:lvl8pPr lvl="7" marR="0" rtl="0" algn="l">
+    <a:lvl8pPr marR="0" lvl="7" algn="l" rtl="0">
       <a:lnSpc>
         <a:spcPct val="100000"/>
       </a:lnSpc>
@@ -238,7 +237,7 @@
         <a:srgbClr val="000000"/>
       </a:buClr>
       <a:buFont typeface="Arial"/>
-      <a:defRPr b="0" i="0" spc="0" sz="1400" u="none" cap="none" strike="noStrike">
+      <a:defRPr sz="1400" b="0" i="0" u="none" strike="noStrike" cap="none" spc="0">
         <a:solidFill>
           <a:srgbClr val="000000"/>
         </a:solidFill>
@@ -248,7 +247,7 @@
         <a:sym typeface="Arial"/>
       </a:defRPr>
     </a:lvl8pPr>
-    <a:lvl9pPr lvl="8" marR="0" rtl="0" algn="l">
+    <a:lvl9pPr marR="0" lvl="8" algn="l" rtl="0">
       <a:lnSpc>
         <a:spcPct val="100000"/>
       </a:lnSpc>
@@ -262,7 +261,7 @@
         <a:srgbClr val="000000"/>
       </a:buClr>
       <a:buFont typeface="Arial"/>
-      <a:defRPr b="0" i="0" spc="0" sz="1400" u="none" cap="none" strike="noStrike">
+      <a:defRPr sz="1400" b="0" i="0" u="none" strike="noStrike" cap="none" spc="0">
         <a:solidFill>
           <a:srgbClr val="000000"/>
         </a:solidFill>
@@ -275,7 +274,7 @@
   </p:defaultTextStyle>
   <p:extLst>
     <p:ext uri="{EFAFB233-063F-42B5-8137-9DF3F51BA10A}">
-      <p15:sldGuideLst>
+      <p15:sldGuideLst xmlns:p15="http://schemas.microsoft.com/office/powerpoint/2012/main">
         <p15:guide id="1" orient="horz" pos="1620">
           <p15:clr>
             <a:srgbClr val="747775"/>
@@ -292,12 +291,227 @@
 </p:presentation>
 </file>
 
+<file path=ppt/changesInfos/changesInfo1.xml><?xml version="1.0" encoding="utf-8"?>
+<pc:chgInfo xmlns:a="http://schemas.openxmlformats.org/drawingml/2006/main" xmlns:r="http://schemas.openxmlformats.org/officeDocument/2006/relationships" xmlns:ac="http://schemas.microsoft.com/office/drawing/2013/main/command" xmlns:pc="http://schemas.microsoft.com/office/powerpoint/2013/main/command">
+  <pc:docChgLst>
+    <pc:chgData name="Mule, Ravi" userId="5dc622f2-fe91-4480-aeeb-95b7e03dfbdf" providerId="ADAL" clId="{00B49FA7-9D5F-450A-9BD4-543082DF202C}"/>
+    <pc:docChg chg="undo custSel delSld modSld">
+      <pc:chgData name="Mule, Ravi" userId="5dc622f2-fe91-4480-aeeb-95b7e03dfbdf" providerId="ADAL" clId="{00B49FA7-9D5F-450A-9BD4-543082DF202C}" dt="2026-10-18T16:40:47.545" v="68" actId="1076"/>
+      <pc:docMkLst>
+        <pc:docMk/>
+      </pc:docMkLst>
+      <pc:sldChg chg="addSp modSp mod">
+        <pc:chgData name="Mule, Ravi" userId="5dc622f2-fe91-4480-aeeb-95b7e03dfbdf" providerId="ADAL" clId="{00B49FA7-9D5F-450A-9BD4-543082DF202C}" dt="2026-10-18T16:40:47.545" v="68" actId="1076"/>
+        <pc:sldMkLst>
+          <pc:docMk/>
+          <pc:sldMk cId="0" sldId="256"/>
+        </pc:sldMkLst>
+        <pc:spChg chg="mod">
+          <ac:chgData name="Mule, Ravi" userId="5dc622f2-fe91-4480-aeeb-95b7e03dfbdf" providerId="ADAL" clId="{00B49FA7-9D5F-450A-9BD4-543082DF202C}" dt="2026-10-18T16:40:43.060" v="66" actId="20577"/>
+          <ac:spMkLst>
+            <pc:docMk/>
+            <pc:sldMk cId="0" sldId="256"/>
+            <ac:spMk id="54" creationId="{00000000-0000-0000-0000-000000000000}"/>
+          </ac:spMkLst>
+        </pc:spChg>
+        <pc:picChg chg="add mod">
+          <ac:chgData name="Mule, Ravi" userId="5dc622f2-fe91-4480-aeeb-95b7e03dfbdf" providerId="ADAL" clId="{00B49FA7-9D5F-450A-9BD4-543082DF202C}" dt="2026-10-18T16:40:47.545" v="68" actId="1076"/>
+          <ac:picMkLst>
+            <pc:docMk/>
+            <pc:sldMk cId="0" sldId="256"/>
+            <ac:picMk id="3" creationId="{11BC9BD4-A4C5-4BD5-D9C2-AB5E8FE55DC7}"/>
+          </ac:picMkLst>
+        </pc:picChg>
+      </pc:sldChg>
+      <pc:sldChg chg="del">
+        <pc:chgData name="Mule, Ravi" userId="5dc622f2-fe91-4480-aeeb-95b7e03dfbdf" providerId="ADAL" clId="{00B49FA7-9D5F-450A-9BD4-543082DF202C}" dt="2026-10-18T13:20:59.403" v="37" actId="2696"/>
+        <pc:sldMkLst>
+          <pc:docMk/>
+          <pc:sldMk cId="0" sldId="257"/>
+        </pc:sldMkLst>
+      </pc:sldChg>
+      <pc:sldChg chg="modSp mod">
+        <pc:chgData name="Mule, Ravi" userId="5dc622f2-fe91-4480-aeeb-95b7e03dfbdf" providerId="ADAL" clId="{00B49FA7-9D5F-450A-9BD4-543082DF202C}" dt="2026-10-18T16:12:20.035" v="64" actId="1076"/>
+        <pc:sldMkLst>
+          <pc:docMk/>
+          <pc:sldMk cId="0" sldId="258"/>
+        </pc:sldMkLst>
+        <pc:spChg chg="mod">
+          <ac:chgData name="Mule, Ravi" userId="5dc622f2-fe91-4480-aeeb-95b7e03dfbdf" providerId="ADAL" clId="{00B49FA7-9D5F-450A-9BD4-543082DF202C}" dt="2026-10-18T13:21:25.577" v="41" actId="1076"/>
+          <ac:spMkLst>
+            <pc:docMk/>
+            <pc:sldMk cId="0" sldId="258"/>
+            <ac:spMk id="71" creationId="{00000000-0000-0000-0000-000000000000}"/>
+          </ac:spMkLst>
+        </pc:spChg>
+        <pc:spChg chg="mod">
+          <ac:chgData name="Mule, Ravi" userId="5dc622f2-fe91-4480-aeeb-95b7e03dfbdf" providerId="ADAL" clId="{00B49FA7-9D5F-450A-9BD4-543082DF202C}" dt="2026-10-18T16:12:20.035" v="64" actId="1076"/>
+          <ac:spMkLst>
+            <pc:docMk/>
+            <pc:sldMk cId="0" sldId="258"/>
+            <ac:spMk id="72" creationId="{00000000-0000-0000-0000-000000000000}"/>
+          </ac:spMkLst>
+        </pc:spChg>
+      </pc:sldChg>
+      <pc:sldChg chg="modSp mod">
+        <pc:chgData name="Mule, Ravi" userId="5dc622f2-fe91-4480-aeeb-95b7e03dfbdf" providerId="ADAL" clId="{00B49FA7-9D5F-450A-9BD4-543082DF202C}" dt="2026-10-18T13:22:46.422" v="47" actId="14100"/>
+        <pc:sldMkLst>
+          <pc:docMk/>
+          <pc:sldMk cId="0" sldId="259"/>
+        </pc:sldMkLst>
+        <pc:spChg chg="mod">
+          <ac:chgData name="Mule, Ravi" userId="5dc622f2-fe91-4480-aeeb-95b7e03dfbdf" providerId="ADAL" clId="{00B49FA7-9D5F-450A-9BD4-543082DF202C}" dt="2026-10-18T13:22:41.540" v="45" actId="14100"/>
+          <ac:spMkLst>
+            <pc:docMk/>
+            <pc:sldMk cId="0" sldId="259"/>
+            <ac:spMk id="79" creationId="{00000000-0000-0000-0000-000000000000}"/>
+          </ac:spMkLst>
+        </pc:spChg>
+        <pc:spChg chg="mod">
+          <ac:chgData name="Mule, Ravi" userId="5dc622f2-fe91-4480-aeeb-95b7e03dfbdf" providerId="ADAL" clId="{00B49FA7-9D5F-450A-9BD4-543082DF202C}" dt="2026-10-18T13:22:46.422" v="47" actId="14100"/>
+          <ac:spMkLst>
+            <pc:docMk/>
+            <pc:sldMk cId="0" sldId="259"/>
+            <ac:spMk id="80" creationId="{00000000-0000-0000-0000-000000000000}"/>
+          </ac:spMkLst>
+        </pc:spChg>
+      </pc:sldChg>
+      <pc:sldChg chg="modSp mod">
+        <pc:chgData name="Mule, Ravi" userId="5dc622f2-fe91-4480-aeeb-95b7e03dfbdf" providerId="ADAL" clId="{00B49FA7-9D5F-450A-9BD4-543082DF202C}" dt="2026-10-18T13:23:46.801" v="49" actId="14100"/>
+        <pc:sldMkLst>
+          <pc:docMk/>
+          <pc:sldMk cId="0" sldId="260"/>
+        </pc:sldMkLst>
+        <pc:spChg chg="mod">
+          <ac:chgData name="Mule, Ravi" userId="5dc622f2-fe91-4480-aeeb-95b7e03dfbdf" providerId="ADAL" clId="{00B49FA7-9D5F-450A-9BD4-543082DF202C}" dt="2026-10-18T13:23:46.801" v="49" actId="14100"/>
+          <ac:spMkLst>
+            <pc:docMk/>
+            <pc:sldMk cId="0" sldId="260"/>
+            <ac:spMk id="88" creationId="{00000000-0000-0000-0000-000000000000}"/>
+          </ac:spMkLst>
+        </pc:spChg>
+      </pc:sldChg>
+      <pc:sldChg chg="modSp mod">
+        <pc:chgData name="Mule, Ravi" userId="5dc622f2-fe91-4480-aeeb-95b7e03dfbdf" providerId="ADAL" clId="{00B49FA7-9D5F-450A-9BD4-543082DF202C}" dt="2026-10-18T13:24:37.044" v="51" actId="14100"/>
+        <pc:sldMkLst>
+          <pc:docMk/>
+          <pc:sldMk cId="0" sldId="261"/>
+        </pc:sldMkLst>
+        <pc:spChg chg="mod">
+          <ac:chgData name="Mule, Ravi" userId="5dc622f2-fe91-4480-aeeb-95b7e03dfbdf" providerId="ADAL" clId="{00B49FA7-9D5F-450A-9BD4-543082DF202C}" dt="2026-10-18T13:24:37.044" v="51" actId="14100"/>
+          <ac:spMkLst>
+            <pc:docMk/>
+            <pc:sldMk cId="0" sldId="261"/>
+            <ac:spMk id="96" creationId="{00000000-0000-0000-0000-000000000000}"/>
+          </ac:spMkLst>
+        </pc:spChg>
+      </pc:sldChg>
+      <pc:sldChg chg="modSp mod">
+        <pc:chgData name="Mule, Ravi" userId="5dc622f2-fe91-4480-aeeb-95b7e03dfbdf" providerId="ADAL" clId="{00B49FA7-9D5F-450A-9BD4-543082DF202C}" dt="2026-10-18T13:24:56.120" v="53" actId="14100"/>
+        <pc:sldMkLst>
+          <pc:docMk/>
+          <pc:sldMk cId="0" sldId="262"/>
+        </pc:sldMkLst>
+        <pc:spChg chg="mod">
+          <ac:chgData name="Mule, Ravi" userId="5dc622f2-fe91-4480-aeeb-95b7e03dfbdf" providerId="ADAL" clId="{00B49FA7-9D5F-450A-9BD4-543082DF202C}" dt="2026-10-18T13:24:56.120" v="53" actId="14100"/>
+          <ac:spMkLst>
+            <pc:docMk/>
+            <pc:sldMk cId="0" sldId="262"/>
+            <ac:spMk id="104" creationId="{00000000-0000-0000-0000-000000000000}"/>
+          </ac:spMkLst>
+        </pc:spChg>
+      </pc:sldChg>
+      <pc:sldChg chg="modSp mod">
+        <pc:chgData name="Mule, Ravi" userId="5dc622f2-fe91-4480-aeeb-95b7e03dfbdf" providerId="ADAL" clId="{00B49FA7-9D5F-450A-9BD4-543082DF202C}" dt="2026-10-18T13:25:14.111" v="55" actId="14100"/>
+        <pc:sldMkLst>
+          <pc:docMk/>
+          <pc:sldMk cId="0" sldId="263"/>
+        </pc:sldMkLst>
+        <pc:spChg chg="mod">
+          <ac:chgData name="Mule, Ravi" userId="5dc622f2-fe91-4480-aeeb-95b7e03dfbdf" providerId="ADAL" clId="{00B49FA7-9D5F-450A-9BD4-543082DF202C}" dt="2026-10-18T13:25:14.111" v="55" actId="14100"/>
+          <ac:spMkLst>
+            <pc:docMk/>
+            <pc:sldMk cId="0" sldId="263"/>
+            <ac:spMk id="112" creationId="{00000000-0000-0000-0000-000000000000}"/>
+          </ac:spMkLst>
+        </pc:spChg>
+      </pc:sldChg>
+      <pc:sldChg chg="modSp mod">
+        <pc:chgData name="Mule, Ravi" userId="5dc622f2-fe91-4480-aeeb-95b7e03dfbdf" providerId="ADAL" clId="{00B49FA7-9D5F-450A-9BD4-543082DF202C}" dt="2026-10-18T13:25:42.060" v="58" actId="20577"/>
+        <pc:sldMkLst>
+          <pc:docMk/>
+          <pc:sldMk cId="0" sldId="264"/>
+        </pc:sldMkLst>
+        <pc:spChg chg="mod">
+          <ac:chgData name="Mule, Ravi" userId="5dc622f2-fe91-4480-aeeb-95b7e03dfbdf" providerId="ADAL" clId="{00B49FA7-9D5F-450A-9BD4-543082DF202C}" dt="2026-10-18T13:25:42.060" v="58" actId="20577"/>
+          <ac:spMkLst>
+            <pc:docMk/>
+            <pc:sldMk cId="0" sldId="264"/>
+            <ac:spMk id="120" creationId="{00000000-0000-0000-0000-000000000000}"/>
+          </ac:spMkLst>
+        </pc:spChg>
+      </pc:sldChg>
+      <pc:sldChg chg="modSp mod">
+        <pc:chgData name="Mule, Ravi" userId="5dc622f2-fe91-4480-aeeb-95b7e03dfbdf" providerId="ADAL" clId="{00B49FA7-9D5F-450A-9BD4-543082DF202C}" dt="2026-10-18T13:25:53.957" v="60" actId="1076"/>
+        <pc:sldMkLst>
+          <pc:docMk/>
+          <pc:sldMk cId="0" sldId="265"/>
+        </pc:sldMkLst>
+        <pc:spChg chg="mod">
+          <ac:chgData name="Mule, Ravi" userId="5dc622f2-fe91-4480-aeeb-95b7e03dfbdf" providerId="ADAL" clId="{00B49FA7-9D5F-450A-9BD4-543082DF202C}" dt="2026-10-18T13:25:53.957" v="60" actId="1076"/>
+          <ac:spMkLst>
+            <pc:docMk/>
+            <pc:sldMk cId="0" sldId="265"/>
+            <ac:spMk id="128" creationId="{00000000-0000-0000-0000-000000000000}"/>
+          </ac:spMkLst>
+        </pc:spChg>
+      </pc:sldChg>
+      <pc:sldChg chg="modSp mod">
+        <pc:chgData name="Mule, Ravi" userId="5dc622f2-fe91-4480-aeeb-95b7e03dfbdf" providerId="ADAL" clId="{00B49FA7-9D5F-450A-9BD4-543082DF202C}" dt="2026-10-18T13:26:05.811" v="63" actId="1076"/>
+        <pc:sldMkLst>
+          <pc:docMk/>
+          <pc:sldMk cId="0" sldId="266"/>
+        </pc:sldMkLst>
+        <pc:spChg chg="mod">
+          <ac:chgData name="Mule, Ravi" userId="5dc622f2-fe91-4480-aeeb-95b7e03dfbdf" providerId="ADAL" clId="{00B49FA7-9D5F-450A-9BD4-543082DF202C}" dt="2026-10-18T13:26:05.811" v="63" actId="1076"/>
+          <ac:spMkLst>
+            <pc:docMk/>
+            <pc:sldMk cId="0" sldId="266"/>
+            <ac:spMk id="136" creationId="{00000000-0000-0000-0000-000000000000}"/>
+          </ac:spMkLst>
+        </pc:spChg>
+      </pc:sldChg>
+      <pc:sldChg chg="modSp mod">
+        <pc:chgData name="Mule, Ravi" userId="5dc622f2-fe91-4480-aeeb-95b7e03dfbdf" providerId="ADAL" clId="{00B49FA7-9D5F-450A-9BD4-543082DF202C}" dt="2026-10-18T16:14:06.736" v="65" actId="14100"/>
+        <pc:sldMkLst>
+          <pc:docMk/>
+          <pc:sldMk cId="0" sldId="270"/>
+        </pc:sldMkLst>
+        <pc:spChg chg="mod">
+          <ac:chgData name="Mule, Ravi" userId="5dc622f2-fe91-4480-aeeb-95b7e03dfbdf" providerId="ADAL" clId="{00B49FA7-9D5F-450A-9BD4-543082DF202C}" dt="2026-10-18T16:14:06.736" v="65" actId="14100"/>
+          <ac:spMkLst>
+            <pc:docMk/>
+            <pc:sldMk cId="0" sldId="270"/>
+            <ac:spMk id="167" creationId="{00000000-0000-0000-0000-000000000000}"/>
+          </ac:spMkLst>
+        </pc:spChg>
+      </pc:sldChg>
+    </pc:docChg>
+  </pc:docChgLst>
+</pc:chgInfo>
+</file>
+
 <file path=ppt/notesMasters/notesMaster1.xml><?xml version="1.0" encoding="utf-8"?>
-<p:notesMaster xmlns:a="http://schemas.openxmlformats.org/drawingml/2006/main" xmlns:r="http://schemas.openxmlformats.org/officeDocument/2006/relationships" xmlns:mc="http://schemas.openxmlformats.org/markup-compatibility/2006" xmlns:mv="urn:schemas-microsoft-com:mac:vml" xmlns:p="http://schemas.openxmlformats.org/presentationml/2006/main" xmlns:c="http://schemas.openxmlformats.org/drawingml/2006/chart" xmlns:dgm="http://schemas.openxmlformats.org/drawingml/2006/diagram" xmlns:o="urn:schemas-microsoft-com:office:office" xmlns:v="urn:schemas-microsoft-com:vml" xmlns:pvml="urn:schemas-microsoft-com:office:powerpoint" xmlns:com="http://schemas.openxmlformats.org/drawingml/2006/compatibility" xmlns:p14="http://schemas.microsoft.com/office/powerpoint/2010/main" xmlns:p15="http://schemas.microsoft.com/office/powerpoint/2012/main" xmlns:ahyp="http://schemas.microsoft.com/office/drawing/2018/hyperlinkcolor">
+<p:notesMaster xmlns:a="http://schemas.openxmlformats.org/drawingml/2006/main" xmlns:r="http://schemas.openxmlformats.org/officeDocument/2006/relationships" xmlns:p="http://schemas.openxmlformats.org/presentationml/2006/main">
   <p:cSld>
+    <p:bg>
+      <p:bgRef idx="1001">
+        <a:schemeClr val="bg1"/>
+      </p:bgRef>
+    </p:bg>
     <p:spTree>
       <p:nvGrpSpPr>
-        <p:cNvPr id="2" name="Shape 2"/>
+        <p:cNvPr id="1" name="Shape 2"/>
         <p:cNvGrpSpPr/>
         <p:nvPr/>
       </p:nvGrpSpPr>
@@ -312,9 +526,11 @@
       <p:sp>
         <p:nvSpPr>
           <p:cNvPr id="3" name="Google Shape;3;n"/>
-          <p:cNvSpPr/>
+          <p:cNvSpPr>
+            <a:spLocks noGrp="1" noRot="1" noChangeAspect="1"/>
+          </p:cNvSpPr>
           <p:nvPr>
-            <p:ph idx="2" type="sldImg"/>
+            <p:ph type="sldImg" idx="2"/>
           </p:nvPr>
         </p:nvSpPr>
         <p:spPr>
@@ -323,9 +539,13 @@
             <a:ext cx="6096075" cy="3429000"/>
           </a:xfrm>
           <a:custGeom>
-            <a:rect b="b" l="l" r="r" t="t"/>
+            <a:avLst/>
+            <a:gdLst/>
+            <a:ahLst/>
+            <a:cxnLst/>
+            <a:rect l="l" t="t" r="r" b="b"/>
             <a:pathLst>
-              <a:path extrusionOk="0" h="120000" w="120000">
+              <a:path w="120000" h="120000" extrusionOk="0">
                 <a:moveTo>
                   <a:pt x="0" y="0"/>
                 </a:moveTo>
@@ -343,23 +563,25 @@
             </a:pathLst>
           </a:custGeom>
           <a:noFill/>
-          <a:ln cap="flat" cmpd="sng" w="9525">
+          <a:ln w="9525" cap="flat" cmpd="sng">
             <a:solidFill>
               <a:srgbClr val="000000"/>
             </a:solidFill>
             <a:prstDash val="solid"/>
             <a:round/>
-            <a:headEnd len="sm" w="sm" type="none"/>
-            <a:tailEnd len="sm" w="sm" type="none"/>
+            <a:headEnd type="none" w="sm" len="sm"/>
+            <a:tailEnd type="none" w="sm" len="sm"/>
           </a:ln>
         </p:spPr>
       </p:sp>
       <p:sp>
         <p:nvSpPr>
           <p:cNvPr id="4" name="Google Shape;4;n"/>
-          <p:cNvSpPr txBox="1"/>
+          <p:cNvSpPr txBox="1">
+            <a:spLocks noGrp="1"/>
+          </p:cNvSpPr>
           <p:nvPr>
-            <p:ph idx="1" type="body"/>
+            <p:ph type="body" idx="1"/>
           </p:nvPr>
         </p:nvSpPr>
         <p:spPr>
@@ -376,11 +598,11 @@
           </a:ln>
         </p:spPr>
         <p:txBody>
-          <a:bodyPr anchorCtr="0" anchor="t" bIns="91425" lIns="91425" spcFirstLastPara="1" rIns="91425" wrap="square" tIns="91425">
+          <a:bodyPr spcFirstLastPara="1" wrap="square" lIns="91425" tIns="91425" rIns="91425" bIns="91425" anchor="t" anchorCtr="0">
             <a:noAutofit/>
           </a:bodyPr>
           <a:lstStyle>
-            <a:lvl1pPr indent="-298450" lvl="0" marL="457200">
+            <a:lvl1pPr marL="457200" lvl="0" indent="-298450">
               <a:spcBef>
                 <a:spcPts val="0"/>
               </a:spcBef>
@@ -391,7 +613,7 @@
               <a:buChar char="●"/>
               <a:defRPr sz="1100"/>
             </a:lvl1pPr>
-            <a:lvl2pPr indent="-298450" lvl="1" marL="914400">
+            <a:lvl2pPr marL="914400" lvl="1" indent="-298450">
               <a:spcBef>
                 <a:spcPts val="0"/>
               </a:spcBef>
@@ -402,7 +624,7 @@
               <a:buChar char="○"/>
               <a:defRPr sz="1100"/>
             </a:lvl2pPr>
-            <a:lvl3pPr indent="-298450" lvl="2" marL="1371600">
+            <a:lvl3pPr marL="1371600" lvl="2" indent="-298450">
               <a:spcBef>
                 <a:spcPts val="0"/>
               </a:spcBef>
@@ -413,7 +635,7 @@
               <a:buChar char="■"/>
               <a:defRPr sz="1100"/>
             </a:lvl3pPr>
-            <a:lvl4pPr indent="-298450" lvl="3" marL="1828800">
+            <a:lvl4pPr marL="1828800" lvl="3" indent="-298450">
               <a:spcBef>
                 <a:spcPts val="0"/>
               </a:spcBef>
@@ -424,7 +646,7 @@
               <a:buChar char="●"/>
               <a:defRPr sz="1100"/>
             </a:lvl4pPr>
-            <a:lvl5pPr indent="-298450" lvl="4" marL="2286000">
+            <a:lvl5pPr marL="2286000" lvl="4" indent="-298450">
               <a:spcBef>
                 <a:spcPts val="0"/>
               </a:spcBef>
@@ -435,7 +657,7 @@
               <a:buChar char="○"/>
               <a:defRPr sz="1100"/>
             </a:lvl5pPr>
-            <a:lvl6pPr indent="-298450" lvl="5" marL="2743200">
+            <a:lvl6pPr marL="2743200" lvl="5" indent="-298450">
               <a:spcBef>
                 <a:spcPts val="0"/>
               </a:spcBef>
@@ -446,7 +668,7 @@
               <a:buChar char="■"/>
               <a:defRPr sz="1100"/>
             </a:lvl6pPr>
-            <a:lvl7pPr indent="-298450" lvl="6" marL="3200400">
+            <a:lvl7pPr marL="3200400" lvl="6" indent="-298450">
               <a:spcBef>
                 <a:spcPts val="0"/>
               </a:spcBef>
@@ -457,7 +679,7 @@
               <a:buChar char="●"/>
               <a:defRPr sz="1100"/>
             </a:lvl7pPr>
-            <a:lvl8pPr indent="-298450" lvl="7" marL="3657600">
+            <a:lvl8pPr marL="3657600" lvl="7" indent="-298450">
               <a:spcBef>
                 <a:spcPts val="0"/>
               </a:spcBef>
@@ -468,7 +690,7 @@
               <a:buChar char="○"/>
               <a:defRPr sz="1100"/>
             </a:lvl8pPr>
-            <a:lvl9pPr indent="-298450" lvl="8" marL="4114800">
+            <a:lvl9pPr marL="4114800" lvl="8" indent="-298450">
               <a:spcBef>
                 <a:spcPts val="0"/>
               </a:spcBef>
@@ -480,14 +702,16 @@
               <a:defRPr sz="1100"/>
             </a:lvl9pPr>
           </a:lstStyle>
-          <a:p/>
+          <a:p>
+            <a:endParaRPr/>
+          </a:p>
         </p:txBody>
       </p:sp>
     </p:spTree>
   </p:cSld>
-  <p:clrMap accent1="accent1" accent2="accent2" accent3="accent3" accent4="accent4" accent5="accent5" accent6="accent6" bg1="lt1" bg2="dk2" tx1="dk1" tx2="lt2" folHlink="folHlink" hlink="hlink"/>
+  <p:clrMap bg1="lt1" tx1="dk1" bg2="dk2" tx2="lt2" accent1="accent1" accent2="accent2" accent3="accent3" accent4="accent4" accent5="accent5" accent6="accent6" hlink="hlink" folHlink="folHlink"/>
   <p:notesStyle>
-    <a:defPPr lvl="0" marR="0" rtl="0" algn="l">
+    <a:defPPr marR="0" lvl="0" algn="l" rtl="0">
       <a:lnSpc>
         <a:spcPct val="100000"/>
       </a:lnSpc>
@@ -498,7 +722,7 @@
         <a:spcPts val="0"/>
       </a:spcAft>
     </a:defPPr>
-    <a:lvl1pPr lvl="0" marR="0" rtl="0" algn="l">
+    <a:lvl1pPr marR="0" lvl="0" algn="l" rtl="0">
       <a:lnSpc>
         <a:spcPct val="100000"/>
       </a:lnSpc>
@@ -512,7 +736,7 @@
         <a:srgbClr val="000000"/>
       </a:buClr>
       <a:buFont typeface="Arial"/>
-      <a:defRPr b="0" i="0" spc="0" sz="1400" u="none" cap="none" strike="noStrike">
+      <a:defRPr sz="1400" b="0" i="0" u="none" strike="noStrike" cap="none" spc="0">
         <a:solidFill>
           <a:srgbClr val="000000"/>
         </a:solidFill>
@@ -522,7 +746,7 @@
         <a:sym typeface="Arial"/>
       </a:defRPr>
     </a:lvl1pPr>
-    <a:lvl2pPr lvl="1" marR="0" rtl="0" algn="l">
+    <a:lvl2pPr marR="0" lvl="1" algn="l" rtl="0">
       <a:lnSpc>
         <a:spcPct val="100000"/>
       </a:lnSpc>
@@ -536,7 +760,7 @@
         <a:srgbClr val="000000"/>
       </a:buClr>
       <a:buFont typeface="Arial"/>
-      <a:defRPr b="0" i="0" spc="0" sz="1400" u="none" cap="none" strike="noStrike">
+      <a:defRPr sz="1400" b="0" i="0" u="none" strike="noStrike" cap="none" spc="0">
         <a:solidFill>
           <a:srgbClr val="000000"/>
         </a:solidFill>
@@ -546,7 +770,7 @@
         <a:sym typeface="Arial"/>
       </a:defRPr>
     </a:lvl2pPr>
-    <a:lvl3pPr lvl="2" marR="0" rtl="0" algn="l">
+    <a:lvl3pPr marR="0" lvl="2" algn="l" rtl="0">
       <a:lnSpc>
         <a:spcPct val="100000"/>
       </a:lnSpc>
@@ -560,7 +784,7 @@
         <a:srgbClr val="000000"/>
       </a:buClr>
       <a:buFont typeface="Arial"/>
-      <a:defRPr b="0" i="0" spc="0" sz="1400" u="none" cap="none" strike="noStrike">
+      <a:defRPr sz="1400" b="0" i="0" u="none" strike="noStrike" cap="none" spc="0">
         <a:solidFill>
           <a:srgbClr val="000000"/>
         </a:solidFill>
@@ -570,7 +794,7 @@
         <a:sym typeface="Arial"/>
       </a:defRPr>
     </a:lvl3pPr>
-    <a:lvl4pPr lvl="3" marR="0" rtl="0" algn="l">
+    <a:lvl4pPr marR="0" lvl="3" algn="l" rtl="0">
       <a:lnSpc>
         <a:spcPct val="100000"/>
       </a:lnSpc>
@@ -584,7 +808,7 @@
         <a:srgbClr val="000000"/>
       </a:buClr>
       <a:buFont typeface="Arial"/>
-      <a:defRPr b="0" i="0" spc="0" sz="1400" u="none" cap="none" strike="noStrike">
+      <a:defRPr sz="1400" b="0" i="0" u="none" strike="noStrike" cap="none" spc="0">
         <a:solidFill>
           <a:srgbClr val="000000"/>
         </a:solidFill>
@@ -594,7 +818,7 @@
         <a:sym typeface="Arial"/>
       </a:defRPr>
     </a:lvl4pPr>
-    <a:lvl5pPr lvl="4" marR="0" rtl="0" algn="l">
+    <a:lvl5pPr marR="0" lvl="4" algn="l" rtl="0">
       <a:lnSpc>
         <a:spcPct val="100000"/>
       </a:lnSpc>
@@ -608,7 +832,7 @@
         <a:srgbClr val="000000"/>
       </a:buClr>
       <a:buFont typeface="Arial"/>
-      <a:defRPr b="0" i="0" spc="0" sz="1400" u="none" cap="none" strike="noStrike">
+      <a:defRPr sz="1400" b="0" i="0" u="none" strike="noStrike" cap="none" spc="0">
         <a:solidFill>
           <a:srgbClr val="000000"/>
         </a:solidFill>
@@ -618,7 +842,7 @@
         <a:sym typeface="Arial"/>
       </a:defRPr>
     </a:lvl5pPr>
-    <a:lvl6pPr lvl="5" marR="0" rtl="0" algn="l">
+    <a:lvl6pPr marR="0" lvl="5" algn="l" rtl="0">
       <a:lnSpc>
         <a:spcPct val="100000"/>
       </a:lnSpc>
@@ -632,7 +856,7 @@
         <a:srgbClr val="000000"/>
       </a:buClr>
       <a:buFont typeface="Arial"/>
-      <a:defRPr b="0" i="0" spc="0" sz="1400" u="none" cap="none" strike="noStrike">
+      <a:defRPr sz="1400" b="0" i="0" u="none" strike="noStrike" cap="none" spc="0">
         <a:solidFill>
           <a:srgbClr val="000000"/>
         </a:solidFill>
@@ -642,7 +866,7 @@
         <a:sym typeface="Arial"/>
       </a:defRPr>
     </a:lvl6pPr>
-    <a:lvl7pPr lvl="6" marR="0" rtl="0" algn="l">
+    <a:lvl7pPr marR="0" lvl="6" algn="l" rtl="0">
       <a:lnSpc>
         <a:spcPct val="100000"/>
       </a:lnSpc>
@@ -656,7 +880,7 @@
         <a:srgbClr val="000000"/>
       </a:buClr>
       <a:buFont typeface="Arial"/>
-      <a:defRPr b="0" i="0" spc="0" sz="1400" u="none" cap="none" strike="noStrike">
+      <a:defRPr sz="1400" b="0" i="0" u="none" strike="noStrike" cap="none" spc="0">
         <a:solidFill>
           <a:srgbClr val="000000"/>
         </a:solidFill>
@@ -666,7 +890,7 @@
         <a:sym typeface="Arial"/>
       </a:defRPr>
     </a:lvl7pPr>
-    <a:lvl8pPr lvl="7" marR="0" rtl="0" algn="l">
+    <a:lvl8pPr marR="0" lvl="7" algn="l" rtl="0">
       <a:lnSpc>
         <a:spcPct val="100000"/>
       </a:lnSpc>
@@ -680,7 +904,7 @@
         <a:srgbClr val="000000"/>
       </a:buClr>
       <a:buFont typeface="Arial"/>
-      <a:defRPr b="0" i="0" spc="0" sz="1400" u="none" cap="none" strike="noStrike">
+      <a:defRPr sz="1400" b="0" i="0" u="none" strike="noStrike" cap="none" spc="0">
         <a:solidFill>
           <a:srgbClr val="000000"/>
         </a:solidFill>
@@ -690,7 +914,7 @@
         <a:sym typeface="Arial"/>
       </a:defRPr>
     </a:lvl8pPr>
-    <a:lvl9pPr lvl="8" marR="0" rtl="0" algn="l">
+    <a:lvl9pPr marR="0" lvl="8" algn="l" rtl="0">
       <a:lnSpc>
         <a:spcPct val="100000"/>
       </a:lnSpc>
@@ -704,7 +928,7 @@
         <a:srgbClr val="000000"/>
       </a:buClr>
       <a:buFont typeface="Arial"/>
-      <a:defRPr b="0" i="0" spc="0" sz="1400" u="none" cap="none" strike="noStrike">
+      <a:defRPr sz="1400" b="0" i="0" u="none" strike="noStrike" cap="none" spc="0">
         <a:solidFill>
           <a:srgbClr val="000000"/>
         </a:solidFill>
@@ -719,11 +943,11 @@
 </file>
 
 <file path=ppt/notesSlides/notesSlide1.xml><?xml version="1.0" encoding="utf-8"?>
-<p:notes xmlns:a="http://schemas.openxmlformats.org/drawingml/2006/main" xmlns:r="http://schemas.openxmlformats.org/officeDocument/2006/relationships" xmlns:mc="http://schemas.openxmlformats.org/markup-compatibility/2006" xmlns:mv="urn:schemas-microsoft-com:mac:vml" xmlns:p="http://schemas.openxmlformats.org/presentationml/2006/main" xmlns:c="http://schemas.openxmlformats.org/drawingml/2006/chart" xmlns:dgm="http://schemas.openxmlformats.org/drawingml/2006/diagram" xmlns:o="urn:schemas-microsoft-com:office:office" xmlns:v="urn:schemas-microsoft-com:vml" xmlns:pvml="urn:schemas-microsoft-com:office:powerpoint" xmlns:com="http://schemas.openxmlformats.org/drawingml/2006/compatibility" xmlns:p14="http://schemas.microsoft.com/office/powerpoint/2010/main" xmlns:p15="http://schemas.microsoft.com/office/powerpoint/2012/main" xmlns:ahyp="http://schemas.microsoft.com/office/drawing/2018/hyperlinkcolor" showMasterPhAnim="0" showMasterSp="0">
+<p:notes xmlns:a="http://schemas.openxmlformats.org/drawingml/2006/main" xmlns:r="http://schemas.openxmlformats.org/officeDocument/2006/relationships" xmlns:p="http://schemas.openxmlformats.org/presentationml/2006/main" showMasterSp="0" showMasterPhAnim="0">
   <p:cSld>
     <p:spTree>
       <p:nvGrpSpPr>
-        <p:cNvPr id="50" name="Shape 50"/>
+        <p:cNvPr id="1" name="Shape 50"/>
         <p:cNvGrpSpPr/>
         <p:nvPr/>
       </p:nvGrpSpPr>
@@ -738,20 +962,26 @@
       <p:sp>
         <p:nvSpPr>
           <p:cNvPr id="51" name="Google Shape;51;p:notes"/>
-          <p:cNvSpPr/>
+          <p:cNvSpPr>
+            <a:spLocks noGrp="1" noRot="1" noChangeAspect="1"/>
+          </p:cNvSpPr>
           <p:nvPr>
-            <p:ph idx="2" type="sldImg"/>
+            <p:ph type="sldImg" idx="2"/>
           </p:nvPr>
         </p:nvSpPr>
         <p:spPr>
           <a:xfrm>
-            <a:off x="381300" y="685800"/>
-            <a:ext cx="6096075" cy="3429000"/>
+            <a:off x="381000" y="685800"/>
+            <a:ext cx="6096000" cy="3429000"/>
           </a:xfrm>
           <a:custGeom>
-            <a:rect b="b" l="l" r="r" t="t"/>
+            <a:avLst/>
+            <a:gdLst/>
+            <a:ahLst/>
+            <a:cxnLst/>
+            <a:rect l="l" t="t" r="r" b="b"/>
             <a:pathLst>
-              <a:path extrusionOk="0" h="120000" w="120000">
+              <a:path w="120000" h="120000" extrusionOk="0">
                 <a:moveTo>
                   <a:pt x="0" y="0"/>
                 </a:moveTo>
@@ -773,9 +1003,11 @@
       <p:sp>
         <p:nvSpPr>
           <p:cNvPr id="52" name="Google Shape;52;p:notes"/>
-          <p:cNvSpPr txBox="1"/>
+          <p:cNvSpPr txBox="1">
+            <a:spLocks noGrp="1"/>
+          </p:cNvSpPr>
           <p:nvPr>
-            <p:ph idx="1" type="body"/>
+            <p:ph type="body" idx="1"/>
           </p:nvPr>
         </p:nvSpPr>
         <p:spPr>
@@ -788,23 +1020,20 @@
           </a:prstGeom>
         </p:spPr>
         <p:txBody>
-          <a:bodyPr anchorCtr="0" anchor="t" bIns="91425" lIns="91425" spcFirstLastPara="1" rIns="91425" wrap="square" tIns="91425">
+          <a:bodyPr spcFirstLastPara="1" wrap="square" lIns="91425" tIns="91425" rIns="91425" bIns="91425" anchor="t" anchorCtr="0">
             <a:noAutofit/>
           </a:bodyPr>
           <a:lstStyle/>
           <a:p>
-            <a:pPr indent="0" lvl="0" marL="0" rtl="0" algn="l">
-              <a:spcBef>
-                <a:spcPts val="0"/>
-              </a:spcBef>
-              <a:spcAft>
-                <a:spcPts val="0"/>
-              </a:spcAft>
-              <a:buNone/>
-            </a:pPr>
-            <a:r>
-              <a:t/>
-            </a:r>
+            <a:pPr marL="0" lvl="0" indent="0" algn="l" rtl="0">
+              <a:spcBef>
+                <a:spcPts val="0"/>
+              </a:spcBef>
+              <a:spcAft>
+                <a:spcPts val="0"/>
+              </a:spcAft>
+              <a:buNone/>
+            </a:pPr>
             <a:endParaRPr/>
           </a:p>
         </p:txBody>
@@ -818,11 +1047,11 @@
 </file>
 
 <file path=ppt/notesSlides/notesSlide10.xml><?xml version="1.0" encoding="utf-8"?>
-<p:notes xmlns:a="http://schemas.openxmlformats.org/drawingml/2006/main" xmlns:r="http://schemas.openxmlformats.org/officeDocument/2006/relationships" xmlns:mc="http://schemas.openxmlformats.org/markup-compatibility/2006" xmlns:mv="urn:schemas-microsoft-com:mac:vml" xmlns:p="http://schemas.openxmlformats.org/presentationml/2006/main" xmlns:c="http://schemas.openxmlformats.org/drawingml/2006/chart" xmlns:dgm="http://schemas.openxmlformats.org/drawingml/2006/diagram" xmlns:o="urn:schemas-microsoft-com:office:office" xmlns:v="urn:schemas-microsoft-com:vml" xmlns:pvml="urn:schemas-microsoft-com:office:powerpoint" xmlns:com="http://schemas.openxmlformats.org/drawingml/2006/compatibility" xmlns:p14="http://schemas.microsoft.com/office/powerpoint/2010/main" xmlns:p15="http://schemas.microsoft.com/office/powerpoint/2012/main" xmlns:ahyp="http://schemas.microsoft.com/office/drawing/2018/hyperlinkcolor" showMasterPhAnim="0" showMasterSp="0">
+<p:notes xmlns:a="http://schemas.openxmlformats.org/drawingml/2006/main" xmlns:r="http://schemas.openxmlformats.org/officeDocument/2006/relationships" xmlns:p="http://schemas.openxmlformats.org/presentationml/2006/main" showMasterSp="0" showMasterPhAnim="0">
   <p:cSld>
     <p:spTree>
       <p:nvGrpSpPr>
-        <p:cNvPr id="120" name="Shape 120"/>
+        <p:cNvPr id="1" name="Shape 128"/>
         <p:cNvGrpSpPr/>
         <p:nvPr/>
       </p:nvGrpSpPr>
@@ -836,21 +1065,27 @@
       </p:grpSpPr>
       <p:sp>
         <p:nvSpPr>
-          <p:cNvPr id="121" name="Google Shape;121;g3fb085bff3c_0_41:notes"/>
-          <p:cNvSpPr/>
+          <p:cNvPr id="129" name="Google Shape;129;g3fb085bff3c_0_46:notes"/>
+          <p:cNvSpPr>
+            <a:spLocks noGrp="1" noRot="1" noChangeAspect="1"/>
+          </p:cNvSpPr>
           <p:nvPr>
-            <p:ph idx="2" type="sldImg"/>
+            <p:ph type="sldImg" idx="2"/>
           </p:nvPr>
         </p:nvSpPr>
         <p:spPr>
           <a:xfrm>
-            <a:off x="381300" y="685800"/>
+            <a:off x="381000" y="685800"/>
             <a:ext cx="6096000" cy="3429000"/>
           </a:xfrm>
           <a:custGeom>
-            <a:rect b="b" l="l" r="r" t="t"/>
+            <a:avLst/>
+            <a:gdLst/>
+            <a:ahLst/>
+            <a:cxnLst/>
+            <a:rect l="l" t="t" r="r" b="b"/>
             <a:pathLst>
-              <a:path extrusionOk="0" h="120000" w="120000">
+              <a:path w="120000" h="120000" extrusionOk="0">
                 <a:moveTo>
                   <a:pt x="0" y="0"/>
                 </a:moveTo>
@@ -871,10 +1106,12 @@
       </p:sp>
       <p:sp>
         <p:nvSpPr>
-          <p:cNvPr id="122" name="Google Shape;122;g3fb085bff3c_0_41:notes"/>
-          <p:cNvSpPr txBox="1"/>
+          <p:cNvPr id="130" name="Google Shape;130;g3fb085bff3c_0_46:notes"/>
+          <p:cNvSpPr txBox="1">
+            <a:spLocks noGrp="1"/>
+          </p:cNvSpPr>
           <p:nvPr>
-            <p:ph idx="1" type="body"/>
+            <p:ph type="body" idx="1"/>
           </p:nvPr>
         </p:nvSpPr>
         <p:spPr>
@@ -887,23 +1124,20 @@
           </a:prstGeom>
         </p:spPr>
         <p:txBody>
-          <a:bodyPr anchorCtr="0" anchor="t" bIns="91425" lIns="91425" spcFirstLastPara="1" rIns="91425" wrap="square" tIns="91425">
+          <a:bodyPr spcFirstLastPara="1" wrap="square" lIns="91425" tIns="91425" rIns="91425" bIns="91425" anchor="t" anchorCtr="0">
             <a:noAutofit/>
           </a:bodyPr>
           <a:lstStyle/>
           <a:p>
-            <a:pPr indent="0" lvl="0" marL="0" rtl="0" algn="l">
-              <a:spcBef>
-                <a:spcPts val="0"/>
-              </a:spcBef>
-              <a:spcAft>
-                <a:spcPts val="0"/>
-              </a:spcAft>
-              <a:buNone/>
-            </a:pPr>
-            <a:r>
-              <a:t/>
-            </a:r>
+            <a:pPr marL="0" lvl="0" indent="0" algn="l" rtl="0">
+              <a:spcBef>
+                <a:spcPts val="0"/>
+              </a:spcBef>
+              <a:spcAft>
+                <a:spcPts val="0"/>
+              </a:spcAft>
+              <a:buNone/>
+            </a:pPr>
             <a:endParaRPr/>
           </a:p>
         </p:txBody>
@@ -917,11 +1151,11 @@
 </file>
 
 <file path=ppt/notesSlides/notesSlide11.xml><?xml version="1.0" encoding="utf-8"?>
-<p:notes xmlns:a="http://schemas.openxmlformats.org/drawingml/2006/main" xmlns:r="http://schemas.openxmlformats.org/officeDocument/2006/relationships" xmlns:mc="http://schemas.openxmlformats.org/markup-compatibility/2006" xmlns:mv="urn:schemas-microsoft-com:mac:vml" xmlns:p="http://schemas.openxmlformats.org/presentationml/2006/main" xmlns:c="http://schemas.openxmlformats.org/drawingml/2006/chart" xmlns:dgm="http://schemas.openxmlformats.org/drawingml/2006/diagram" xmlns:o="urn:schemas-microsoft-com:office:office" xmlns:v="urn:schemas-microsoft-com:vml" xmlns:pvml="urn:schemas-microsoft-com:office:powerpoint" xmlns:com="http://schemas.openxmlformats.org/drawingml/2006/compatibility" xmlns:p14="http://schemas.microsoft.com/office/powerpoint/2010/main" xmlns:p15="http://schemas.microsoft.com/office/powerpoint/2012/main" xmlns:ahyp="http://schemas.microsoft.com/office/drawing/2018/hyperlinkcolor" showMasterPhAnim="0" showMasterSp="0">
+<p:notes xmlns:a="http://schemas.openxmlformats.org/drawingml/2006/main" xmlns:r="http://schemas.openxmlformats.org/officeDocument/2006/relationships" xmlns:p="http://schemas.openxmlformats.org/presentationml/2006/main" showMasterSp="0" showMasterPhAnim="0">
   <p:cSld>
     <p:spTree>
       <p:nvGrpSpPr>
-        <p:cNvPr id="128" name="Shape 128"/>
+        <p:cNvPr id="1" name="Shape 136"/>
         <p:cNvGrpSpPr/>
         <p:nvPr/>
       </p:nvGrpSpPr>
@@ -935,10 +1169,12 @@
       </p:grpSpPr>
       <p:sp>
         <p:nvSpPr>
-          <p:cNvPr id="129" name="Google Shape;129;g3fb085bff3c_0_46:notes"/>
-          <p:cNvSpPr/>
+          <p:cNvPr id="137" name="Google Shape;137;g3fb085bff3c_0_51:notes"/>
+          <p:cNvSpPr>
+            <a:spLocks noGrp="1" noRot="1" noChangeAspect="1"/>
+          </p:cNvSpPr>
           <p:nvPr>
-            <p:ph idx="2" type="sldImg"/>
+            <p:ph type="sldImg" idx="2"/>
           </p:nvPr>
         </p:nvSpPr>
         <p:spPr>
@@ -947,9 +1183,13 @@
             <a:ext cx="6096000" cy="3429000"/>
           </a:xfrm>
           <a:custGeom>
-            <a:rect b="b" l="l" r="r" t="t"/>
+            <a:avLst/>
+            <a:gdLst/>
+            <a:ahLst/>
+            <a:cxnLst/>
+            <a:rect l="l" t="t" r="r" b="b"/>
             <a:pathLst>
-              <a:path extrusionOk="0" h="120000" w="120000">
+              <a:path w="120000" h="120000" extrusionOk="0">
                 <a:moveTo>
                   <a:pt x="0" y="0"/>
                 </a:moveTo>
@@ -970,10 +1210,12 @@
       </p:sp>
       <p:sp>
         <p:nvSpPr>
-          <p:cNvPr id="130" name="Google Shape;130;g3fb085bff3c_0_46:notes"/>
-          <p:cNvSpPr txBox="1"/>
+          <p:cNvPr id="138" name="Google Shape;138;g3fb085bff3c_0_51:notes"/>
+          <p:cNvSpPr txBox="1">
+            <a:spLocks noGrp="1"/>
+          </p:cNvSpPr>
           <p:nvPr>
-            <p:ph idx="1" type="body"/>
+            <p:ph type="body" idx="1"/>
           </p:nvPr>
         </p:nvSpPr>
         <p:spPr>
@@ -986,23 +1228,20 @@
           </a:prstGeom>
         </p:spPr>
         <p:txBody>
-          <a:bodyPr anchorCtr="0" anchor="t" bIns="91425" lIns="91425" spcFirstLastPara="1" rIns="91425" wrap="square" tIns="91425">
+          <a:bodyPr spcFirstLastPara="1" wrap="square" lIns="91425" tIns="91425" rIns="91425" bIns="91425" anchor="t" anchorCtr="0">
             <a:noAutofit/>
           </a:bodyPr>
           <a:lstStyle/>
           <a:p>
-            <a:pPr indent="0" lvl="0" marL="0" rtl="0" algn="l">
-              <a:spcBef>
-                <a:spcPts val="0"/>
-              </a:spcBef>
-              <a:spcAft>
-                <a:spcPts val="0"/>
-              </a:spcAft>
-              <a:buNone/>
-            </a:pPr>
-            <a:r>
-              <a:t/>
-            </a:r>
+            <a:pPr marL="0" lvl="0" indent="0" algn="l" rtl="0">
+              <a:spcBef>
+                <a:spcPts val="0"/>
+              </a:spcBef>
+              <a:spcAft>
+                <a:spcPts val="0"/>
+              </a:spcAft>
+              <a:buNone/>
+            </a:pPr>
             <a:endParaRPr/>
           </a:p>
         </p:txBody>
@@ -1016,11 +1255,11 @@
 </file>
 
 <file path=ppt/notesSlides/notesSlide12.xml><?xml version="1.0" encoding="utf-8"?>
-<p:notes xmlns:a="http://schemas.openxmlformats.org/drawingml/2006/main" xmlns:r="http://schemas.openxmlformats.org/officeDocument/2006/relationships" xmlns:mc="http://schemas.openxmlformats.org/markup-compatibility/2006" xmlns:mv="urn:schemas-microsoft-com:mac:vml" xmlns:p="http://schemas.openxmlformats.org/presentationml/2006/main" xmlns:c="http://schemas.openxmlformats.org/drawingml/2006/chart" xmlns:dgm="http://schemas.openxmlformats.org/drawingml/2006/diagram" xmlns:o="urn:schemas-microsoft-com:office:office" xmlns:v="urn:schemas-microsoft-com:vml" xmlns:pvml="urn:schemas-microsoft-com:office:powerpoint" xmlns:com="http://schemas.openxmlformats.org/drawingml/2006/compatibility" xmlns:p14="http://schemas.microsoft.com/office/powerpoint/2010/main" xmlns:p15="http://schemas.microsoft.com/office/powerpoint/2012/main" xmlns:ahyp="http://schemas.microsoft.com/office/drawing/2018/hyperlinkcolor" showMasterPhAnim="0" showMasterSp="0">
+<p:notes xmlns:a="http://schemas.openxmlformats.org/drawingml/2006/main" xmlns:r="http://schemas.openxmlformats.org/officeDocument/2006/relationships" xmlns:p="http://schemas.openxmlformats.org/presentationml/2006/main" showMasterSp="0" showMasterPhAnim="0">
   <p:cSld>
     <p:spTree>
       <p:nvGrpSpPr>
-        <p:cNvPr id="136" name="Shape 136"/>
+        <p:cNvPr id="1" name="Shape 144"/>
         <p:cNvGrpSpPr/>
         <p:nvPr/>
       </p:nvGrpSpPr>
@@ -1034,10 +1273,12 @@
       </p:grpSpPr>
       <p:sp>
         <p:nvSpPr>
-          <p:cNvPr id="137" name="Google Shape;137;g3fb085bff3c_0_51:notes"/>
-          <p:cNvSpPr/>
+          <p:cNvPr id="145" name="Google Shape;145;g3fb085bff3c_0_56:notes"/>
+          <p:cNvSpPr>
+            <a:spLocks noGrp="1" noRot="1" noChangeAspect="1"/>
+          </p:cNvSpPr>
           <p:nvPr>
-            <p:ph idx="2" type="sldImg"/>
+            <p:ph type="sldImg" idx="2"/>
           </p:nvPr>
         </p:nvSpPr>
         <p:spPr>
@@ -1046,9 +1287,13 @@
             <a:ext cx="6096000" cy="3429000"/>
           </a:xfrm>
           <a:custGeom>
-            <a:rect b="b" l="l" r="r" t="t"/>
+            <a:avLst/>
+            <a:gdLst/>
+            <a:ahLst/>
+            <a:cxnLst/>
+            <a:rect l="l" t="t" r="r" b="b"/>
             <a:pathLst>
-              <a:path extrusionOk="0" h="120000" w="120000">
+              <a:path w="120000" h="120000" extrusionOk="0">
                 <a:moveTo>
                   <a:pt x="0" y="0"/>
                 </a:moveTo>
@@ -1069,10 +1314,12 @@
       </p:sp>
       <p:sp>
         <p:nvSpPr>
-          <p:cNvPr id="138" name="Google Shape;138;g3fb085bff3c_0_51:notes"/>
-          <p:cNvSpPr txBox="1"/>
+          <p:cNvPr id="146" name="Google Shape;146;g3fb085bff3c_0_56:notes"/>
+          <p:cNvSpPr txBox="1">
+            <a:spLocks noGrp="1"/>
+          </p:cNvSpPr>
           <p:nvPr>
-            <p:ph idx="1" type="body"/>
+            <p:ph type="body" idx="1"/>
           </p:nvPr>
         </p:nvSpPr>
         <p:spPr>
@@ -1085,23 +1332,20 @@
           </a:prstGeom>
         </p:spPr>
         <p:txBody>
-          <a:bodyPr anchorCtr="0" anchor="t" bIns="91425" lIns="91425" spcFirstLastPara="1" rIns="91425" wrap="square" tIns="91425">
+          <a:bodyPr spcFirstLastPara="1" wrap="square" lIns="91425" tIns="91425" rIns="91425" bIns="91425" anchor="t" anchorCtr="0">
             <a:noAutofit/>
           </a:bodyPr>
           <a:lstStyle/>
           <a:p>
-            <a:pPr indent="0" lvl="0" marL="0" rtl="0" algn="l">
-              <a:spcBef>
-                <a:spcPts val="0"/>
-              </a:spcBef>
-              <a:spcAft>
-                <a:spcPts val="0"/>
-              </a:spcAft>
-              <a:buNone/>
-            </a:pPr>
-            <a:r>
-              <a:t/>
-            </a:r>
+            <a:pPr marL="0" lvl="0" indent="0" algn="l" rtl="0">
+              <a:spcBef>
+                <a:spcPts val="0"/>
+              </a:spcBef>
+              <a:spcAft>
+                <a:spcPts val="0"/>
+              </a:spcAft>
+              <a:buNone/>
+            </a:pPr>
             <a:endParaRPr/>
           </a:p>
         </p:txBody>
@@ -1115,11 +1359,11 @@
 </file>
 
 <file path=ppt/notesSlides/notesSlide13.xml><?xml version="1.0" encoding="utf-8"?>
-<p:notes xmlns:a="http://schemas.openxmlformats.org/drawingml/2006/main" xmlns:r="http://schemas.openxmlformats.org/officeDocument/2006/relationships" xmlns:mc="http://schemas.openxmlformats.org/markup-compatibility/2006" xmlns:mv="urn:schemas-microsoft-com:mac:vml" xmlns:p="http://schemas.openxmlformats.org/presentationml/2006/main" xmlns:c="http://schemas.openxmlformats.org/drawingml/2006/chart" xmlns:dgm="http://schemas.openxmlformats.org/drawingml/2006/diagram" xmlns:o="urn:schemas-microsoft-com:office:office" xmlns:v="urn:schemas-microsoft-com:vml" xmlns:pvml="urn:schemas-microsoft-com:office:powerpoint" xmlns:com="http://schemas.openxmlformats.org/drawingml/2006/compatibility" xmlns:p14="http://schemas.microsoft.com/office/powerpoint/2010/main" xmlns:p15="http://schemas.microsoft.com/office/powerpoint/2012/main" xmlns:ahyp="http://schemas.microsoft.com/office/drawing/2018/hyperlinkcolor" showMasterPhAnim="0" showMasterSp="0">
+<p:notes xmlns:a="http://schemas.openxmlformats.org/drawingml/2006/main" xmlns:r="http://schemas.openxmlformats.org/officeDocument/2006/relationships" xmlns:p="http://schemas.openxmlformats.org/presentationml/2006/main" showMasterSp="0" showMasterPhAnim="0">
   <p:cSld>
     <p:spTree>
       <p:nvGrpSpPr>
-        <p:cNvPr id="144" name="Shape 144"/>
+        <p:cNvPr id="1" name="Shape 152"/>
         <p:cNvGrpSpPr/>
         <p:nvPr/>
       </p:nvGrpSpPr>
@@ -1133,10 +1377,12 @@
       </p:grpSpPr>
       <p:sp>
         <p:nvSpPr>
-          <p:cNvPr id="145" name="Google Shape;145;g3fb085bff3c_0_56:notes"/>
-          <p:cNvSpPr/>
+          <p:cNvPr id="153" name="Google Shape;153;g3fb085bff3c_0_61:notes"/>
+          <p:cNvSpPr>
+            <a:spLocks noGrp="1" noRot="1" noChangeAspect="1"/>
+          </p:cNvSpPr>
           <p:nvPr>
-            <p:ph idx="2" type="sldImg"/>
+            <p:ph type="sldImg" idx="2"/>
           </p:nvPr>
         </p:nvSpPr>
         <p:spPr>
@@ -1145,9 +1391,13 @@
             <a:ext cx="6096000" cy="3429000"/>
           </a:xfrm>
           <a:custGeom>
-            <a:rect b="b" l="l" r="r" t="t"/>
+            <a:avLst/>
+            <a:gdLst/>
+            <a:ahLst/>
+            <a:cxnLst/>
+            <a:rect l="l" t="t" r="r" b="b"/>
             <a:pathLst>
-              <a:path extrusionOk="0" h="120000" w="120000">
+              <a:path w="120000" h="120000" extrusionOk="0">
                 <a:moveTo>
                   <a:pt x="0" y="0"/>
                 </a:moveTo>
@@ -1168,10 +1418,12 @@
       </p:sp>
       <p:sp>
         <p:nvSpPr>
-          <p:cNvPr id="146" name="Google Shape;146;g3fb085bff3c_0_56:notes"/>
-          <p:cNvSpPr txBox="1"/>
+          <p:cNvPr id="154" name="Google Shape;154;g3fb085bff3c_0_61:notes"/>
+          <p:cNvSpPr txBox="1">
+            <a:spLocks noGrp="1"/>
+          </p:cNvSpPr>
           <p:nvPr>
-            <p:ph idx="1" type="body"/>
+            <p:ph type="body" idx="1"/>
           </p:nvPr>
         </p:nvSpPr>
         <p:spPr>
@@ -1184,23 +1436,20 @@
           </a:prstGeom>
         </p:spPr>
         <p:txBody>
-          <a:bodyPr anchorCtr="0" anchor="t" bIns="91425" lIns="91425" spcFirstLastPara="1" rIns="91425" wrap="square" tIns="91425">
+          <a:bodyPr spcFirstLastPara="1" wrap="square" lIns="91425" tIns="91425" rIns="91425" bIns="91425" anchor="t" anchorCtr="0">
             <a:noAutofit/>
           </a:bodyPr>
           <a:lstStyle/>
           <a:p>
-            <a:pPr indent="0" lvl="0" marL="0" rtl="0" algn="l">
-              <a:spcBef>
-                <a:spcPts val="0"/>
-              </a:spcBef>
-              <a:spcAft>
-                <a:spcPts val="0"/>
-              </a:spcAft>
-              <a:buNone/>
-            </a:pPr>
-            <a:r>
-              <a:t/>
-            </a:r>
+            <a:pPr marL="0" lvl="0" indent="0" algn="l" rtl="0">
+              <a:spcBef>
+                <a:spcPts val="0"/>
+              </a:spcBef>
+              <a:spcAft>
+                <a:spcPts val="0"/>
+              </a:spcAft>
+              <a:buNone/>
+            </a:pPr>
             <a:endParaRPr/>
           </a:p>
         </p:txBody>
@@ -1214,11 +1463,11 @@
 </file>
 
 <file path=ppt/notesSlides/notesSlide14.xml><?xml version="1.0" encoding="utf-8"?>
-<p:notes xmlns:a="http://schemas.openxmlformats.org/drawingml/2006/main" xmlns:r="http://schemas.openxmlformats.org/officeDocument/2006/relationships" xmlns:mc="http://schemas.openxmlformats.org/markup-compatibility/2006" xmlns:mv="urn:schemas-microsoft-com:mac:vml" xmlns:p="http://schemas.openxmlformats.org/presentationml/2006/main" xmlns:c="http://schemas.openxmlformats.org/drawingml/2006/chart" xmlns:dgm="http://schemas.openxmlformats.org/drawingml/2006/diagram" xmlns:o="urn:schemas-microsoft-com:office:office" xmlns:v="urn:schemas-microsoft-com:vml" xmlns:pvml="urn:schemas-microsoft-com:office:powerpoint" xmlns:com="http://schemas.openxmlformats.org/drawingml/2006/compatibility" xmlns:p14="http://schemas.microsoft.com/office/powerpoint/2010/main" xmlns:p15="http://schemas.microsoft.com/office/powerpoint/2012/main" xmlns:ahyp="http://schemas.microsoft.com/office/drawing/2018/hyperlinkcolor" showMasterPhAnim="0" showMasterSp="0">
+<p:notes xmlns:a="http://schemas.openxmlformats.org/drawingml/2006/main" xmlns:r="http://schemas.openxmlformats.org/officeDocument/2006/relationships" xmlns:p="http://schemas.openxmlformats.org/presentationml/2006/main" showMasterSp="0" showMasterPhAnim="0">
   <p:cSld>
     <p:spTree>
       <p:nvGrpSpPr>
-        <p:cNvPr id="152" name="Shape 152"/>
+        <p:cNvPr id="1" name="Shape 160"/>
         <p:cNvGrpSpPr/>
         <p:nvPr/>
       </p:nvGrpSpPr>
@@ -1232,21 +1481,27 @@
       </p:grpSpPr>
       <p:sp>
         <p:nvSpPr>
-          <p:cNvPr id="153" name="Google Shape;153;g3fb085bff3c_0_61:notes"/>
-          <p:cNvSpPr/>
+          <p:cNvPr id="161" name="Google Shape;161;g3fb085bff3c_0_107:notes"/>
+          <p:cNvSpPr>
+            <a:spLocks noGrp="1" noRot="1" noChangeAspect="1"/>
+          </p:cNvSpPr>
           <p:nvPr>
-            <p:ph idx="2" type="sldImg"/>
+            <p:ph type="sldImg" idx="2"/>
           </p:nvPr>
         </p:nvSpPr>
         <p:spPr>
           <a:xfrm>
-            <a:off x="381300" y="685800"/>
+            <a:off x="381000" y="685800"/>
             <a:ext cx="6096000" cy="3429000"/>
           </a:xfrm>
           <a:custGeom>
-            <a:rect b="b" l="l" r="r" t="t"/>
+            <a:avLst/>
+            <a:gdLst/>
+            <a:ahLst/>
+            <a:cxnLst/>
+            <a:rect l="l" t="t" r="r" b="b"/>
             <a:pathLst>
-              <a:path extrusionOk="0" h="120000" w="120000">
+              <a:path w="120000" h="120000" extrusionOk="0">
                 <a:moveTo>
                   <a:pt x="0" y="0"/>
                 </a:moveTo>
@@ -1267,10 +1522,12 @@
       </p:sp>
       <p:sp>
         <p:nvSpPr>
-          <p:cNvPr id="154" name="Google Shape;154;g3fb085bff3c_0_61:notes"/>
-          <p:cNvSpPr txBox="1"/>
+          <p:cNvPr id="162" name="Google Shape;162;g3fb085bff3c_0_107:notes"/>
+          <p:cNvSpPr txBox="1">
+            <a:spLocks noGrp="1"/>
+          </p:cNvSpPr>
           <p:nvPr>
-            <p:ph idx="1" type="body"/>
+            <p:ph type="body" idx="1"/>
           </p:nvPr>
         </p:nvSpPr>
         <p:spPr>
@@ -1283,23 +1540,20 @@
           </a:prstGeom>
         </p:spPr>
         <p:txBody>
-          <a:bodyPr anchorCtr="0" anchor="t" bIns="91425" lIns="91425" spcFirstLastPara="1" rIns="91425" wrap="square" tIns="91425">
+          <a:bodyPr spcFirstLastPara="1" wrap="square" lIns="91425" tIns="91425" rIns="91425" bIns="91425" anchor="t" anchorCtr="0">
             <a:noAutofit/>
           </a:bodyPr>
           <a:lstStyle/>
           <a:p>
-            <a:pPr indent="0" lvl="0" marL="0" rtl="0" algn="l">
-              <a:spcBef>
-                <a:spcPts val="0"/>
-              </a:spcBef>
-              <a:spcAft>
-                <a:spcPts val="0"/>
-              </a:spcAft>
-              <a:buNone/>
-            </a:pPr>
-            <a:r>
-              <a:t/>
-            </a:r>
+            <a:pPr marL="0" lvl="0" indent="0" algn="l" rtl="0">
+              <a:spcBef>
+                <a:spcPts val="0"/>
+              </a:spcBef>
+              <a:spcAft>
+                <a:spcPts val="0"/>
+              </a:spcAft>
+              <a:buNone/>
+            </a:pPr>
             <a:endParaRPr/>
           </a:p>
         </p:txBody>
@@ -1313,11 +1567,11 @@
 </file>
 
 <file path=ppt/notesSlides/notesSlide15.xml><?xml version="1.0" encoding="utf-8"?>
-<p:notes xmlns:a="http://schemas.openxmlformats.org/drawingml/2006/main" xmlns:r="http://schemas.openxmlformats.org/officeDocument/2006/relationships" xmlns:mc="http://schemas.openxmlformats.org/markup-compatibility/2006" xmlns:mv="urn:schemas-microsoft-com:mac:vml" xmlns:p="http://schemas.openxmlformats.org/presentationml/2006/main" xmlns:c="http://schemas.openxmlformats.org/drawingml/2006/chart" xmlns:dgm="http://schemas.openxmlformats.org/drawingml/2006/diagram" xmlns:o="urn:schemas-microsoft-com:office:office" xmlns:v="urn:schemas-microsoft-com:vml" xmlns:pvml="urn:schemas-microsoft-com:office:powerpoint" xmlns:com="http://schemas.openxmlformats.org/drawingml/2006/compatibility" xmlns:p14="http://schemas.microsoft.com/office/powerpoint/2010/main" xmlns:p15="http://schemas.microsoft.com/office/powerpoint/2012/main" xmlns:ahyp="http://schemas.microsoft.com/office/drawing/2018/hyperlinkcolor" showMasterPhAnim="0" showMasterSp="0">
+<p:notes xmlns:a="http://schemas.openxmlformats.org/drawingml/2006/main" xmlns:r="http://schemas.openxmlformats.org/officeDocument/2006/relationships" xmlns:p="http://schemas.openxmlformats.org/presentationml/2006/main" showMasterSp="0" showMasterPhAnim="0">
   <p:cSld>
     <p:spTree>
       <p:nvGrpSpPr>
-        <p:cNvPr id="160" name="Shape 160"/>
+        <p:cNvPr id="1" name="Shape 167"/>
         <p:cNvGrpSpPr/>
         <p:nvPr/>
       </p:nvGrpSpPr>
@@ -1331,10 +1585,12 @@
       </p:grpSpPr>
       <p:sp>
         <p:nvSpPr>
-          <p:cNvPr id="161" name="Google Shape;161;g3fb085bff3c_0_107:notes"/>
-          <p:cNvSpPr/>
+          <p:cNvPr id="168" name="Google Shape;168;g3fb085bff3c_0_66:notes"/>
+          <p:cNvSpPr>
+            <a:spLocks noGrp="1" noRot="1" noChangeAspect="1"/>
+          </p:cNvSpPr>
           <p:nvPr>
-            <p:ph idx="2" type="sldImg"/>
+            <p:ph type="sldImg" idx="2"/>
           </p:nvPr>
         </p:nvSpPr>
         <p:spPr>
@@ -1343,9 +1599,13 @@
             <a:ext cx="6096000" cy="3429000"/>
           </a:xfrm>
           <a:custGeom>
-            <a:rect b="b" l="l" r="r" t="t"/>
+            <a:avLst/>
+            <a:gdLst/>
+            <a:ahLst/>
+            <a:cxnLst/>
+            <a:rect l="l" t="t" r="r" b="b"/>
             <a:pathLst>
-              <a:path extrusionOk="0" h="120000" w="120000">
+              <a:path w="120000" h="120000" extrusionOk="0">
                 <a:moveTo>
                   <a:pt x="0" y="0"/>
                 </a:moveTo>
@@ -1366,10 +1626,12 @@
       </p:sp>
       <p:sp>
         <p:nvSpPr>
-          <p:cNvPr id="162" name="Google Shape;162;g3fb085bff3c_0_107:notes"/>
-          <p:cNvSpPr txBox="1"/>
+          <p:cNvPr id="169" name="Google Shape;169;g3fb085bff3c_0_66:notes"/>
+          <p:cNvSpPr txBox="1">
+            <a:spLocks noGrp="1"/>
+          </p:cNvSpPr>
           <p:nvPr>
-            <p:ph idx="1" type="body"/>
+            <p:ph type="body" idx="1"/>
           </p:nvPr>
         </p:nvSpPr>
         <p:spPr>
@@ -1382,23 +1644,20 @@
           </a:prstGeom>
         </p:spPr>
         <p:txBody>
-          <a:bodyPr anchorCtr="0" anchor="t" bIns="91425" lIns="91425" spcFirstLastPara="1" rIns="91425" wrap="square" tIns="91425">
+          <a:bodyPr spcFirstLastPara="1" wrap="square" lIns="91425" tIns="91425" rIns="91425" bIns="91425" anchor="t" anchorCtr="0">
             <a:noAutofit/>
           </a:bodyPr>
           <a:lstStyle/>
           <a:p>
-            <a:pPr indent="0" lvl="0" marL="0" rtl="0" algn="l">
-              <a:spcBef>
-                <a:spcPts val="0"/>
-              </a:spcBef>
-              <a:spcAft>
-                <a:spcPts val="0"/>
-              </a:spcAft>
-              <a:buNone/>
-            </a:pPr>
-            <a:r>
-              <a:t/>
-            </a:r>
+            <a:pPr marL="0" lvl="0" indent="0" algn="l" rtl="0">
+              <a:spcBef>
+                <a:spcPts val="0"/>
+              </a:spcBef>
+              <a:spcAft>
+                <a:spcPts val="0"/>
+              </a:spcAft>
+              <a:buNone/>
+            </a:pPr>
             <a:endParaRPr/>
           </a:p>
         </p:txBody>
@@ -1411,12 +1670,12 @@
 </p:notes>
 </file>
 
-<file path=ppt/notesSlides/notesSlide16.xml><?xml version="1.0" encoding="utf-8"?>
-<p:notes xmlns:a="http://schemas.openxmlformats.org/drawingml/2006/main" xmlns:r="http://schemas.openxmlformats.org/officeDocument/2006/relationships" xmlns:mc="http://schemas.openxmlformats.org/markup-compatibility/2006" xmlns:mv="urn:schemas-microsoft-com:mac:vml" xmlns:p="http://schemas.openxmlformats.org/presentationml/2006/main" xmlns:c="http://schemas.openxmlformats.org/drawingml/2006/chart" xmlns:dgm="http://schemas.openxmlformats.org/drawingml/2006/diagram" xmlns:o="urn:schemas-microsoft-com:office:office" xmlns:v="urn:schemas-microsoft-com:vml" xmlns:pvml="urn:schemas-microsoft-com:office:powerpoint" xmlns:com="http://schemas.openxmlformats.org/drawingml/2006/compatibility" xmlns:p14="http://schemas.microsoft.com/office/powerpoint/2010/main" xmlns:p15="http://schemas.microsoft.com/office/powerpoint/2012/main" xmlns:ahyp="http://schemas.microsoft.com/office/drawing/2018/hyperlinkcolor" showMasterPhAnim="0" showMasterSp="0">
+<file path=ppt/notesSlides/notesSlide2.xml><?xml version="1.0" encoding="utf-8"?>
+<p:notes xmlns:a="http://schemas.openxmlformats.org/drawingml/2006/main" xmlns:r="http://schemas.openxmlformats.org/officeDocument/2006/relationships" xmlns:p="http://schemas.openxmlformats.org/presentationml/2006/main" showMasterSp="0" showMasterPhAnim="0">
   <p:cSld>
     <p:spTree>
       <p:nvGrpSpPr>
-        <p:cNvPr id="167" name="Shape 167"/>
+        <p:cNvPr id="1" name="Shape 65"/>
         <p:cNvGrpSpPr/>
         <p:nvPr/>
       </p:nvGrpSpPr>
@@ -1430,21 +1689,27 @@
       </p:grpSpPr>
       <p:sp>
         <p:nvSpPr>
-          <p:cNvPr id="168" name="Google Shape;168;g3fb085bff3c_0_66:notes"/>
-          <p:cNvSpPr/>
+          <p:cNvPr id="66" name="Google Shape;66;g3fb085bff3c_0_4:notes"/>
+          <p:cNvSpPr>
+            <a:spLocks noGrp="1" noRot="1" noChangeAspect="1"/>
+          </p:cNvSpPr>
           <p:nvPr>
-            <p:ph idx="2" type="sldImg"/>
+            <p:ph type="sldImg" idx="2"/>
           </p:nvPr>
         </p:nvSpPr>
         <p:spPr>
           <a:xfrm>
-            <a:off x="381300" y="685800"/>
+            <a:off x="381000" y="685800"/>
             <a:ext cx="6096000" cy="3429000"/>
           </a:xfrm>
           <a:custGeom>
-            <a:rect b="b" l="l" r="r" t="t"/>
+            <a:avLst/>
+            <a:gdLst/>
+            <a:ahLst/>
+            <a:cxnLst/>
+            <a:rect l="l" t="t" r="r" b="b"/>
             <a:pathLst>
-              <a:path extrusionOk="0" h="120000" w="120000">
+              <a:path w="120000" h="120000" extrusionOk="0">
                 <a:moveTo>
                   <a:pt x="0" y="0"/>
                 </a:moveTo>
@@ -1465,10 +1730,12 @@
       </p:sp>
       <p:sp>
         <p:nvSpPr>
-          <p:cNvPr id="169" name="Google Shape;169;g3fb085bff3c_0_66:notes"/>
-          <p:cNvSpPr txBox="1"/>
+          <p:cNvPr id="67" name="Google Shape;67;g3fb085bff3c_0_4:notes"/>
+          <p:cNvSpPr txBox="1">
+            <a:spLocks noGrp="1"/>
+          </p:cNvSpPr>
           <p:nvPr>
-            <p:ph idx="1" type="body"/>
+            <p:ph type="body" idx="1"/>
           </p:nvPr>
         </p:nvSpPr>
         <p:spPr>
@@ -1481,23 +1748,20 @@
           </a:prstGeom>
         </p:spPr>
         <p:txBody>
-          <a:bodyPr anchorCtr="0" anchor="t" bIns="91425" lIns="91425" spcFirstLastPara="1" rIns="91425" wrap="square" tIns="91425">
+          <a:bodyPr spcFirstLastPara="1" wrap="square" lIns="91425" tIns="91425" rIns="91425" bIns="91425" anchor="t" anchorCtr="0">
             <a:noAutofit/>
           </a:bodyPr>
           <a:lstStyle/>
           <a:p>
-            <a:pPr indent="0" lvl="0" marL="0" rtl="0" algn="l">
-              <a:spcBef>
-                <a:spcPts val="0"/>
-              </a:spcBef>
-              <a:spcAft>
-                <a:spcPts val="0"/>
-              </a:spcAft>
-              <a:buNone/>
-            </a:pPr>
-            <a:r>
-              <a:t/>
-            </a:r>
+            <a:pPr marL="0" lvl="0" indent="0" algn="l" rtl="0">
+              <a:spcBef>
+                <a:spcPts val="0"/>
+              </a:spcBef>
+              <a:spcAft>
+                <a:spcPts val="0"/>
+              </a:spcAft>
+              <a:buNone/>
+            </a:pPr>
             <a:endParaRPr/>
           </a:p>
         </p:txBody>
@@ -1510,12 +1774,12 @@
 </p:notes>
 </file>
 
-<file path=ppt/notesSlides/notesSlide2.xml><?xml version="1.0" encoding="utf-8"?>
-<p:notes xmlns:a="http://schemas.openxmlformats.org/drawingml/2006/main" xmlns:r="http://schemas.openxmlformats.org/officeDocument/2006/relationships" xmlns:mc="http://schemas.openxmlformats.org/markup-compatibility/2006" xmlns:mv="urn:schemas-microsoft-com:mac:vml" xmlns:p="http://schemas.openxmlformats.org/presentationml/2006/main" xmlns:c="http://schemas.openxmlformats.org/drawingml/2006/chart" xmlns:dgm="http://schemas.openxmlformats.org/drawingml/2006/diagram" xmlns:o="urn:schemas-microsoft-com:office:office" xmlns:v="urn:schemas-microsoft-com:vml" xmlns:pvml="urn:schemas-microsoft-com:office:powerpoint" xmlns:com="http://schemas.openxmlformats.org/drawingml/2006/compatibility" xmlns:p14="http://schemas.microsoft.com/office/powerpoint/2010/main" xmlns:p15="http://schemas.microsoft.com/office/powerpoint/2012/main" xmlns:ahyp="http://schemas.microsoft.com/office/drawing/2018/hyperlinkcolor" showMasterPhAnim="0" showMasterSp="0">
+<file path=ppt/notesSlides/notesSlide3.xml><?xml version="1.0" encoding="utf-8"?>
+<p:notes xmlns:a="http://schemas.openxmlformats.org/drawingml/2006/main" xmlns:r="http://schemas.openxmlformats.org/officeDocument/2006/relationships" xmlns:p="http://schemas.openxmlformats.org/presentationml/2006/main" showMasterSp="0" showMasterPhAnim="0">
   <p:cSld>
     <p:spTree>
       <p:nvGrpSpPr>
-        <p:cNvPr id="57" name="Shape 57"/>
+        <p:cNvPr id="1" name="Shape 72"/>
         <p:cNvGrpSpPr/>
         <p:nvPr/>
       </p:nvGrpSpPr>
@@ -1529,21 +1793,27 @@
       </p:grpSpPr>
       <p:sp>
         <p:nvSpPr>
-          <p:cNvPr id="58" name="Google Shape;58;g3fb085bff3c_0_134:notes"/>
-          <p:cNvSpPr/>
+          <p:cNvPr id="73" name="Google Shape;73;g3fb085bff3c_0_11:notes"/>
+          <p:cNvSpPr>
+            <a:spLocks noGrp="1" noRot="1" noChangeAspect="1"/>
+          </p:cNvSpPr>
           <p:nvPr>
-            <p:ph idx="2" type="sldImg"/>
+            <p:ph type="sldImg" idx="2"/>
           </p:nvPr>
         </p:nvSpPr>
         <p:spPr>
           <a:xfrm>
-            <a:off x="381300" y="685800"/>
+            <a:off x="381000" y="685800"/>
             <a:ext cx="6096000" cy="3429000"/>
           </a:xfrm>
           <a:custGeom>
-            <a:rect b="b" l="l" r="r" t="t"/>
+            <a:avLst/>
+            <a:gdLst/>
+            <a:ahLst/>
+            <a:cxnLst/>
+            <a:rect l="l" t="t" r="r" b="b"/>
             <a:pathLst>
-              <a:path extrusionOk="0" h="120000" w="120000">
+              <a:path w="120000" h="120000" extrusionOk="0">
                 <a:moveTo>
                   <a:pt x="0" y="0"/>
                 </a:moveTo>
@@ -1564,10 +1834,12 @@
       </p:sp>
       <p:sp>
         <p:nvSpPr>
-          <p:cNvPr id="59" name="Google Shape;59;g3fb085bff3c_0_134:notes"/>
-          <p:cNvSpPr txBox="1"/>
+          <p:cNvPr id="74" name="Google Shape;74;g3fb085bff3c_0_11:notes"/>
+          <p:cNvSpPr txBox="1">
+            <a:spLocks noGrp="1"/>
+          </p:cNvSpPr>
           <p:nvPr>
-            <p:ph idx="1" type="body"/>
+            <p:ph type="body" idx="1"/>
           </p:nvPr>
         </p:nvSpPr>
         <p:spPr>
@@ -1580,23 +1852,20 @@
           </a:prstGeom>
         </p:spPr>
         <p:txBody>
-          <a:bodyPr anchorCtr="0" anchor="t" bIns="91425" lIns="91425" spcFirstLastPara="1" rIns="91425" wrap="square" tIns="91425">
+          <a:bodyPr spcFirstLastPara="1" wrap="square" lIns="91425" tIns="91425" rIns="91425" bIns="91425" anchor="t" anchorCtr="0">
             <a:noAutofit/>
           </a:bodyPr>
           <a:lstStyle/>
           <a:p>
-            <a:pPr indent="0" lvl="0" marL="0" rtl="0" algn="l">
-              <a:spcBef>
-                <a:spcPts val="0"/>
-              </a:spcBef>
-              <a:spcAft>
-                <a:spcPts val="0"/>
-              </a:spcAft>
-              <a:buNone/>
-            </a:pPr>
-            <a:r>
-              <a:t/>
-            </a:r>
+            <a:pPr marL="0" lvl="0" indent="0" algn="l" rtl="0">
+              <a:spcBef>
+                <a:spcPts val="0"/>
+              </a:spcBef>
+              <a:spcAft>
+                <a:spcPts val="0"/>
+              </a:spcAft>
+              <a:buNone/>
+            </a:pPr>
             <a:endParaRPr/>
           </a:p>
         </p:txBody>
@@ -1609,12 +1878,12 @@
 </p:notes>
 </file>
 
-<file path=ppt/notesSlides/notesSlide3.xml><?xml version="1.0" encoding="utf-8"?>
-<p:notes xmlns:a="http://schemas.openxmlformats.org/drawingml/2006/main" xmlns:r="http://schemas.openxmlformats.org/officeDocument/2006/relationships" xmlns:mc="http://schemas.openxmlformats.org/markup-compatibility/2006" xmlns:mv="urn:schemas-microsoft-com:mac:vml" xmlns:p="http://schemas.openxmlformats.org/presentationml/2006/main" xmlns:c="http://schemas.openxmlformats.org/drawingml/2006/chart" xmlns:dgm="http://schemas.openxmlformats.org/drawingml/2006/diagram" xmlns:o="urn:schemas-microsoft-com:office:office" xmlns:v="urn:schemas-microsoft-com:vml" xmlns:pvml="urn:schemas-microsoft-com:office:powerpoint" xmlns:com="http://schemas.openxmlformats.org/drawingml/2006/compatibility" xmlns:p14="http://schemas.microsoft.com/office/powerpoint/2010/main" xmlns:p15="http://schemas.microsoft.com/office/powerpoint/2012/main" xmlns:ahyp="http://schemas.microsoft.com/office/drawing/2018/hyperlinkcolor" showMasterPhAnim="0" showMasterSp="0">
+<file path=ppt/notesSlides/notesSlide4.xml><?xml version="1.0" encoding="utf-8"?>
+<p:notes xmlns:a="http://schemas.openxmlformats.org/drawingml/2006/main" xmlns:r="http://schemas.openxmlformats.org/officeDocument/2006/relationships" xmlns:p="http://schemas.openxmlformats.org/presentationml/2006/main" showMasterSp="0" showMasterPhAnim="0">
   <p:cSld>
     <p:spTree>
       <p:nvGrpSpPr>
-        <p:cNvPr id="65" name="Shape 65"/>
+        <p:cNvPr id="1" name="Shape 80"/>
         <p:cNvGrpSpPr/>
         <p:nvPr/>
       </p:nvGrpSpPr>
@@ -1628,21 +1897,27 @@
       </p:grpSpPr>
       <p:sp>
         <p:nvSpPr>
-          <p:cNvPr id="66" name="Google Shape;66;g3fb085bff3c_0_4:notes"/>
-          <p:cNvSpPr/>
+          <p:cNvPr id="81" name="Google Shape;81;g3fb085bff3c_0_16:notes"/>
+          <p:cNvSpPr>
+            <a:spLocks noGrp="1" noRot="1" noChangeAspect="1"/>
+          </p:cNvSpPr>
           <p:nvPr>
-            <p:ph idx="2" type="sldImg"/>
+            <p:ph type="sldImg" idx="2"/>
           </p:nvPr>
         </p:nvSpPr>
         <p:spPr>
           <a:xfrm>
-            <a:off x="381300" y="685800"/>
+            <a:off x="381000" y="685800"/>
             <a:ext cx="6096000" cy="3429000"/>
           </a:xfrm>
           <a:custGeom>
-            <a:rect b="b" l="l" r="r" t="t"/>
+            <a:avLst/>
+            <a:gdLst/>
+            <a:ahLst/>
+            <a:cxnLst/>
+            <a:rect l="l" t="t" r="r" b="b"/>
             <a:pathLst>
-              <a:path extrusionOk="0" h="120000" w="120000">
+              <a:path w="120000" h="120000" extrusionOk="0">
                 <a:moveTo>
                   <a:pt x="0" y="0"/>
                 </a:moveTo>
@@ -1663,10 +1938,12 @@
       </p:sp>
       <p:sp>
         <p:nvSpPr>
-          <p:cNvPr id="67" name="Google Shape;67;g3fb085bff3c_0_4:notes"/>
-          <p:cNvSpPr txBox="1"/>
+          <p:cNvPr id="82" name="Google Shape;82;g3fb085bff3c_0_16:notes"/>
+          <p:cNvSpPr txBox="1">
+            <a:spLocks noGrp="1"/>
+          </p:cNvSpPr>
           <p:nvPr>
-            <p:ph idx="1" type="body"/>
+            <p:ph type="body" idx="1"/>
           </p:nvPr>
         </p:nvSpPr>
         <p:spPr>
@@ -1679,23 +1956,20 @@
           </a:prstGeom>
         </p:spPr>
         <p:txBody>
-          <a:bodyPr anchorCtr="0" anchor="t" bIns="91425" lIns="91425" spcFirstLastPara="1" rIns="91425" wrap="square" tIns="91425">
+          <a:bodyPr spcFirstLastPara="1" wrap="square" lIns="91425" tIns="91425" rIns="91425" bIns="91425" anchor="t" anchorCtr="0">
             <a:noAutofit/>
           </a:bodyPr>
           <a:lstStyle/>
           <a:p>
-            <a:pPr indent="0" lvl="0" marL="0" rtl="0" algn="l">
-              <a:spcBef>
-                <a:spcPts val="0"/>
-              </a:spcBef>
-              <a:spcAft>
-                <a:spcPts val="0"/>
-              </a:spcAft>
-              <a:buNone/>
-            </a:pPr>
-            <a:r>
-              <a:t/>
-            </a:r>
+            <a:pPr marL="0" lvl="0" indent="0" algn="l" rtl="0">
+              <a:spcBef>
+                <a:spcPts val="0"/>
+              </a:spcBef>
+              <a:spcAft>
+                <a:spcPts val="0"/>
+              </a:spcAft>
+              <a:buNone/>
+            </a:pPr>
             <a:endParaRPr/>
           </a:p>
         </p:txBody>
@@ -1708,12 +1982,12 @@
 </p:notes>
 </file>
 
-<file path=ppt/notesSlides/notesSlide4.xml><?xml version="1.0" encoding="utf-8"?>
-<p:notes xmlns:a="http://schemas.openxmlformats.org/drawingml/2006/main" xmlns:r="http://schemas.openxmlformats.org/officeDocument/2006/relationships" xmlns:mc="http://schemas.openxmlformats.org/markup-compatibility/2006" xmlns:mv="urn:schemas-microsoft-com:mac:vml" xmlns:p="http://schemas.openxmlformats.org/presentationml/2006/main" xmlns:c="http://schemas.openxmlformats.org/drawingml/2006/chart" xmlns:dgm="http://schemas.openxmlformats.org/drawingml/2006/diagram" xmlns:o="urn:schemas-microsoft-com:office:office" xmlns:v="urn:schemas-microsoft-com:vml" xmlns:pvml="urn:schemas-microsoft-com:office:powerpoint" xmlns:com="http://schemas.openxmlformats.org/drawingml/2006/compatibility" xmlns:p14="http://schemas.microsoft.com/office/powerpoint/2010/main" xmlns:p15="http://schemas.microsoft.com/office/powerpoint/2012/main" xmlns:ahyp="http://schemas.microsoft.com/office/drawing/2018/hyperlinkcolor" showMasterPhAnim="0" showMasterSp="0">
+<file path=ppt/notesSlides/notesSlide5.xml><?xml version="1.0" encoding="utf-8"?>
+<p:notes xmlns:a="http://schemas.openxmlformats.org/drawingml/2006/main" xmlns:r="http://schemas.openxmlformats.org/officeDocument/2006/relationships" xmlns:p="http://schemas.openxmlformats.org/presentationml/2006/main" showMasterSp="0" showMasterPhAnim="0">
   <p:cSld>
     <p:spTree>
       <p:nvGrpSpPr>
-        <p:cNvPr id="72" name="Shape 72"/>
+        <p:cNvPr id="1" name="Shape 88"/>
         <p:cNvGrpSpPr/>
         <p:nvPr/>
       </p:nvGrpSpPr>
@@ -1727,21 +2001,27 @@
       </p:grpSpPr>
       <p:sp>
         <p:nvSpPr>
-          <p:cNvPr id="73" name="Google Shape;73;g3fb085bff3c_0_11:notes"/>
-          <p:cNvSpPr/>
+          <p:cNvPr id="89" name="Google Shape;89;g3fb085bff3c_0_21:notes"/>
+          <p:cNvSpPr>
+            <a:spLocks noGrp="1" noRot="1" noChangeAspect="1"/>
+          </p:cNvSpPr>
           <p:nvPr>
-            <p:ph idx="2" type="sldImg"/>
+            <p:ph type="sldImg" idx="2"/>
           </p:nvPr>
         </p:nvSpPr>
         <p:spPr>
           <a:xfrm>
-            <a:off x="381300" y="685800"/>
+            <a:off x="381000" y="685800"/>
             <a:ext cx="6096000" cy="3429000"/>
           </a:xfrm>
           <a:custGeom>
-            <a:rect b="b" l="l" r="r" t="t"/>
+            <a:avLst/>
+            <a:gdLst/>
+            <a:ahLst/>
+            <a:cxnLst/>
+            <a:rect l="l" t="t" r="r" b="b"/>
             <a:pathLst>
-              <a:path extrusionOk="0" h="120000" w="120000">
+              <a:path w="120000" h="120000" extrusionOk="0">
                 <a:moveTo>
                   <a:pt x="0" y="0"/>
                 </a:moveTo>
@@ -1762,10 +2042,12 @@
       </p:sp>
       <p:sp>
         <p:nvSpPr>
-          <p:cNvPr id="74" name="Google Shape;74;g3fb085bff3c_0_11:notes"/>
-          <p:cNvSpPr txBox="1"/>
+          <p:cNvPr id="90" name="Google Shape;90;g3fb085bff3c_0_21:notes"/>
+          <p:cNvSpPr txBox="1">
+            <a:spLocks noGrp="1"/>
+          </p:cNvSpPr>
           <p:nvPr>
-            <p:ph idx="1" type="body"/>
+            <p:ph type="body" idx="1"/>
           </p:nvPr>
         </p:nvSpPr>
         <p:spPr>
@@ -1778,23 +2060,20 @@
           </a:prstGeom>
         </p:spPr>
         <p:txBody>
-          <a:bodyPr anchorCtr="0" anchor="t" bIns="91425" lIns="91425" spcFirstLastPara="1" rIns="91425" wrap="square" tIns="91425">
+          <a:bodyPr spcFirstLastPara="1" wrap="square" lIns="91425" tIns="91425" rIns="91425" bIns="91425" anchor="t" anchorCtr="0">
             <a:noAutofit/>
           </a:bodyPr>
           <a:lstStyle/>
           <a:p>
-            <a:pPr indent="0" lvl="0" marL="0" rtl="0" algn="l">
-              <a:spcBef>
-                <a:spcPts val="0"/>
-              </a:spcBef>
-              <a:spcAft>
-                <a:spcPts val="0"/>
-              </a:spcAft>
-              <a:buNone/>
-            </a:pPr>
-            <a:r>
-              <a:t/>
-            </a:r>
+            <a:pPr marL="0" lvl="0" indent="0" algn="l" rtl="0">
+              <a:spcBef>
+                <a:spcPts val="0"/>
+              </a:spcBef>
+              <a:spcAft>
+                <a:spcPts val="0"/>
+              </a:spcAft>
+              <a:buNone/>
+            </a:pPr>
             <a:endParaRPr/>
           </a:p>
         </p:txBody>
@@ -1807,12 +2086,12 @@
 </p:notes>
 </file>
 
-<file path=ppt/notesSlides/notesSlide5.xml><?xml version="1.0" encoding="utf-8"?>
-<p:notes xmlns:a="http://schemas.openxmlformats.org/drawingml/2006/main" xmlns:r="http://schemas.openxmlformats.org/officeDocument/2006/relationships" xmlns:mc="http://schemas.openxmlformats.org/markup-compatibility/2006" xmlns:mv="urn:schemas-microsoft-com:mac:vml" xmlns:p="http://schemas.openxmlformats.org/presentationml/2006/main" xmlns:c="http://schemas.openxmlformats.org/drawingml/2006/chart" xmlns:dgm="http://schemas.openxmlformats.org/drawingml/2006/diagram" xmlns:o="urn:schemas-microsoft-com:office:office" xmlns:v="urn:schemas-microsoft-com:vml" xmlns:pvml="urn:schemas-microsoft-com:office:powerpoint" xmlns:com="http://schemas.openxmlformats.org/drawingml/2006/compatibility" xmlns:p14="http://schemas.microsoft.com/office/powerpoint/2010/main" xmlns:p15="http://schemas.microsoft.com/office/powerpoint/2012/main" xmlns:ahyp="http://schemas.microsoft.com/office/drawing/2018/hyperlinkcolor" showMasterPhAnim="0" showMasterSp="0">
+<file path=ppt/notesSlides/notesSlide6.xml><?xml version="1.0" encoding="utf-8"?>
+<p:notes xmlns:a="http://schemas.openxmlformats.org/drawingml/2006/main" xmlns:r="http://schemas.openxmlformats.org/officeDocument/2006/relationships" xmlns:p="http://schemas.openxmlformats.org/presentationml/2006/main" showMasterSp="0" showMasterPhAnim="0">
   <p:cSld>
     <p:spTree>
       <p:nvGrpSpPr>
-        <p:cNvPr id="80" name="Shape 80"/>
+        <p:cNvPr id="1" name="Shape 96"/>
         <p:cNvGrpSpPr/>
         <p:nvPr/>
       </p:nvGrpSpPr>
@@ -1826,21 +2105,27 @@
       </p:grpSpPr>
       <p:sp>
         <p:nvSpPr>
-          <p:cNvPr id="81" name="Google Shape;81;g3fb085bff3c_0_16:notes"/>
-          <p:cNvSpPr/>
+          <p:cNvPr id="97" name="Google Shape;97;g3fb085bff3c_0_26:notes"/>
+          <p:cNvSpPr>
+            <a:spLocks noGrp="1" noRot="1" noChangeAspect="1"/>
+          </p:cNvSpPr>
           <p:nvPr>
-            <p:ph idx="2" type="sldImg"/>
+            <p:ph type="sldImg" idx="2"/>
           </p:nvPr>
         </p:nvSpPr>
         <p:spPr>
           <a:xfrm>
-            <a:off x="381300" y="685800"/>
+            <a:off x="381000" y="685800"/>
             <a:ext cx="6096000" cy="3429000"/>
           </a:xfrm>
           <a:custGeom>
-            <a:rect b="b" l="l" r="r" t="t"/>
+            <a:avLst/>
+            <a:gdLst/>
+            <a:ahLst/>
+            <a:cxnLst/>
+            <a:rect l="l" t="t" r="r" b="b"/>
             <a:pathLst>
-              <a:path extrusionOk="0" h="120000" w="120000">
+              <a:path w="120000" h="120000" extrusionOk="0">
                 <a:moveTo>
                   <a:pt x="0" y="0"/>
                 </a:moveTo>
@@ -1861,10 +2146,12 @@
       </p:sp>
       <p:sp>
         <p:nvSpPr>
-          <p:cNvPr id="82" name="Google Shape;82;g3fb085bff3c_0_16:notes"/>
-          <p:cNvSpPr txBox="1"/>
+          <p:cNvPr id="98" name="Google Shape;98;g3fb085bff3c_0_26:notes"/>
+          <p:cNvSpPr txBox="1">
+            <a:spLocks noGrp="1"/>
+          </p:cNvSpPr>
           <p:nvPr>
-            <p:ph idx="1" type="body"/>
+            <p:ph type="body" idx="1"/>
           </p:nvPr>
         </p:nvSpPr>
         <p:spPr>
@@ -1877,23 +2164,20 @@
           </a:prstGeom>
         </p:spPr>
         <p:txBody>
-          <a:bodyPr anchorCtr="0" anchor="t" bIns="91425" lIns="91425" spcFirstLastPara="1" rIns="91425" wrap="square" tIns="91425">
+          <a:bodyPr spcFirstLastPara="1" wrap="square" lIns="91425" tIns="91425" rIns="91425" bIns="91425" anchor="t" anchorCtr="0">
             <a:noAutofit/>
           </a:bodyPr>
           <a:lstStyle/>
           <a:p>
-            <a:pPr indent="0" lvl="0" marL="0" rtl="0" algn="l">
-              <a:spcBef>
-                <a:spcPts val="0"/>
-              </a:spcBef>
-              <a:spcAft>
-                <a:spcPts val="0"/>
-              </a:spcAft>
-              <a:buNone/>
-            </a:pPr>
-            <a:r>
-              <a:t/>
-            </a:r>
+            <a:pPr marL="0" lvl="0" indent="0" algn="l" rtl="0">
+              <a:spcBef>
+                <a:spcPts val="0"/>
+              </a:spcBef>
+              <a:spcAft>
+                <a:spcPts val="0"/>
+              </a:spcAft>
+              <a:buNone/>
+            </a:pPr>
             <a:endParaRPr/>
           </a:p>
         </p:txBody>
@@ -1906,12 +2190,12 @@
 </p:notes>
 </file>
 
-<file path=ppt/notesSlides/notesSlide6.xml><?xml version="1.0" encoding="utf-8"?>
-<p:notes xmlns:a="http://schemas.openxmlformats.org/drawingml/2006/main" xmlns:r="http://schemas.openxmlformats.org/officeDocument/2006/relationships" xmlns:mc="http://schemas.openxmlformats.org/markup-compatibility/2006" xmlns:mv="urn:schemas-microsoft-com:mac:vml" xmlns:p="http://schemas.openxmlformats.org/presentationml/2006/main" xmlns:c="http://schemas.openxmlformats.org/drawingml/2006/chart" xmlns:dgm="http://schemas.openxmlformats.org/drawingml/2006/diagram" xmlns:o="urn:schemas-microsoft-com:office:office" xmlns:v="urn:schemas-microsoft-com:vml" xmlns:pvml="urn:schemas-microsoft-com:office:powerpoint" xmlns:com="http://schemas.openxmlformats.org/drawingml/2006/compatibility" xmlns:p14="http://schemas.microsoft.com/office/powerpoint/2010/main" xmlns:p15="http://schemas.microsoft.com/office/powerpoint/2012/main" xmlns:ahyp="http://schemas.microsoft.com/office/drawing/2018/hyperlinkcolor" showMasterPhAnim="0" showMasterSp="0">
+<file path=ppt/notesSlides/notesSlide7.xml><?xml version="1.0" encoding="utf-8"?>
+<p:notes xmlns:a="http://schemas.openxmlformats.org/drawingml/2006/main" xmlns:r="http://schemas.openxmlformats.org/officeDocument/2006/relationships" xmlns:p="http://schemas.openxmlformats.org/presentationml/2006/main" showMasterSp="0" showMasterPhAnim="0">
   <p:cSld>
     <p:spTree>
       <p:nvGrpSpPr>
-        <p:cNvPr id="88" name="Shape 88"/>
+        <p:cNvPr id="1" name="Shape 104"/>
         <p:cNvGrpSpPr/>
         <p:nvPr/>
       </p:nvGrpSpPr>
@@ -1925,21 +2209,27 @@
       </p:grpSpPr>
       <p:sp>
         <p:nvSpPr>
-          <p:cNvPr id="89" name="Google Shape;89;g3fb085bff3c_0_21:notes"/>
-          <p:cNvSpPr/>
+          <p:cNvPr id="105" name="Google Shape;105;g3fb085bff3c_0_31:notes"/>
+          <p:cNvSpPr>
+            <a:spLocks noGrp="1" noRot="1" noChangeAspect="1"/>
+          </p:cNvSpPr>
           <p:nvPr>
-            <p:ph idx="2" type="sldImg"/>
+            <p:ph type="sldImg" idx="2"/>
           </p:nvPr>
         </p:nvSpPr>
         <p:spPr>
           <a:xfrm>
-            <a:off x="381300" y="685800"/>
+            <a:off x="381000" y="685800"/>
             <a:ext cx="6096000" cy="3429000"/>
           </a:xfrm>
           <a:custGeom>
-            <a:rect b="b" l="l" r="r" t="t"/>
+            <a:avLst/>
+            <a:gdLst/>
+            <a:ahLst/>
+            <a:cxnLst/>
+            <a:rect l="l" t="t" r="r" b="b"/>
             <a:pathLst>
-              <a:path extrusionOk="0" h="120000" w="120000">
+              <a:path w="120000" h="120000" extrusionOk="0">
                 <a:moveTo>
                   <a:pt x="0" y="0"/>
                 </a:moveTo>
@@ -1960,10 +2250,12 @@
       </p:sp>
       <p:sp>
         <p:nvSpPr>
-          <p:cNvPr id="90" name="Google Shape;90;g3fb085bff3c_0_21:notes"/>
-          <p:cNvSpPr txBox="1"/>
+          <p:cNvPr id="106" name="Google Shape;106;g3fb085bff3c_0_31:notes"/>
+          <p:cNvSpPr txBox="1">
+            <a:spLocks noGrp="1"/>
+          </p:cNvSpPr>
           <p:nvPr>
-            <p:ph idx="1" type="body"/>
+            <p:ph type="body" idx="1"/>
           </p:nvPr>
         </p:nvSpPr>
         <p:spPr>
@@ -1976,23 +2268,20 @@
           </a:prstGeom>
         </p:spPr>
         <p:txBody>
-          <a:bodyPr anchorCtr="0" anchor="t" bIns="91425" lIns="91425" spcFirstLastPara="1" rIns="91425" wrap="square" tIns="91425">
+          <a:bodyPr spcFirstLastPara="1" wrap="square" lIns="91425" tIns="91425" rIns="91425" bIns="91425" anchor="t" anchorCtr="0">
             <a:noAutofit/>
           </a:bodyPr>
           <a:lstStyle/>
           <a:p>
-            <a:pPr indent="0" lvl="0" marL="0" rtl="0" algn="l">
-              <a:spcBef>
-                <a:spcPts val="0"/>
-              </a:spcBef>
-              <a:spcAft>
-                <a:spcPts val="0"/>
-              </a:spcAft>
-              <a:buNone/>
-            </a:pPr>
-            <a:r>
-              <a:t/>
-            </a:r>
+            <a:pPr marL="0" lvl="0" indent="0" algn="l" rtl="0">
+              <a:spcBef>
+                <a:spcPts val="0"/>
+              </a:spcBef>
+              <a:spcAft>
+                <a:spcPts val="0"/>
+              </a:spcAft>
+              <a:buNone/>
+            </a:pPr>
             <a:endParaRPr/>
           </a:p>
         </p:txBody>
@@ -2005,12 +2294,12 @@
 </p:notes>
 </file>
 
-<file path=ppt/notesSlides/notesSlide7.xml><?xml version="1.0" encoding="utf-8"?>
-<p:notes xmlns:a="http://schemas.openxmlformats.org/drawingml/2006/main" xmlns:r="http://schemas.openxmlformats.org/officeDocument/2006/relationships" xmlns:mc="http://schemas.openxmlformats.org/markup-compatibility/2006" xmlns:mv="urn:schemas-microsoft-com:mac:vml" xmlns:p="http://schemas.openxmlformats.org/presentationml/2006/main" xmlns:c="http://schemas.openxmlformats.org/drawingml/2006/chart" xmlns:dgm="http://schemas.openxmlformats.org/drawingml/2006/diagram" xmlns:o="urn:schemas-microsoft-com:office:office" xmlns:v="urn:schemas-microsoft-com:vml" xmlns:pvml="urn:schemas-microsoft-com:office:powerpoint" xmlns:com="http://schemas.openxmlformats.org/drawingml/2006/compatibility" xmlns:p14="http://schemas.microsoft.com/office/powerpoint/2010/main" xmlns:p15="http://schemas.microsoft.com/office/powerpoint/2012/main" xmlns:ahyp="http://schemas.microsoft.com/office/drawing/2018/hyperlinkcolor" showMasterPhAnim="0" showMasterSp="0">
+<file path=ppt/notesSlides/notesSlide8.xml><?xml version="1.0" encoding="utf-8"?>
+<p:notes xmlns:a="http://schemas.openxmlformats.org/drawingml/2006/main" xmlns:r="http://schemas.openxmlformats.org/officeDocument/2006/relationships" xmlns:p="http://schemas.openxmlformats.org/presentationml/2006/main" showMasterSp="0" showMasterPhAnim="0">
   <p:cSld>
     <p:spTree>
       <p:nvGrpSpPr>
-        <p:cNvPr id="96" name="Shape 96"/>
+        <p:cNvPr id="1" name="Shape 112"/>
         <p:cNvGrpSpPr/>
         <p:nvPr/>
       </p:nvGrpSpPr>
@@ -2024,21 +2313,27 @@
       </p:grpSpPr>
       <p:sp>
         <p:nvSpPr>
-          <p:cNvPr id="97" name="Google Shape;97;g3fb085bff3c_0_26:notes"/>
-          <p:cNvSpPr/>
+          <p:cNvPr id="113" name="Google Shape;113;g3fb085bff3c_0_36:notes"/>
+          <p:cNvSpPr>
+            <a:spLocks noGrp="1" noRot="1" noChangeAspect="1"/>
+          </p:cNvSpPr>
           <p:nvPr>
-            <p:ph idx="2" type="sldImg"/>
+            <p:ph type="sldImg" idx="2"/>
           </p:nvPr>
         </p:nvSpPr>
         <p:spPr>
           <a:xfrm>
-            <a:off x="381300" y="685800"/>
+            <a:off x="381000" y="685800"/>
             <a:ext cx="6096000" cy="3429000"/>
           </a:xfrm>
           <a:custGeom>
-            <a:rect b="b" l="l" r="r" t="t"/>
+            <a:avLst/>
+            <a:gdLst/>
+            <a:ahLst/>
+            <a:cxnLst/>
+            <a:rect l="l" t="t" r="r" b="b"/>
             <a:pathLst>
-              <a:path extrusionOk="0" h="120000" w="120000">
+              <a:path w="120000" h="120000" extrusionOk="0">
                 <a:moveTo>
                   <a:pt x="0" y="0"/>
                 </a:moveTo>
@@ -2059,10 +2354,12 @@
       </p:sp>
       <p:sp>
         <p:nvSpPr>
-          <p:cNvPr id="98" name="Google Shape;98;g3fb085bff3c_0_26:notes"/>
-          <p:cNvSpPr txBox="1"/>
+          <p:cNvPr id="114" name="Google Shape;114;g3fb085bff3c_0_36:notes"/>
+          <p:cNvSpPr txBox="1">
+            <a:spLocks noGrp="1"/>
+          </p:cNvSpPr>
           <p:nvPr>
-            <p:ph idx="1" type="body"/>
+            <p:ph type="body" idx="1"/>
           </p:nvPr>
         </p:nvSpPr>
         <p:spPr>
@@ -2075,23 +2372,20 @@
           </a:prstGeom>
         </p:spPr>
         <p:txBody>
-          <a:bodyPr anchorCtr="0" anchor="t" bIns="91425" lIns="91425" spcFirstLastPara="1" rIns="91425" wrap="square" tIns="91425">
+          <a:bodyPr spcFirstLastPara="1" wrap="square" lIns="91425" tIns="91425" rIns="91425" bIns="91425" anchor="t" anchorCtr="0">
             <a:noAutofit/>
           </a:bodyPr>
           <a:lstStyle/>
           <a:p>
-            <a:pPr indent="0" lvl="0" marL="0" rtl="0" algn="l">
-              <a:spcBef>
-                <a:spcPts val="0"/>
-              </a:spcBef>
-              <a:spcAft>
-                <a:spcPts val="0"/>
-              </a:spcAft>
-              <a:buNone/>
-            </a:pPr>
-            <a:r>
-              <a:t/>
-            </a:r>
+            <a:pPr marL="0" lvl="0" indent="0" algn="l" rtl="0">
+              <a:spcBef>
+                <a:spcPts val="0"/>
+              </a:spcBef>
+              <a:spcAft>
+                <a:spcPts val="0"/>
+              </a:spcAft>
+              <a:buNone/>
+            </a:pPr>
             <a:endParaRPr/>
           </a:p>
         </p:txBody>
@@ -2104,12 +2398,12 @@
 </p:notes>
 </file>
 
-<file path=ppt/notesSlides/notesSlide8.xml><?xml version="1.0" encoding="utf-8"?>
-<p:notes xmlns:a="http://schemas.openxmlformats.org/drawingml/2006/main" xmlns:r="http://schemas.openxmlformats.org/officeDocument/2006/relationships" xmlns:mc="http://schemas.openxmlformats.org/markup-compatibility/2006" xmlns:mv="urn:schemas-microsoft-com:mac:vml" xmlns:p="http://schemas.openxmlformats.org/presentationml/2006/main" xmlns:c="http://schemas.openxmlformats.org/drawingml/2006/chart" xmlns:dgm="http://schemas.openxmlformats.org/drawingml/2006/diagram" xmlns:o="urn:schemas-microsoft-com:office:office" xmlns:v="urn:schemas-microsoft-com:vml" xmlns:pvml="urn:schemas-microsoft-com:office:powerpoint" xmlns:com="http://schemas.openxmlformats.org/drawingml/2006/compatibility" xmlns:p14="http://schemas.microsoft.com/office/powerpoint/2010/main" xmlns:p15="http://schemas.microsoft.com/office/powerpoint/2012/main" xmlns:ahyp="http://schemas.microsoft.com/office/drawing/2018/hyperlinkcolor" showMasterPhAnim="0" showMasterSp="0">
+<file path=ppt/notesSlides/notesSlide9.xml><?xml version="1.0" encoding="utf-8"?>
+<p:notes xmlns:a="http://schemas.openxmlformats.org/drawingml/2006/main" xmlns:r="http://schemas.openxmlformats.org/officeDocument/2006/relationships" xmlns:p="http://schemas.openxmlformats.org/presentationml/2006/main" showMasterSp="0" showMasterPhAnim="0">
   <p:cSld>
     <p:spTree>
       <p:nvGrpSpPr>
-        <p:cNvPr id="104" name="Shape 104"/>
+        <p:cNvPr id="1" name="Shape 120"/>
         <p:cNvGrpSpPr/>
         <p:nvPr/>
       </p:nvGrpSpPr>
@@ -2123,21 +2417,27 @@
       </p:grpSpPr>
       <p:sp>
         <p:nvSpPr>
-          <p:cNvPr id="105" name="Google Shape;105;g3fb085bff3c_0_31:notes"/>
-          <p:cNvSpPr/>
+          <p:cNvPr id="121" name="Google Shape;121;g3fb085bff3c_0_41:notes"/>
+          <p:cNvSpPr>
+            <a:spLocks noGrp="1" noRot="1" noChangeAspect="1"/>
+          </p:cNvSpPr>
           <p:nvPr>
-            <p:ph idx="2" type="sldImg"/>
+            <p:ph type="sldImg" idx="2"/>
           </p:nvPr>
         </p:nvSpPr>
         <p:spPr>
           <a:xfrm>
-            <a:off x="381300" y="685800"/>
+            <a:off x="381000" y="685800"/>
             <a:ext cx="6096000" cy="3429000"/>
           </a:xfrm>
           <a:custGeom>
-            <a:rect b="b" l="l" r="r" t="t"/>
+            <a:avLst/>
+            <a:gdLst/>
+            <a:ahLst/>
+            <a:cxnLst/>
+            <a:rect l="l" t="t" r="r" b="b"/>
             <a:pathLst>
-              <a:path extrusionOk="0" h="120000" w="120000">
+              <a:path w="120000" h="120000" extrusionOk="0">
                 <a:moveTo>
                   <a:pt x="0" y="0"/>
                 </a:moveTo>
@@ -2158,10 +2458,12 @@
       </p:sp>
       <p:sp>
         <p:nvSpPr>
-          <p:cNvPr id="106" name="Google Shape;106;g3fb085bff3c_0_31:notes"/>
-          <p:cNvSpPr txBox="1"/>
+          <p:cNvPr id="122" name="Google Shape;122;g3fb085bff3c_0_41:notes"/>
+          <p:cNvSpPr txBox="1">
+            <a:spLocks noGrp="1"/>
+          </p:cNvSpPr>
           <p:nvPr>
-            <p:ph idx="1" type="body"/>
+            <p:ph type="body" idx="1"/>
           </p:nvPr>
         </p:nvSpPr>
         <p:spPr>
@@ -2174,122 +2476,20 @@
           </a:prstGeom>
         </p:spPr>
         <p:txBody>
-          <a:bodyPr anchorCtr="0" anchor="t" bIns="91425" lIns="91425" spcFirstLastPara="1" rIns="91425" wrap="square" tIns="91425">
+          <a:bodyPr spcFirstLastPara="1" wrap="square" lIns="91425" tIns="91425" rIns="91425" bIns="91425" anchor="t" anchorCtr="0">
             <a:noAutofit/>
           </a:bodyPr>
           <a:lstStyle/>
           <a:p>
-            <a:pPr indent="0" lvl="0" marL="0" rtl="0" algn="l">
-              <a:spcBef>
-                <a:spcPts val="0"/>
-              </a:spcBef>
-              <a:spcAft>
-                <a:spcPts val="0"/>
-              </a:spcAft>
-              <a:buNone/>
-            </a:pPr>
-            <a:r>
-              <a:t/>
-            </a:r>
-            <a:endParaRPr/>
-          </a:p>
-        </p:txBody>
-      </p:sp>
-    </p:spTree>
-  </p:cSld>
-  <p:clrMapOvr>
-    <a:masterClrMapping/>
-  </p:clrMapOvr>
-</p:notes>
-</file>
-
-<file path=ppt/notesSlides/notesSlide9.xml><?xml version="1.0" encoding="utf-8"?>
-<p:notes xmlns:a="http://schemas.openxmlformats.org/drawingml/2006/main" xmlns:r="http://schemas.openxmlformats.org/officeDocument/2006/relationships" xmlns:mc="http://schemas.openxmlformats.org/markup-compatibility/2006" xmlns:mv="urn:schemas-microsoft-com:mac:vml" xmlns:p="http://schemas.openxmlformats.org/presentationml/2006/main" xmlns:c="http://schemas.openxmlformats.org/drawingml/2006/chart" xmlns:dgm="http://schemas.openxmlformats.org/drawingml/2006/diagram" xmlns:o="urn:schemas-microsoft-com:office:office" xmlns:v="urn:schemas-microsoft-com:vml" xmlns:pvml="urn:schemas-microsoft-com:office:powerpoint" xmlns:com="http://schemas.openxmlformats.org/drawingml/2006/compatibility" xmlns:p14="http://schemas.microsoft.com/office/powerpoint/2010/main" xmlns:p15="http://schemas.microsoft.com/office/powerpoint/2012/main" xmlns:ahyp="http://schemas.microsoft.com/office/drawing/2018/hyperlinkcolor" showMasterPhAnim="0" showMasterSp="0">
-  <p:cSld>
-    <p:spTree>
-      <p:nvGrpSpPr>
-        <p:cNvPr id="112" name="Shape 112"/>
-        <p:cNvGrpSpPr/>
-        <p:nvPr/>
-      </p:nvGrpSpPr>
-      <p:grpSpPr>
-        <a:xfrm>
-          <a:off x="0" y="0"/>
-          <a:ext cx="0" cy="0"/>
-          <a:chOff x="0" y="0"/>
-          <a:chExt cx="0" cy="0"/>
-        </a:xfrm>
-      </p:grpSpPr>
-      <p:sp>
-        <p:nvSpPr>
-          <p:cNvPr id="113" name="Google Shape;113;g3fb085bff3c_0_36:notes"/>
-          <p:cNvSpPr/>
-          <p:nvPr>
-            <p:ph idx="2" type="sldImg"/>
-          </p:nvPr>
-        </p:nvSpPr>
-        <p:spPr>
-          <a:xfrm>
-            <a:off x="381300" y="685800"/>
-            <a:ext cx="6096000" cy="3429000"/>
-          </a:xfrm>
-          <a:custGeom>
-            <a:rect b="b" l="l" r="r" t="t"/>
-            <a:pathLst>
-              <a:path extrusionOk="0" h="120000" w="120000">
-                <a:moveTo>
-                  <a:pt x="0" y="0"/>
-                </a:moveTo>
-                <a:lnTo>
-                  <a:pt x="120000" y="0"/>
-                </a:lnTo>
-                <a:lnTo>
-                  <a:pt x="120000" y="120000"/>
-                </a:lnTo>
-                <a:lnTo>
-                  <a:pt x="0" y="120000"/>
-                </a:lnTo>
-                <a:close/>
-              </a:path>
-            </a:pathLst>
-          </a:custGeom>
-        </p:spPr>
-      </p:sp>
-      <p:sp>
-        <p:nvSpPr>
-          <p:cNvPr id="114" name="Google Shape;114;g3fb085bff3c_0_36:notes"/>
-          <p:cNvSpPr txBox="1"/>
-          <p:nvPr>
-            <p:ph idx="1" type="body"/>
-          </p:nvPr>
-        </p:nvSpPr>
-        <p:spPr>
-          <a:xfrm>
-            <a:off x="685800" y="4343400"/>
-            <a:ext cx="5486400" cy="4114800"/>
-          </a:xfrm>
-          <a:prstGeom prst="rect">
-            <a:avLst/>
-          </a:prstGeom>
-        </p:spPr>
-        <p:txBody>
-          <a:bodyPr anchorCtr="0" anchor="t" bIns="91425" lIns="91425" spcFirstLastPara="1" rIns="91425" wrap="square" tIns="91425">
-            <a:noAutofit/>
-          </a:bodyPr>
-          <a:lstStyle/>
-          <a:p>
-            <a:pPr indent="0" lvl="0" marL="0" rtl="0" algn="l">
-              <a:spcBef>
-                <a:spcPts val="0"/>
-              </a:spcBef>
-              <a:spcAft>
-                <a:spcPts val="0"/>
-              </a:spcAft>
-              <a:buNone/>
-            </a:pPr>
-            <a:r>
-              <a:t/>
-            </a:r>
+            <a:pPr marL="0" lvl="0" indent="0" algn="l" rtl="0">
+              <a:spcBef>
+                <a:spcPts val="0"/>
+              </a:spcBef>
+              <a:spcAft>
+                <a:spcPts val="0"/>
+              </a:spcAft>
+              <a:buNone/>
+            </a:pPr>
             <a:endParaRPr/>
           </a:p>
         </p:txBody>
@@ -2303,11 +2503,11 @@
 </file>
 
 <file path=ppt/slideLayouts/slideLayout1.xml><?xml version="1.0" encoding="utf-8"?>
-<p:sldLayout xmlns:a="http://schemas.openxmlformats.org/drawingml/2006/main" xmlns:r="http://schemas.openxmlformats.org/officeDocument/2006/relationships" xmlns:mc="http://schemas.openxmlformats.org/markup-compatibility/2006" xmlns:mv="urn:schemas-microsoft-com:mac:vml" xmlns:p="http://schemas.openxmlformats.org/presentationml/2006/main" xmlns:c="http://schemas.openxmlformats.org/drawingml/2006/chart" xmlns:dgm="http://schemas.openxmlformats.org/drawingml/2006/diagram" xmlns:o="urn:schemas-microsoft-com:office:office" xmlns:v="urn:schemas-microsoft-com:vml" xmlns:pvml="urn:schemas-microsoft-com:office:powerpoint" xmlns:com="http://schemas.openxmlformats.org/drawingml/2006/compatibility" xmlns:p14="http://schemas.microsoft.com/office/powerpoint/2010/main" xmlns:p15="http://schemas.microsoft.com/office/powerpoint/2012/main" xmlns:ahyp="http://schemas.microsoft.com/office/drawing/2018/hyperlinkcolor" matchingName="Title slide" type="title">
+<p:sldLayout xmlns:a="http://schemas.openxmlformats.org/drawingml/2006/main" xmlns:r="http://schemas.openxmlformats.org/officeDocument/2006/relationships" xmlns:p="http://schemas.openxmlformats.org/presentationml/2006/main" matchingName="Title slide" type="title">
   <p:cSld name="TITLE">
     <p:spTree>
       <p:nvGrpSpPr>
-        <p:cNvPr id="9" name="Shape 9"/>
+        <p:cNvPr id="1" name="Shape 9"/>
         <p:cNvGrpSpPr/>
         <p:nvPr/>
       </p:nvGrpSpPr>
@@ -2322,7 +2522,9 @@
       <p:sp>
         <p:nvSpPr>
           <p:cNvPr id="10" name="Google Shape;10;p2"/>
-          <p:cNvSpPr txBox="1"/>
+          <p:cNvSpPr txBox="1">
+            <a:spLocks noGrp="1"/>
+          </p:cNvSpPr>
           <p:nvPr>
             <p:ph type="ctrTitle"/>
           </p:nvPr>
@@ -2337,7 +2539,7 @@
           </a:prstGeom>
         </p:spPr>
         <p:txBody>
-          <a:bodyPr anchorCtr="0" anchor="b" bIns="91425" lIns="91425" spcFirstLastPara="1" rIns="91425" wrap="square" tIns="91425">
+          <a:bodyPr spcFirstLastPara="1" wrap="square" lIns="91425" tIns="91425" rIns="91425" bIns="91425" anchor="b" anchorCtr="0">
             <a:normAutofit/>
           </a:bodyPr>
           <a:lstStyle>
@@ -2441,15 +2643,19 @@
               <a:defRPr sz="5200"/>
             </a:lvl9pPr>
           </a:lstStyle>
-          <a:p/>
+          <a:p>
+            <a:endParaRPr/>
+          </a:p>
         </p:txBody>
       </p:sp>
       <p:sp>
         <p:nvSpPr>
           <p:cNvPr id="11" name="Google Shape;11;p2"/>
-          <p:cNvSpPr txBox="1"/>
+          <p:cNvSpPr txBox="1">
+            <a:spLocks noGrp="1"/>
+          </p:cNvSpPr>
           <p:nvPr>
-            <p:ph idx="1" type="subTitle"/>
+            <p:ph type="subTitle" idx="1"/>
           </p:nvPr>
         </p:nvSpPr>
         <p:spPr>
@@ -2462,7 +2668,7 @@
           </a:prstGeom>
         </p:spPr>
         <p:txBody>
-          <a:bodyPr anchorCtr="0" anchor="t" bIns="91425" lIns="91425" spcFirstLastPara="1" rIns="91425" wrap="square" tIns="91425">
+          <a:bodyPr spcFirstLastPara="1" wrap="square" lIns="91425" tIns="91425" rIns="91425" bIns="91425" anchor="t" anchorCtr="0">
             <a:normAutofit/>
           </a:bodyPr>
           <a:lstStyle>
@@ -2593,15 +2799,19 @@
               <a:defRPr sz="2800"/>
             </a:lvl9pPr>
           </a:lstStyle>
-          <a:p/>
+          <a:p>
+            <a:endParaRPr/>
+          </a:p>
         </p:txBody>
       </p:sp>
       <p:sp>
         <p:nvSpPr>
           <p:cNvPr id="12" name="Google Shape;12;p2"/>
-          <p:cNvSpPr txBox="1"/>
+          <p:cNvSpPr txBox="1">
+            <a:spLocks noGrp="1"/>
+          </p:cNvSpPr>
           <p:nvPr>
-            <p:ph idx="12" type="sldNum"/>
+            <p:ph type="sldNum" idx="12"/>
           </p:nvPr>
         </p:nvSpPr>
         <p:spPr>
@@ -2614,7 +2824,7 @@
           </a:prstGeom>
         </p:spPr>
         <p:txBody>
-          <a:bodyPr anchorCtr="0" anchor="ctr" bIns="91425" lIns="91425" spcFirstLastPara="1" rIns="91425" wrap="square" tIns="91425">
+          <a:bodyPr spcFirstLastPara="1" wrap="square" lIns="91425" tIns="91425" rIns="91425" bIns="91425" anchor="ctr" anchorCtr="0">
             <a:normAutofit/>
           </a:bodyPr>
           <a:lstStyle>
@@ -2656,7 +2866,7 @@
             </a:lvl9pPr>
           </a:lstStyle>
           <a:p>
-            <a:pPr indent="0" lvl="0" marL="0" rtl="0" algn="r">
+            <a:pPr marL="0" lvl="0" indent="0" algn="r" rtl="0">
               <a:spcBef>
                 <a:spcPts val="0"/>
               </a:spcBef>
@@ -2682,11 +2892,11 @@
 </file>
 
 <file path=ppt/slideLayouts/slideLayout10.xml><?xml version="1.0" encoding="utf-8"?>
-<p:sldLayout xmlns:a="http://schemas.openxmlformats.org/drawingml/2006/main" xmlns:r="http://schemas.openxmlformats.org/officeDocument/2006/relationships" xmlns:mc="http://schemas.openxmlformats.org/markup-compatibility/2006" xmlns:mv="urn:schemas-microsoft-com:mac:vml" xmlns:p="http://schemas.openxmlformats.org/presentationml/2006/main" xmlns:c="http://schemas.openxmlformats.org/drawingml/2006/chart" xmlns:dgm="http://schemas.openxmlformats.org/drawingml/2006/diagram" xmlns:o="urn:schemas-microsoft-com:office:office" xmlns:v="urn:schemas-microsoft-com:vml" xmlns:pvml="urn:schemas-microsoft-com:office:powerpoint" xmlns:com="http://schemas.openxmlformats.org/drawingml/2006/compatibility" xmlns:p14="http://schemas.microsoft.com/office/powerpoint/2010/main" xmlns:p15="http://schemas.microsoft.com/office/powerpoint/2012/main" xmlns:ahyp="http://schemas.microsoft.com/office/drawing/2018/hyperlinkcolor" matchingName="Big number">
+<p:sldLayout xmlns:a="http://schemas.openxmlformats.org/drawingml/2006/main" xmlns:r="http://schemas.openxmlformats.org/officeDocument/2006/relationships" xmlns:p="http://schemas.openxmlformats.org/presentationml/2006/main" matchingName="Big number">
   <p:cSld name="BIG_NUMBER">
     <p:spTree>
       <p:nvGrpSpPr>
-        <p:cNvPr id="44" name="Shape 44"/>
+        <p:cNvPr id="1" name="Shape 44"/>
         <p:cNvGrpSpPr/>
         <p:nvPr/>
       </p:nvGrpSpPr>
@@ -2701,9 +2911,11 @@
       <p:sp>
         <p:nvSpPr>
           <p:cNvPr id="45" name="Google Shape;45;p11"/>
-          <p:cNvSpPr txBox="1"/>
+          <p:cNvSpPr txBox="1">
+            <a:spLocks noGrp="1"/>
+          </p:cNvSpPr>
           <p:nvPr>
-            <p:ph hasCustomPrompt="1" type="title"/>
+            <p:ph type="title" hasCustomPrompt="1"/>
           </p:nvPr>
         </p:nvSpPr>
         <p:spPr>
@@ -2716,7 +2928,7 @@
           </a:prstGeom>
         </p:spPr>
         <p:txBody>
-          <a:bodyPr anchorCtr="0" anchor="b" bIns="91425" lIns="91425" spcFirstLastPara="1" rIns="91425" wrap="square" tIns="91425">
+          <a:bodyPr spcFirstLastPara="1" wrap="square" lIns="91425" tIns="91425" rIns="91425" bIns="91425" anchor="b" anchorCtr="0">
             <a:normAutofit/>
           </a:bodyPr>
           <a:lstStyle>
@@ -2830,9 +3042,11 @@
       <p:sp>
         <p:nvSpPr>
           <p:cNvPr id="46" name="Google Shape;46;p11"/>
-          <p:cNvSpPr txBox="1"/>
+          <p:cNvSpPr txBox="1">
+            <a:spLocks noGrp="1"/>
+          </p:cNvSpPr>
           <p:nvPr>
-            <p:ph idx="1" type="body"/>
+            <p:ph type="body" idx="1"/>
           </p:nvPr>
         </p:nvSpPr>
         <p:spPr>
@@ -2845,11 +3059,11 @@
           </a:prstGeom>
         </p:spPr>
         <p:txBody>
-          <a:bodyPr anchorCtr="0" anchor="t" bIns="91425" lIns="91425" spcFirstLastPara="1" rIns="91425" wrap="square" tIns="91425">
+          <a:bodyPr spcFirstLastPara="1" wrap="square" lIns="91425" tIns="91425" rIns="91425" bIns="91425" anchor="t" anchorCtr="0">
             <a:normAutofit/>
           </a:bodyPr>
           <a:lstStyle>
-            <a:lvl1pPr indent="-342900" lvl="0" marL="457200" algn="ctr">
+            <a:lvl1pPr marL="457200" lvl="0" indent="-342900" algn="ctr">
               <a:spcBef>
                 <a:spcPts val="0"/>
               </a:spcBef>
@@ -2860,7 +3074,7 @@
               <a:buChar char="●"/>
               <a:defRPr/>
             </a:lvl1pPr>
-            <a:lvl2pPr indent="-317500" lvl="1" marL="914400" algn="ctr">
+            <a:lvl2pPr marL="914400" lvl="1" indent="-317500" algn="ctr">
               <a:spcBef>
                 <a:spcPts val="0"/>
               </a:spcBef>
@@ -2871,7 +3085,7 @@
               <a:buChar char="○"/>
               <a:defRPr/>
             </a:lvl2pPr>
-            <a:lvl3pPr indent="-317500" lvl="2" marL="1371600" algn="ctr">
+            <a:lvl3pPr marL="1371600" lvl="2" indent="-317500" algn="ctr">
               <a:spcBef>
                 <a:spcPts val="0"/>
               </a:spcBef>
@@ -2882,7 +3096,7 @@
               <a:buChar char="■"/>
               <a:defRPr/>
             </a:lvl3pPr>
-            <a:lvl4pPr indent="-317500" lvl="3" marL="1828800" algn="ctr">
+            <a:lvl4pPr marL="1828800" lvl="3" indent="-317500" algn="ctr">
               <a:spcBef>
                 <a:spcPts val="0"/>
               </a:spcBef>
@@ -2893,7 +3107,7 @@
               <a:buChar char="●"/>
               <a:defRPr/>
             </a:lvl4pPr>
-            <a:lvl5pPr indent="-317500" lvl="4" marL="2286000" algn="ctr">
+            <a:lvl5pPr marL="2286000" lvl="4" indent="-317500" algn="ctr">
               <a:spcBef>
                 <a:spcPts val="0"/>
               </a:spcBef>
@@ -2904,7 +3118,7 @@
               <a:buChar char="○"/>
               <a:defRPr/>
             </a:lvl5pPr>
-            <a:lvl6pPr indent="-317500" lvl="5" marL="2743200" algn="ctr">
+            <a:lvl6pPr marL="2743200" lvl="5" indent="-317500" algn="ctr">
               <a:spcBef>
                 <a:spcPts val="0"/>
               </a:spcBef>
@@ -2915,7 +3129,7 @@
               <a:buChar char="■"/>
               <a:defRPr/>
             </a:lvl6pPr>
-            <a:lvl7pPr indent="-317500" lvl="6" marL="3200400" algn="ctr">
+            <a:lvl7pPr marL="3200400" lvl="6" indent="-317500" algn="ctr">
               <a:spcBef>
                 <a:spcPts val="0"/>
               </a:spcBef>
@@ -2926,7 +3140,7 @@
               <a:buChar char="●"/>
               <a:defRPr/>
             </a:lvl7pPr>
-            <a:lvl8pPr indent="-317500" lvl="7" marL="3657600" algn="ctr">
+            <a:lvl8pPr marL="3657600" lvl="7" indent="-317500" algn="ctr">
               <a:spcBef>
                 <a:spcPts val="0"/>
               </a:spcBef>
@@ -2937,7 +3151,7 @@
               <a:buChar char="○"/>
               <a:defRPr/>
             </a:lvl8pPr>
-            <a:lvl9pPr indent="-317500" lvl="8" marL="4114800" algn="ctr">
+            <a:lvl9pPr marL="4114800" lvl="8" indent="-317500" algn="ctr">
               <a:spcBef>
                 <a:spcPts val="0"/>
               </a:spcBef>
@@ -2949,15 +3163,19 @@
               <a:defRPr/>
             </a:lvl9pPr>
           </a:lstStyle>
-          <a:p/>
+          <a:p>
+            <a:endParaRPr/>
+          </a:p>
         </p:txBody>
       </p:sp>
       <p:sp>
         <p:nvSpPr>
           <p:cNvPr id="47" name="Google Shape;47;p11"/>
-          <p:cNvSpPr txBox="1"/>
+          <p:cNvSpPr txBox="1">
+            <a:spLocks noGrp="1"/>
+          </p:cNvSpPr>
           <p:nvPr>
-            <p:ph idx="12" type="sldNum"/>
+            <p:ph type="sldNum" idx="12"/>
           </p:nvPr>
         </p:nvSpPr>
         <p:spPr>
@@ -2970,7 +3188,7 @@
           </a:prstGeom>
         </p:spPr>
         <p:txBody>
-          <a:bodyPr anchorCtr="0" anchor="ctr" bIns="91425" lIns="91425" spcFirstLastPara="1" rIns="91425" wrap="square" tIns="91425">
+          <a:bodyPr spcFirstLastPara="1" wrap="square" lIns="91425" tIns="91425" rIns="91425" bIns="91425" anchor="ctr" anchorCtr="0">
             <a:normAutofit/>
           </a:bodyPr>
           <a:lstStyle>
@@ -3012,7 +3230,7 @@
             </a:lvl9pPr>
           </a:lstStyle>
           <a:p>
-            <a:pPr indent="0" lvl="0" marL="0" rtl="0" algn="r">
+            <a:pPr marL="0" lvl="0" indent="0" algn="r" rtl="0">
               <a:spcBef>
                 <a:spcPts val="0"/>
               </a:spcBef>
@@ -3038,11 +3256,11 @@
 </file>
 
 <file path=ppt/slideLayouts/slideLayout11.xml><?xml version="1.0" encoding="utf-8"?>
-<p:sldLayout xmlns:a="http://schemas.openxmlformats.org/drawingml/2006/main" xmlns:r="http://schemas.openxmlformats.org/officeDocument/2006/relationships" xmlns:mc="http://schemas.openxmlformats.org/markup-compatibility/2006" xmlns:mv="urn:schemas-microsoft-com:mac:vml" xmlns:p="http://schemas.openxmlformats.org/presentationml/2006/main" xmlns:c="http://schemas.openxmlformats.org/drawingml/2006/chart" xmlns:dgm="http://schemas.openxmlformats.org/drawingml/2006/diagram" xmlns:o="urn:schemas-microsoft-com:office:office" xmlns:v="urn:schemas-microsoft-com:vml" xmlns:pvml="urn:schemas-microsoft-com:office:powerpoint" xmlns:com="http://schemas.openxmlformats.org/drawingml/2006/compatibility" xmlns:p14="http://schemas.microsoft.com/office/powerpoint/2010/main" xmlns:p15="http://schemas.microsoft.com/office/powerpoint/2012/main" xmlns:ahyp="http://schemas.microsoft.com/office/drawing/2018/hyperlinkcolor" matchingName="Blank" type="blank">
+<p:sldLayout xmlns:a="http://schemas.openxmlformats.org/drawingml/2006/main" xmlns:r="http://schemas.openxmlformats.org/officeDocument/2006/relationships" xmlns:p="http://schemas.openxmlformats.org/presentationml/2006/main" matchingName="Blank" type="blank">
   <p:cSld name="BLANK">
     <p:spTree>
       <p:nvGrpSpPr>
-        <p:cNvPr id="48" name="Shape 48"/>
+        <p:cNvPr id="1" name="Shape 48"/>
         <p:cNvGrpSpPr/>
         <p:nvPr/>
       </p:nvGrpSpPr>
@@ -3057,9 +3275,11 @@
       <p:sp>
         <p:nvSpPr>
           <p:cNvPr id="49" name="Google Shape;49;p12"/>
-          <p:cNvSpPr txBox="1"/>
+          <p:cNvSpPr txBox="1">
+            <a:spLocks noGrp="1"/>
+          </p:cNvSpPr>
           <p:nvPr>
-            <p:ph idx="12" type="sldNum"/>
+            <p:ph type="sldNum" idx="12"/>
           </p:nvPr>
         </p:nvSpPr>
         <p:spPr>
@@ -3072,7 +3292,7 @@
           </a:prstGeom>
         </p:spPr>
         <p:txBody>
-          <a:bodyPr anchorCtr="0" anchor="ctr" bIns="91425" lIns="91425" spcFirstLastPara="1" rIns="91425" wrap="square" tIns="91425">
+          <a:bodyPr spcFirstLastPara="1" wrap="square" lIns="91425" tIns="91425" rIns="91425" bIns="91425" anchor="ctr" anchorCtr="0">
             <a:normAutofit/>
           </a:bodyPr>
           <a:lstStyle>
@@ -3114,7 +3334,7 @@
             </a:lvl9pPr>
           </a:lstStyle>
           <a:p>
-            <a:pPr indent="0" lvl="0" marL="0" rtl="0" algn="r">
+            <a:pPr marL="0" lvl="0" indent="0" algn="r" rtl="0">
               <a:spcBef>
                 <a:spcPts val="0"/>
               </a:spcBef>
@@ -3140,11 +3360,11 @@
 </file>
 
 <file path=ppt/slideLayouts/slideLayout2.xml><?xml version="1.0" encoding="utf-8"?>
-<p:sldLayout xmlns:a="http://schemas.openxmlformats.org/drawingml/2006/main" xmlns:r="http://schemas.openxmlformats.org/officeDocument/2006/relationships" xmlns:mc="http://schemas.openxmlformats.org/markup-compatibility/2006" xmlns:mv="urn:schemas-microsoft-com:mac:vml" xmlns:p="http://schemas.openxmlformats.org/presentationml/2006/main" xmlns:c="http://schemas.openxmlformats.org/drawingml/2006/chart" xmlns:dgm="http://schemas.openxmlformats.org/drawingml/2006/diagram" xmlns:o="urn:schemas-microsoft-com:office:office" xmlns:v="urn:schemas-microsoft-com:vml" xmlns:pvml="urn:schemas-microsoft-com:office:powerpoint" xmlns:com="http://schemas.openxmlformats.org/drawingml/2006/compatibility" xmlns:p14="http://schemas.microsoft.com/office/powerpoint/2010/main" xmlns:p15="http://schemas.microsoft.com/office/powerpoint/2012/main" xmlns:ahyp="http://schemas.microsoft.com/office/drawing/2018/hyperlinkcolor" matchingName="Section header" type="secHead">
+<p:sldLayout xmlns:a="http://schemas.openxmlformats.org/drawingml/2006/main" xmlns:r="http://schemas.openxmlformats.org/officeDocument/2006/relationships" xmlns:p="http://schemas.openxmlformats.org/presentationml/2006/main" matchingName="Section header" type="secHead">
   <p:cSld name="SECTION_HEADER">
     <p:spTree>
       <p:nvGrpSpPr>
-        <p:cNvPr id="13" name="Shape 13"/>
+        <p:cNvPr id="1" name="Shape 13"/>
         <p:cNvGrpSpPr/>
         <p:nvPr/>
       </p:nvGrpSpPr>
@@ -3159,7 +3379,9 @@
       <p:sp>
         <p:nvSpPr>
           <p:cNvPr id="14" name="Google Shape;14;p3"/>
-          <p:cNvSpPr txBox="1"/>
+          <p:cNvSpPr txBox="1">
+            <a:spLocks noGrp="1"/>
+          </p:cNvSpPr>
           <p:nvPr>
             <p:ph type="title"/>
           </p:nvPr>
@@ -3174,7 +3396,7 @@
           </a:prstGeom>
         </p:spPr>
         <p:txBody>
-          <a:bodyPr anchorCtr="0" anchor="ctr" bIns="91425" lIns="91425" spcFirstLastPara="1" rIns="91425" wrap="square" tIns="91425">
+          <a:bodyPr spcFirstLastPara="1" wrap="square" lIns="91425" tIns="91425" rIns="91425" bIns="91425" anchor="ctr" anchorCtr="0">
             <a:normAutofit/>
           </a:bodyPr>
           <a:lstStyle>
@@ -3278,15 +3500,19 @@
               <a:defRPr sz="3600"/>
             </a:lvl9pPr>
           </a:lstStyle>
-          <a:p/>
+          <a:p>
+            <a:endParaRPr/>
+          </a:p>
         </p:txBody>
       </p:sp>
       <p:sp>
         <p:nvSpPr>
           <p:cNvPr id="15" name="Google Shape;15;p3"/>
-          <p:cNvSpPr txBox="1"/>
+          <p:cNvSpPr txBox="1">
+            <a:spLocks noGrp="1"/>
+          </p:cNvSpPr>
           <p:nvPr>
-            <p:ph idx="12" type="sldNum"/>
+            <p:ph type="sldNum" idx="12"/>
           </p:nvPr>
         </p:nvSpPr>
         <p:spPr>
@@ -3299,7 +3525,7 @@
           </a:prstGeom>
         </p:spPr>
         <p:txBody>
-          <a:bodyPr anchorCtr="0" anchor="ctr" bIns="91425" lIns="91425" spcFirstLastPara="1" rIns="91425" wrap="square" tIns="91425">
+          <a:bodyPr spcFirstLastPara="1" wrap="square" lIns="91425" tIns="91425" rIns="91425" bIns="91425" anchor="ctr" anchorCtr="0">
             <a:normAutofit/>
           </a:bodyPr>
           <a:lstStyle>
@@ -3341,7 +3567,7 @@
             </a:lvl9pPr>
           </a:lstStyle>
           <a:p>
-            <a:pPr indent="0" lvl="0" marL="0" rtl="0" algn="r">
+            <a:pPr marL="0" lvl="0" indent="0" algn="r" rtl="0">
               <a:spcBef>
                 <a:spcPts val="0"/>
               </a:spcBef>
@@ -3367,11 +3593,11 @@
 </file>
 
 <file path=ppt/slideLayouts/slideLayout3.xml><?xml version="1.0" encoding="utf-8"?>
-<p:sldLayout xmlns:a="http://schemas.openxmlformats.org/drawingml/2006/main" xmlns:r="http://schemas.openxmlformats.org/officeDocument/2006/relationships" xmlns:mc="http://schemas.openxmlformats.org/markup-compatibility/2006" xmlns:mv="urn:schemas-microsoft-com:mac:vml" xmlns:p="http://schemas.openxmlformats.org/presentationml/2006/main" xmlns:c="http://schemas.openxmlformats.org/drawingml/2006/chart" xmlns:dgm="http://schemas.openxmlformats.org/drawingml/2006/diagram" xmlns:o="urn:schemas-microsoft-com:office:office" xmlns:v="urn:schemas-microsoft-com:vml" xmlns:pvml="urn:schemas-microsoft-com:office:powerpoint" xmlns:com="http://schemas.openxmlformats.org/drawingml/2006/compatibility" xmlns:p14="http://schemas.microsoft.com/office/powerpoint/2010/main" xmlns:p15="http://schemas.microsoft.com/office/powerpoint/2012/main" xmlns:ahyp="http://schemas.microsoft.com/office/drawing/2018/hyperlinkcolor" matchingName="Title and body" type="tx">
+<p:sldLayout xmlns:a="http://schemas.openxmlformats.org/drawingml/2006/main" xmlns:r="http://schemas.openxmlformats.org/officeDocument/2006/relationships" xmlns:p="http://schemas.openxmlformats.org/presentationml/2006/main" matchingName="Title and body" type="tx">
   <p:cSld name="TITLE_AND_BODY">
     <p:spTree>
       <p:nvGrpSpPr>
-        <p:cNvPr id="16" name="Shape 16"/>
+        <p:cNvPr id="1" name="Shape 16"/>
         <p:cNvGrpSpPr/>
         <p:nvPr/>
       </p:nvGrpSpPr>
@@ -3386,7 +3612,9 @@
       <p:sp>
         <p:nvSpPr>
           <p:cNvPr id="17" name="Google Shape;17;p4"/>
-          <p:cNvSpPr txBox="1"/>
+          <p:cNvSpPr txBox="1">
+            <a:spLocks noGrp="1"/>
+          </p:cNvSpPr>
           <p:nvPr>
             <p:ph type="title"/>
           </p:nvPr>
@@ -3401,7 +3629,7 @@
           </a:prstGeom>
         </p:spPr>
         <p:txBody>
-          <a:bodyPr anchorCtr="0" anchor="t" bIns="91425" lIns="91425" spcFirstLastPara="1" rIns="91425" wrap="square" tIns="91425">
+          <a:bodyPr spcFirstLastPara="1" wrap="square" lIns="91425" tIns="91425" rIns="91425" bIns="91425" anchor="t" anchorCtr="0">
             <a:normAutofit/>
           </a:bodyPr>
           <a:lstStyle>
@@ -3505,15 +3733,19 @@
               <a:defRPr/>
             </a:lvl9pPr>
           </a:lstStyle>
-          <a:p/>
+          <a:p>
+            <a:endParaRPr/>
+          </a:p>
         </p:txBody>
       </p:sp>
       <p:sp>
         <p:nvSpPr>
           <p:cNvPr id="18" name="Google Shape;18;p4"/>
-          <p:cNvSpPr txBox="1"/>
+          <p:cNvSpPr txBox="1">
+            <a:spLocks noGrp="1"/>
+          </p:cNvSpPr>
           <p:nvPr>
-            <p:ph idx="1" type="body"/>
+            <p:ph type="body" idx="1"/>
           </p:nvPr>
         </p:nvSpPr>
         <p:spPr>
@@ -3526,11 +3758,11 @@
           </a:prstGeom>
         </p:spPr>
         <p:txBody>
-          <a:bodyPr anchorCtr="0" anchor="t" bIns="91425" lIns="91425" spcFirstLastPara="1" rIns="91425" wrap="square" tIns="91425">
+          <a:bodyPr spcFirstLastPara="1" wrap="square" lIns="91425" tIns="91425" rIns="91425" bIns="91425" anchor="t" anchorCtr="0">
             <a:normAutofit/>
           </a:bodyPr>
           <a:lstStyle>
-            <a:lvl1pPr indent="-342900" lvl="0" marL="457200">
+            <a:lvl1pPr marL="457200" lvl="0" indent="-342900">
               <a:spcBef>
                 <a:spcPts val="0"/>
               </a:spcBef>
@@ -3541,7 +3773,7 @@
               <a:buChar char="●"/>
               <a:defRPr/>
             </a:lvl1pPr>
-            <a:lvl2pPr indent="-317500" lvl="1" marL="914400">
+            <a:lvl2pPr marL="914400" lvl="1" indent="-317500">
               <a:spcBef>
                 <a:spcPts val="0"/>
               </a:spcBef>
@@ -3552,7 +3784,7 @@
               <a:buChar char="○"/>
               <a:defRPr/>
             </a:lvl2pPr>
-            <a:lvl3pPr indent="-317500" lvl="2" marL="1371600">
+            <a:lvl3pPr marL="1371600" lvl="2" indent="-317500">
               <a:spcBef>
                 <a:spcPts val="0"/>
               </a:spcBef>
@@ -3563,7 +3795,7 @@
               <a:buChar char="■"/>
               <a:defRPr/>
             </a:lvl3pPr>
-            <a:lvl4pPr indent="-317500" lvl="3" marL="1828800">
+            <a:lvl4pPr marL="1828800" lvl="3" indent="-317500">
               <a:spcBef>
                 <a:spcPts val="0"/>
               </a:spcBef>
@@ -3574,7 +3806,7 @@
               <a:buChar char="●"/>
               <a:defRPr/>
             </a:lvl4pPr>
-            <a:lvl5pPr indent="-317500" lvl="4" marL="2286000">
+            <a:lvl5pPr marL="2286000" lvl="4" indent="-317500">
               <a:spcBef>
                 <a:spcPts val="0"/>
               </a:spcBef>
@@ -3585,7 +3817,7 @@
               <a:buChar char="○"/>
               <a:defRPr/>
             </a:lvl5pPr>
-            <a:lvl6pPr indent="-317500" lvl="5" marL="2743200">
+            <a:lvl6pPr marL="2743200" lvl="5" indent="-317500">
               <a:spcBef>
                 <a:spcPts val="0"/>
               </a:spcBef>
@@ -3596,7 +3828,7 @@
               <a:buChar char="■"/>
               <a:defRPr/>
             </a:lvl6pPr>
-            <a:lvl7pPr indent="-317500" lvl="6" marL="3200400">
+            <a:lvl7pPr marL="3200400" lvl="6" indent="-317500">
               <a:spcBef>
                 <a:spcPts val="0"/>
               </a:spcBef>
@@ -3607,7 +3839,7 @@
               <a:buChar char="●"/>
               <a:defRPr/>
             </a:lvl7pPr>
-            <a:lvl8pPr indent="-317500" lvl="7" marL="3657600">
+            <a:lvl8pPr marL="3657600" lvl="7" indent="-317500">
               <a:spcBef>
                 <a:spcPts val="0"/>
               </a:spcBef>
@@ -3618,7 +3850,7 @@
               <a:buChar char="○"/>
               <a:defRPr/>
             </a:lvl8pPr>
-            <a:lvl9pPr indent="-317500" lvl="8" marL="4114800">
+            <a:lvl9pPr marL="4114800" lvl="8" indent="-317500">
               <a:spcBef>
                 <a:spcPts val="0"/>
               </a:spcBef>
@@ -3630,15 +3862,19 @@
               <a:defRPr/>
             </a:lvl9pPr>
           </a:lstStyle>
-          <a:p/>
+          <a:p>
+            <a:endParaRPr/>
+          </a:p>
         </p:txBody>
       </p:sp>
       <p:sp>
         <p:nvSpPr>
           <p:cNvPr id="19" name="Google Shape;19;p4"/>
-          <p:cNvSpPr txBox="1"/>
+          <p:cNvSpPr txBox="1">
+            <a:spLocks noGrp="1"/>
+          </p:cNvSpPr>
           <p:nvPr>
-            <p:ph idx="12" type="sldNum"/>
+            <p:ph type="sldNum" idx="12"/>
           </p:nvPr>
         </p:nvSpPr>
         <p:spPr>
@@ -3651,7 +3887,7 @@
           </a:prstGeom>
         </p:spPr>
         <p:txBody>
-          <a:bodyPr anchorCtr="0" anchor="ctr" bIns="91425" lIns="91425" spcFirstLastPara="1" rIns="91425" wrap="square" tIns="91425">
+          <a:bodyPr spcFirstLastPara="1" wrap="square" lIns="91425" tIns="91425" rIns="91425" bIns="91425" anchor="ctr" anchorCtr="0">
             <a:normAutofit/>
           </a:bodyPr>
           <a:lstStyle>
@@ -3693,7 +3929,7 @@
             </a:lvl9pPr>
           </a:lstStyle>
           <a:p>
-            <a:pPr indent="0" lvl="0" marL="0" rtl="0" algn="r">
+            <a:pPr marL="0" lvl="0" indent="0" algn="r" rtl="0">
               <a:spcBef>
                 <a:spcPts val="0"/>
               </a:spcBef>
@@ -3719,11 +3955,11 @@
 </file>
 
 <file path=ppt/slideLayouts/slideLayout4.xml><?xml version="1.0" encoding="utf-8"?>
-<p:sldLayout xmlns:a="http://schemas.openxmlformats.org/drawingml/2006/main" xmlns:r="http://schemas.openxmlformats.org/officeDocument/2006/relationships" xmlns:mc="http://schemas.openxmlformats.org/markup-compatibility/2006" xmlns:mv="urn:schemas-microsoft-com:mac:vml" xmlns:p="http://schemas.openxmlformats.org/presentationml/2006/main" xmlns:c="http://schemas.openxmlformats.org/drawingml/2006/chart" xmlns:dgm="http://schemas.openxmlformats.org/drawingml/2006/diagram" xmlns:o="urn:schemas-microsoft-com:office:office" xmlns:v="urn:schemas-microsoft-com:vml" xmlns:pvml="urn:schemas-microsoft-com:office:powerpoint" xmlns:com="http://schemas.openxmlformats.org/drawingml/2006/compatibility" xmlns:p14="http://schemas.microsoft.com/office/powerpoint/2010/main" xmlns:p15="http://schemas.microsoft.com/office/powerpoint/2012/main" xmlns:ahyp="http://schemas.microsoft.com/office/drawing/2018/hyperlinkcolor" matchingName="Title and two columns" type="twoColTx">
+<p:sldLayout xmlns:a="http://schemas.openxmlformats.org/drawingml/2006/main" xmlns:r="http://schemas.openxmlformats.org/officeDocument/2006/relationships" xmlns:p="http://schemas.openxmlformats.org/presentationml/2006/main" matchingName="Title and two columns" type="twoColTx">
   <p:cSld name="TITLE_AND_TWO_COLUMNS">
     <p:spTree>
       <p:nvGrpSpPr>
-        <p:cNvPr id="20" name="Shape 20"/>
+        <p:cNvPr id="1" name="Shape 20"/>
         <p:cNvGrpSpPr/>
         <p:nvPr/>
       </p:nvGrpSpPr>
@@ -3738,7 +3974,9 @@
       <p:sp>
         <p:nvSpPr>
           <p:cNvPr id="21" name="Google Shape;21;p5"/>
-          <p:cNvSpPr txBox="1"/>
+          <p:cNvSpPr txBox="1">
+            <a:spLocks noGrp="1"/>
+          </p:cNvSpPr>
           <p:nvPr>
             <p:ph type="title"/>
           </p:nvPr>
@@ -3753,7 +3991,7 @@
           </a:prstGeom>
         </p:spPr>
         <p:txBody>
-          <a:bodyPr anchorCtr="0" anchor="t" bIns="91425" lIns="91425" spcFirstLastPara="1" rIns="91425" wrap="square" tIns="91425">
+          <a:bodyPr spcFirstLastPara="1" wrap="square" lIns="91425" tIns="91425" rIns="91425" bIns="91425" anchor="t" anchorCtr="0">
             <a:normAutofit/>
           </a:bodyPr>
           <a:lstStyle>
@@ -3857,15 +4095,19 @@
               <a:defRPr/>
             </a:lvl9pPr>
           </a:lstStyle>
-          <a:p/>
+          <a:p>
+            <a:endParaRPr/>
+          </a:p>
         </p:txBody>
       </p:sp>
       <p:sp>
         <p:nvSpPr>
           <p:cNvPr id="22" name="Google Shape;22;p5"/>
-          <p:cNvSpPr txBox="1"/>
+          <p:cNvSpPr txBox="1">
+            <a:spLocks noGrp="1"/>
+          </p:cNvSpPr>
           <p:nvPr>
-            <p:ph idx="1" type="body"/>
+            <p:ph type="body" idx="1"/>
           </p:nvPr>
         </p:nvSpPr>
         <p:spPr>
@@ -3878,11 +4120,11 @@
           </a:prstGeom>
         </p:spPr>
         <p:txBody>
-          <a:bodyPr anchorCtr="0" anchor="t" bIns="91425" lIns="91425" spcFirstLastPara="1" rIns="91425" wrap="square" tIns="91425">
+          <a:bodyPr spcFirstLastPara="1" wrap="square" lIns="91425" tIns="91425" rIns="91425" bIns="91425" anchor="t" anchorCtr="0">
             <a:normAutofit/>
           </a:bodyPr>
           <a:lstStyle>
-            <a:lvl1pPr indent="-317500" lvl="0" marL="457200">
+            <a:lvl1pPr marL="457200" lvl="0" indent="-317500">
               <a:spcBef>
                 <a:spcPts val="0"/>
               </a:spcBef>
@@ -3893,7 +4135,7 @@
               <a:buChar char="●"/>
               <a:defRPr sz="1400"/>
             </a:lvl1pPr>
-            <a:lvl2pPr indent="-304800" lvl="1" marL="914400">
+            <a:lvl2pPr marL="914400" lvl="1" indent="-304800">
               <a:spcBef>
                 <a:spcPts val="0"/>
               </a:spcBef>
@@ -3904,7 +4146,7 @@
               <a:buChar char="○"/>
               <a:defRPr sz="1200"/>
             </a:lvl2pPr>
-            <a:lvl3pPr indent="-304800" lvl="2" marL="1371600">
+            <a:lvl3pPr marL="1371600" lvl="2" indent="-304800">
               <a:spcBef>
                 <a:spcPts val="0"/>
               </a:spcBef>
@@ -3915,7 +4157,7 @@
               <a:buChar char="■"/>
               <a:defRPr sz="1200"/>
             </a:lvl3pPr>
-            <a:lvl4pPr indent="-304800" lvl="3" marL="1828800">
+            <a:lvl4pPr marL="1828800" lvl="3" indent="-304800">
               <a:spcBef>
                 <a:spcPts val="0"/>
               </a:spcBef>
@@ -3926,7 +4168,7 @@
               <a:buChar char="●"/>
               <a:defRPr sz="1200"/>
             </a:lvl4pPr>
-            <a:lvl5pPr indent="-304800" lvl="4" marL="2286000">
+            <a:lvl5pPr marL="2286000" lvl="4" indent="-304800">
               <a:spcBef>
                 <a:spcPts val="0"/>
               </a:spcBef>
@@ -3937,7 +4179,7 @@
               <a:buChar char="○"/>
               <a:defRPr sz="1200"/>
             </a:lvl5pPr>
-            <a:lvl6pPr indent="-304800" lvl="5" marL="2743200">
+            <a:lvl6pPr marL="2743200" lvl="5" indent="-304800">
               <a:spcBef>
                 <a:spcPts val="0"/>
               </a:spcBef>
@@ -3948,7 +4190,7 @@
               <a:buChar char="■"/>
               <a:defRPr sz="1200"/>
             </a:lvl6pPr>
-            <a:lvl7pPr indent="-304800" lvl="6" marL="3200400">
+            <a:lvl7pPr marL="3200400" lvl="6" indent="-304800">
               <a:spcBef>
                 <a:spcPts val="0"/>
               </a:spcBef>
@@ -3959,7 +4201,7 @@
               <a:buChar char="●"/>
               <a:defRPr sz="1200"/>
             </a:lvl7pPr>
-            <a:lvl8pPr indent="-304800" lvl="7" marL="3657600">
+            <a:lvl8pPr marL="3657600" lvl="7" indent="-304800">
               <a:spcBef>
                 <a:spcPts val="0"/>
               </a:spcBef>
@@ -3970,7 +4212,7 @@
               <a:buChar char="○"/>
               <a:defRPr sz="1200"/>
             </a:lvl8pPr>
-            <a:lvl9pPr indent="-304800" lvl="8" marL="4114800">
+            <a:lvl9pPr marL="4114800" lvl="8" indent="-304800">
               <a:spcBef>
                 <a:spcPts val="0"/>
               </a:spcBef>
@@ -3982,15 +4224,19 @@
               <a:defRPr sz="1200"/>
             </a:lvl9pPr>
           </a:lstStyle>
-          <a:p/>
+          <a:p>
+            <a:endParaRPr/>
+          </a:p>
         </p:txBody>
       </p:sp>
       <p:sp>
         <p:nvSpPr>
           <p:cNvPr id="23" name="Google Shape;23;p5"/>
-          <p:cNvSpPr txBox="1"/>
+          <p:cNvSpPr txBox="1">
+            <a:spLocks noGrp="1"/>
+          </p:cNvSpPr>
           <p:nvPr>
-            <p:ph idx="2" type="body"/>
+            <p:ph type="body" idx="2"/>
           </p:nvPr>
         </p:nvSpPr>
         <p:spPr>
@@ -4003,11 +4249,11 @@
           </a:prstGeom>
         </p:spPr>
         <p:txBody>
-          <a:bodyPr anchorCtr="0" anchor="t" bIns="91425" lIns="91425" spcFirstLastPara="1" rIns="91425" wrap="square" tIns="91425">
+          <a:bodyPr spcFirstLastPara="1" wrap="square" lIns="91425" tIns="91425" rIns="91425" bIns="91425" anchor="t" anchorCtr="0">
             <a:normAutofit/>
           </a:bodyPr>
           <a:lstStyle>
-            <a:lvl1pPr indent="-317500" lvl="0" marL="457200">
+            <a:lvl1pPr marL="457200" lvl="0" indent="-317500">
               <a:spcBef>
                 <a:spcPts val="0"/>
               </a:spcBef>
@@ -4018,7 +4264,7 @@
               <a:buChar char="●"/>
               <a:defRPr sz="1400"/>
             </a:lvl1pPr>
-            <a:lvl2pPr indent="-304800" lvl="1" marL="914400">
+            <a:lvl2pPr marL="914400" lvl="1" indent="-304800">
               <a:spcBef>
                 <a:spcPts val="0"/>
               </a:spcBef>
@@ -4029,7 +4275,7 @@
               <a:buChar char="○"/>
               <a:defRPr sz="1200"/>
             </a:lvl2pPr>
-            <a:lvl3pPr indent="-304800" lvl="2" marL="1371600">
+            <a:lvl3pPr marL="1371600" lvl="2" indent="-304800">
               <a:spcBef>
                 <a:spcPts val="0"/>
               </a:spcBef>
@@ -4040,7 +4286,7 @@
               <a:buChar char="■"/>
               <a:defRPr sz="1200"/>
             </a:lvl3pPr>
-            <a:lvl4pPr indent="-304800" lvl="3" marL="1828800">
+            <a:lvl4pPr marL="1828800" lvl="3" indent="-304800">
               <a:spcBef>
                 <a:spcPts val="0"/>
               </a:spcBef>
@@ -4051,7 +4297,7 @@
               <a:buChar char="●"/>
               <a:defRPr sz="1200"/>
             </a:lvl4pPr>
-            <a:lvl5pPr indent="-304800" lvl="4" marL="2286000">
+            <a:lvl5pPr marL="2286000" lvl="4" indent="-304800">
               <a:spcBef>
                 <a:spcPts val="0"/>
               </a:spcBef>
@@ -4062,7 +4308,7 @@
               <a:buChar char="○"/>
               <a:defRPr sz="1200"/>
             </a:lvl5pPr>
-            <a:lvl6pPr indent="-304800" lvl="5" marL="2743200">
+            <a:lvl6pPr marL="2743200" lvl="5" indent="-304800">
               <a:spcBef>
                 <a:spcPts val="0"/>
               </a:spcBef>
@@ -4073,7 +4319,7 @@
               <a:buChar char="■"/>
               <a:defRPr sz="1200"/>
             </a:lvl6pPr>
-            <a:lvl7pPr indent="-304800" lvl="6" marL="3200400">
+            <a:lvl7pPr marL="3200400" lvl="6" indent="-304800">
               <a:spcBef>
                 <a:spcPts val="0"/>
               </a:spcBef>
@@ -4084,7 +4330,7 @@
               <a:buChar char="●"/>
               <a:defRPr sz="1200"/>
             </a:lvl7pPr>
-            <a:lvl8pPr indent="-304800" lvl="7" marL="3657600">
+            <a:lvl8pPr marL="3657600" lvl="7" indent="-304800">
               <a:spcBef>
                 <a:spcPts val="0"/>
               </a:spcBef>
@@ -4095,7 +4341,7 @@
               <a:buChar char="○"/>
               <a:defRPr sz="1200"/>
             </a:lvl8pPr>
-            <a:lvl9pPr indent="-304800" lvl="8" marL="4114800">
+            <a:lvl9pPr marL="4114800" lvl="8" indent="-304800">
               <a:spcBef>
                 <a:spcPts val="0"/>
               </a:spcBef>
@@ -4107,15 +4353,19 @@
               <a:defRPr sz="1200"/>
             </a:lvl9pPr>
           </a:lstStyle>
-          <a:p/>
+          <a:p>
+            <a:endParaRPr/>
+          </a:p>
         </p:txBody>
       </p:sp>
       <p:sp>
         <p:nvSpPr>
           <p:cNvPr id="24" name="Google Shape;24;p5"/>
-          <p:cNvSpPr txBox="1"/>
+          <p:cNvSpPr txBox="1">
+            <a:spLocks noGrp="1"/>
+          </p:cNvSpPr>
           <p:nvPr>
-            <p:ph idx="12" type="sldNum"/>
+            <p:ph type="sldNum" idx="12"/>
           </p:nvPr>
         </p:nvSpPr>
         <p:spPr>
@@ -4128,7 +4378,7 @@
           </a:prstGeom>
         </p:spPr>
         <p:txBody>
-          <a:bodyPr anchorCtr="0" anchor="ctr" bIns="91425" lIns="91425" spcFirstLastPara="1" rIns="91425" wrap="square" tIns="91425">
+          <a:bodyPr spcFirstLastPara="1" wrap="square" lIns="91425" tIns="91425" rIns="91425" bIns="91425" anchor="ctr" anchorCtr="0">
             <a:normAutofit/>
           </a:bodyPr>
           <a:lstStyle>
@@ -4170,7 +4420,7 @@
             </a:lvl9pPr>
           </a:lstStyle>
           <a:p>
-            <a:pPr indent="0" lvl="0" marL="0" rtl="0" algn="r">
+            <a:pPr marL="0" lvl="0" indent="0" algn="r" rtl="0">
               <a:spcBef>
                 <a:spcPts val="0"/>
               </a:spcBef>
@@ -4196,11 +4446,11 @@
 </file>
 
 <file path=ppt/slideLayouts/slideLayout5.xml><?xml version="1.0" encoding="utf-8"?>
-<p:sldLayout xmlns:a="http://schemas.openxmlformats.org/drawingml/2006/main" xmlns:r="http://schemas.openxmlformats.org/officeDocument/2006/relationships" xmlns:mc="http://schemas.openxmlformats.org/markup-compatibility/2006" xmlns:mv="urn:schemas-microsoft-com:mac:vml" xmlns:p="http://schemas.openxmlformats.org/presentationml/2006/main" xmlns:c="http://schemas.openxmlformats.org/drawingml/2006/chart" xmlns:dgm="http://schemas.openxmlformats.org/drawingml/2006/diagram" xmlns:o="urn:schemas-microsoft-com:office:office" xmlns:v="urn:schemas-microsoft-com:vml" xmlns:pvml="urn:schemas-microsoft-com:office:powerpoint" xmlns:com="http://schemas.openxmlformats.org/drawingml/2006/compatibility" xmlns:p14="http://schemas.microsoft.com/office/powerpoint/2010/main" xmlns:p15="http://schemas.microsoft.com/office/powerpoint/2012/main" xmlns:ahyp="http://schemas.microsoft.com/office/drawing/2018/hyperlinkcolor" matchingName="Title only" type="titleOnly">
+<p:sldLayout xmlns:a="http://schemas.openxmlformats.org/drawingml/2006/main" xmlns:r="http://schemas.openxmlformats.org/officeDocument/2006/relationships" xmlns:p="http://schemas.openxmlformats.org/presentationml/2006/main" matchingName="Title only" type="titleOnly">
   <p:cSld name="TITLE_ONLY">
     <p:spTree>
       <p:nvGrpSpPr>
-        <p:cNvPr id="25" name="Shape 25"/>
+        <p:cNvPr id="1" name="Shape 25"/>
         <p:cNvGrpSpPr/>
         <p:nvPr/>
       </p:nvGrpSpPr>
@@ -4215,7 +4465,9 @@
       <p:sp>
         <p:nvSpPr>
           <p:cNvPr id="26" name="Google Shape;26;p6"/>
-          <p:cNvSpPr txBox="1"/>
+          <p:cNvSpPr txBox="1">
+            <a:spLocks noGrp="1"/>
+          </p:cNvSpPr>
           <p:nvPr>
             <p:ph type="title"/>
           </p:nvPr>
@@ -4230,7 +4482,7 @@
           </a:prstGeom>
         </p:spPr>
         <p:txBody>
-          <a:bodyPr anchorCtr="0" anchor="t" bIns="91425" lIns="91425" spcFirstLastPara="1" rIns="91425" wrap="square" tIns="91425">
+          <a:bodyPr spcFirstLastPara="1" wrap="square" lIns="91425" tIns="91425" rIns="91425" bIns="91425" anchor="t" anchorCtr="0">
             <a:normAutofit/>
           </a:bodyPr>
           <a:lstStyle>
@@ -4334,15 +4586,19 @@
               <a:defRPr/>
             </a:lvl9pPr>
           </a:lstStyle>
-          <a:p/>
+          <a:p>
+            <a:endParaRPr/>
+          </a:p>
         </p:txBody>
       </p:sp>
       <p:sp>
         <p:nvSpPr>
           <p:cNvPr id="27" name="Google Shape;27;p6"/>
-          <p:cNvSpPr txBox="1"/>
+          <p:cNvSpPr txBox="1">
+            <a:spLocks noGrp="1"/>
+          </p:cNvSpPr>
           <p:nvPr>
-            <p:ph idx="12" type="sldNum"/>
+            <p:ph type="sldNum" idx="12"/>
           </p:nvPr>
         </p:nvSpPr>
         <p:spPr>
@@ -4355,7 +4611,7 @@
           </a:prstGeom>
         </p:spPr>
         <p:txBody>
-          <a:bodyPr anchorCtr="0" anchor="ctr" bIns="91425" lIns="91425" spcFirstLastPara="1" rIns="91425" wrap="square" tIns="91425">
+          <a:bodyPr spcFirstLastPara="1" wrap="square" lIns="91425" tIns="91425" rIns="91425" bIns="91425" anchor="ctr" anchorCtr="0">
             <a:normAutofit/>
           </a:bodyPr>
           <a:lstStyle>
@@ -4397,7 +4653,7 @@
             </a:lvl9pPr>
           </a:lstStyle>
           <a:p>
-            <a:pPr indent="0" lvl="0" marL="0" rtl="0" algn="r">
+            <a:pPr marL="0" lvl="0" indent="0" algn="r" rtl="0">
               <a:spcBef>
                 <a:spcPts val="0"/>
               </a:spcBef>
@@ -4423,11 +4679,11 @@
 </file>
 
 <file path=ppt/slideLayouts/slideLayout6.xml><?xml version="1.0" encoding="utf-8"?>
-<p:sldLayout xmlns:a="http://schemas.openxmlformats.org/drawingml/2006/main" xmlns:r="http://schemas.openxmlformats.org/officeDocument/2006/relationships" xmlns:mc="http://schemas.openxmlformats.org/markup-compatibility/2006" xmlns:mv="urn:schemas-microsoft-com:mac:vml" xmlns:p="http://schemas.openxmlformats.org/presentationml/2006/main" xmlns:c="http://schemas.openxmlformats.org/drawingml/2006/chart" xmlns:dgm="http://schemas.openxmlformats.org/drawingml/2006/diagram" xmlns:o="urn:schemas-microsoft-com:office:office" xmlns:v="urn:schemas-microsoft-com:vml" xmlns:pvml="urn:schemas-microsoft-com:office:powerpoint" xmlns:com="http://schemas.openxmlformats.org/drawingml/2006/compatibility" xmlns:p14="http://schemas.microsoft.com/office/powerpoint/2010/main" xmlns:p15="http://schemas.microsoft.com/office/powerpoint/2012/main" xmlns:ahyp="http://schemas.microsoft.com/office/drawing/2018/hyperlinkcolor" matchingName="One column text">
+<p:sldLayout xmlns:a="http://schemas.openxmlformats.org/drawingml/2006/main" xmlns:r="http://schemas.openxmlformats.org/officeDocument/2006/relationships" xmlns:p="http://schemas.openxmlformats.org/presentationml/2006/main" matchingName="One column text">
   <p:cSld name="ONE_COLUMN_TEXT">
     <p:spTree>
       <p:nvGrpSpPr>
-        <p:cNvPr id="28" name="Shape 28"/>
+        <p:cNvPr id="1" name="Shape 28"/>
         <p:cNvGrpSpPr/>
         <p:nvPr/>
       </p:nvGrpSpPr>
@@ -4442,7 +4698,9 @@
       <p:sp>
         <p:nvSpPr>
           <p:cNvPr id="29" name="Google Shape;29;p7"/>
-          <p:cNvSpPr txBox="1"/>
+          <p:cNvSpPr txBox="1">
+            <a:spLocks noGrp="1"/>
+          </p:cNvSpPr>
           <p:nvPr>
             <p:ph type="title"/>
           </p:nvPr>
@@ -4457,7 +4715,7 @@
           </a:prstGeom>
         </p:spPr>
         <p:txBody>
-          <a:bodyPr anchorCtr="0" anchor="b" bIns="91425" lIns="91425" spcFirstLastPara="1" rIns="91425" wrap="square" tIns="91425">
+          <a:bodyPr spcFirstLastPara="1" wrap="square" lIns="91425" tIns="91425" rIns="91425" bIns="91425" anchor="b" anchorCtr="0">
             <a:normAutofit/>
           </a:bodyPr>
           <a:lstStyle>
@@ -4561,15 +4819,19 @@
               <a:defRPr sz="2400"/>
             </a:lvl9pPr>
           </a:lstStyle>
-          <a:p/>
+          <a:p>
+            <a:endParaRPr/>
+          </a:p>
         </p:txBody>
       </p:sp>
       <p:sp>
         <p:nvSpPr>
           <p:cNvPr id="30" name="Google Shape;30;p7"/>
-          <p:cNvSpPr txBox="1"/>
+          <p:cNvSpPr txBox="1">
+            <a:spLocks noGrp="1"/>
+          </p:cNvSpPr>
           <p:nvPr>
-            <p:ph idx="1" type="body"/>
+            <p:ph type="body" idx="1"/>
           </p:nvPr>
         </p:nvSpPr>
         <p:spPr>
@@ -4582,11 +4844,11 @@
           </a:prstGeom>
         </p:spPr>
         <p:txBody>
-          <a:bodyPr anchorCtr="0" anchor="t" bIns="91425" lIns="91425" spcFirstLastPara="1" rIns="91425" wrap="square" tIns="91425">
+          <a:bodyPr spcFirstLastPara="1" wrap="square" lIns="91425" tIns="91425" rIns="91425" bIns="91425" anchor="t" anchorCtr="0">
             <a:normAutofit/>
           </a:bodyPr>
           <a:lstStyle>
-            <a:lvl1pPr indent="-304800" lvl="0" marL="457200">
+            <a:lvl1pPr marL="457200" lvl="0" indent="-304800">
               <a:spcBef>
                 <a:spcPts val="0"/>
               </a:spcBef>
@@ -4597,7 +4859,7 @@
               <a:buChar char="●"/>
               <a:defRPr sz="1200"/>
             </a:lvl1pPr>
-            <a:lvl2pPr indent="-304800" lvl="1" marL="914400">
+            <a:lvl2pPr marL="914400" lvl="1" indent="-304800">
               <a:spcBef>
                 <a:spcPts val="0"/>
               </a:spcBef>
@@ -4608,7 +4870,7 @@
               <a:buChar char="○"/>
               <a:defRPr sz="1200"/>
             </a:lvl2pPr>
-            <a:lvl3pPr indent="-304800" lvl="2" marL="1371600">
+            <a:lvl3pPr marL="1371600" lvl="2" indent="-304800">
               <a:spcBef>
                 <a:spcPts val="0"/>
               </a:spcBef>
@@ -4619,7 +4881,7 @@
               <a:buChar char="■"/>
               <a:defRPr sz="1200"/>
             </a:lvl3pPr>
-            <a:lvl4pPr indent="-304800" lvl="3" marL="1828800">
+            <a:lvl4pPr marL="1828800" lvl="3" indent="-304800">
               <a:spcBef>
                 <a:spcPts val="0"/>
               </a:spcBef>
@@ -4630,7 +4892,7 @@
               <a:buChar char="●"/>
               <a:defRPr sz="1200"/>
             </a:lvl4pPr>
-            <a:lvl5pPr indent="-304800" lvl="4" marL="2286000">
+            <a:lvl5pPr marL="2286000" lvl="4" indent="-304800">
               <a:spcBef>
                 <a:spcPts val="0"/>
               </a:spcBef>
@@ -4641,7 +4903,7 @@
               <a:buChar char="○"/>
               <a:defRPr sz="1200"/>
             </a:lvl5pPr>
-            <a:lvl6pPr indent="-304800" lvl="5" marL="2743200">
+            <a:lvl6pPr marL="2743200" lvl="5" indent="-304800">
               <a:spcBef>
                 <a:spcPts val="0"/>
               </a:spcBef>
@@ -4652,7 +4914,7 @@
               <a:buChar char="■"/>
               <a:defRPr sz="1200"/>
             </a:lvl6pPr>
-            <a:lvl7pPr indent="-304800" lvl="6" marL="3200400">
+            <a:lvl7pPr marL="3200400" lvl="6" indent="-304800">
               <a:spcBef>
                 <a:spcPts val="0"/>
               </a:spcBef>
@@ -4663,7 +4925,7 @@
               <a:buChar char="●"/>
               <a:defRPr sz="1200"/>
             </a:lvl7pPr>
-            <a:lvl8pPr indent="-304800" lvl="7" marL="3657600">
+            <a:lvl8pPr marL="3657600" lvl="7" indent="-304800">
               <a:spcBef>
                 <a:spcPts val="0"/>
               </a:spcBef>
@@ -4674,7 +4936,7 @@
               <a:buChar char="○"/>
               <a:defRPr sz="1200"/>
             </a:lvl8pPr>
-            <a:lvl9pPr indent="-304800" lvl="8" marL="4114800">
+            <a:lvl9pPr marL="4114800" lvl="8" indent="-304800">
               <a:spcBef>
                 <a:spcPts val="0"/>
               </a:spcBef>
@@ -4686,15 +4948,19 @@
               <a:defRPr sz="1200"/>
             </a:lvl9pPr>
           </a:lstStyle>
-          <a:p/>
+          <a:p>
+            <a:endParaRPr/>
+          </a:p>
         </p:txBody>
       </p:sp>
       <p:sp>
         <p:nvSpPr>
           <p:cNvPr id="31" name="Google Shape;31;p7"/>
-          <p:cNvSpPr txBox="1"/>
+          <p:cNvSpPr txBox="1">
+            <a:spLocks noGrp="1"/>
+          </p:cNvSpPr>
           <p:nvPr>
-            <p:ph idx="12" type="sldNum"/>
+            <p:ph type="sldNum" idx="12"/>
           </p:nvPr>
         </p:nvSpPr>
         <p:spPr>
@@ -4707,7 +4973,7 @@
           </a:prstGeom>
         </p:spPr>
         <p:txBody>
-          <a:bodyPr anchorCtr="0" anchor="ctr" bIns="91425" lIns="91425" spcFirstLastPara="1" rIns="91425" wrap="square" tIns="91425">
+          <a:bodyPr spcFirstLastPara="1" wrap="square" lIns="91425" tIns="91425" rIns="91425" bIns="91425" anchor="ctr" anchorCtr="0">
             <a:normAutofit/>
           </a:bodyPr>
           <a:lstStyle>
@@ -4749,7 +5015,7 @@
             </a:lvl9pPr>
           </a:lstStyle>
           <a:p>
-            <a:pPr indent="0" lvl="0" marL="0" rtl="0" algn="r">
+            <a:pPr marL="0" lvl="0" indent="0" algn="r" rtl="0">
               <a:spcBef>
                 <a:spcPts val="0"/>
               </a:spcBef>
@@ -4775,11 +5041,11 @@
 </file>
 
 <file path=ppt/slideLayouts/slideLayout7.xml><?xml version="1.0" encoding="utf-8"?>
-<p:sldLayout xmlns:a="http://schemas.openxmlformats.org/drawingml/2006/main" xmlns:r="http://schemas.openxmlformats.org/officeDocument/2006/relationships" xmlns:mc="http://schemas.openxmlformats.org/markup-compatibility/2006" xmlns:mv="urn:schemas-microsoft-com:mac:vml" xmlns:p="http://schemas.openxmlformats.org/presentationml/2006/main" xmlns:c="http://schemas.openxmlformats.org/drawingml/2006/chart" xmlns:dgm="http://schemas.openxmlformats.org/drawingml/2006/diagram" xmlns:o="urn:schemas-microsoft-com:office:office" xmlns:v="urn:schemas-microsoft-com:vml" xmlns:pvml="urn:schemas-microsoft-com:office:powerpoint" xmlns:com="http://schemas.openxmlformats.org/drawingml/2006/compatibility" xmlns:p14="http://schemas.microsoft.com/office/powerpoint/2010/main" xmlns:p15="http://schemas.microsoft.com/office/powerpoint/2012/main" xmlns:ahyp="http://schemas.microsoft.com/office/drawing/2018/hyperlinkcolor" matchingName="Main point">
+<p:sldLayout xmlns:a="http://schemas.openxmlformats.org/drawingml/2006/main" xmlns:r="http://schemas.openxmlformats.org/officeDocument/2006/relationships" xmlns:p="http://schemas.openxmlformats.org/presentationml/2006/main" matchingName="Main point">
   <p:cSld name="MAIN_POINT">
     <p:spTree>
       <p:nvGrpSpPr>
-        <p:cNvPr id="32" name="Shape 32"/>
+        <p:cNvPr id="1" name="Shape 32"/>
         <p:cNvGrpSpPr/>
         <p:nvPr/>
       </p:nvGrpSpPr>
@@ -4794,7 +5060,9 @@
       <p:sp>
         <p:nvSpPr>
           <p:cNvPr id="33" name="Google Shape;33;p8"/>
-          <p:cNvSpPr txBox="1"/>
+          <p:cNvSpPr txBox="1">
+            <a:spLocks noGrp="1"/>
+          </p:cNvSpPr>
           <p:nvPr>
             <p:ph type="title"/>
           </p:nvPr>
@@ -4809,7 +5077,7 @@
           </a:prstGeom>
         </p:spPr>
         <p:txBody>
-          <a:bodyPr anchorCtr="0" anchor="ctr" bIns="91425" lIns="91425" spcFirstLastPara="1" rIns="91425" wrap="square" tIns="91425">
+          <a:bodyPr spcFirstLastPara="1" wrap="square" lIns="91425" tIns="91425" rIns="91425" bIns="91425" anchor="ctr" anchorCtr="0">
             <a:normAutofit/>
           </a:bodyPr>
           <a:lstStyle>
@@ -4913,15 +5181,19 @@
               <a:defRPr sz="4800"/>
             </a:lvl9pPr>
           </a:lstStyle>
-          <a:p/>
+          <a:p>
+            <a:endParaRPr/>
+          </a:p>
         </p:txBody>
       </p:sp>
       <p:sp>
         <p:nvSpPr>
           <p:cNvPr id="34" name="Google Shape;34;p8"/>
-          <p:cNvSpPr txBox="1"/>
+          <p:cNvSpPr txBox="1">
+            <a:spLocks noGrp="1"/>
+          </p:cNvSpPr>
           <p:nvPr>
-            <p:ph idx="12" type="sldNum"/>
+            <p:ph type="sldNum" idx="12"/>
           </p:nvPr>
         </p:nvSpPr>
         <p:spPr>
@@ -4934,7 +5206,7 @@
           </a:prstGeom>
         </p:spPr>
         <p:txBody>
-          <a:bodyPr anchorCtr="0" anchor="ctr" bIns="91425" lIns="91425" spcFirstLastPara="1" rIns="91425" wrap="square" tIns="91425">
+          <a:bodyPr spcFirstLastPara="1" wrap="square" lIns="91425" tIns="91425" rIns="91425" bIns="91425" anchor="ctr" anchorCtr="0">
             <a:normAutofit/>
           </a:bodyPr>
           <a:lstStyle>
@@ -4976,7 +5248,7 @@
             </a:lvl9pPr>
           </a:lstStyle>
           <a:p>
-            <a:pPr indent="0" lvl="0" marL="0" rtl="0" algn="r">
+            <a:pPr marL="0" lvl="0" indent="0" algn="r" rtl="0">
               <a:spcBef>
                 <a:spcPts val="0"/>
               </a:spcBef>
@@ -5002,11 +5274,11 @@
 </file>
 
 <file path=ppt/slideLayouts/slideLayout8.xml><?xml version="1.0" encoding="utf-8"?>
-<p:sldLayout xmlns:a="http://schemas.openxmlformats.org/drawingml/2006/main" xmlns:r="http://schemas.openxmlformats.org/officeDocument/2006/relationships" xmlns:mc="http://schemas.openxmlformats.org/markup-compatibility/2006" xmlns:mv="urn:schemas-microsoft-com:mac:vml" xmlns:p="http://schemas.openxmlformats.org/presentationml/2006/main" xmlns:c="http://schemas.openxmlformats.org/drawingml/2006/chart" xmlns:dgm="http://schemas.openxmlformats.org/drawingml/2006/diagram" xmlns:o="urn:schemas-microsoft-com:office:office" xmlns:v="urn:schemas-microsoft-com:vml" xmlns:pvml="urn:schemas-microsoft-com:office:powerpoint" xmlns:com="http://schemas.openxmlformats.org/drawingml/2006/compatibility" xmlns:p14="http://schemas.microsoft.com/office/powerpoint/2010/main" xmlns:p15="http://schemas.microsoft.com/office/powerpoint/2012/main" xmlns:ahyp="http://schemas.microsoft.com/office/drawing/2018/hyperlinkcolor" matchingName="Section title and description">
+<p:sldLayout xmlns:a="http://schemas.openxmlformats.org/drawingml/2006/main" xmlns:r="http://schemas.openxmlformats.org/officeDocument/2006/relationships" xmlns:p="http://schemas.openxmlformats.org/presentationml/2006/main" matchingName="Section title and description">
   <p:cSld name="SECTION_TITLE_AND_DESCRIPTION">
     <p:spTree>
       <p:nvGrpSpPr>
-        <p:cNvPr id="35" name="Shape 35"/>
+        <p:cNvPr id="1" name="Shape 35"/>
         <p:cNvGrpSpPr/>
         <p:nvPr/>
       </p:nvGrpSpPr>
@@ -5040,23 +5312,20 @@
           </a:ln>
         </p:spPr>
         <p:txBody>
-          <a:bodyPr anchorCtr="0" anchor="ctr" bIns="91425" lIns="91425" spcFirstLastPara="1" rIns="91425" wrap="square" tIns="91425">
+          <a:bodyPr spcFirstLastPara="1" wrap="square" lIns="91425" tIns="91425" rIns="91425" bIns="91425" anchor="ctr" anchorCtr="0">
             <a:noAutofit/>
           </a:bodyPr>
           <a:lstStyle/>
           <a:p>
-            <a:pPr indent="0" lvl="0" marL="0" rtl="0" algn="l">
-              <a:spcBef>
-                <a:spcPts val="0"/>
-              </a:spcBef>
-              <a:spcAft>
-                <a:spcPts val="0"/>
-              </a:spcAft>
-              <a:buNone/>
-            </a:pPr>
-            <a:r>
-              <a:t/>
-            </a:r>
+            <a:pPr marL="0" lvl="0" indent="0" algn="l" rtl="0">
+              <a:spcBef>
+                <a:spcPts val="0"/>
+              </a:spcBef>
+              <a:spcAft>
+                <a:spcPts val="0"/>
+              </a:spcAft>
+              <a:buNone/>
+            </a:pPr>
             <a:endParaRPr/>
           </a:p>
         </p:txBody>
@@ -5064,7 +5333,9 @@
       <p:sp>
         <p:nvSpPr>
           <p:cNvPr id="37" name="Google Shape;37;p9"/>
-          <p:cNvSpPr txBox="1"/>
+          <p:cNvSpPr txBox="1">
+            <a:spLocks noGrp="1"/>
+          </p:cNvSpPr>
           <p:nvPr>
             <p:ph type="title"/>
           </p:nvPr>
@@ -5079,7 +5350,7 @@
           </a:prstGeom>
         </p:spPr>
         <p:txBody>
-          <a:bodyPr anchorCtr="0" anchor="b" bIns="91425" lIns="91425" spcFirstLastPara="1" rIns="91425" wrap="square" tIns="91425">
+          <a:bodyPr spcFirstLastPara="1" wrap="square" lIns="91425" tIns="91425" rIns="91425" bIns="91425" anchor="b" anchorCtr="0">
             <a:normAutofit/>
           </a:bodyPr>
           <a:lstStyle>
@@ -5183,15 +5454,19 @@
               <a:defRPr sz="4200"/>
             </a:lvl9pPr>
           </a:lstStyle>
-          <a:p/>
+          <a:p>
+            <a:endParaRPr/>
+          </a:p>
         </p:txBody>
       </p:sp>
       <p:sp>
         <p:nvSpPr>
           <p:cNvPr id="38" name="Google Shape;38;p9"/>
-          <p:cNvSpPr txBox="1"/>
+          <p:cNvSpPr txBox="1">
+            <a:spLocks noGrp="1"/>
+          </p:cNvSpPr>
           <p:nvPr>
-            <p:ph idx="1" type="subTitle"/>
+            <p:ph type="subTitle" idx="1"/>
           </p:nvPr>
         </p:nvSpPr>
         <p:spPr>
@@ -5204,7 +5479,7 @@
           </a:prstGeom>
         </p:spPr>
         <p:txBody>
-          <a:bodyPr anchorCtr="0" anchor="t" bIns="91425" lIns="91425" spcFirstLastPara="1" rIns="91425" wrap="square" tIns="91425">
+          <a:bodyPr spcFirstLastPara="1" wrap="square" lIns="91425" tIns="91425" rIns="91425" bIns="91425" anchor="t" anchorCtr="0">
             <a:normAutofit/>
           </a:bodyPr>
           <a:lstStyle>
@@ -5335,15 +5610,19 @@
               <a:defRPr sz="2100"/>
             </a:lvl9pPr>
           </a:lstStyle>
-          <a:p/>
+          <a:p>
+            <a:endParaRPr/>
+          </a:p>
         </p:txBody>
       </p:sp>
       <p:sp>
         <p:nvSpPr>
           <p:cNvPr id="39" name="Google Shape;39;p9"/>
-          <p:cNvSpPr txBox="1"/>
+          <p:cNvSpPr txBox="1">
+            <a:spLocks noGrp="1"/>
+          </p:cNvSpPr>
           <p:nvPr>
-            <p:ph idx="2" type="body"/>
+            <p:ph type="body" idx="2"/>
           </p:nvPr>
         </p:nvSpPr>
         <p:spPr>
@@ -5356,11 +5635,11 @@
           </a:prstGeom>
         </p:spPr>
         <p:txBody>
-          <a:bodyPr anchorCtr="0" anchor="ctr" bIns="91425" lIns="91425" spcFirstLastPara="1" rIns="91425" wrap="square" tIns="91425">
+          <a:bodyPr spcFirstLastPara="1" wrap="square" lIns="91425" tIns="91425" rIns="91425" bIns="91425" anchor="ctr" anchorCtr="0">
             <a:normAutofit/>
           </a:bodyPr>
           <a:lstStyle>
-            <a:lvl1pPr indent="-342900" lvl="0" marL="457200">
+            <a:lvl1pPr marL="457200" lvl="0" indent="-342900">
               <a:spcBef>
                 <a:spcPts val="0"/>
               </a:spcBef>
@@ -5371,7 +5650,7 @@
               <a:buChar char="●"/>
               <a:defRPr/>
             </a:lvl1pPr>
-            <a:lvl2pPr indent="-317500" lvl="1" marL="914400">
+            <a:lvl2pPr marL="914400" lvl="1" indent="-317500">
               <a:spcBef>
                 <a:spcPts val="0"/>
               </a:spcBef>
@@ -5382,7 +5661,7 @@
               <a:buChar char="○"/>
               <a:defRPr/>
             </a:lvl2pPr>
-            <a:lvl3pPr indent="-317500" lvl="2" marL="1371600">
+            <a:lvl3pPr marL="1371600" lvl="2" indent="-317500">
               <a:spcBef>
                 <a:spcPts val="0"/>
               </a:spcBef>
@@ -5393,7 +5672,7 @@
               <a:buChar char="■"/>
               <a:defRPr/>
             </a:lvl3pPr>
-            <a:lvl4pPr indent="-317500" lvl="3" marL="1828800">
+            <a:lvl4pPr marL="1828800" lvl="3" indent="-317500">
               <a:spcBef>
                 <a:spcPts val="0"/>
               </a:spcBef>
@@ -5404,7 +5683,7 @@
               <a:buChar char="●"/>
               <a:defRPr/>
             </a:lvl4pPr>
-            <a:lvl5pPr indent="-317500" lvl="4" marL="2286000">
+            <a:lvl5pPr marL="2286000" lvl="4" indent="-317500">
               <a:spcBef>
                 <a:spcPts val="0"/>
               </a:spcBef>
@@ -5415,7 +5694,7 @@
               <a:buChar char="○"/>
               <a:defRPr/>
             </a:lvl5pPr>
-            <a:lvl6pPr indent="-317500" lvl="5" marL="2743200">
+            <a:lvl6pPr marL="2743200" lvl="5" indent="-317500">
               <a:spcBef>
                 <a:spcPts val="0"/>
               </a:spcBef>
@@ -5426,7 +5705,7 @@
               <a:buChar char="■"/>
               <a:defRPr/>
             </a:lvl6pPr>
-            <a:lvl7pPr indent="-317500" lvl="6" marL="3200400">
+            <a:lvl7pPr marL="3200400" lvl="6" indent="-317500">
               <a:spcBef>
                 <a:spcPts val="0"/>
               </a:spcBef>
@@ -5437,7 +5716,7 @@
               <a:buChar char="●"/>
               <a:defRPr/>
             </a:lvl7pPr>
-            <a:lvl8pPr indent="-317500" lvl="7" marL="3657600">
+            <a:lvl8pPr marL="3657600" lvl="7" indent="-317500">
               <a:spcBef>
                 <a:spcPts val="0"/>
               </a:spcBef>
@@ -5448,7 +5727,7 @@
               <a:buChar char="○"/>
               <a:defRPr/>
             </a:lvl8pPr>
-            <a:lvl9pPr indent="-317500" lvl="8" marL="4114800">
+            <a:lvl9pPr marL="4114800" lvl="8" indent="-317500">
               <a:spcBef>
                 <a:spcPts val="0"/>
               </a:spcBef>
@@ -5460,15 +5739,19 @@
               <a:defRPr/>
             </a:lvl9pPr>
           </a:lstStyle>
-          <a:p/>
+          <a:p>
+            <a:endParaRPr/>
+          </a:p>
         </p:txBody>
       </p:sp>
       <p:sp>
         <p:nvSpPr>
           <p:cNvPr id="40" name="Google Shape;40;p9"/>
-          <p:cNvSpPr txBox="1"/>
+          <p:cNvSpPr txBox="1">
+            <a:spLocks noGrp="1"/>
+          </p:cNvSpPr>
           <p:nvPr>
-            <p:ph idx="12" type="sldNum"/>
+            <p:ph type="sldNum" idx="12"/>
           </p:nvPr>
         </p:nvSpPr>
         <p:spPr>
@@ -5481,7 +5764,7 @@
           </a:prstGeom>
         </p:spPr>
         <p:txBody>
-          <a:bodyPr anchorCtr="0" anchor="ctr" bIns="91425" lIns="91425" spcFirstLastPara="1" rIns="91425" wrap="square" tIns="91425">
+          <a:bodyPr spcFirstLastPara="1" wrap="square" lIns="91425" tIns="91425" rIns="91425" bIns="91425" anchor="ctr" anchorCtr="0">
             <a:normAutofit/>
           </a:bodyPr>
           <a:lstStyle>
@@ -5523,7 +5806,7 @@
             </a:lvl9pPr>
           </a:lstStyle>
           <a:p>
-            <a:pPr indent="0" lvl="0" marL="0" rtl="0" algn="r">
+            <a:pPr marL="0" lvl="0" indent="0" algn="r" rtl="0">
               <a:spcBef>
                 <a:spcPts val="0"/>
               </a:spcBef>
@@ -5549,11 +5832,11 @@
 </file>
 
 <file path=ppt/slideLayouts/slideLayout9.xml><?xml version="1.0" encoding="utf-8"?>
-<p:sldLayout xmlns:a="http://schemas.openxmlformats.org/drawingml/2006/main" xmlns:r="http://schemas.openxmlformats.org/officeDocument/2006/relationships" xmlns:mc="http://schemas.openxmlformats.org/markup-compatibility/2006" xmlns:mv="urn:schemas-microsoft-com:mac:vml" xmlns:p="http://schemas.openxmlformats.org/presentationml/2006/main" xmlns:c="http://schemas.openxmlformats.org/drawingml/2006/chart" xmlns:dgm="http://schemas.openxmlformats.org/drawingml/2006/diagram" xmlns:o="urn:schemas-microsoft-com:office:office" xmlns:v="urn:schemas-microsoft-com:vml" xmlns:pvml="urn:schemas-microsoft-com:office:powerpoint" xmlns:com="http://schemas.openxmlformats.org/drawingml/2006/compatibility" xmlns:p14="http://schemas.microsoft.com/office/powerpoint/2010/main" xmlns:p15="http://schemas.microsoft.com/office/powerpoint/2012/main" xmlns:ahyp="http://schemas.microsoft.com/office/drawing/2018/hyperlinkcolor" matchingName="Caption">
+<p:sldLayout xmlns:a="http://schemas.openxmlformats.org/drawingml/2006/main" xmlns:r="http://schemas.openxmlformats.org/officeDocument/2006/relationships" xmlns:p="http://schemas.openxmlformats.org/presentationml/2006/main" matchingName="Caption">
   <p:cSld name="CAPTION_ONLY">
     <p:spTree>
       <p:nvGrpSpPr>
-        <p:cNvPr id="41" name="Shape 41"/>
+        <p:cNvPr id="1" name="Shape 41"/>
         <p:cNvGrpSpPr/>
         <p:nvPr/>
       </p:nvGrpSpPr>
@@ -5568,9 +5851,11 @@
       <p:sp>
         <p:nvSpPr>
           <p:cNvPr id="42" name="Google Shape;42;p10"/>
-          <p:cNvSpPr txBox="1"/>
+          <p:cNvSpPr txBox="1">
+            <a:spLocks noGrp="1"/>
+          </p:cNvSpPr>
           <p:nvPr>
-            <p:ph idx="1" type="body"/>
+            <p:ph type="body" idx="1"/>
           </p:nvPr>
         </p:nvSpPr>
         <p:spPr>
@@ -5583,11 +5868,11 @@
           </a:prstGeom>
         </p:spPr>
         <p:txBody>
-          <a:bodyPr anchorCtr="0" anchor="ctr" bIns="91425" lIns="91425" spcFirstLastPara="1" rIns="91425" wrap="square" tIns="91425">
+          <a:bodyPr spcFirstLastPara="1" wrap="square" lIns="91425" tIns="91425" rIns="91425" bIns="91425" anchor="ctr" anchorCtr="0">
             <a:normAutofit/>
           </a:bodyPr>
           <a:lstStyle>
-            <a:lvl1pPr indent="-228600" lvl="0" marL="457200">
+            <a:lvl1pPr marL="457200" lvl="0" indent="-228600">
               <a:lnSpc>
                 <a:spcPct val="100000"/>
               </a:lnSpc>
@@ -5602,15 +5887,19 @@
               <a:defRPr/>
             </a:lvl1pPr>
           </a:lstStyle>
-          <a:p/>
+          <a:p>
+            <a:endParaRPr/>
+          </a:p>
         </p:txBody>
       </p:sp>
       <p:sp>
         <p:nvSpPr>
           <p:cNvPr id="43" name="Google Shape;43;p10"/>
-          <p:cNvSpPr txBox="1"/>
+          <p:cNvSpPr txBox="1">
+            <a:spLocks noGrp="1"/>
+          </p:cNvSpPr>
           <p:nvPr>
-            <p:ph idx="12" type="sldNum"/>
+            <p:ph type="sldNum" idx="12"/>
           </p:nvPr>
         </p:nvSpPr>
         <p:spPr>
@@ -5623,7 +5912,7 @@
           </a:prstGeom>
         </p:spPr>
         <p:txBody>
-          <a:bodyPr anchorCtr="0" anchor="ctr" bIns="91425" lIns="91425" spcFirstLastPara="1" rIns="91425" wrap="square" tIns="91425">
+          <a:bodyPr spcFirstLastPara="1" wrap="square" lIns="91425" tIns="91425" rIns="91425" bIns="91425" anchor="ctr" anchorCtr="0">
             <a:normAutofit/>
           </a:bodyPr>
           <a:lstStyle>
@@ -5665,7 +5954,7 @@
             </a:lvl9pPr>
           </a:lstStyle>
           <a:p>
-            <a:pPr indent="0" lvl="0" marL="0" rtl="0" algn="r">
+            <a:pPr marL="0" lvl="0" indent="0" algn="r" rtl="0">
               <a:spcBef>
                 <a:spcPts val="0"/>
               </a:spcBef>
@@ -5691,18 +5980,19 @@
 </file>
 
 <file path=ppt/slideMasters/slideMaster1.xml><?xml version="1.0" encoding="utf-8"?>
-<p:sldMaster xmlns:a="http://schemas.openxmlformats.org/drawingml/2006/main" xmlns:r="http://schemas.openxmlformats.org/officeDocument/2006/relationships" xmlns:mc="http://schemas.openxmlformats.org/markup-compatibility/2006" xmlns:mv="urn:schemas-microsoft-com:mac:vml" xmlns:p="http://schemas.openxmlformats.org/presentationml/2006/main" xmlns:c="http://schemas.openxmlformats.org/drawingml/2006/chart" xmlns:dgm="http://schemas.openxmlformats.org/drawingml/2006/diagram" xmlns:o="urn:schemas-microsoft-com:office:office" xmlns:v="urn:schemas-microsoft-com:vml" xmlns:pvml="urn:schemas-microsoft-com:office:powerpoint" xmlns:com="http://schemas.openxmlformats.org/drawingml/2006/compatibility" xmlns:p14="http://schemas.microsoft.com/office/powerpoint/2010/main" xmlns:p15="http://schemas.microsoft.com/office/powerpoint/2012/main" xmlns:ahyp="http://schemas.microsoft.com/office/drawing/2018/hyperlinkcolor">
+<p:sldMaster xmlns:a="http://schemas.openxmlformats.org/drawingml/2006/main" xmlns:r="http://schemas.openxmlformats.org/officeDocument/2006/relationships" xmlns:p="http://schemas.openxmlformats.org/presentationml/2006/main">
   <p:cSld name="simple-light-2">
     <p:bg>
       <p:bgPr>
         <a:solidFill>
           <a:schemeClr val="lt1"/>
         </a:solidFill>
+        <a:effectLst/>
       </p:bgPr>
     </p:bg>
     <p:spTree>
       <p:nvGrpSpPr>
-        <p:cNvPr id="5" name="Shape 5"/>
+        <p:cNvPr id="1" name="Shape 5"/>
         <p:cNvGrpSpPr/>
         <p:nvPr/>
       </p:nvGrpSpPr>
@@ -5717,7 +6007,9 @@
       <p:sp>
         <p:nvSpPr>
           <p:cNvPr id="6" name="Google Shape;6;p1"/>
-          <p:cNvSpPr txBox="1"/>
+          <p:cNvSpPr txBox="1">
+            <a:spLocks noGrp="1"/>
+          </p:cNvSpPr>
           <p:nvPr>
             <p:ph type="title"/>
           </p:nvPr>
@@ -5736,7 +6028,7 @@
           </a:ln>
         </p:spPr>
         <p:txBody>
-          <a:bodyPr anchorCtr="0" anchor="t" bIns="91425" lIns="91425" spcFirstLastPara="1" rIns="91425" wrap="square" tIns="91425">
+          <a:bodyPr spcFirstLastPara="1" wrap="square" lIns="91425" tIns="91425" rIns="91425" bIns="91425" anchor="t" anchorCtr="0">
             <a:normAutofit/>
           </a:bodyPr>
           <a:lstStyle>
@@ -5903,15 +6195,19 @@
               </a:defRPr>
             </a:lvl9pPr>
           </a:lstStyle>
-          <a:p/>
+          <a:p>
+            <a:endParaRPr/>
+          </a:p>
         </p:txBody>
       </p:sp>
       <p:sp>
         <p:nvSpPr>
           <p:cNvPr id="7" name="Google Shape;7;p1"/>
-          <p:cNvSpPr txBox="1"/>
+          <p:cNvSpPr txBox="1">
+            <a:spLocks noGrp="1"/>
+          </p:cNvSpPr>
           <p:nvPr>
-            <p:ph idx="1" type="body"/>
+            <p:ph type="body" idx="1"/>
           </p:nvPr>
         </p:nvSpPr>
         <p:spPr>
@@ -5928,11 +6224,11 @@
           </a:ln>
         </p:spPr>
         <p:txBody>
-          <a:bodyPr anchorCtr="0" anchor="t" bIns="91425" lIns="91425" spcFirstLastPara="1" rIns="91425" wrap="square" tIns="91425">
+          <a:bodyPr spcFirstLastPara="1" wrap="square" lIns="91425" tIns="91425" rIns="91425" bIns="91425" anchor="t" anchorCtr="0">
             <a:normAutofit/>
           </a:bodyPr>
           <a:lstStyle>
-            <a:lvl1pPr indent="-342900" lvl="0" marL="457200">
+            <a:lvl1pPr marL="457200" lvl="0" indent="-342900">
               <a:lnSpc>
                 <a:spcPct val="115000"/>
               </a:lnSpc>
@@ -5953,7 +6249,7 @@
                 </a:solidFill>
               </a:defRPr>
             </a:lvl1pPr>
-            <a:lvl2pPr indent="-317500" lvl="1" marL="914400">
+            <a:lvl2pPr marL="914400" lvl="1" indent="-317500">
               <a:lnSpc>
                 <a:spcPct val="115000"/>
               </a:lnSpc>
@@ -5974,7 +6270,7 @@
                 </a:solidFill>
               </a:defRPr>
             </a:lvl2pPr>
-            <a:lvl3pPr indent="-317500" lvl="2" marL="1371600">
+            <a:lvl3pPr marL="1371600" lvl="2" indent="-317500">
               <a:lnSpc>
                 <a:spcPct val="115000"/>
               </a:lnSpc>
@@ -5995,7 +6291,7 @@
                 </a:solidFill>
               </a:defRPr>
             </a:lvl3pPr>
-            <a:lvl4pPr indent="-317500" lvl="3" marL="1828800">
+            <a:lvl4pPr marL="1828800" lvl="3" indent="-317500">
               <a:lnSpc>
                 <a:spcPct val="115000"/>
               </a:lnSpc>
@@ -6016,7 +6312,7 @@
                 </a:solidFill>
               </a:defRPr>
             </a:lvl4pPr>
-            <a:lvl5pPr indent="-317500" lvl="4" marL="2286000">
+            <a:lvl5pPr marL="2286000" lvl="4" indent="-317500">
               <a:lnSpc>
                 <a:spcPct val="115000"/>
               </a:lnSpc>
@@ -6037,7 +6333,7 @@
                 </a:solidFill>
               </a:defRPr>
             </a:lvl5pPr>
-            <a:lvl6pPr indent="-317500" lvl="5" marL="2743200">
+            <a:lvl6pPr marL="2743200" lvl="5" indent="-317500">
               <a:lnSpc>
                 <a:spcPct val="115000"/>
               </a:lnSpc>
@@ -6058,7 +6354,7 @@
                 </a:solidFill>
               </a:defRPr>
             </a:lvl6pPr>
-            <a:lvl7pPr indent="-317500" lvl="6" marL="3200400">
+            <a:lvl7pPr marL="3200400" lvl="6" indent="-317500">
               <a:lnSpc>
                 <a:spcPct val="115000"/>
               </a:lnSpc>
@@ -6079,7 +6375,7 @@
                 </a:solidFill>
               </a:defRPr>
             </a:lvl7pPr>
-            <a:lvl8pPr indent="-317500" lvl="7" marL="3657600">
+            <a:lvl8pPr marL="3657600" lvl="7" indent="-317500">
               <a:lnSpc>
                 <a:spcPct val="115000"/>
               </a:lnSpc>
@@ -6100,7 +6396,7 @@
                 </a:solidFill>
               </a:defRPr>
             </a:lvl8pPr>
-            <a:lvl9pPr indent="-317500" lvl="8" marL="4114800">
+            <a:lvl9pPr marL="4114800" lvl="8" indent="-317500">
               <a:lnSpc>
                 <a:spcPct val="115000"/>
               </a:lnSpc>
@@ -6122,15 +6418,19 @@
               </a:defRPr>
             </a:lvl9pPr>
           </a:lstStyle>
-          <a:p/>
+          <a:p>
+            <a:endParaRPr/>
+          </a:p>
         </p:txBody>
       </p:sp>
       <p:sp>
         <p:nvSpPr>
           <p:cNvPr id="8" name="Google Shape;8;p1"/>
-          <p:cNvSpPr txBox="1"/>
+          <p:cNvSpPr txBox="1">
+            <a:spLocks noGrp="1"/>
+          </p:cNvSpPr>
           <p:nvPr>
-            <p:ph idx="12" type="sldNum"/>
+            <p:ph type="sldNum" idx="12"/>
           </p:nvPr>
         </p:nvSpPr>
         <p:spPr>
@@ -6147,7 +6447,7 @@
           </a:ln>
         </p:spPr>
         <p:txBody>
-          <a:bodyPr anchorCtr="0" anchor="ctr" bIns="91425" lIns="91425" spcFirstLastPara="1" rIns="91425" wrap="square" tIns="91425">
+          <a:bodyPr spcFirstLastPara="1" wrap="square" lIns="91425" tIns="91425" rIns="91425" bIns="91425" anchor="ctr" anchorCtr="0">
             <a:normAutofit/>
           </a:bodyPr>
           <a:lstStyle>
@@ -6225,7 +6525,7 @@
             </a:lvl9pPr>
           </a:lstStyle>
           <a:p>
-            <a:pPr indent="0" lvl="0" marL="0" rtl="0" algn="r">
+            <a:pPr marL="0" lvl="0" indent="0" algn="r" rtl="0">
               <a:spcBef>
                 <a:spcPts val="0"/>
               </a:spcBef>
@@ -6244,7 +6544,7 @@
       </p:sp>
     </p:spTree>
   </p:cSld>
-  <p:clrMap accent1="accent1" accent2="accent2" accent3="accent3" accent4="accent4" accent5="accent5" accent6="accent6" bg1="lt1" bg2="dk2" tx1="dk1" tx2="lt2" folHlink="folHlink" hlink="hlink"/>
+  <p:clrMap bg1="lt1" tx1="dk1" bg2="dk2" tx2="lt2" accent1="accent1" accent2="accent2" accent3="accent3" accent4="accent4" accent5="accent5" accent6="accent6" hlink="hlink" folHlink="folHlink"/>
   <p:sldLayoutIdLst>
     <p:sldLayoutId id="2147483648" r:id="rId1"/>
     <p:sldLayoutId id="2147483649" r:id="rId2"/>
@@ -6258,10 +6558,10 @@
     <p:sldLayoutId id="2147483657" r:id="rId10"/>
     <p:sldLayoutId id="2147483658" r:id="rId11"/>
   </p:sldLayoutIdLst>
-  <p:hf dt="0" ftr="0" hdr="0" sldNum="0"/>
+  <p:hf sldNum="0" hdr="0" ftr="0" dt="0"/>
   <p:txStyles>
     <p:titleStyle>
-      <a:defPPr lvl="0" marR="0" rtl="0" algn="l">
+      <a:defPPr marR="0" lvl="0" algn="l" rtl="0">
         <a:lnSpc>
           <a:spcPct val="100000"/>
         </a:lnSpc>
@@ -6272,7 +6572,7 @@
           <a:spcPts val="0"/>
         </a:spcAft>
       </a:defPPr>
-      <a:lvl1pPr lvl="0" marR="0" rtl="0" algn="l">
+      <a:lvl1pPr marR="0" lvl="0" algn="l" rtl="0">
         <a:lnSpc>
           <a:spcPct val="100000"/>
         </a:lnSpc>
@@ -6286,7 +6586,7 @@
           <a:srgbClr val="000000"/>
         </a:buClr>
         <a:buFont typeface="Arial"/>
-        <a:defRPr b="0" i="0" spc="0" sz="1400" u="none" cap="none" strike="noStrike">
+        <a:defRPr sz="1400" b="0" i="0" u="none" strike="noStrike" cap="none" spc="0">
           <a:solidFill>
             <a:srgbClr val="000000"/>
           </a:solidFill>
@@ -6296,7 +6596,7 @@
           <a:sym typeface="Arial"/>
         </a:defRPr>
       </a:lvl1pPr>
-      <a:lvl2pPr lvl="1" marR="0" rtl="0" algn="l">
+      <a:lvl2pPr marR="0" lvl="1" algn="l" rtl="0">
         <a:lnSpc>
           <a:spcPct val="100000"/>
         </a:lnSpc>
@@ -6310,7 +6610,7 @@
           <a:srgbClr val="000000"/>
         </a:buClr>
         <a:buFont typeface="Arial"/>
-        <a:defRPr b="0" i="0" spc="0" sz="1400" u="none" cap="none" strike="noStrike">
+        <a:defRPr sz="1400" b="0" i="0" u="none" strike="noStrike" cap="none" spc="0">
           <a:solidFill>
             <a:srgbClr val="000000"/>
           </a:solidFill>
@@ -6320,7 +6620,7 @@
           <a:sym typeface="Arial"/>
         </a:defRPr>
       </a:lvl2pPr>
-      <a:lvl3pPr lvl="2" marR="0" rtl="0" algn="l">
+      <a:lvl3pPr marR="0" lvl="2" algn="l" rtl="0">
         <a:lnSpc>
           <a:spcPct val="100000"/>
         </a:lnSpc>
@@ -6334,7 +6634,7 @@
           <a:srgbClr val="000000"/>
         </a:buClr>
         <a:buFont typeface="Arial"/>
-        <a:defRPr b="0" i="0" spc="0" sz="1400" u="none" cap="none" strike="noStrike">
+        <a:defRPr sz="1400" b="0" i="0" u="none" strike="noStrike" cap="none" spc="0">
           <a:solidFill>
             <a:srgbClr val="000000"/>
           </a:solidFill>
@@ -6344,7 +6644,7 @@
           <a:sym typeface="Arial"/>
         </a:defRPr>
       </a:lvl3pPr>
-      <a:lvl4pPr lvl="3" marR="0" rtl="0" algn="l">
+      <a:lvl4pPr marR="0" lvl="3" algn="l" rtl="0">
         <a:lnSpc>
           <a:spcPct val="100000"/>
         </a:lnSpc>
@@ -6358,7 +6658,7 @@
           <a:srgbClr val="000000"/>
         </a:buClr>
         <a:buFont typeface="Arial"/>
-        <a:defRPr b="0" i="0" spc="0" sz="1400" u="none" cap="none" strike="noStrike">
+        <a:defRPr sz="1400" b="0" i="0" u="none" strike="noStrike" cap="none" spc="0">
           <a:solidFill>
             <a:srgbClr val="000000"/>
           </a:solidFill>
@@ -6368,7 +6668,7 @@
           <a:sym typeface="Arial"/>
         </a:defRPr>
       </a:lvl4pPr>
-      <a:lvl5pPr lvl="4" marR="0" rtl="0" algn="l">
+      <a:lvl5pPr marR="0" lvl="4" algn="l" rtl="0">
         <a:lnSpc>
           <a:spcPct val="100000"/>
         </a:lnSpc>
@@ -6382,7 +6682,7 @@
           <a:srgbClr val="000000"/>
         </a:buClr>
         <a:buFont typeface="Arial"/>
-        <a:defRPr b="0" i="0" spc="0" sz="1400" u="none" cap="none" strike="noStrike">
+        <a:defRPr sz="1400" b="0" i="0" u="none" strike="noStrike" cap="none" spc="0">
           <a:solidFill>
             <a:srgbClr val="000000"/>
           </a:solidFill>
@@ -6392,7 +6692,7 @@
           <a:sym typeface="Arial"/>
         </a:defRPr>
       </a:lvl5pPr>
-      <a:lvl6pPr lvl="5" marR="0" rtl="0" algn="l">
+      <a:lvl6pPr marR="0" lvl="5" algn="l" rtl="0">
         <a:lnSpc>
           <a:spcPct val="100000"/>
         </a:lnSpc>
@@ -6406,7 +6706,7 @@
           <a:srgbClr val="000000"/>
         </a:buClr>
         <a:buFont typeface="Arial"/>
-        <a:defRPr b="0" i="0" spc="0" sz="1400" u="none" cap="none" strike="noStrike">
+        <a:defRPr sz="1400" b="0" i="0" u="none" strike="noStrike" cap="none" spc="0">
           <a:solidFill>
             <a:srgbClr val="000000"/>
           </a:solidFill>
@@ -6416,7 +6716,7 @@
           <a:sym typeface="Arial"/>
         </a:defRPr>
       </a:lvl6pPr>
-      <a:lvl7pPr lvl="6" marR="0" rtl="0" algn="l">
+      <a:lvl7pPr marR="0" lvl="6" algn="l" rtl="0">
         <a:lnSpc>
           <a:spcPct val="100000"/>
         </a:lnSpc>
@@ -6430,7 +6730,7 @@
           <a:srgbClr val="000000"/>
         </a:buClr>
         <a:buFont typeface="Arial"/>
-        <a:defRPr b="0" i="0" spc="0" sz="1400" u="none" cap="none" strike="noStrike">
+        <a:defRPr sz="1400" b="0" i="0" u="none" strike="noStrike" cap="none" spc="0">
           <a:solidFill>
             <a:srgbClr val="000000"/>
           </a:solidFill>
@@ -6440,7 +6740,7 @@
           <a:sym typeface="Arial"/>
         </a:defRPr>
       </a:lvl7pPr>
-      <a:lvl8pPr lvl="7" marR="0" rtl="0" algn="l">
+      <a:lvl8pPr marR="0" lvl="7" algn="l" rtl="0">
         <a:lnSpc>
           <a:spcPct val="100000"/>
         </a:lnSpc>
@@ -6454,7 +6754,7 @@
           <a:srgbClr val="000000"/>
         </a:buClr>
         <a:buFont typeface="Arial"/>
-        <a:defRPr b="0" i="0" spc="0" sz="1400" u="none" cap="none" strike="noStrike">
+        <a:defRPr sz="1400" b="0" i="0" u="none" strike="noStrike" cap="none" spc="0">
           <a:solidFill>
             <a:srgbClr val="000000"/>
           </a:solidFill>
@@ -6464,7 +6764,7 @@
           <a:sym typeface="Arial"/>
         </a:defRPr>
       </a:lvl8pPr>
-      <a:lvl9pPr lvl="8" marR="0" rtl="0" algn="l">
+      <a:lvl9pPr marR="0" lvl="8" algn="l" rtl="0">
         <a:lnSpc>
           <a:spcPct val="100000"/>
         </a:lnSpc>
@@ -6478,7 +6778,7 @@
           <a:srgbClr val="000000"/>
         </a:buClr>
         <a:buFont typeface="Arial"/>
-        <a:defRPr b="0" i="0" spc="0" sz="1400" u="none" cap="none" strike="noStrike">
+        <a:defRPr sz="1400" b="0" i="0" u="none" strike="noStrike" cap="none" spc="0">
           <a:solidFill>
             <a:srgbClr val="000000"/>
           </a:solidFill>
@@ -6490,7 +6790,7 @@
       </a:lvl9pPr>
     </p:titleStyle>
     <p:bodyStyle>
-      <a:defPPr lvl="0" marR="0" rtl="0" algn="l">
+      <a:defPPr marR="0" lvl="0" algn="l" rtl="0">
         <a:lnSpc>
           <a:spcPct val="100000"/>
         </a:lnSpc>
@@ -6501,7 +6801,7 @@
           <a:spcPts val="0"/>
         </a:spcAft>
       </a:defPPr>
-      <a:lvl1pPr lvl="0" marR="0" rtl="0" algn="l">
+      <a:lvl1pPr marR="0" lvl="0" algn="l" rtl="0">
         <a:lnSpc>
           <a:spcPct val="100000"/>
         </a:lnSpc>
@@ -6515,7 +6815,7 @@
           <a:srgbClr val="000000"/>
         </a:buClr>
         <a:buFont typeface="Arial"/>
-        <a:defRPr b="0" i="0" spc="0" sz="1400" u="none" cap="none" strike="noStrike">
+        <a:defRPr sz="1400" b="0" i="0" u="none" strike="noStrike" cap="none" spc="0">
           <a:solidFill>
             <a:srgbClr val="000000"/>
           </a:solidFill>
@@ -6525,7 +6825,7 @@
           <a:sym typeface="Arial"/>
         </a:defRPr>
       </a:lvl1pPr>
-      <a:lvl2pPr lvl="1" marR="0" rtl="0" algn="l">
+      <a:lvl2pPr marR="0" lvl="1" algn="l" rtl="0">
         <a:lnSpc>
           <a:spcPct val="100000"/>
         </a:lnSpc>
@@ -6539,7 +6839,7 @@
           <a:srgbClr val="000000"/>
         </a:buClr>
         <a:buFont typeface="Arial"/>
-        <a:defRPr b="0" i="0" spc="0" sz="1400" u="none" cap="none" strike="noStrike">
+        <a:defRPr sz="1400" b="0" i="0" u="none" strike="noStrike" cap="none" spc="0">
           <a:solidFill>
             <a:srgbClr val="000000"/>
           </a:solidFill>
@@ -6549,7 +6849,7 @@
           <a:sym typeface="Arial"/>
         </a:defRPr>
       </a:lvl2pPr>
-      <a:lvl3pPr lvl="2" marR="0" rtl="0" algn="l">
+      <a:lvl3pPr marR="0" lvl="2" algn="l" rtl="0">
         <a:lnSpc>
           <a:spcPct val="100000"/>
         </a:lnSpc>
@@ -6563,7 +6863,7 @@
           <a:srgbClr val="000000"/>
         </a:buClr>
         <a:buFont typeface="Arial"/>
-        <a:defRPr b="0" i="0" spc="0" sz="1400" u="none" cap="none" strike="noStrike">
+        <a:defRPr sz="1400" b="0" i="0" u="none" strike="noStrike" cap="none" spc="0">
           <a:solidFill>
             <a:srgbClr val="000000"/>
           </a:solidFill>
@@ -6573,7 +6873,7 @@
           <a:sym typeface="Arial"/>
         </a:defRPr>
       </a:lvl3pPr>
-      <a:lvl4pPr lvl="3" marR="0" rtl="0" algn="l">
+      <a:lvl4pPr marR="0" lvl="3" algn="l" rtl="0">
         <a:lnSpc>
           <a:spcPct val="100000"/>
         </a:lnSpc>
@@ -6587,7 +6887,7 @@
           <a:srgbClr val="000000"/>
         </a:buClr>
         <a:buFont typeface="Arial"/>
-        <a:defRPr b="0" i="0" spc="0" sz="1400" u="none" cap="none" strike="noStrike">
+        <a:defRPr sz="1400" b="0" i="0" u="none" strike="noStrike" cap="none" spc="0">
           <a:solidFill>
             <a:srgbClr val="000000"/>
           </a:solidFill>
@@ -6597,7 +6897,7 @@
           <a:sym typeface="Arial"/>
         </a:defRPr>
       </a:lvl4pPr>
-      <a:lvl5pPr lvl="4" marR="0" rtl="0" algn="l">
+      <a:lvl5pPr marR="0" lvl="4" algn="l" rtl="0">
         <a:lnSpc>
           <a:spcPct val="100000"/>
         </a:lnSpc>
@@ -6611,7 +6911,7 @@
           <a:srgbClr val="000000"/>
         </a:buClr>
         <a:buFont typeface="Arial"/>
-        <a:defRPr b="0" i="0" spc="0" sz="1400" u="none" cap="none" strike="noStrike">
+        <a:defRPr sz="1400" b="0" i="0" u="none" strike="noStrike" cap="none" spc="0">
           <a:solidFill>
             <a:srgbClr val="000000"/>
           </a:solidFill>
@@ -6621,7 +6921,7 @@
           <a:sym typeface="Arial"/>
         </a:defRPr>
       </a:lvl5pPr>
-      <a:lvl6pPr lvl="5" marR="0" rtl="0" algn="l">
+      <a:lvl6pPr marR="0" lvl="5" algn="l" rtl="0">
         <a:lnSpc>
           <a:spcPct val="100000"/>
         </a:lnSpc>
@@ -6635,7 +6935,7 @@
           <a:srgbClr val="000000"/>
         </a:buClr>
         <a:buFont typeface="Arial"/>
-        <a:defRPr b="0" i="0" spc="0" sz="1400" u="none" cap="none" strike="noStrike">
+        <a:defRPr sz="1400" b="0" i="0" u="none" strike="noStrike" cap="none" spc="0">
           <a:solidFill>
             <a:srgbClr val="000000"/>
           </a:solidFill>
@@ -6645,7 +6945,7 @@
           <a:sym typeface="Arial"/>
         </a:defRPr>
       </a:lvl6pPr>
-      <a:lvl7pPr lvl="6" marR="0" rtl="0" algn="l">
+      <a:lvl7pPr marR="0" lvl="6" algn="l" rtl="0">
         <a:lnSpc>
           <a:spcPct val="100000"/>
         </a:lnSpc>
@@ -6659,7 +6959,7 @@
           <a:srgbClr val="000000"/>
         </a:buClr>
         <a:buFont typeface="Arial"/>
-        <a:defRPr b="0" i="0" spc="0" sz="1400" u="none" cap="none" strike="noStrike">
+        <a:defRPr sz="1400" b="0" i="0" u="none" strike="noStrike" cap="none" spc="0">
           <a:solidFill>
             <a:srgbClr val="000000"/>
           </a:solidFill>
@@ -6669,7 +6969,7 @@
           <a:sym typeface="Arial"/>
         </a:defRPr>
       </a:lvl7pPr>
-      <a:lvl8pPr lvl="7" marR="0" rtl="0" algn="l">
+      <a:lvl8pPr marR="0" lvl="7" algn="l" rtl="0">
         <a:lnSpc>
           <a:spcPct val="100000"/>
         </a:lnSpc>
@@ -6683,7 +6983,7 @@
           <a:srgbClr val="000000"/>
         </a:buClr>
         <a:buFont typeface="Arial"/>
-        <a:defRPr b="0" i="0" spc="0" sz="1400" u="none" cap="none" strike="noStrike">
+        <a:defRPr sz="1400" b="0" i="0" u="none" strike="noStrike" cap="none" spc="0">
           <a:solidFill>
             <a:srgbClr val="000000"/>
           </a:solidFill>
@@ -6693,7 +6993,7 @@
           <a:sym typeface="Arial"/>
         </a:defRPr>
       </a:lvl8pPr>
-      <a:lvl9pPr lvl="8" marR="0" rtl="0" algn="l">
+      <a:lvl9pPr marR="0" lvl="8" algn="l" rtl="0">
         <a:lnSpc>
           <a:spcPct val="100000"/>
         </a:lnSpc>
@@ -6707,7 +7007,7 @@
           <a:srgbClr val="000000"/>
         </a:buClr>
         <a:buFont typeface="Arial"/>
-        <a:defRPr b="0" i="0" spc="0" sz="1400" u="none" cap="none" strike="noStrike">
+        <a:defRPr sz="1400" b="0" i="0" u="none" strike="noStrike" cap="none" spc="0">
           <a:solidFill>
             <a:srgbClr val="000000"/>
           </a:solidFill>
@@ -6719,7 +7019,7 @@
       </a:lvl9pPr>
     </p:bodyStyle>
     <p:otherStyle>
-      <a:defPPr lvl="0" marR="0" rtl="0" algn="l">
+      <a:defPPr marR="0" lvl="0" algn="l" rtl="0">
         <a:lnSpc>
           <a:spcPct val="100000"/>
         </a:lnSpc>
@@ -6730,7 +7030,7 @@
           <a:spcPts val="0"/>
         </a:spcAft>
       </a:defPPr>
-      <a:lvl1pPr lvl="0" marR="0" rtl="0" algn="l">
+      <a:lvl1pPr marR="0" lvl="0" algn="l" rtl="0">
         <a:lnSpc>
           <a:spcPct val="100000"/>
         </a:lnSpc>
@@ -6744,7 +7044,7 @@
           <a:srgbClr val="000000"/>
         </a:buClr>
         <a:buFont typeface="Arial"/>
-        <a:defRPr b="0" i="0" spc="0" sz="1400" u="none" cap="none" strike="noStrike">
+        <a:defRPr sz="1400" b="0" i="0" u="none" strike="noStrike" cap="none" spc="0">
           <a:solidFill>
             <a:srgbClr val="000000"/>
           </a:solidFill>
@@ -6754,7 +7054,7 @@
           <a:sym typeface="Arial"/>
         </a:defRPr>
       </a:lvl1pPr>
-      <a:lvl2pPr lvl="1" marR="0" rtl="0" algn="l">
+      <a:lvl2pPr marR="0" lvl="1" algn="l" rtl="0">
         <a:lnSpc>
           <a:spcPct val="100000"/>
         </a:lnSpc>
@@ -6768,7 +7068,7 @@
           <a:srgbClr val="000000"/>
         </a:buClr>
         <a:buFont typeface="Arial"/>
-        <a:defRPr b="0" i="0" spc="0" sz="1400" u="none" cap="none" strike="noStrike">
+        <a:defRPr sz="1400" b="0" i="0" u="none" strike="noStrike" cap="none" spc="0">
           <a:solidFill>
             <a:srgbClr val="000000"/>
           </a:solidFill>
@@ -6778,7 +7078,7 @@
           <a:sym typeface="Arial"/>
         </a:defRPr>
       </a:lvl2pPr>
-      <a:lvl3pPr lvl="2" marR="0" rtl="0" algn="l">
+      <a:lvl3pPr marR="0" lvl="2" algn="l" rtl="0">
         <a:lnSpc>
           <a:spcPct val="100000"/>
         </a:lnSpc>
@@ -6792,7 +7092,7 @@
           <a:srgbClr val="000000"/>
         </a:buClr>
         <a:buFont typeface="Arial"/>
-        <a:defRPr b="0" i="0" spc="0" sz="1400" u="none" cap="none" strike="noStrike">
+        <a:defRPr sz="1400" b="0" i="0" u="none" strike="noStrike" cap="none" spc="0">
           <a:solidFill>
             <a:srgbClr val="000000"/>
           </a:solidFill>
@@ -6802,7 +7102,7 @@
           <a:sym typeface="Arial"/>
         </a:defRPr>
       </a:lvl3pPr>
-      <a:lvl4pPr lvl="3" marR="0" rtl="0" algn="l">
+      <a:lvl4pPr marR="0" lvl="3" algn="l" rtl="0">
         <a:lnSpc>
           <a:spcPct val="100000"/>
         </a:lnSpc>
@@ -6816,7 +7116,7 @@
           <a:srgbClr val="000000"/>
         </a:buClr>
         <a:buFont typeface="Arial"/>
-        <a:defRPr b="0" i="0" spc="0" sz="1400" u="none" cap="none" strike="noStrike">
+        <a:defRPr sz="1400" b="0" i="0" u="none" strike="noStrike" cap="none" spc="0">
           <a:solidFill>
             <a:srgbClr val="000000"/>
           </a:solidFill>
@@ -6826,7 +7126,7 @@
           <a:sym typeface="Arial"/>
         </a:defRPr>
       </a:lvl4pPr>
-      <a:lvl5pPr lvl="4" marR="0" rtl="0" algn="l">
+      <a:lvl5pPr marR="0" lvl="4" algn="l" rtl="0">
         <a:lnSpc>
           <a:spcPct val="100000"/>
         </a:lnSpc>
@@ -6840,7 +7140,7 @@
           <a:srgbClr val="000000"/>
         </a:buClr>
         <a:buFont typeface="Arial"/>
-        <a:defRPr b="0" i="0" spc="0" sz="1400" u="none" cap="none" strike="noStrike">
+        <a:defRPr sz="1400" b="0" i="0" u="none" strike="noStrike" cap="none" spc="0">
           <a:solidFill>
             <a:srgbClr val="000000"/>
           </a:solidFill>
@@ -6850,7 +7150,7 @@
           <a:sym typeface="Arial"/>
         </a:defRPr>
       </a:lvl5pPr>
-      <a:lvl6pPr lvl="5" marR="0" rtl="0" algn="l">
+      <a:lvl6pPr marR="0" lvl="5" algn="l" rtl="0">
         <a:lnSpc>
           <a:spcPct val="100000"/>
         </a:lnSpc>
@@ -6864,7 +7164,7 @@
           <a:srgbClr val="000000"/>
         </a:buClr>
         <a:buFont typeface="Arial"/>
-        <a:defRPr b="0" i="0" spc="0" sz="1400" u="none" cap="none" strike="noStrike">
+        <a:defRPr sz="1400" b="0" i="0" u="none" strike="noStrike" cap="none" spc="0">
           <a:solidFill>
             <a:srgbClr val="000000"/>
           </a:solidFill>
@@ -6874,7 +7174,7 @@
           <a:sym typeface="Arial"/>
         </a:defRPr>
       </a:lvl6pPr>
-      <a:lvl7pPr lvl="6" marR="0" rtl="0" algn="l">
+      <a:lvl7pPr marR="0" lvl="6" algn="l" rtl="0">
         <a:lnSpc>
           <a:spcPct val="100000"/>
         </a:lnSpc>
@@ -6888,7 +7188,7 @@
           <a:srgbClr val="000000"/>
         </a:buClr>
         <a:buFont typeface="Arial"/>
-        <a:defRPr b="0" i="0" spc="0" sz="1400" u="none" cap="none" strike="noStrike">
+        <a:defRPr sz="1400" b="0" i="0" u="none" strike="noStrike" cap="none" spc="0">
           <a:solidFill>
             <a:srgbClr val="000000"/>
           </a:solidFill>
@@ -6898,7 +7198,7 @@
           <a:sym typeface="Arial"/>
         </a:defRPr>
       </a:lvl7pPr>
-      <a:lvl8pPr lvl="7" marR="0" rtl="0" algn="l">
+      <a:lvl8pPr marR="0" lvl="7" algn="l" rtl="0">
         <a:lnSpc>
           <a:spcPct val="100000"/>
         </a:lnSpc>
@@ -6912,7 +7212,7 @@
           <a:srgbClr val="000000"/>
         </a:buClr>
         <a:buFont typeface="Arial"/>
-        <a:defRPr b="0" i="0" spc="0" sz="1400" u="none" cap="none" strike="noStrike">
+        <a:defRPr sz="1400" b="0" i="0" u="none" strike="noStrike" cap="none" spc="0">
           <a:solidFill>
             <a:srgbClr val="000000"/>
           </a:solidFill>
@@ -6922,7 +7222,7 @@
           <a:sym typeface="Arial"/>
         </a:defRPr>
       </a:lvl8pPr>
-      <a:lvl9pPr lvl="8" marR="0" rtl="0" algn="l">
+      <a:lvl9pPr marR="0" lvl="8" algn="l" rtl="0">
         <a:lnSpc>
           <a:spcPct val="100000"/>
         </a:lnSpc>
@@ -6936,7 +7236,7 @@
           <a:srgbClr val="000000"/>
         </a:buClr>
         <a:buFont typeface="Arial"/>
-        <a:defRPr b="0" i="0" spc="0" sz="1400" u="none" cap="none" strike="noStrike">
+        <a:defRPr sz="1400" b="0" i="0" u="none" strike="noStrike" cap="none" spc="0">
           <a:solidFill>
             <a:srgbClr val="000000"/>
           </a:solidFill>
@@ -6952,11 +7252,11 @@
 </file>
 
 <file path=ppt/slides/slide1.xml><?xml version="1.0" encoding="utf-8"?>
-<p:sld xmlns:a="http://schemas.openxmlformats.org/drawingml/2006/main" xmlns:r="http://schemas.openxmlformats.org/officeDocument/2006/relationships" xmlns:mc="http://schemas.openxmlformats.org/markup-compatibility/2006" xmlns:mv="urn:schemas-microsoft-com:mac:vml" xmlns:p="http://schemas.openxmlformats.org/presentationml/2006/main" xmlns:c="http://schemas.openxmlformats.org/drawingml/2006/chart" xmlns:dgm="http://schemas.openxmlformats.org/drawingml/2006/diagram" xmlns:o="urn:schemas-microsoft-com:office:office" xmlns:v="urn:schemas-microsoft-com:vml" xmlns:pvml="urn:schemas-microsoft-com:office:powerpoint" xmlns:com="http://schemas.openxmlformats.org/drawingml/2006/compatibility" xmlns:p14="http://schemas.microsoft.com/office/powerpoint/2010/main" xmlns:p15="http://schemas.microsoft.com/office/powerpoint/2012/main" xmlns:ahyp="http://schemas.microsoft.com/office/drawing/2018/hyperlinkcolor">
+<p:sld xmlns:a="http://schemas.openxmlformats.org/drawingml/2006/main" xmlns:r="http://schemas.openxmlformats.org/officeDocument/2006/relationships" xmlns:p="http://schemas.openxmlformats.org/presentationml/2006/main">
   <p:cSld>
     <p:spTree>
       <p:nvGrpSpPr>
-        <p:cNvPr id="53" name="Shape 53"/>
+        <p:cNvPr id="1" name="Shape 53"/>
         <p:cNvGrpSpPr/>
         <p:nvPr/>
       </p:nvGrpSpPr>
@@ -6976,8 +7276,8 @@
         </p:nvSpPr>
         <p:spPr>
           <a:xfrm>
-            <a:off x="146600" y="2902694"/>
-            <a:ext cx="8760000" cy="2003700"/>
+            <a:off x="0" y="2715523"/>
+            <a:ext cx="9144000" cy="2427977"/>
           </a:xfrm>
           <a:prstGeom prst="rect">
             <a:avLst/>
@@ -6988,30 +7288,30 @@
           </a:ln>
         </p:spPr>
         <p:txBody>
-          <a:bodyPr anchorCtr="0" anchor="t" bIns="91425" lIns="91425" spcFirstLastPara="1" rIns="91425" wrap="square" tIns="91425">
+          <a:bodyPr spcFirstLastPara="1" wrap="square" lIns="91425" tIns="91425" rIns="91425" bIns="91425" anchor="t" anchorCtr="0">
             <a:noAutofit/>
           </a:bodyPr>
           <a:lstStyle/>
           <a:p>
-            <a:pPr indent="0" lvl="0" marL="0" rtl="0" algn="l">
-              <a:spcBef>
-                <a:spcPts val="0"/>
-              </a:spcBef>
-              <a:spcAft>
-                <a:spcPts val="0"/>
-              </a:spcAft>
-              <a:buNone/>
-            </a:pPr>
-            <a:r>
-              <a:rPr lang="en-GB" sz="2100">
+            <a:pPr marL="0" lvl="0" indent="0" algn="l" rtl="0">
+              <a:spcBef>
+                <a:spcPts val="0"/>
+              </a:spcBef>
+              <a:spcAft>
+                <a:spcPts val="0"/>
+              </a:spcAft>
+              <a:buNone/>
+            </a:pPr>
+            <a:r>
+              <a:rPr lang="en-GB" sz="2100" dirty="0">
                 <a:latin typeface="Google Sans Flex SemiBold"/>
                 <a:ea typeface="Google Sans Flex SemiBold"/>
                 <a:cs typeface="Google Sans Flex SemiBold"/>
                 <a:sym typeface="Google Sans Flex SemiBold"/>
               </a:rPr>
-              <a:t>Team Details</a:t>
-            </a:r>
-            <a:endParaRPr sz="2100">
+              <a:t>Team Details </a:t>
+            </a:r>
+            <a:endParaRPr sz="2100" dirty="0">
               <a:latin typeface="Google Sans Flex SemiBold"/>
               <a:ea typeface="Google Sans Flex SemiBold"/>
               <a:cs typeface="Google Sans Flex SemiBold"/>
@@ -7019,19 +7319,16 @@
             </a:endParaRPr>
           </a:p>
           <a:p>
-            <a:pPr indent="0" lvl="0" marL="0" rtl="0" algn="l">
-              <a:spcBef>
-                <a:spcPts val="0"/>
-              </a:spcBef>
-              <a:spcAft>
-                <a:spcPts val="0"/>
-              </a:spcAft>
-              <a:buNone/>
-            </a:pPr>
-            <a:r>
-              <a:t/>
-            </a:r>
-            <a:endParaRPr sz="1800">
+            <a:pPr marL="0" lvl="0" indent="0" algn="l" rtl="0">
+              <a:spcBef>
+                <a:spcPts val="0"/>
+              </a:spcBef>
+              <a:spcAft>
+                <a:spcPts val="0"/>
+              </a:spcAft>
+              <a:buNone/>
+            </a:pPr>
+            <a:endParaRPr sz="1800" dirty="0">
               <a:latin typeface="Google Sans Flex Medium"/>
               <a:ea typeface="Google Sans Flex Medium"/>
               <a:cs typeface="Google Sans Flex Medium"/>
@@ -7039,7 +7336,7 @@
             </a:endParaRPr>
           </a:p>
           <a:p>
-            <a:pPr indent="-342900" lvl="1" marL="914400" rtl="0" algn="l">
+            <a:pPr marL="914400" lvl="1" indent="-342900" algn="l" rtl="0">
               <a:spcBef>
                 <a:spcPts val="0"/>
               </a:spcBef>
@@ -7052,9 +7349,14 @@
               <a:defRPr sz="1600" b="1"/>
             </a:pPr>
             <a:r>
-              <a:t>Team name: CargoClear</a:t>
-            </a:r>
-            <a:endParaRPr sz="1800">
+              <a:rPr dirty="0"/>
+              <a:t>Team name: </a:t>
+            </a:r>
+            <a:r>
+              <a:rPr dirty="0" err="1"/>
+              <a:t>CargoClear</a:t>
+            </a:r>
+            <a:endParaRPr sz="1800" dirty="0">
               <a:latin typeface="Google Sans Flex"/>
               <a:ea typeface="Google Sans Flex"/>
               <a:cs typeface="Google Sans Flex"/>
@@ -7062,7 +7364,7 @@
             </a:endParaRPr>
           </a:p>
           <a:p>
-            <a:pPr indent="-342900" lvl="1" marL="914400" rtl="0" algn="l">
+            <a:pPr marL="914400" lvl="1" indent="-342900" algn="l" rtl="0">
               <a:spcBef>
                 <a:spcPts val="0"/>
               </a:spcBef>
@@ -7075,9 +7377,14 @@
               <a:defRPr sz="1600" b="1"/>
             </a:pPr>
             <a:r>
-              <a:t>Team leader name: Ravi Mule (Team Member: Nikhil Pande)</a:t>
-            </a:r>
-            <a:endParaRPr sz="1800">
+              <a:rPr dirty="0"/>
+              <a:t>Team leader name: Ravi Mule</a:t>
+            </a:r>
+            <a:r>
+              <a:rPr lang="en-US" dirty="0"/>
+              <a:t> and Nikhil Pande</a:t>
+            </a:r>
+            <a:endParaRPr sz="1800" dirty="0">
               <a:latin typeface="Google Sans Flex"/>
               <a:ea typeface="Google Sans Flex"/>
               <a:cs typeface="Google Sans Flex"/>
@@ -7085,7 +7392,7 @@
             </a:endParaRPr>
           </a:p>
           <a:p>
-            <a:pPr indent="-342900" lvl="1" marL="914400" rtl="0" algn="l">
+            <a:pPr marL="914400" lvl="1" indent="-342900" algn="l" rtl="0">
               <a:spcBef>
                 <a:spcPts val="0"/>
               </a:spcBef>
@@ -7098,9 +7405,22 @@
               <a:defRPr sz="1400" b="0"/>
             </a:pPr>
             <a:r>
-              <a:t>Problem Statement: Cross-border trade documentation is error-prone, manually audited, and highly vulnerable to misdeclared tariff classifications, resulting in 3–7 day port delays, costly customs penalties, and missed trade remedy duties. Customs House Agents (CHAs) need an intelligent, automated pre-submission assessment workbench to reconcile multi-document trade packages with cryptographic auditability before filing declarations.</a:t>
-            </a:r>
-            <a:endParaRPr sz="1800">
+              <a:rPr b="1" dirty="0"/>
+              <a:t>Problem Statement: </a:t>
+            </a:r>
+            <a:r>
+              <a:rPr dirty="0"/>
+              <a:t>Cross-border trade documentation is error-prone, manually audited, and highly vulnerable to </a:t>
+            </a:r>
+            <a:r>
+              <a:rPr dirty="0" err="1"/>
+              <a:t>misdeclared</a:t>
+            </a:r>
+            <a:r>
+              <a:rPr dirty="0"/>
+              <a:t> tariff classifications, resulting in 3–7 day port delays, costly customs penalties, and missed trade remedy duties. Customs House Agents (CHAs) need an intelligent, automated pre-submission assessment workbench to reconcile multi-document trade packages with cryptographic auditability before filing declarations.</a:t>
+            </a:r>
+            <a:endParaRPr sz="1800" dirty="0">
               <a:latin typeface="Google Sans Flex"/>
               <a:ea typeface="Google Sans Flex"/>
               <a:cs typeface="Google Sans Flex"/>
@@ -7108,19 +7428,16 @@
             </a:endParaRPr>
           </a:p>
           <a:p>
-            <a:pPr indent="0" lvl="0" marL="0" rtl="0" algn="l">
-              <a:spcBef>
-                <a:spcPts val="0"/>
-              </a:spcBef>
-              <a:spcAft>
-                <a:spcPts val="0"/>
-              </a:spcAft>
-              <a:buNone/>
-            </a:pPr>
-            <a:r>
-              <a:t/>
-            </a:r>
-            <a:endParaRPr sz="1800">
+            <a:pPr marL="0" lvl="0" indent="0" algn="l" rtl="0">
+              <a:spcBef>
+                <a:spcPts val="0"/>
+              </a:spcBef>
+              <a:spcAft>
+                <a:spcPts val="0"/>
+              </a:spcAft>
+              <a:buNone/>
+            </a:pPr>
+            <a:endParaRPr sz="1800" dirty="0">
               <a:latin typeface="Google Sans Flex Medium"/>
               <a:ea typeface="Google Sans Flex Medium"/>
               <a:cs typeface="Google Sans Flex Medium"/>
@@ -7167,7 +7484,7 @@
           <a:blip r:embed="rId4">
             <a:alphaModFix/>
           </a:blip>
-          <a:srcRect b="98001" l="0" r="0" t="0"/>
+          <a:srcRect b="98001"/>
           <a:stretch/>
         </p:blipFill>
         <p:spPr>
@@ -7182,6 +7499,36 @@
           <a:ln>
             <a:noFill/>
           </a:ln>
+        </p:spPr>
+      </p:pic>
+      <p:pic>
+        <p:nvPicPr>
+          <p:cNvPr id="3" name="Picture 2">
+            <a:extLst>
+              <a:ext uri="{FF2B5EF4-FFF2-40B4-BE49-F238E27FC236}">
+                <a16:creationId xmlns:a16="http://schemas.microsoft.com/office/drawing/2014/main" id="{11BC9BD4-A4C5-4BD5-D9C2-AB5E8FE55DC7}"/>
+              </a:ext>
+            </a:extLst>
+          </p:cNvPr>
+          <p:cNvPicPr>
+            <a:picLocks noChangeAspect="1"/>
+          </p:cNvPicPr>
+          <p:nvPr/>
+        </p:nvPicPr>
+        <p:blipFill>
+          <a:blip r:embed="rId5"/>
+          <a:stretch>
+            <a:fillRect/>
+          </a:stretch>
+        </p:blipFill>
+        <p:spPr>
+          <a:xfrm>
+            <a:off x="3449383" y="3277256"/>
+            <a:ext cx="400106" cy="352474"/>
+          </a:xfrm>
+          <a:prstGeom prst="rect">
+            <a:avLst/>
+          </a:prstGeom>
         </p:spPr>
       </p:pic>
     </p:spTree>
@@ -7193,299 +7540,11 @@
 </file>
 
 <file path=ppt/slides/slide10.xml><?xml version="1.0" encoding="utf-8"?>
-<p:sld xmlns:a="http://schemas.openxmlformats.org/drawingml/2006/main" xmlns:r="http://schemas.openxmlformats.org/officeDocument/2006/relationships" xmlns:mc="http://schemas.openxmlformats.org/markup-compatibility/2006" xmlns:mv="urn:schemas-microsoft-com:mac:vml" xmlns:p="http://schemas.openxmlformats.org/presentationml/2006/main" xmlns:c="http://schemas.openxmlformats.org/drawingml/2006/chart" xmlns:dgm="http://schemas.openxmlformats.org/drawingml/2006/diagram" xmlns:o="urn:schemas-microsoft-com:office:office" xmlns:v="urn:schemas-microsoft-com:vml" xmlns:pvml="urn:schemas-microsoft-com:office:powerpoint" xmlns:com="http://schemas.openxmlformats.org/drawingml/2006/compatibility" xmlns:p14="http://schemas.microsoft.com/office/powerpoint/2010/main" xmlns:p15="http://schemas.microsoft.com/office/powerpoint/2012/main" xmlns:ahyp="http://schemas.microsoft.com/office/drawing/2018/hyperlinkcolor">
+<p:sld xmlns:a="http://schemas.openxmlformats.org/drawingml/2006/main" xmlns:r="http://schemas.openxmlformats.org/officeDocument/2006/relationships" xmlns:p="http://schemas.openxmlformats.org/presentationml/2006/main">
   <p:cSld>
     <p:spTree>
       <p:nvGrpSpPr>
-        <p:cNvPr id="123" name="Shape 123"/>
-        <p:cNvGrpSpPr/>
-        <p:nvPr/>
-      </p:nvGrpSpPr>
-      <p:grpSpPr>
-        <a:xfrm>
-          <a:off x="0" y="0"/>
-          <a:ext cx="0" cy="0"/>
-          <a:chOff x="0" y="0"/>
-          <a:chExt cx="0" cy="0"/>
-        </a:xfrm>
-      </p:grpSpPr>
-      <p:pic>
-        <p:nvPicPr>
-          <p:cNvPr id="124" name="Google Shape;124;p22" title="Frame 144.png"/>
-          <p:cNvPicPr preferRelativeResize="0"/>
-          <p:nvPr/>
-        </p:nvPicPr>
-        <p:blipFill rotWithShape="1">
-          <a:blip r:embed="rId3">
-            <a:alphaModFix/>
-          </a:blip>
-          <a:srcRect b="98001" l="0" r="0" t="0"/>
-          <a:stretch/>
-        </p:blipFill>
-        <p:spPr>
-          <a:xfrm>
-            <a:off x="0" y="5093562"/>
-            <a:ext cx="9144000" cy="54275"/>
-          </a:xfrm>
-          <a:prstGeom prst="rect">
-            <a:avLst/>
-          </a:prstGeom>
-          <a:noFill/>
-          <a:ln>
-            <a:noFill/>
-          </a:ln>
-        </p:spPr>
-      </p:pic>
-      <p:pic>
-        <p:nvPicPr>
-          <p:cNvPr id="125" name="Google Shape;125;p22" title="Group 427319979.png"/>
-          <p:cNvPicPr preferRelativeResize="0"/>
-          <p:nvPr/>
-        </p:nvPicPr>
-        <p:blipFill>
-          <a:blip r:embed="rId4">
-            <a:alphaModFix/>
-          </a:blip>
-          <a:stretch>
-            <a:fillRect/>
-          </a:stretch>
-        </p:blipFill>
-        <p:spPr>
-          <a:xfrm>
-            <a:off x="0" y="1"/>
-            <a:ext cx="9144000" cy="507359"/>
-          </a:xfrm>
-          <a:prstGeom prst="rect">
-            <a:avLst/>
-          </a:prstGeom>
-          <a:noFill/>
-          <a:ln>
-            <a:noFill/>
-          </a:ln>
-        </p:spPr>
-      </p:pic>
-      <p:sp>
-        <p:nvSpPr>
-          <p:cNvPr id="126" name="Google Shape;126;p22"/>
-          <p:cNvSpPr/>
-          <p:nvPr/>
-        </p:nvSpPr>
-        <p:spPr>
-          <a:xfrm>
-            <a:off x="-29250" y="5071875"/>
-            <a:ext cx="9173400" cy="97800"/>
-          </a:xfrm>
-          <a:prstGeom prst="rect">
-            <a:avLst/>
-          </a:prstGeom>
-          <a:solidFill>
-            <a:schemeClr val="dk1"/>
-          </a:solidFill>
-          <a:ln>
-            <a:noFill/>
-          </a:ln>
-        </p:spPr>
-        <p:txBody>
-          <a:bodyPr anchorCtr="0" anchor="ctr" bIns="91425" lIns="91425" spcFirstLastPara="1" rIns="91425" wrap="square" tIns="91425">
-            <a:noAutofit/>
-          </a:bodyPr>
-          <a:lstStyle/>
-          <a:p>
-            <a:pPr indent="0" lvl="0" marL="0" rtl="0" algn="ctr">
-              <a:spcBef>
-                <a:spcPts val="0"/>
-              </a:spcBef>
-              <a:spcAft>
-                <a:spcPts val="0"/>
-              </a:spcAft>
-              <a:buNone/>
-            </a:pPr>
-            <a:r>
-              <a:t/>
-            </a:r>
-            <a:endParaRPr/>
-          </a:p>
-        </p:txBody>
-      </p:sp>
-      <p:sp>
-        <p:nvSpPr>
-          <p:cNvPr id="127" name="Google Shape;127;p22"/>
-          <p:cNvSpPr txBox="1"/>
-          <p:nvPr/>
-        </p:nvSpPr>
-        <p:spPr>
-          <a:xfrm>
-            <a:off x="265350" y="663825"/>
-            <a:ext cx="8943000" cy="561900"/>
-          </a:xfrm>
-          <a:prstGeom prst="rect">
-            <a:avLst/>
-          </a:prstGeom>
-          <a:noFill/>
-          <a:ln>
-            <a:noFill/>
-          </a:ln>
-        </p:spPr>
-        <p:txBody>
-          <a:bodyPr anchorCtr="0" anchor="t" bIns="91425" lIns="91425" spcFirstLastPara="1" rIns="91425" wrap="square" tIns="91425">
-            <a:noAutofit/>
-          </a:bodyPr>
-          <a:lstStyle/>
-          <a:p>
-            <a:pPr indent="0" lvl="0" marL="0" rtl="0" algn="l">
-              <a:spcBef>
-                <a:spcPts val="0"/>
-              </a:spcBef>
-              <a:spcAft>
-                <a:spcPts val="0"/>
-              </a:spcAft>
-              <a:buNone/>
-            </a:pPr>
-            <a:r>
-              <a:rPr lang="en-GB" sz="1600">
-                <a:latin typeface="Google Sans Flex Medium"/>
-                <a:ea typeface="Google Sans Flex Medium"/>
-                <a:cs typeface="Google Sans Flex Medium"/>
-                <a:sym typeface="Google Sans Flex Medium"/>
-              </a:rPr>
-              <a:t>Estimated implementation cost (optional)</a:t>
-            </a:r>
-            <a:endParaRPr sz="1600">
-              <a:latin typeface="Google Sans Flex Medium"/>
-              <a:ea typeface="Google Sans Flex Medium"/>
-              <a:cs typeface="Google Sans Flex Medium"/>
-              <a:sym typeface="Google Sans Flex Medium"/>
-            </a:endParaRPr>
-          </a:p>
-        </p:txBody>
-      </p:sp>
-      <p:sp>
-        <p:nvSpPr>
-          <p:cNvPr id="128" name="TextBox 127"/>
-          <p:cNvSpPr txBox="1"/>
-          <p:nvPr/>
-        </p:nvSpPr>
-        <p:spPr>
-          <a:xfrm>
-            <a:off x="731520" y="1645920"/>
-            <a:ext cx="10515600" cy="4754880"/>
-          </a:xfrm>
-          <a:prstGeom prst="rect">
-            <a:avLst/>
-          </a:prstGeom>
-          <a:noFill/>
-        </p:spPr>
-        <p:txBody>
-          <a:bodyPr wrap="square" tIns="91440" bIns="91440">
-            <a:spAutoFit/>
-          </a:bodyPr>
-          <a:lstStyle/>
-          <a:p>
-            <a:pPr>
-              <a:spcAft>
-                <a:spcPts val="600"/>
-              </a:spcAft>
-              <a:defRPr sz="1600" b="1">
-                <a:solidFill>
-                  <a:srgbClr val="0F172A"/>
-                </a:solidFill>
-              </a:defRPr>
-            </a:pPr>
-            <a:r>
-              <a:t>Serverless Pay-Per-Use Cost Model (Zero Idle Costs):</a:t>
-            </a:r>
-          </a:p>
-          <a:p>
-            <a:pPr>
-              <a:spcAft>
-                <a:spcPts val="600"/>
-              </a:spcAft>
-              <a:defRPr sz="1200" b="0">
-                <a:solidFill>
-                  <a:srgbClr val="1E293B"/>
-                </a:solidFill>
-              </a:defRPr>
-            </a:pPr>
-            <a:r>
-              <a:t>• Cloud Run Frontend &amp; API Services: Deployed with --min-instances 0 (scale-to-zero), delivering $0.00 idle compute cost. Monthly compute for 5,000 assessments falls within Cloud Run Free Tier (2M requests/mo free). Projected compute: $0.00 – $2.00 / month.</a:t>
-            </a:r>
-          </a:p>
-          <a:p>
-            <a:pPr>
-              <a:spcAft>
-                <a:spcPts val="600"/>
-              </a:spcAft>
-              <a:defRPr sz="1200" b="0">
-                <a:solidFill>
-                  <a:srgbClr val="1E293B"/>
-                </a:solidFill>
-              </a:defRPr>
-            </a:pPr>
-            <a:r>
-              <a:t>• Google Gemini 2.5 Flash Inference: Pricing: $0.075 / 1M input tokens, $0.30 / 1M output tokens. An average 4-document trade bundle consumes ~4,500 input tokens and ~1,800 output tokens. Cost per bundle assessment: ~$0.00088 (&lt; 0.1¢). For 5,000 monthly shipments: ~$4.40 / month.</a:t>
-            </a:r>
-          </a:p>
-          <a:p>
-            <a:pPr>
-              <a:spcAft>
-                <a:spcPts val="600"/>
-              </a:spcAft>
-              <a:defRPr sz="1200" b="0">
-                <a:solidFill>
-                  <a:srgbClr val="1E293B"/>
-                </a:solidFill>
-              </a:defRPr>
-            </a:pPr>
-            <a:r>
-              <a:t>• Cloud Storage &amp; Firestore Native Ledger: Document storage (10 MB/shipment) + Firestore native user registration and audit ledger read/writes. Projected cost: ~$5.00 – $10.00 / month.</a:t>
-            </a:r>
-          </a:p>
-          <a:p>
-            <a:pPr>
-              <a:spcAft>
-                <a:spcPts val="600"/>
-              </a:spcAft>
-              <a:defRPr sz="1200" b="0">
-                <a:solidFill>
-                  <a:srgbClr val="1E293B"/>
-                </a:solidFill>
-              </a:defRPr>
-            </a:pPr>
-            <a:r>
-              <a:t>• BigQuery Reference Queries: Tariff schedule lookups cached in-memory with BigQuery vector search. Projected cost: ~$2.00 – $5.00 / month.</a:t>
-            </a:r>
-          </a:p>
-          <a:p>
-            <a:pPr>
-              <a:spcAft>
-                <a:spcPts val="600"/>
-              </a:spcAft>
-              <a:defRPr sz="1200" b="0">
-                <a:solidFill>
-                  <a:srgbClr val="1E293B"/>
-                </a:solidFill>
-              </a:defRPr>
-            </a:pPr>
-            <a:r>
-              <a:t>• Total Estimated Monthly Operating Cost: Estimated total for 5,000 full shipment bundle assessments: ~$11.40 – $21.40 / month (less than $0.005 per clearance assessment!).</a:t>
-            </a:r>
-          </a:p>
-        </p:txBody>
-      </p:sp>
-    </p:spTree>
-  </p:cSld>
-  <p:clrMapOvr>
-    <a:masterClrMapping/>
-  </p:clrMapOvr>
-</p:sld>
-</file>
-
-<file path=ppt/slides/slide11.xml><?xml version="1.0" encoding="utf-8"?>
-<p:sld xmlns:a="http://schemas.openxmlformats.org/drawingml/2006/main" xmlns:r="http://schemas.openxmlformats.org/officeDocument/2006/relationships" xmlns:mc="http://schemas.openxmlformats.org/markup-compatibility/2006" xmlns:mv="urn:schemas-microsoft-com:mac:vml" xmlns:p="http://schemas.openxmlformats.org/presentationml/2006/main" xmlns:c="http://schemas.openxmlformats.org/drawingml/2006/chart" xmlns:dgm="http://schemas.openxmlformats.org/drawingml/2006/diagram" xmlns:o="urn:schemas-microsoft-com:office:office" xmlns:v="urn:schemas-microsoft-com:vml" xmlns:pvml="urn:schemas-microsoft-com:office:powerpoint" xmlns:com="http://schemas.openxmlformats.org/drawingml/2006/compatibility" xmlns:p14="http://schemas.microsoft.com/office/powerpoint/2010/main" xmlns:p15="http://schemas.microsoft.com/office/powerpoint/2012/main" xmlns:ahyp="http://schemas.microsoft.com/office/drawing/2018/hyperlinkcolor">
-  <p:cSld>
-    <p:spTree>
-      <p:nvGrpSpPr>
-        <p:cNvPr id="131" name="Shape 131"/>
+        <p:cNvPr id="1" name="Shape 131"/>
         <p:cNvGrpSpPr/>
         <p:nvPr/>
       </p:nvGrpSpPr>
@@ -7507,7 +7566,7 @@
           <a:blip r:embed="rId3">
             <a:alphaModFix/>
           </a:blip>
-          <a:srcRect b="98001" l="0" r="0" t="0"/>
+          <a:srcRect b="98001"/>
           <a:stretch/>
         </p:blipFill>
         <p:spPr>
@@ -7574,23 +7633,20 @@
           </a:ln>
         </p:spPr>
         <p:txBody>
-          <a:bodyPr anchorCtr="0" anchor="ctr" bIns="91425" lIns="91425" spcFirstLastPara="1" rIns="91425" wrap="square" tIns="91425">
+          <a:bodyPr spcFirstLastPara="1" wrap="square" lIns="91425" tIns="91425" rIns="91425" bIns="91425" anchor="ctr" anchorCtr="0">
             <a:noAutofit/>
           </a:bodyPr>
           <a:lstStyle/>
           <a:p>
-            <a:pPr indent="0" lvl="0" marL="0" rtl="0" algn="ctr">
-              <a:spcBef>
-                <a:spcPts val="0"/>
-              </a:spcBef>
-              <a:spcAft>
-                <a:spcPts val="0"/>
-              </a:spcAft>
-              <a:buNone/>
-            </a:pPr>
-            <a:r>
-              <a:t/>
-            </a:r>
+            <a:pPr marL="0" lvl="0" indent="0" algn="ctr" rtl="0">
+              <a:spcBef>
+                <a:spcPts val="0"/>
+              </a:spcBef>
+              <a:spcAft>
+                <a:spcPts val="0"/>
+              </a:spcAft>
+              <a:buNone/>
+            </a:pPr>
             <a:endParaRPr/>
           </a:p>
         </p:txBody>
@@ -7615,12 +7671,12 @@
           </a:ln>
         </p:spPr>
         <p:txBody>
-          <a:bodyPr anchorCtr="0" anchor="t" bIns="91425" lIns="91425" spcFirstLastPara="1" rIns="91425" wrap="square" tIns="91425">
+          <a:bodyPr spcFirstLastPara="1" wrap="square" lIns="91425" tIns="91425" rIns="91425" bIns="91425" anchor="t" anchorCtr="0">
             <a:noAutofit/>
           </a:bodyPr>
           <a:lstStyle/>
           <a:p>
-            <a:pPr indent="0" lvl="0" marL="0" rtl="0" algn="l">
+            <a:pPr marL="0" lvl="0" indent="0" algn="l" rtl="0">
               <a:spcBef>
                 <a:spcPts val="0"/>
               </a:spcBef>
@@ -7655,8 +7711,8 @@
         </p:nvSpPr>
         <p:spPr>
           <a:xfrm>
-            <a:off x="731520" y="1645920"/>
-            <a:ext cx="10515600" cy="4754880"/>
+            <a:off x="380455" y="1284390"/>
+            <a:ext cx="7743009" cy="2662267"/>
           </a:xfrm>
           <a:prstGeom prst="rect">
             <a:avLst/>
@@ -7680,6 +7736,7 @@
               </a:defRPr>
             </a:pPr>
             <a:r>
+              <a:rPr dirty="0"/>
               <a:t>Live Prototype Capabilities &amp; Visual Verification:</a:t>
             </a:r>
           </a:p>
@@ -7695,7 +7752,8 @@
               </a:defRPr>
             </a:pPr>
             <a:r>
-              <a:t>• 1. Commercial Auth &amp; Tenant Dashboard: Google Workspace SSO plus Cloud Firestore commercial registration (salted PBKDF2-HMAC-SHA256 password hashing), user profile menu with 3-way theme controls, and recent bundles table.</a:t>
+              <a:rPr dirty="0"/>
+              <a:t>• 1. Commercial SSO &amp; Tenant Dashboard: Google Workspace SSO integration, role-based licensing (Licensed CHA, Operator, Auditor), tenant scoping, and recent bundles table with status pills.</a:t>
             </a:r>
           </a:p>
           <a:p>
@@ -7710,7 +7768,8 @@
               </a:defRPr>
             </a:pPr>
             <a:r>
-              <a:t>• 2. Tripartite Clearance Workbench: Next.js 15 workbench with 3-way layout switcher (Split, Viewer focus, Decision focus), auto-hiding PDF view during analysis with automated focus scrolling to live progress bar.</a:t>
+              <a:rPr dirty="0"/>
+              <a:t>• 2. Interactive 3-Pane Clearance Workbench: Multi-document bundle view with side-by-side high-resolution PDF rendering, document switcher, and live upload progress.</a:t>
             </a:r>
           </a:p>
           <a:p>
@@ -7725,7 +7784,8 @@
               </a:defRPr>
             </a:pPr>
             <a:r>
-              <a:t>• 3. Pre-Upload Staging &amp; Classification: Portaled document classification modal (z-[9999]) enabling customs brokers to categorize document types prior to ingestion.</a:t>
+              <a:rPr dirty="0"/>
+              <a:t>• 3. Visual Evidence Grounding &amp; Bounding Boxes: Direct coordinate overlays on trade documents highlighting discrepancies (e.g. invoice gross weight vs. packing list weight) and chemistry mismatches.</a:t>
             </a:r>
           </a:p>
           <a:p>
@@ -7740,7 +7800,8 @@
               </a:defRPr>
             </a:pPr>
             <a:r>
-              <a:t>• 4. Visual Evidence Grounding &amp; Bounding Boxes: Direct coordinate overlays on trade documents highlighting discrepancies (e.g. invoice gross weight vs. packing list weight) and chemistry mismatches.</a:t>
+              <a:rPr dirty="0"/>
+              <a:t>• 4. Tariff Valuation &amp; Anti-Dumping Calculation: Itemized duty calculation card detailing BCD, Social Welfare Surcharge, and Anti-Dumping Duties with legal notification citations.</a:t>
             </a:r>
           </a:p>
           <a:p>
@@ -7755,7 +7816,16 @@
               </a:defRPr>
             </a:pPr>
             <a:r>
-              <a:t>• 5. Tariff Valuation, In-Place Override &amp; Audit Ledger: Itemized duty calculation card (BCD, SWS, ADD), authorized override modal with instant zero-model recomputation, and cryptographically signed SHA-256 audit log timeline.</a:t>
+              <a:rPr dirty="0"/>
+              <a:t>• 5. Human-in-the-Loop Corrections &amp; Audit Trail: Authorized override modal with instant zero-model </a:t>
+            </a:r>
+            <a:r>
+              <a:rPr dirty="0" err="1"/>
+              <a:t>recomputation</a:t>
+            </a:r>
+            <a:r>
+              <a:rPr dirty="0"/>
+              <a:t> and cryptographically signed SHA-256 audit log timeline.</a:t>
             </a:r>
           </a:p>
         </p:txBody>
@@ -7768,12 +7838,12 @@
 </p:sld>
 </file>
 
-<file path=ppt/slides/slide12.xml><?xml version="1.0" encoding="utf-8"?>
-<p:sld xmlns:a="http://schemas.openxmlformats.org/drawingml/2006/main" xmlns:r="http://schemas.openxmlformats.org/officeDocument/2006/relationships" xmlns:mc="http://schemas.openxmlformats.org/markup-compatibility/2006" xmlns:mv="urn:schemas-microsoft-com:mac:vml" xmlns:p="http://schemas.openxmlformats.org/presentationml/2006/main" xmlns:c="http://schemas.openxmlformats.org/drawingml/2006/chart" xmlns:dgm="http://schemas.openxmlformats.org/drawingml/2006/diagram" xmlns:o="urn:schemas-microsoft-com:office:office" xmlns:v="urn:schemas-microsoft-com:vml" xmlns:pvml="urn:schemas-microsoft-com:office:powerpoint" xmlns:com="http://schemas.openxmlformats.org/drawingml/2006/compatibility" xmlns:p14="http://schemas.microsoft.com/office/powerpoint/2010/main" xmlns:p15="http://schemas.microsoft.com/office/powerpoint/2012/main" xmlns:ahyp="http://schemas.microsoft.com/office/drawing/2018/hyperlinkcolor">
+<file path=ppt/slides/slide11.xml><?xml version="1.0" encoding="utf-8"?>
+<p:sld xmlns:a="http://schemas.openxmlformats.org/drawingml/2006/main" xmlns:r="http://schemas.openxmlformats.org/officeDocument/2006/relationships" xmlns:p="http://schemas.openxmlformats.org/presentationml/2006/main">
   <p:cSld>
     <p:spTree>
       <p:nvGrpSpPr>
-        <p:cNvPr id="139" name="Shape 139"/>
+        <p:cNvPr id="1" name="Shape 139"/>
         <p:cNvGrpSpPr/>
         <p:nvPr/>
       </p:nvGrpSpPr>
@@ -7795,7 +7865,7 @@
           <a:blip r:embed="rId3">
             <a:alphaModFix/>
           </a:blip>
-          <a:srcRect b="98001" l="0" r="0" t="0"/>
+          <a:srcRect b="98001"/>
           <a:stretch/>
         </p:blipFill>
         <p:spPr>
@@ -7862,23 +7932,20 @@
           </a:ln>
         </p:spPr>
         <p:txBody>
-          <a:bodyPr anchorCtr="0" anchor="ctr" bIns="91425" lIns="91425" spcFirstLastPara="1" rIns="91425" wrap="square" tIns="91425">
+          <a:bodyPr spcFirstLastPara="1" wrap="square" lIns="91425" tIns="91425" rIns="91425" bIns="91425" anchor="ctr" anchorCtr="0">
             <a:noAutofit/>
           </a:bodyPr>
           <a:lstStyle/>
           <a:p>
-            <a:pPr indent="0" lvl="0" marL="0" rtl="0" algn="ctr">
-              <a:spcBef>
-                <a:spcPts val="0"/>
-              </a:spcBef>
-              <a:spcAft>
-                <a:spcPts val="0"/>
-              </a:spcAft>
-              <a:buNone/>
-            </a:pPr>
-            <a:r>
-              <a:t/>
-            </a:r>
+            <a:pPr marL="0" lvl="0" indent="0" algn="ctr" rtl="0">
+              <a:spcBef>
+                <a:spcPts val="0"/>
+              </a:spcBef>
+              <a:spcAft>
+                <a:spcPts val="0"/>
+              </a:spcAft>
+              <a:buNone/>
+            </a:pPr>
             <a:endParaRPr/>
           </a:p>
         </p:txBody>
@@ -7903,12 +7970,12 @@
           </a:ln>
         </p:spPr>
         <p:txBody>
-          <a:bodyPr anchorCtr="0" anchor="t" bIns="91425" lIns="91425" spcFirstLastPara="1" rIns="91425" wrap="square" tIns="91425">
+          <a:bodyPr spcFirstLastPara="1" wrap="square" lIns="91425" tIns="91425" rIns="91425" bIns="91425" anchor="t" anchorCtr="0">
             <a:noAutofit/>
           </a:bodyPr>
           <a:lstStyle/>
           <a:p>
-            <a:pPr indent="0" lvl="0" marL="0" rtl="0" algn="l">
+            <a:pPr marL="0" lvl="0" indent="0" algn="l" rtl="0">
               <a:spcBef>
                 <a:spcPts val="0"/>
               </a:spcBef>
@@ -8101,12 +8168,12 @@
 </p:sld>
 </file>
 
-<file path=ppt/slides/slide13.xml><?xml version="1.0" encoding="utf-8"?>
-<p:sld xmlns:a="http://schemas.openxmlformats.org/drawingml/2006/main" xmlns:r="http://schemas.openxmlformats.org/officeDocument/2006/relationships" xmlns:mc="http://schemas.openxmlformats.org/markup-compatibility/2006" xmlns:mv="urn:schemas-microsoft-com:mac:vml" xmlns:p="http://schemas.openxmlformats.org/presentationml/2006/main" xmlns:c="http://schemas.openxmlformats.org/drawingml/2006/chart" xmlns:dgm="http://schemas.openxmlformats.org/drawingml/2006/diagram" xmlns:o="urn:schemas-microsoft-com:office:office" xmlns:v="urn:schemas-microsoft-com:vml" xmlns:pvml="urn:schemas-microsoft-com:office:powerpoint" xmlns:com="http://schemas.openxmlformats.org/drawingml/2006/compatibility" xmlns:p14="http://schemas.microsoft.com/office/powerpoint/2010/main" xmlns:p15="http://schemas.microsoft.com/office/powerpoint/2012/main" xmlns:ahyp="http://schemas.microsoft.com/office/drawing/2018/hyperlinkcolor">
+<file path=ppt/slides/slide12.xml><?xml version="1.0" encoding="utf-8"?>
+<p:sld xmlns:a="http://schemas.openxmlformats.org/drawingml/2006/main" xmlns:r="http://schemas.openxmlformats.org/officeDocument/2006/relationships" xmlns:p="http://schemas.openxmlformats.org/presentationml/2006/main">
   <p:cSld>
     <p:spTree>
       <p:nvGrpSpPr>
-        <p:cNvPr id="147" name="Shape 147"/>
+        <p:cNvPr id="1" name="Shape 147"/>
         <p:cNvGrpSpPr/>
         <p:nvPr/>
       </p:nvGrpSpPr>
@@ -8128,7 +8195,7 @@
           <a:blip r:embed="rId3">
             <a:alphaModFix/>
           </a:blip>
-          <a:srcRect b="98001" l="0" r="0" t="0"/>
+          <a:srcRect b="98001"/>
           <a:stretch/>
         </p:blipFill>
         <p:spPr>
@@ -8195,23 +8262,20 @@
           </a:ln>
         </p:spPr>
         <p:txBody>
-          <a:bodyPr anchorCtr="0" anchor="ctr" bIns="91425" lIns="91425" spcFirstLastPara="1" rIns="91425" wrap="square" tIns="91425">
+          <a:bodyPr spcFirstLastPara="1" wrap="square" lIns="91425" tIns="91425" rIns="91425" bIns="91425" anchor="ctr" anchorCtr="0">
             <a:noAutofit/>
           </a:bodyPr>
           <a:lstStyle/>
           <a:p>
-            <a:pPr indent="0" lvl="0" marL="0" rtl="0" algn="ctr">
-              <a:spcBef>
-                <a:spcPts val="0"/>
-              </a:spcBef>
-              <a:spcAft>
-                <a:spcPts val="0"/>
-              </a:spcAft>
-              <a:buNone/>
-            </a:pPr>
-            <a:r>
-              <a:t/>
-            </a:r>
+            <a:pPr marL="0" lvl="0" indent="0" algn="ctr" rtl="0">
+              <a:spcBef>
+                <a:spcPts val="0"/>
+              </a:spcBef>
+              <a:spcAft>
+                <a:spcPts val="0"/>
+              </a:spcAft>
+              <a:buNone/>
+            </a:pPr>
             <a:endParaRPr/>
           </a:p>
         </p:txBody>
@@ -8236,12 +8300,12 @@
           </a:ln>
         </p:spPr>
         <p:txBody>
-          <a:bodyPr anchorCtr="0" anchor="t" bIns="91425" lIns="91425" spcFirstLastPara="1" rIns="91425" wrap="square" tIns="91425">
+          <a:bodyPr spcFirstLastPara="1" wrap="square" lIns="91425" tIns="91425" rIns="91425" bIns="91425" anchor="t" anchorCtr="0">
             <a:noAutofit/>
           </a:bodyPr>
           <a:lstStyle/>
           <a:p>
-            <a:pPr indent="0" lvl="0" marL="0" rtl="0" algn="l">
+            <a:pPr marL="0" lvl="0" indent="0" algn="l" rtl="0">
               <a:spcBef>
                 <a:spcPts val="0"/>
               </a:spcBef>
@@ -8389,12 +8453,12 @@
 </p:sld>
 </file>
 
-<file path=ppt/slides/slide14.xml><?xml version="1.0" encoding="utf-8"?>
-<p:sld xmlns:a="http://schemas.openxmlformats.org/drawingml/2006/main" xmlns:r="http://schemas.openxmlformats.org/officeDocument/2006/relationships" xmlns:mc="http://schemas.openxmlformats.org/markup-compatibility/2006" xmlns:mv="urn:schemas-microsoft-com:mac:vml" xmlns:p="http://schemas.openxmlformats.org/presentationml/2006/main" xmlns:c="http://schemas.openxmlformats.org/drawingml/2006/chart" xmlns:dgm="http://schemas.openxmlformats.org/drawingml/2006/diagram" xmlns:o="urn:schemas-microsoft-com:office:office" xmlns:v="urn:schemas-microsoft-com:vml" xmlns:pvml="urn:schemas-microsoft-com:office:powerpoint" xmlns:com="http://schemas.openxmlformats.org/drawingml/2006/compatibility" xmlns:p14="http://schemas.microsoft.com/office/powerpoint/2010/main" xmlns:p15="http://schemas.microsoft.com/office/powerpoint/2012/main" xmlns:ahyp="http://schemas.microsoft.com/office/drawing/2018/hyperlinkcolor">
+<file path=ppt/slides/slide13.xml><?xml version="1.0" encoding="utf-8"?>
+<p:sld xmlns:a="http://schemas.openxmlformats.org/drawingml/2006/main" xmlns:r="http://schemas.openxmlformats.org/officeDocument/2006/relationships" xmlns:p="http://schemas.openxmlformats.org/presentationml/2006/main">
   <p:cSld>
     <p:spTree>
       <p:nvGrpSpPr>
-        <p:cNvPr id="155" name="Shape 155"/>
+        <p:cNvPr id="1" name="Shape 155"/>
         <p:cNvGrpSpPr/>
         <p:nvPr/>
       </p:nvGrpSpPr>
@@ -8416,7 +8480,7 @@
           <a:blip r:embed="rId3">
             <a:alphaModFix/>
           </a:blip>
-          <a:srcRect b="98001" l="0" r="0" t="0"/>
+          <a:srcRect b="98001"/>
           <a:stretch/>
         </p:blipFill>
         <p:spPr>
@@ -8483,23 +8547,20 @@
           </a:ln>
         </p:spPr>
         <p:txBody>
-          <a:bodyPr anchorCtr="0" anchor="ctr" bIns="91425" lIns="91425" spcFirstLastPara="1" rIns="91425" wrap="square" tIns="91425">
+          <a:bodyPr spcFirstLastPara="1" wrap="square" lIns="91425" tIns="91425" rIns="91425" bIns="91425" anchor="ctr" anchorCtr="0">
             <a:noAutofit/>
           </a:bodyPr>
           <a:lstStyle/>
           <a:p>
-            <a:pPr indent="0" lvl="0" marL="0" rtl="0" algn="ctr">
-              <a:spcBef>
-                <a:spcPts val="0"/>
-              </a:spcBef>
-              <a:spcAft>
-                <a:spcPts val="0"/>
-              </a:spcAft>
-              <a:buNone/>
-            </a:pPr>
-            <a:r>
-              <a:t/>
-            </a:r>
+            <a:pPr marL="0" lvl="0" indent="0" algn="ctr" rtl="0">
+              <a:spcBef>
+                <a:spcPts val="0"/>
+              </a:spcBef>
+              <a:spcAft>
+                <a:spcPts val="0"/>
+              </a:spcAft>
+              <a:buNone/>
+            </a:pPr>
             <a:endParaRPr/>
           </a:p>
         </p:txBody>
@@ -8524,12 +8585,12 @@
           </a:ln>
         </p:spPr>
         <p:txBody>
-          <a:bodyPr anchorCtr="0" anchor="t" bIns="91425" lIns="91425" spcFirstLastPara="1" rIns="91425" wrap="square" tIns="91425">
+          <a:bodyPr spcFirstLastPara="1" wrap="square" lIns="91425" tIns="91425" rIns="91425" bIns="91425" anchor="t" anchorCtr="0">
             <a:noAutofit/>
           </a:bodyPr>
           <a:lstStyle/>
           <a:p>
-            <a:pPr indent="0" lvl="0" marL="0" rtl="0" algn="l">
+            <a:pPr marL="0" lvl="0" indent="0" algn="l" rtl="0">
               <a:spcBef>
                 <a:spcPts val="0"/>
               </a:spcBef>
@@ -8555,18 +8616,15 @@
             </a:endParaRPr>
           </a:p>
           <a:p>
-            <a:pPr indent="0" lvl="0" marL="0" rtl="0" algn="l">
-              <a:spcBef>
-                <a:spcPts val="0"/>
-              </a:spcBef>
-              <a:spcAft>
-                <a:spcPts val="0"/>
-              </a:spcAft>
-              <a:buNone/>
-            </a:pPr>
-            <a:r>
-              <a:t/>
-            </a:r>
+            <a:pPr marL="0" lvl="0" indent="0" algn="l" rtl="0">
+              <a:spcBef>
+                <a:spcPts val="0"/>
+              </a:spcBef>
+              <a:spcAft>
+                <a:spcPts val="0"/>
+              </a:spcAft>
+              <a:buNone/>
+            </a:pPr>
             <a:endParaRPr sz="1600">
               <a:latin typeface="Google Sans Flex Medium"/>
               <a:ea typeface="Google Sans Flex Medium"/>
@@ -8575,7 +8633,7 @@
             </a:endParaRPr>
           </a:p>
           <a:p>
-            <a:pPr indent="-317500" lvl="0" marL="457200" rtl="0" algn="l">
+            <a:pPr marL="457200" lvl="0" indent="-317500" algn="l" rtl="0">
               <a:spcBef>
                 <a:spcPts val="0"/>
               </a:spcBef>
@@ -8588,7 +8646,7 @@
               <a:defRPr sz="1600" b="1"/>
             </a:pPr>
             <a:r>
-              <a:t>GitHub Public Repository: https://github.com/ravimule93/cargoclear (Branch: improvement-plan)</a:t>
+              <a:t>GitHub Public Repository: https://github.com/ravimule93/cargoclear</a:t>
             </a:r>
             <a:endParaRPr>
               <a:latin typeface="Google Sans Flex Medium"/>
@@ -8598,7 +8656,7 @@
             </a:endParaRPr>
           </a:p>
           <a:p>
-            <a:pPr indent="-317500" lvl="0" marL="457200" rtl="0" algn="l">
+            <a:pPr marL="457200" lvl="0" indent="-317500" algn="l" rtl="0">
               <a:spcBef>
                 <a:spcPts val="0"/>
               </a:spcBef>
@@ -8611,7 +8669,7 @@
               <a:defRPr sz="1600" b="1"/>
             </a:pPr>
             <a:r>
-              <a:t>Demo Video Link (3 Minutes): [DEMO VIDEO LINK — Insert URL here] (Narrative script in submission dossier)</a:t>
+              <a:t>Demo Video Link (3 Minutes): submission/CargoClear_AI_Builder_Cup_Demo.mp4</a:t>
             </a:r>
             <a:endParaRPr>
               <a:latin typeface="Google Sans Flex Medium"/>
@@ -8621,7 +8679,7 @@
             </a:endParaRPr>
           </a:p>
           <a:p>
-            <a:pPr indent="-317500" lvl="0" marL="457200" rtl="0" algn="l">
+            <a:pPr marL="457200" lvl="0" indent="-317500" algn="l" rtl="0">
               <a:spcBef>
                 <a:spcPts val="0"/>
               </a:spcBef>
@@ -8634,7 +8692,7 @@
               <a:defRPr sz="1600" b="1"/>
             </a:pPr>
             <a:r>
-              <a:t>Final Product Link: https://cargoclear-app.web.app (UI: https://cargoclear-ui-448522365737.asia-south1.run.app)</a:t>
+              <a:t>Final Product Link: https://cargoclear-app.web.app (UI: https://cargoclear-ui-5ho4zmc74q-el.a.run.app)</a:t>
             </a:r>
             <a:endParaRPr>
               <a:latin typeface="Google Sans Flex Medium"/>
@@ -8644,18 +8702,15 @@
             </a:endParaRPr>
           </a:p>
           <a:p>
-            <a:pPr indent="0" lvl="0" marL="0" rtl="0" algn="l">
-              <a:spcBef>
-                <a:spcPts val="0"/>
-              </a:spcBef>
-              <a:spcAft>
-                <a:spcPts val="0"/>
-              </a:spcAft>
-              <a:buNone/>
-            </a:pPr>
-            <a:r>
-              <a:t/>
-            </a:r>
+            <a:pPr marL="0" lvl="0" indent="0" algn="l" rtl="0">
+              <a:spcBef>
+                <a:spcPts val="0"/>
+              </a:spcBef>
+              <a:spcAft>
+                <a:spcPts val="0"/>
+              </a:spcAft>
+              <a:buNone/>
+            </a:pPr>
             <a:endParaRPr sz="1600">
               <a:latin typeface="Google Sans Flex Medium"/>
               <a:ea typeface="Google Sans Flex Medium"/>
@@ -8673,12 +8728,12 @@
 </p:sld>
 </file>
 
-<file path=ppt/slides/slide15.xml><?xml version="1.0" encoding="utf-8"?>
-<p:sld xmlns:a="http://schemas.openxmlformats.org/drawingml/2006/main" xmlns:r="http://schemas.openxmlformats.org/officeDocument/2006/relationships" xmlns:mc="http://schemas.openxmlformats.org/markup-compatibility/2006" xmlns:mv="urn:schemas-microsoft-com:mac:vml" xmlns:p="http://schemas.openxmlformats.org/presentationml/2006/main" xmlns:c="http://schemas.openxmlformats.org/drawingml/2006/chart" xmlns:dgm="http://schemas.openxmlformats.org/drawingml/2006/diagram" xmlns:o="urn:schemas-microsoft-com:office:office" xmlns:v="urn:schemas-microsoft-com:vml" xmlns:pvml="urn:schemas-microsoft-com:office:powerpoint" xmlns:com="http://schemas.openxmlformats.org/drawingml/2006/compatibility" xmlns:p14="http://schemas.microsoft.com/office/powerpoint/2010/main" xmlns:p15="http://schemas.microsoft.com/office/powerpoint/2012/main" xmlns:ahyp="http://schemas.microsoft.com/office/drawing/2018/hyperlinkcolor">
+<file path=ppt/slides/slide14.xml><?xml version="1.0" encoding="utf-8"?>
+<p:sld xmlns:a="http://schemas.openxmlformats.org/drawingml/2006/main" xmlns:r="http://schemas.openxmlformats.org/officeDocument/2006/relationships" xmlns:p="http://schemas.openxmlformats.org/presentationml/2006/main">
   <p:cSld>
     <p:spTree>
       <p:nvGrpSpPr>
-        <p:cNvPr id="163" name="Shape 163"/>
+        <p:cNvPr id="1" name="Shape 163"/>
         <p:cNvGrpSpPr/>
         <p:nvPr/>
       </p:nvGrpSpPr>
@@ -8700,7 +8755,7 @@
           <a:blip r:embed="rId3">
             <a:alphaModFix/>
           </a:blip>
-          <a:srcRect b="98001" l="0" r="0" t="0"/>
+          <a:srcRect b="98001"/>
           <a:stretch/>
         </p:blipFill>
         <p:spPr>
@@ -8767,23 +8822,20 @@
           </a:ln>
         </p:spPr>
         <p:txBody>
-          <a:bodyPr anchorCtr="0" anchor="ctr" bIns="91425" lIns="91425" spcFirstLastPara="1" rIns="91425" wrap="square" tIns="91425">
+          <a:bodyPr spcFirstLastPara="1" wrap="square" lIns="91425" tIns="91425" rIns="91425" bIns="91425" anchor="ctr" anchorCtr="0">
             <a:noAutofit/>
           </a:bodyPr>
           <a:lstStyle/>
           <a:p>
-            <a:pPr indent="0" lvl="0" marL="0" rtl="0" algn="ctr">
-              <a:spcBef>
-                <a:spcPts val="0"/>
-              </a:spcBef>
-              <a:spcAft>
-                <a:spcPts val="0"/>
-              </a:spcAft>
-              <a:buNone/>
-            </a:pPr>
-            <a:r>
-              <a:t/>
-            </a:r>
+            <a:pPr marL="0" lvl="0" indent="0" algn="ctr" rtl="0">
+              <a:spcBef>
+                <a:spcPts val="0"/>
+              </a:spcBef>
+              <a:spcAft>
+                <a:spcPts val="0"/>
+              </a:spcAft>
+              <a:buNone/>
+            </a:pPr>
             <a:endParaRPr/>
           </a:p>
         </p:txBody>
@@ -8796,8 +8848,8 @@
         </p:nvSpPr>
         <p:spPr>
           <a:xfrm>
-            <a:off x="914400" y="1828800"/>
-            <a:ext cx="10058400" cy="4114800"/>
+            <a:off x="914400" y="1079296"/>
+            <a:ext cx="7625443" cy="2785378"/>
           </a:xfrm>
           <a:prstGeom prst="rect">
             <a:avLst/>
@@ -8821,7 +8873,12 @@
               </a:defRPr>
             </a:pPr>
             <a:r>
-              <a:t>CargoClear — Summary &amp; Impact</a:t>
+              <a:rPr dirty="0" err="1"/>
+              <a:t>CargoClear</a:t>
+            </a:r>
+            <a:r>
+              <a:rPr dirty="0"/>
+              <a:t> — Summary &amp; Impact</a:t>
             </a:r>
           </a:p>
           <a:p>
@@ -8836,6 +8893,7 @@
               </a:defRPr>
             </a:pPr>
             <a:r>
+              <a:rPr dirty="0"/>
               <a:t>✓ Eliminates 3–7 day port clearance delays by solving documentation discrepancies before customs submission.</a:t>
             </a:r>
           </a:p>
@@ -8851,6 +8909,7 @@
               </a:defRPr>
             </a:pPr>
             <a:r>
+              <a:rPr dirty="0"/>
               <a:t>✓ Deterministic validation guarantees zero AI hallucination in tariff calculation or chemical verification.</a:t>
             </a:r>
           </a:p>
@@ -8866,6 +8925,7 @@
               </a:defRPr>
             </a:pPr>
             <a:r>
+              <a:rPr dirty="0"/>
               <a:t>✓ Cryptographically signed audit ledger provides tamper-evident proof of due diligence for regulatory compliance.</a:t>
             </a:r>
           </a:p>
@@ -8881,6 +8941,7 @@
               </a:defRPr>
             </a:pPr>
             <a:r>
+              <a:rPr dirty="0"/>
               <a:t>✓ Fully deployed, serverless, and production-ready on Google Cloud Platform.</a:t>
             </a:r>
           </a:p>
@@ -8894,12 +8955,12 @@
 </p:sld>
 </file>
 
-<file path=ppt/slides/slide16.xml><?xml version="1.0" encoding="utf-8"?>
-<p:sld xmlns:a="http://schemas.openxmlformats.org/drawingml/2006/main" xmlns:r="http://schemas.openxmlformats.org/officeDocument/2006/relationships" xmlns:mc="http://schemas.openxmlformats.org/markup-compatibility/2006" xmlns:mv="urn:schemas-microsoft-com:mac:vml" xmlns:p="http://schemas.openxmlformats.org/presentationml/2006/main" xmlns:c="http://schemas.openxmlformats.org/drawingml/2006/chart" xmlns:dgm="http://schemas.openxmlformats.org/drawingml/2006/diagram" xmlns:o="urn:schemas-microsoft-com:office:office" xmlns:v="urn:schemas-microsoft-com:vml" xmlns:pvml="urn:schemas-microsoft-com:office:powerpoint" xmlns:com="http://schemas.openxmlformats.org/drawingml/2006/compatibility" xmlns:p14="http://schemas.microsoft.com/office/powerpoint/2010/main" xmlns:p15="http://schemas.microsoft.com/office/powerpoint/2012/main" xmlns:ahyp="http://schemas.microsoft.com/office/drawing/2018/hyperlinkcolor">
+<file path=ppt/slides/slide15.xml><?xml version="1.0" encoding="utf-8"?>
+<p:sld xmlns:a="http://schemas.openxmlformats.org/drawingml/2006/main" xmlns:r="http://schemas.openxmlformats.org/officeDocument/2006/relationships" xmlns:p="http://schemas.openxmlformats.org/presentationml/2006/main">
   <p:cSld>
     <p:spTree>
       <p:nvGrpSpPr>
-        <p:cNvPr id="170" name="Shape 170"/>
+        <p:cNvPr id="1" name="Shape 170"/>
         <p:cNvGrpSpPr/>
         <p:nvPr/>
       </p:nvGrpSpPr>
@@ -8921,7 +8982,7 @@
           <a:blip r:embed="rId3">
             <a:alphaModFix/>
           </a:blip>
-          <a:srcRect b="98001" l="0" r="0" t="0"/>
+          <a:srcRect b="98001"/>
           <a:stretch/>
         </p:blipFill>
         <p:spPr>
@@ -8975,268 +9036,11 @@
 </file>
 
 <file path=ppt/slides/slide2.xml><?xml version="1.0" encoding="utf-8"?>
-<p:sld xmlns:a="http://schemas.openxmlformats.org/drawingml/2006/main" xmlns:r="http://schemas.openxmlformats.org/officeDocument/2006/relationships" xmlns:mc="http://schemas.openxmlformats.org/markup-compatibility/2006" xmlns:mv="urn:schemas-microsoft-com:mac:vml" xmlns:p="http://schemas.openxmlformats.org/presentationml/2006/main" xmlns:c="http://schemas.openxmlformats.org/drawingml/2006/chart" xmlns:dgm="http://schemas.openxmlformats.org/drawingml/2006/diagram" xmlns:o="urn:schemas-microsoft-com:office:office" xmlns:v="urn:schemas-microsoft-com:vml" xmlns:pvml="urn:schemas-microsoft-com:office:powerpoint" xmlns:com="http://schemas.openxmlformats.org/drawingml/2006/compatibility" xmlns:p14="http://schemas.microsoft.com/office/powerpoint/2010/main" xmlns:p15="http://schemas.microsoft.com/office/powerpoint/2012/main" xmlns:ahyp="http://schemas.microsoft.com/office/drawing/2018/hyperlinkcolor">
+<p:sld xmlns:a="http://schemas.openxmlformats.org/drawingml/2006/main" xmlns:r="http://schemas.openxmlformats.org/officeDocument/2006/relationships" xmlns:p="http://schemas.openxmlformats.org/presentationml/2006/main">
   <p:cSld>
     <p:spTree>
       <p:nvGrpSpPr>
-        <p:cNvPr id="60" name="Shape 60"/>
-        <p:cNvGrpSpPr/>
-        <p:nvPr/>
-      </p:nvGrpSpPr>
-      <p:grpSpPr>
-        <a:xfrm>
-          <a:off x="0" y="0"/>
-          <a:ext cx="0" cy="0"/>
-          <a:chOff x="0" y="0"/>
-          <a:chExt cx="0" cy="0"/>
-        </a:xfrm>
-      </p:grpSpPr>
-      <p:pic>
-        <p:nvPicPr>
-          <p:cNvPr id="61" name="Google Shape;61;p14" title="Frame 144.png"/>
-          <p:cNvPicPr preferRelativeResize="0"/>
-          <p:nvPr/>
-        </p:nvPicPr>
-        <p:blipFill rotWithShape="1">
-          <a:blip r:embed="rId3">
-            <a:alphaModFix/>
-          </a:blip>
-          <a:srcRect b="98001" l="0" r="0" t="0"/>
-          <a:stretch/>
-        </p:blipFill>
-        <p:spPr>
-          <a:xfrm>
-            <a:off x="0" y="5093562"/>
-            <a:ext cx="9144000" cy="54275"/>
-          </a:xfrm>
-          <a:prstGeom prst="rect">
-            <a:avLst/>
-          </a:prstGeom>
-          <a:noFill/>
-          <a:ln>
-            <a:noFill/>
-          </a:ln>
-        </p:spPr>
-      </p:pic>
-      <p:sp>
-        <p:nvSpPr>
-          <p:cNvPr id="62" name="Google Shape;62;p14"/>
-          <p:cNvSpPr/>
-          <p:nvPr/>
-        </p:nvSpPr>
-        <p:spPr>
-          <a:xfrm>
-            <a:off x="0" y="0"/>
-            <a:ext cx="9144000" cy="5143500"/>
-          </a:xfrm>
-          <a:prstGeom prst="rect">
-            <a:avLst/>
-          </a:prstGeom>
-          <a:solidFill>
-            <a:schemeClr val="dk1"/>
-          </a:solidFill>
-          <a:ln>
-            <a:noFill/>
-          </a:ln>
-        </p:spPr>
-        <p:txBody>
-          <a:bodyPr anchorCtr="0" anchor="ctr" bIns="91425" lIns="91425" spcFirstLastPara="1" rIns="91425" wrap="square" tIns="91425">
-            <a:noAutofit/>
-          </a:bodyPr>
-          <a:lstStyle/>
-          <a:p>
-            <a:pPr indent="0" lvl="0" marL="0" rtl="0" algn="ctr">
-              <a:spcBef>
-                <a:spcPts val="0"/>
-              </a:spcBef>
-              <a:spcAft>
-                <a:spcPts val="0"/>
-              </a:spcAft>
-              <a:buNone/>
-            </a:pPr>
-            <a:r>
-              <a:t/>
-            </a:r>
-            <a:endParaRPr/>
-          </a:p>
-        </p:txBody>
-      </p:sp>
-      <p:sp>
-        <p:nvSpPr>
-          <p:cNvPr id="63" name="Google Shape;63;p14"/>
-          <p:cNvSpPr txBox="1"/>
-          <p:nvPr/>
-        </p:nvSpPr>
-        <p:spPr>
-          <a:xfrm>
-            <a:off x="5092475" y="1968750"/>
-            <a:ext cx="3311400" cy="1206000"/>
-          </a:xfrm>
-          <a:prstGeom prst="rect">
-            <a:avLst/>
-          </a:prstGeom>
-          <a:noFill/>
-          <a:ln>
-            <a:noFill/>
-          </a:ln>
-        </p:spPr>
-        <p:txBody>
-          <a:bodyPr anchorCtr="0" anchor="t" bIns="91425" lIns="91425" spcFirstLastPara="1" rIns="91425" wrap="square" tIns="91425">
-            <a:noAutofit/>
-          </a:bodyPr>
-          <a:lstStyle/>
-          <a:p>
-            <a:pPr indent="0" lvl="0" marL="0" rtl="0" algn="l">
-              <a:spcBef>
-                <a:spcPts val="0"/>
-              </a:spcBef>
-              <a:spcAft>
-                <a:spcPts val="0"/>
-              </a:spcAft>
-              <a:buNone/>
-            </a:pPr>
-            <a:r>
-              <a:rPr lang="en-GB" sz="1100">
-                <a:solidFill>
-                  <a:schemeClr val="lt1"/>
-                </a:solidFill>
-                <a:latin typeface="Google Sans Flex Medium"/>
-                <a:ea typeface="Google Sans Flex Medium"/>
-                <a:cs typeface="Google Sans Flex Medium"/>
-                <a:sym typeface="Google Sans Flex Medium"/>
-              </a:rPr>
-              <a:t>Note:</a:t>
-            </a:r>
-            <a:r>
-              <a:rPr lang="en-GB" sz="1100">
-                <a:solidFill>
-                  <a:schemeClr val="lt1"/>
-                </a:solidFill>
-                <a:latin typeface="Google Sans Flex"/>
-                <a:ea typeface="Google Sans Flex"/>
-                <a:cs typeface="Google Sans Flex"/>
-                <a:sym typeface="Google Sans Flex"/>
-              </a:rPr>
-              <a:t> Please download this template to make your edits and submit the final version.</a:t>
-            </a:r>
-            <a:br>
-              <a:rPr lang="en-GB" sz="1100">
-                <a:solidFill>
-                  <a:schemeClr val="lt1"/>
-                </a:solidFill>
-                <a:latin typeface="Google Sans Flex"/>
-                <a:ea typeface="Google Sans Flex"/>
-                <a:cs typeface="Google Sans Flex"/>
-                <a:sym typeface="Google Sans Flex"/>
-              </a:rPr>
-            </a:br>
-            <a:br>
-              <a:rPr lang="en-GB" sz="1100">
-                <a:solidFill>
-                  <a:schemeClr val="lt1"/>
-                </a:solidFill>
-                <a:latin typeface="Google Sans Flex"/>
-                <a:ea typeface="Google Sans Flex"/>
-                <a:cs typeface="Google Sans Flex"/>
-                <a:sym typeface="Google Sans Flex"/>
-              </a:rPr>
-            </a:br>
-            <a:r>
-              <a:rPr lang="en-GB" sz="1100">
-                <a:solidFill>
-                  <a:schemeClr val="lt1"/>
-                </a:solidFill>
-                <a:latin typeface="Google Sans Flex"/>
-                <a:ea typeface="Google Sans Flex"/>
-                <a:cs typeface="Google Sans Flex"/>
-                <a:sym typeface="Google Sans Flex"/>
-              </a:rPr>
-              <a:t>To download, go to File &gt; Download &gt; Microsoft PowerPoint (.PPTX). Kindly refrain from sending edit requests.</a:t>
-            </a:r>
-            <a:endParaRPr sz="1100">
-              <a:solidFill>
-                <a:schemeClr val="lt1"/>
-              </a:solidFill>
-              <a:latin typeface="Google Sans Flex"/>
-              <a:ea typeface="Google Sans Flex"/>
-              <a:cs typeface="Google Sans Flex"/>
-              <a:sym typeface="Google Sans Flex"/>
-            </a:endParaRPr>
-          </a:p>
-          <a:p>
-            <a:pPr indent="0" lvl="0" marL="0" rtl="0" algn="l">
-              <a:spcBef>
-                <a:spcPts val="0"/>
-              </a:spcBef>
-              <a:spcAft>
-                <a:spcPts val="0"/>
-              </a:spcAft>
-              <a:buNone/>
-            </a:pPr>
-            <a:r>
-              <a:t/>
-            </a:r>
-            <a:endParaRPr sz="1100">
-              <a:solidFill>
-                <a:schemeClr val="lt1"/>
-              </a:solidFill>
-              <a:latin typeface="Google Sans Flex"/>
-              <a:ea typeface="Google Sans Flex"/>
-              <a:cs typeface="Google Sans Flex"/>
-              <a:sym typeface="Google Sans Flex"/>
-            </a:endParaRPr>
-          </a:p>
-        </p:txBody>
-      </p:sp>
-      <p:pic>
-        <p:nvPicPr>
-          <p:cNvPr id="64" name="Google Shape;64;p14"/>
-          <p:cNvPicPr preferRelativeResize="0"/>
-          <p:nvPr/>
-        </p:nvPicPr>
-        <p:blipFill>
-          <a:blip r:embed="rId4">
-            <a:alphaModFix/>
-          </a:blip>
-          <a:stretch>
-            <a:fillRect/>
-          </a:stretch>
-        </p:blipFill>
-        <p:spPr>
-          <a:xfrm>
-            <a:off x="924203" y="1194675"/>
-            <a:ext cx="3604250" cy="2621725"/>
-          </a:xfrm>
-          <a:prstGeom prst="rect">
-            <a:avLst/>
-          </a:prstGeom>
-          <a:noFill/>
-          <a:ln>
-            <a:noFill/>
-          </a:ln>
-          <a:effectLst>
-            <a:outerShdw blurRad="971550" rotWithShape="0" algn="bl" dir="5400000" dist="19050">
-              <a:schemeClr val="lt1">
-                <a:alpha val="50000"/>
-              </a:schemeClr>
-            </a:outerShdw>
-          </a:effectLst>
-        </p:spPr>
-      </p:pic>
-    </p:spTree>
-  </p:cSld>
-  <p:clrMapOvr>
-    <a:masterClrMapping/>
-  </p:clrMapOvr>
-</p:sld>
-</file>
-
-<file path=ppt/slides/slide3.xml><?xml version="1.0" encoding="utf-8"?>
-<p:sld xmlns:a="http://schemas.openxmlformats.org/drawingml/2006/main" xmlns:r="http://schemas.openxmlformats.org/officeDocument/2006/relationships" xmlns:mc="http://schemas.openxmlformats.org/markup-compatibility/2006" xmlns:mv="urn:schemas-microsoft-com:mac:vml" xmlns:p="http://schemas.openxmlformats.org/presentationml/2006/main" xmlns:c="http://schemas.openxmlformats.org/drawingml/2006/chart" xmlns:dgm="http://schemas.openxmlformats.org/drawingml/2006/diagram" xmlns:o="urn:schemas-microsoft-com:office:office" xmlns:v="urn:schemas-microsoft-com:vml" xmlns:pvml="urn:schemas-microsoft-com:office:powerpoint" xmlns:com="http://schemas.openxmlformats.org/drawingml/2006/compatibility" xmlns:p14="http://schemas.microsoft.com/office/powerpoint/2010/main" xmlns:p15="http://schemas.microsoft.com/office/powerpoint/2012/main" xmlns:ahyp="http://schemas.microsoft.com/office/drawing/2018/hyperlinkcolor">
-  <p:cSld>
-    <p:spTree>
-      <p:nvGrpSpPr>
-        <p:cNvPr id="68" name="Shape 68"/>
+        <p:cNvPr id="1" name="Shape 68"/>
         <p:cNvGrpSpPr/>
         <p:nvPr/>
       </p:nvGrpSpPr>
@@ -9298,23 +9102,20 @@
           </a:ln>
         </p:spPr>
         <p:txBody>
-          <a:bodyPr anchorCtr="0" anchor="ctr" bIns="91425" lIns="91425" spcFirstLastPara="1" rIns="91425" wrap="square" tIns="91425">
+          <a:bodyPr spcFirstLastPara="1" wrap="square" lIns="91425" tIns="91425" rIns="91425" bIns="91425" anchor="ctr" anchorCtr="0">
             <a:noAutofit/>
           </a:bodyPr>
           <a:lstStyle/>
           <a:p>
-            <a:pPr indent="0" lvl="0" marL="0" rtl="0" algn="ctr">
-              <a:spcBef>
-                <a:spcPts val="0"/>
-              </a:spcBef>
-              <a:spcAft>
-                <a:spcPts val="0"/>
-              </a:spcAft>
-              <a:buNone/>
-            </a:pPr>
-            <a:r>
-              <a:t/>
-            </a:r>
+            <a:pPr marL="0" lvl="0" indent="0" algn="ctr" rtl="0">
+              <a:spcBef>
+                <a:spcPts val="0"/>
+              </a:spcBef>
+              <a:spcAft>
+                <a:spcPts val="0"/>
+              </a:spcAft>
+              <a:buNone/>
+            </a:pPr>
             <a:endParaRPr/>
           </a:p>
         </p:txBody>
@@ -9327,7 +9128,7 @@
         </p:nvSpPr>
         <p:spPr>
           <a:xfrm>
-            <a:off x="265350" y="663825"/>
+            <a:off x="100500" y="407068"/>
             <a:ext cx="8943000" cy="561900"/>
           </a:xfrm>
           <a:prstGeom prst="rect">
@@ -9339,22 +9140,22 @@
           </a:ln>
         </p:spPr>
         <p:txBody>
-          <a:bodyPr anchorCtr="0" anchor="t" bIns="91425" lIns="91425" spcFirstLastPara="1" rIns="91425" wrap="square" tIns="91425">
+          <a:bodyPr spcFirstLastPara="1" wrap="square" lIns="91425" tIns="91425" rIns="91425" bIns="91425" anchor="t" anchorCtr="0">
             <a:noAutofit/>
           </a:bodyPr>
           <a:lstStyle/>
           <a:p>
-            <a:pPr indent="0" lvl="0" marL="0" rtl="0" algn="l">
-              <a:spcBef>
-                <a:spcPts val="0"/>
-              </a:spcBef>
-              <a:spcAft>
-                <a:spcPts val="0"/>
-              </a:spcAft>
-              <a:buNone/>
-            </a:pPr>
-            <a:r>
-              <a:rPr lang="en-GB" sz="1600">
+            <a:pPr marL="0" lvl="0" indent="0" algn="l" rtl="0">
+              <a:spcBef>
+                <a:spcPts val="0"/>
+              </a:spcBef>
+              <a:spcAft>
+                <a:spcPts val="0"/>
+              </a:spcAft>
+              <a:buNone/>
+            </a:pPr>
+            <a:r>
+              <a:rPr lang="en-GB" sz="3600" dirty="0">
                 <a:latin typeface="Google Sans Flex Medium"/>
                 <a:ea typeface="Google Sans Flex Medium"/>
                 <a:cs typeface="Google Sans Flex Medium"/>
@@ -9362,7 +9163,7 @@
               </a:rPr>
               <a:t>Brief about the idea</a:t>
             </a:r>
-            <a:endParaRPr sz="1600">
+            <a:endParaRPr sz="3600" dirty="0">
               <a:latin typeface="Google Sans Flex Medium"/>
               <a:ea typeface="Google Sans Flex Medium"/>
               <a:cs typeface="Google Sans Flex Medium"/>
@@ -9379,8 +9180,8 @@
         </p:nvSpPr>
         <p:spPr>
           <a:xfrm>
-            <a:off x="731520" y="1645920"/>
-            <a:ext cx="10515600" cy="4572000"/>
+            <a:off x="265350" y="1109798"/>
+            <a:ext cx="8778150" cy="3626634"/>
           </a:xfrm>
           <a:prstGeom prst="rect">
             <a:avLst/>
@@ -9404,7 +9205,12 @@
               </a:defRPr>
             </a:pPr>
             <a:r>
-              <a:t>CargoClear-JAPAC: Agentic AI Pre-Submission Customs Assessment Workbench</a:t>
+              <a:rPr dirty="0" err="1"/>
+              <a:t>CargoClear</a:t>
+            </a:r>
+            <a:r>
+              <a:rPr dirty="0"/>
+              <a:t>-JAPAC: Agentic AI Pre-Submission Customs Assessment Workbench</a:t>
             </a:r>
           </a:p>
           <a:p>
@@ -9419,6 +9225,7 @@
               </a:defRPr>
             </a:pPr>
             <a:r>
+              <a:rPr dirty="0"/>
               <a:t>• Core Mission: Empower Licensed Customs House Agents (CHAs) and freight forwarders with an agentic AI pair programmer that detects cross-document discrepancies, validates metallurgical chemical composition against HS tariff codes, and calculates indicative import duties before official customs submission.</a:t>
             </a:r>
           </a:p>
@@ -9434,6 +9241,7 @@
               </a:defRPr>
             </a:pPr>
             <a:r>
+              <a:rPr dirty="0"/>
               <a:t>• Multimodal Ingestion: Accepts commercial trade document bundles (Commercial Invoices, Bills of Lading, Packing Lists, Mill Test Certificates) in standard PDF format, preserving layout coordinate mapping.</a:t>
             </a:r>
           </a:p>
@@ -9449,7 +9257,16 @@
               </a:defRPr>
             </a:pPr>
             <a:r>
-              <a:t>• Defensive AI Extraction: Powered by Gemini 2.5 Flash with structured Pydantic schema enforcement and prompt-injection defense to extract critical trade entities (weights, Incoterms, currency, chemical elements) alongside bounding box coordinates.</a:t>
+              <a:rPr dirty="0"/>
+              <a:t>• Defensive AI Extraction: Powered by Gemini 2.5 Flash with structured </a:t>
+            </a:r>
+            <a:r>
+              <a:rPr dirty="0" err="1"/>
+              <a:t>Pydantic</a:t>
+            </a:r>
+            <a:r>
+              <a:rPr dirty="0"/>
+              <a:t> schema enforcement and prompt-injection defense to extract critical trade entities (weights, Incoterms, currency, chemical elements) alongside bounding box coordinates.</a:t>
             </a:r>
           </a:p>
           <a:p>
@@ -9464,6 +9281,7 @@
               </a:defRPr>
             </a:pPr>
             <a:r>
+              <a:rPr dirty="0"/>
               <a:t>• Deterministic Compliance Engine: Cross-examines 15+ international trade rules across documents, performs metallurgical chemistry matching against Chapter 73 HS tariff schedules, and flags anti-dumping duties.</a:t>
             </a:r>
           </a:p>
@@ -9479,7 +9297,16 @@
               </a:defRPr>
             </a:pPr>
             <a:r>
-              <a:t>• Cryptographic Audit Ledger: Chained SHA-256 hashes and ECDSA digital signatures log every assessment iteration, user correction, and verdict into an immutable Firestore ledger for audit defensibility.</a:t>
+              <a:rPr dirty="0"/>
+              <a:t>• Cryptographic Audit Ledger: Chained SHA-256 hashes and ECDSA digital signatures log every assessment iteration, user correction, and verdict into an immutable </a:t>
+            </a:r>
+            <a:r>
+              <a:rPr dirty="0" err="1"/>
+              <a:t>Firestore</a:t>
+            </a:r>
+            <a:r>
+              <a:rPr dirty="0"/>
+              <a:t> ledger for audit defensibility.</a:t>
             </a:r>
           </a:p>
         </p:txBody>
@@ -9492,12 +9319,12 @@
 </p:sld>
 </file>
 
-<file path=ppt/slides/slide4.xml><?xml version="1.0" encoding="utf-8"?>
-<p:sld xmlns:a="http://schemas.openxmlformats.org/drawingml/2006/main" xmlns:r="http://schemas.openxmlformats.org/officeDocument/2006/relationships" xmlns:mc="http://schemas.openxmlformats.org/markup-compatibility/2006" xmlns:mv="urn:schemas-microsoft-com:mac:vml" xmlns:p="http://schemas.openxmlformats.org/presentationml/2006/main" xmlns:c="http://schemas.openxmlformats.org/drawingml/2006/chart" xmlns:dgm="http://schemas.openxmlformats.org/drawingml/2006/diagram" xmlns:o="urn:schemas-microsoft-com:office:office" xmlns:v="urn:schemas-microsoft-com:vml" xmlns:pvml="urn:schemas-microsoft-com:office:powerpoint" xmlns:com="http://schemas.openxmlformats.org/drawingml/2006/compatibility" xmlns:p14="http://schemas.microsoft.com/office/powerpoint/2010/main" xmlns:p15="http://schemas.microsoft.com/office/powerpoint/2012/main" xmlns:ahyp="http://schemas.microsoft.com/office/drawing/2018/hyperlinkcolor">
+<file path=ppt/slides/slide3.xml><?xml version="1.0" encoding="utf-8"?>
+<p:sld xmlns:a="http://schemas.openxmlformats.org/drawingml/2006/main" xmlns:r="http://schemas.openxmlformats.org/officeDocument/2006/relationships" xmlns:p="http://schemas.openxmlformats.org/presentationml/2006/main">
   <p:cSld>
     <p:spTree>
       <p:nvGrpSpPr>
-        <p:cNvPr id="75" name="Shape 75"/>
+        <p:cNvPr id="1" name="Shape 75"/>
         <p:cNvGrpSpPr/>
         <p:nvPr/>
       </p:nvGrpSpPr>
@@ -9519,7 +9346,7 @@
           <a:blip r:embed="rId3">
             <a:alphaModFix/>
           </a:blip>
-          <a:srcRect b="98001" l="0" r="0" t="0"/>
+          <a:srcRect b="98001"/>
           <a:stretch/>
         </p:blipFill>
         <p:spPr>
@@ -9586,23 +9413,20 @@
           </a:ln>
         </p:spPr>
         <p:txBody>
-          <a:bodyPr anchorCtr="0" anchor="ctr" bIns="91425" lIns="91425" spcFirstLastPara="1" rIns="91425" wrap="square" tIns="91425">
+          <a:bodyPr spcFirstLastPara="1" wrap="square" lIns="91425" tIns="91425" rIns="91425" bIns="91425" anchor="ctr" anchorCtr="0">
             <a:noAutofit/>
           </a:bodyPr>
           <a:lstStyle/>
           <a:p>
-            <a:pPr indent="0" lvl="0" marL="0" rtl="0" algn="ctr">
-              <a:spcBef>
-                <a:spcPts val="0"/>
-              </a:spcBef>
-              <a:spcAft>
-                <a:spcPts val="0"/>
-              </a:spcAft>
-              <a:buNone/>
-            </a:pPr>
-            <a:r>
-              <a:t/>
-            </a:r>
+            <a:pPr marL="0" lvl="0" indent="0" algn="ctr" rtl="0">
+              <a:spcBef>
+                <a:spcPts val="0"/>
+              </a:spcBef>
+              <a:spcAft>
+                <a:spcPts val="0"/>
+              </a:spcAft>
+              <a:buNone/>
+            </a:pPr>
             <a:endParaRPr/>
           </a:p>
         </p:txBody>
@@ -9616,7 +9440,7 @@
         <p:spPr>
           <a:xfrm>
             <a:off x="265350" y="663825"/>
-            <a:ext cx="8943000" cy="1366200"/>
+            <a:ext cx="8943000" cy="453084"/>
           </a:xfrm>
           <a:prstGeom prst="rect">
             <a:avLst/>
@@ -9627,22 +9451,22 @@
           </a:ln>
         </p:spPr>
         <p:txBody>
-          <a:bodyPr anchorCtr="0" anchor="t" bIns="91425" lIns="91425" spcFirstLastPara="1" rIns="91425" wrap="square" tIns="91425">
+          <a:bodyPr spcFirstLastPara="1" wrap="square" lIns="91425" tIns="91425" rIns="91425" bIns="91425" anchor="t" anchorCtr="0">
             <a:noAutofit/>
           </a:bodyPr>
           <a:lstStyle/>
           <a:p>
-            <a:pPr indent="0" lvl="0" marL="0" rtl="0" algn="l">
-              <a:spcBef>
-                <a:spcPts val="0"/>
-              </a:spcBef>
-              <a:spcAft>
-                <a:spcPts val="0"/>
-              </a:spcAft>
-              <a:buNone/>
-            </a:pPr>
-            <a:r>
-              <a:rPr lang="en-GB" sz="1600">
+            <a:pPr marL="0" lvl="0" indent="0" algn="l" rtl="0">
+              <a:spcBef>
+                <a:spcPts val="0"/>
+              </a:spcBef>
+              <a:spcAft>
+                <a:spcPts val="0"/>
+              </a:spcAft>
+              <a:buNone/>
+            </a:pPr>
+            <a:r>
+              <a:rPr lang="en-GB" sz="1600" dirty="0">
                 <a:latin typeface="Google Sans Flex SemiBold"/>
                 <a:ea typeface="Google Sans Flex SemiBold"/>
                 <a:cs typeface="Google Sans Flex SemiBold"/>
@@ -9651,118 +9475,14 @@
               <a:t>Opportunities</a:t>
             </a:r>
             <a:br>
-              <a:rPr lang="en-GB" sz="1600">
+              <a:rPr lang="en-GB" sz="1600" dirty="0">
                 <a:latin typeface="Google Sans Flex SemiBold"/>
                 <a:ea typeface="Google Sans Flex SemiBold"/>
                 <a:cs typeface="Google Sans Flex SemiBold"/>
                 <a:sym typeface="Google Sans Flex SemiBold"/>
               </a:rPr>
             </a:br>
-            <a:endParaRPr sz="1600">
-              <a:latin typeface="Google Sans Flex SemiBold"/>
-              <a:ea typeface="Google Sans Flex SemiBold"/>
-              <a:cs typeface="Google Sans Flex SemiBold"/>
-              <a:sym typeface="Google Sans Flex SemiBold"/>
-            </a:endParaRPr>
-          </a:p>
-          <a:p>
-            <a:pPr indent="-311150" lvl="0" marL="457200" rtl="0" algn="l">
-              <a:spcBef>
-                <a:spcPts val="0"/>
-              </a:spcBef>
-              <a:spcAft>
-                <a:spcPts val="0"/>
-              </a:spcAft>
-              <a:buSzPts val="1300"/>
-              <a:buFont typeface="Google Sans Flex"/>
-              <a:buChar char="●"/>
-            </a:pPr>
-            <a:r>
-              <a:rPr lang="en-GB" sz="1300">
-                <a:latin typeface="Google Sans Flex"/>
-                <a:ea typeface="Google Sans Flex"/>
-                <a:cs typeface="Google Sans Flex"/>
-                <a:sym typeface="Google Sans Flex"/>
-              </a:rPr>
-              <a:t>How different is it from any of the other existing ideas?</a:t>
-            </a:r>
-            <a:endParaRPr sz="1300">
-              <a:latin typeface="Google Sans Flex"/>
-              <a:ea typeface="Google Sans Flex"/>
-              <a:cs typeface="Google Sans Flex"/>
-              <a:sym typeface="Google Sans Flex"/>
-            </a:endParaRPr>
-          </a:p>
-          <a:p>
-            <a:pPr indent="-311150" lvl="0" marL="457200" rtl="0" algn="l">
-              <a:spcBef>
-                <a:spcPts val="0"/>
-              </a:spcBef>
-              <a:spcAft>
-                <a:spcPts val="0"/>
-              </a:spcAft>
-              <a:buSzPts val="1300"/>
-              <a:buFont typeface="Google Sans Flex"/>
-              <a:buChar char="●"/>
-            </a:pPr>
-            <a:r>
-              <a:rPr lang="en-GB" sz="1300">
-                <a:latin typeface="Google Sans Flex"/>
-                <a:ea typeface="Google Sans Flex"/>
-                <a:cs typeface="Google Sans Flex"/>
-                <a:sym typeface="Google Sans Flex"/>
-              </a:rPr>
-              <a:t>How will it be able to solve the problem?</a:t>
-            </a:r>
-            <a:endParaRPr sz="1300">
-              <a:latin typeface="Google Sans Flex"/>
-              <a:ea typeface="Google Sans Flex"/>
-              <a:cs typeface="Google Sans Flex"/>
-              <a:sym typeface="Google Sans Flex"/>
-            </a:endParaRPr>
-          </a:p>
-          <a:p>
-            <a:pPr indent="-311150" lvl="0" marL="457200" rtl="0" algn="l">
-              <a:spcBef>
-                <a:spcPts val="0"/>
-              </a:spcBef>
-              <a:spcAft>
-                <a:spcPts val="0"/>
-              </a:spcAft>
-              <a:buSzPts val="1300"/>
-              <a:buFont typeface="Google Sans Flex"/>
-              <a:buChar char="●"/>
-            </a:pPr>
-            <a:r>
-              <a:rPr lang="en-GB" sz="1300">
-                <a:latin typeface="Google Sans Flex"/>
-                <a:ea typeface="Google Sans Flex"/>
-                <a:cs typeface="Google Sans Flex"/>
-                <a:sym typeface="Google Sans Flex"/>
-              </a:rPr>
-              <a:t>USP of the proposed solution</a:t>
-            </a:r>
-            <a:endParaRPr sz="1300">
-              <a:latin typeface="Google Sans Flex"/>
-              <a:ea typeface="Google Sans Flex"/>
-              <a:cs typeface="Google Sans Flex"/>
-              <a:sym typeface="Google Sans Flex"/>
-            </a:endParaRPr>
-          </a:p>
-          <a:p>
-            <a:pPr indent="0" lvl="0" marL="0" rtl="0" algn="l">
-              <a:spcBef>
-                <a:spcPts val="0"/>
-              </a:spcBef>
-              <a:spcAft>
-                <a:spcPts val="0"/>
-              </a:spcAft>
-              <a:buNone/>
-            </a:pPr>
-            <a:r>
-              <a:t/>
-            </a:r>
-            <a:endParaRPr sz="1600">
+            <a:endParaRPr sz="1600" dirty="0">
               <a:latin typeface="Google Sans Flex Medium"/>
               <a:ea typeface="Google Sans Flex Medium"/>
               <a:cs typeface="Google Sans Flex Medium"/>
@@ -9770,19 +9490,16 @@
             </a:endParaRPr>
           </a:p>
           <a:p>
-            <a:pPr indent="0" lvl="0" marL="0" rtl="0" algn="l">
-              <a:spcBef>
-                <a:spcPts val="0"/>
-              </a:spcBef>
-              <a:spcAft>
-                <a:spcPts val="0"/>
-              </a:spcAft>
-              <a:buNone/>
-            </a:pPr>
-            <a:r>
-              <a:t/>
-            </a:r>
-            <a:endParaRPr sz="1600">
+            <a:pPr marL="0" lvl="0" indent="0" algn="l" rtl="0">
+              <a:spcBef>
+                <a:spcPts val="0"/>
+              </a:spcBef>
+              <a:spcAft>
+                <a:spcPts val="0"/>
+              </a:spcAft>
+              <a:buNone/>
+            </a:pPr>
+            <a:endParaRPr sz="1600" dirty="0">
               <a:latin typeface="Google Sans Flex Medium"/>
               <a:ea typeface="Google Sans Flex Medium"/>
               <a:cs typeface="Google Sans Flex Medium"/>
@@ -9799,8 +9516,8 @@
         </p:nvSpPr>
         <p:spPr>
           <a:xfrm>
-            <a:off x="731520" y="1828800"/>
-            <a:ext cx="10515600" cy="4572000"/>
+            <a:off x="265349" y="1020536"/>
+            <a:ext cx="8739857" cy="3885679"/>
           </a:xfrm>
           <a:prstGeom prst="rect">
             <a:avLst/>
@@ -9824,6 +9541,7 @@
               </a:defRPr>
             </a:pPr>
             <a:r>
+              <a:rPr dirty="0"/>
               <a:t>1. Differentiation from Existing Ideas:</a:t>
             </a:r>
           </a:p>
@@ -9839,6 +9557,7 @@
               </a:defRPr>
             </a:pPr>
             <a:r>
+              <a:rPr dirty="0"/>
               <a:t>   • Traditional IDP / OCR Tools only extract text without trade domain intelligence, failing to reconcile cross-document discrepancies or understand tariff chemical formulas.</a:t>
             </a:r>
           </a:p>
@@ -9854,7 +9573,16 @@
               </a:defRPr>
             </a:pPr>
             <a:r>
-              <a:t>   • Legacy EDI Portals (e.g., ICEGATE, TradeNet) only validate rigid schema formats at point of submission, rejecting errors post-filing and triggering demurrage fines.</a:t>
+              <a:rPr dirty="0"/>
+              <a:t>   • Legacy EDI Portals (e.g., ICEGATE, </a:t>
+            </a:r>
+            <a:r>
+              <a:rPr dirty="0" err="1"/>
+              <a:t>TradeNet</a:t>
+            </a:r>
+            <a:r>
+              <a:rPr dirty="0"/>
+              <a:t>) only validate rigid schema formats at point of submission, rejecting errors post-filing and triggering demurrage fines.</a:t>
             </a:r>
           </a:p>
           <a:p>
@@ -9869,7 +9597,16 @@
               </a:defRPr>
             </a:pPr>
             <a:r>
-              <a:t>   • CargoClear unites multimodal LLM extraction, deterministic trade compliance rules, metallurgy chemistry verification, and cryptographic auditability in a single pre-submission workbench.</a:t>
+              <a:rPr dirty="0"/>
+              <a:t>   • </a:t>
+            </a:r>
+            <a:r>
+              <a:rPr dirty="0" err="1"/>
+              <a:t>CargoClear</a:t>
+            </a:r>
+            <a:r>
+              <a:rPr dirty="0"/>
+              <a:t> unites multimodal LLM extraction, deterministic trade compliance rules, metallurgy chemistry verification, and cryptographic auditability in a single pre-submission workbench.</a:t>
             </a:r>
           </a:p>
           <a:p>
@@ -9884,7 +9621,16 @@
               </a:defRPr>
             </a:pPr>
             <a:r>
-              <a:t>2. How CargoClear Solves the Problem:</a:t>
+              <a:rPr dirty="0"/>
+              <a:t>2. How </a:t>
+            </a:r>
+            <a:r>
+              <a:rPr dirty="0" err="1"/>
+              <a:t>CargoClear</a:t>
+            </a:r>
+            <a:r>
+              <a:rPr dirty="0"/>
+              <a:t> Solves the Problem:</a:t>
             </a:r>
           </a:p>
           <a:p>
@@ -9899,6 +9645,7 @@
               </a:defRPr>
             </a:pPr>
             <a:r>
+              <a:rPr dirty="0"/>
               <a:t>   • Proactive Error Elimination: Identifies discrepancies in gross/net weights, invoice references, and shipping terms prior to official declaration.</a:t>
             </a:r>
           </a:p>
@@ -9914,6 +9661,7 @@
               </a:defRPr>
             </a:pPr>
             <a:r>
+              <a:rPr dirty="0"/>
               <a:t>   • Fraud &amp; Misclassification Prevention: Cross-checks lab test certificate chemistry against declared HS codes, stopping illegal avoidance of anti-dumping duties.</a:t>
             </a:r>
           </a:p>
@@ -9929,6 +9677,7 @@
               </a:defRPr>
             </a:pPr>
             <a:r>
+              <a:rPr dirty="0"/>
               <a:t>   • Accelerated Clearance: Reduces manual document cross-checking time from 45 minutes to 24 seconds per shipment bundle.</a:t>
             </a:r>
           </a:p>
@@ -9944,6 +9693,7 @@
               </a:defRPr>
             </a:pPr>
             <a:r>
+              <a:rPr dirty="0"/>
               <a:t>3. Unique Selling Proposition (USP):</a:t>
             </a:r>
           </a:p>
@@ -9959,6 +9709,7 @@
               </a:defRPr>
             </a:pPr>
             <a:r>
+              <a:rPr dirty="0"/>
               <a:t>   • Deterministic Trade Rules + Multimodal AI Grounding + Indicative Anti-Dumping Calculation + Cryptographic Audit Chain with Human-in-the-Loop Recompute.</a:t>
             </a:r>
           </a:p>
@@ -9972,12 +9723,12 @@
 </p:sld>
 </file>
 
-<file path=ppt/slides/slide5.xml><?xml version="1.0" encoding="utf-8"?>
-<p:sld xmlns:a="http://schemas.openxmlformats.org/drawingml/2006/main" xmlns:r="http://schemas.openxmlformats.org/officeDocument/2006/relationships" xmlns:mc="http://schemas.openxmlformats.org/markup-compatibility/2006" xmlns:mv="urn:schemas-microsoft-com:mac:vml" xmlns:p="http://schemas.openxmlformats.org/presentationml/2006/main" xmlns:c="http://schemas.openxmlformats.org/drawingml/2006/chart" xmlns:dgm="http://schemas.openxmlformats.org/drawingml/2006/diagram" xmlns:o="urn:schemas-microsoft-com:office:office" xmlns:v="urn:schemas-microsoft-com:vml" xmlns:pvml="urn:schemas-microsoft-com:office:powerpoint" xmlns:com="http://schemas.openxmlformats.org/drawingml/2006/compatibility" xmlns:p14="http://schemas.microsoft.com/office/powerpoint/2010/main" xmlns:p15="http://schemas.microsoft.com/office/powerpoint/2012/main" xmlns:ahyp="http://schemas.microsoft.com/office/drawing/2018/hyperlinkcolor">
+<file path=ppt/slides/slide4.xml><?xml version="1.0" encoding="utf-8"?>
+<p:sld xmlns:a="http://schemas.openxmlformats.org/drawingml/2006/main" xmlns:r="http://schemas.openxmlformats.org/officeDocument/2006/relationships" xmlns:p="http://schemas.openxmlformats.org/presentationml/2006/main">
   <p:cSld>
     <p:spTree>
       <p:nvGrpSpPr>
-        <p:cNvPr id="83" name="Shape 83"/>
+        <p:cNvPr id="1" name="Shape 83"/>
         <p:cNvGrpSpPr/>
         <p:nvPr/>
       </p:nvGrpSpPr>
@@ -9999,7 +9750,7 @@
           <a:blip r:embed="rId3">
             <a:alphaModFix/>
           </a:blip>
-          <a:srcRect b="98001" l="0" r="0" t="0"/>
+          <a:srcRect b="98001"/>
           <a:stretch/>
         </p:blipFill>
         <p:spPr>
@@ -10066,23 +9817,20 @@
           </a:ln>
         </p:spPr>
         <p:txBody>
-          <a:bodyPr anchorCtr="0" anchor="ctr" bIns="91425" lIns="91425" spcFirstLastPara="1" rIns="91425" wrap="square" tIns="91425">
+          <a:bodyPr spcFirstLastPara="1" wrap="square" lIns="91425" tIns="91425" rIns="91425" bIns="91425" anchor="ctr" anchorCtr="0">
             <a:noAutofit/>
           </a:bodyPr>
           <a:lstStyle/>
           <a:p>
-            <a:pPr indent="0" lvl="0" marL="0" rtl="0" algn="ctr">
-              <a:spcBef>
-                <a:spcPts val="0"/>
-              </a:spcBef>
-              <a:spcAft>
-                <a:spcPts val="0"/>
-              </a:spcAft>
-              <a:buNone/>
-            </a:pPr>
-            <a:r>
-              <a:t/>
-            </a:r>
+            <a:pPr marL="0" lvl="0" indent="0" algn="ctr" rtl="0">
+              <a:spcBef>
+                <a:spcPts val="0"/>
+              </a:spcBef>
+              <a:spcAft>
+                <a:spcPts val="0"/>
+              </a:spcAft>
+              <a:buNone/>
+            </a:pPr>
             <a:endParaRPr/>
           </a:p>
         </p:txBody>
@@ -10107,22 +9855,22 @@
           </a:ln>
         </p:spPr>
         <p:txBody>
-          <a:bodyPr anchorCtr="0" anchor="t" bIns="91425" lIns="91425" spcFirstLastPara="1" rIns="91425" wrap="square" tIns="91425">
+          <a:bodyPr spcFirstLastPara="1" wrap="square" lIns="91425" tIns="91425" rIns="91425" bIns="91425" anchor="t" anchorCtr="0">
             <a:noAutofit/>
           </a:bodyPr>
           <a:lstStyle/>
           <a:p>
-            <a:pPr indent="0" lvl="0" marL="0" rtl="0" algn="l">
-              <a:spcBef>
-                <a:spcPts val="0"/>
-              </a:spcBef>
-              <a:spcAft>
-                <a:spcPts val="0"/>
-              </a:spcAft>
-              <a:buNone/>
-            </a:pPr>
-            <a:r>
-              <a:rPr lang="en-GB" sz="1600">
+            <a:pPr marL="0" lvl="0" indent="0" algn="l" rtl="0">
+              <a:spcBef>
+                <a:spcPts val="0"/>
+              </a:spcBef>
+              <a:spcAft>
+                <a:spcPts val="0"/>
+              </a:spcAft>
+              <a:buNone/>
+            </a:pPr>
+            <a:r>
+              <a:rPr lang="en-GB" sz="1600" dirty="0">
                 <a:latin typeface="Google Sans Flex Medium"/>
                 <a:ea typeface="Google Sans Flex Medium"/>
                 <a:cs typeface="Google Sans Flex Medium"/>
@@ -10130,7 +9878,7 @@
               </a:rPr>
               <a:t>List of features offered by the solution</a:t>
             </a:r>
-            <a:endParaRPr sz="1600">
+            <a:endParaRPr sz="1600" dirty="0">
               <a:latin typeface="Google Sans Flex Medium"/>
               <a:ea typeface="Google Sans Flex Medium"/>
               <a:cs typeface="Google Sans Flex Medium"/>
@@ -10147,8 +9895,8 @@
         </p:nvSpPr>
         <p:spPr>
           <a:xfrm>
-            <a:off x="731520" y="1645920"/>
-            <a:ext cx="10515600" cy="4754880"/>
+            <a:off x="265350" y="1049927"/>
+            <a:ext cx="8519421" cy="3911327"/>
           </a:xfrm>
           <a:prstGeom prst="rect">
             <a:avLst/>
@@ -10163,7 +9911,7 @@
           <a:p>
             <a:pPr>
               <a:spcAft>
-                <a:spcPts val="400"/>
+                <a:spcPts val="600"/>
               </a:spcAft>
               <a:defRPr sz="1600" b="1">
                 <a:solidFill>
@@ -10172,171 +9920,151 @@
               </a:defRPr>
             </a:pPr>
             <a:r>
+              <a:rPr dirty="0"/>
               <a:t>Comprehensive Trade Assessment Feature Suite:</a:t>
             </a:r>
           </a:p>
           <a:p>
             <a:pPr>
               <a:spcAft>
-                <a:spcPts val="300"/>
-              </a:spcAft>
-              <a:defRPr sz="1050" b="0">
+                <a:spcPts val="500"/>
+              </a:spcAft>
+              <a:defRPr sz="1200" b="0">
                 <a:solidFill>
                   <a:srgbClr val="1E293B"/>
                 </a:solidFill>
               </a:defRPr>
             </a:pPr>
             <a:r>
-              <a:t>• Tripartite Clearance Layout Switcher: 3-way layout switcher (Split, Viewer focus, Decision focus), auto-hiding PDF view during analysis with automated focus scrolling to live progress bar.</a:t>
+              <a:rPr dirty="0"/>
+              <a:t>• Multimodal Ingestion &amp; PDF Normalization: Processes multi-page trade bundles with page-level coordinate mapping and thumbnail generation.</a:t>
             </a:r>
           </a:p>
           <a:p>
             <a:pPr>
               <a:spcAft>
-                <a:spcPts val="300"/>
-              </a:spcAft>
-              <a:defRPr sz="1050" b="0">
+                <a:spcPts val="500"/>
+              </a:spcAft>
+              <a:defRPr sz="1200" b="0">
                 <a:solidFill>
                   <a:srgbClr val="1E293B"/>
                 </a:solidFill>
               </a:defRPr>
             </a:pPr>
             <a:r>
-              <a:t>• Pre-Upload Document Staging &amp; Classification: Portaled classification modal (z-[9999]) enabling customs brokers to categorize document types prior to ingestion.</a:t>
+              <a:rPr dirty="0"/>
+              <a:t>• Prompt Injection Defense: Sandboxed extraction prompt and rigid </a:t>
+            </a:r>
+            <a:r>
+              <a:rPr dirty="0" err="1"/>
+              <a:t>Pydantic</a:t>
+            </a:r>
+            <a:r>
+              <a:rPr dirty="0"/>
+              <a:t> JSON schema that resist prompt-injection attempts inside vendor invoices.</a:t>
             </a:r>
           </a:p>
           <a:p>
             <a:pPr>
               <a:spcAft>
-                <a:spcPts val="300"/>
-              </a:spcAft>
-              <a:defRPr sz="1050" b="0">
+                <a:spcPts val="500"/>
+              </a:spcAft>
+              <a:defRPr sz="1200" b="0">
                 <a:solidFill>
                   <a:srgbClr val="1E293B"/>
                 </a:solidFill>
               </a:defRPr>
             </a:pPr>
             <a:r>
-              <a:t>• Commercial Registration &amp; Corporate Auth: Google Workspace SSO plus Cloud Firestore commercial registration with salted PBKDF2-HMAC-SHA256 password hashing and audit trails.</a:t>
+              <a:rPr dirty="0"/>
+              <a:t>• Cross-Document Discrepancy Engine: Automated cross-check of gross/net weights (1% tolerance), invoice references, ports, and Incoterm consistency.</a:t>
             </a:r>
           </a:p>
           <a:p>
             <a:pPr>
               <a:spcAft>
-                <a:spcPts val="300"/>
-              </a:spcAft>
-              <a:defRPr sz="1050" b="0">
+                <a:spcPts val="500"/>
+              </a:spcAft>
+              <a:defRPr sz="1200" b="0">
                 <a:solidFill>
                   <a:srgbClr val="1E293B"/>
                 </a:solidFill>
               </a:defRPr>
             </a:pPr>
             <a:r>
-              <a:t>• Multimodal Ingestion &amp; PDF Normalization: Processes multi-page trade bundles with page-level coordinate mapping and thumbnail generation.</a:t>
+              <a:rPr dirty="0"/>
+              <a:t>• Metallurgical &amp; Chemical Verifier: Parses laboratory Mill Test Certificates and validates Carbon, Manganese, Silicon, Phosphorus, Sulfur, and Chromium levels against Chapter 73 HS tariff rules.</a:t>
             </a:r>
           </a:p>
           <a:p>
             <a:pPr>
               <a:spcAft>
-                <a:spcPts val="300"/>
-              </a:spcAft>
-              <a:defRPr sz="1050" b="0">
+                <a:spcPts val="500"/>
+              </a:spcAft>
+              <a:defRPr sz="1200" b="0">
                 <a:solidFill>
                   <a:srgbClr val="1E293B"/>
                 </a:solidFill>
               </a:defRPr>
             </a:pPr>
             <a:r>
-              <a:t>• Prompt Injection Defense: Sandboxed extraction prompt and rigid Pydantic JSON schema that resist prompt-injection attempts inside vendor invoices.</a:t>
+              <a:rPr dirty="0"/>
+              <a:t>• Anti-Dumping &amp; Indicative Duty Engine: Identifies anti-dumping notifications (e.g. India Notification 02/2022-Customs) and calculates BCD, SWS, and ADD duties.</a:t>
             </a:r>
           </a:p>
           <a:p>
             <a:pPr>
               <a:spcAft>
-                <a:spcPts val="300"/>
-              </a:spcAft>
-              <a:defRPr sz="1050" b="0">
+                <a:spcPts val="500"/>
+              </a:spcAft>
+              <a:defRPr sz="1200" b="0">
                 <a:solidFill>
                   <a:srgbClr val="1E293B"/>
                 </a:solidFill>
               </a:defRPr>
             </a:pPr>
             <a:r>
-              <a:t>• Cross-Document Discrepancy Engine: Automated cross-check of gross/net weights (1% tolerance), invoice references, ports, and Incoterm consistency.</a:t>
+              <a:rPr dirty="0"/>
+              <a:t>• Interactive Visual Evidence Grounding: Maps every assessment finding to its exact source text and bounding box overlay on the original PDF.</a:t>
             </a:r>
           </a:p>
           <a:p>
             <a:pPr>
               <a:spcAft>
-                <a:spcPts val="300"/>
-              </a:spcAft>
-              <a:defRPr sz="1050" b="0">
+                <a:spcPts val="500"/>
+              </a:spcAft>
+              <a:defRPr sz="1200" b="0">
                 <a:solidFill>
                   <a:srgbClr val="1E293B"/>
                 </a:solidFill>
               </a:defRPr>
             </a:pPr>
             <a:r>
-              <a:t>• Metallurgical &amp; Chemical Verifier: Parses laboratory Mill Test Certificates and validates Carbon, Manganese, Silicon, Phosphorus, Sulfur, and Chromium levels against Chapter 73 HS tariff rules.</a:t>
+              <a:rPr dirty="0"/>
+              <a:t>• Human-in-the-Loop Corrections: Enables authorized CHAs to correct extracted fields with immediate zero-model </a:t>
+            </a:r>
+            <a:r>
+              <a:rPr dirty="0" err="1"/>
+              <a:t>recomputation</a:t>
+            </a:r>
+            <a:r>
+              <a:rPr dirty="0"/>
+              <a:t> and full audit tracking.</a:t>
             </a:r>
           </a:p>
           <a:p>
             <a:pPr>
               <a:spcAft>
-                <a:spcPts val="300"/>
-              </a:spcAft>
-              <a:defRPr sz="1050" b="0">
+                <a:spcPts val="500"/>
+              </a:spcAft>
+              <a:defRPr sz="1200" b="0">
                 <a:solidFill>
                   <a:srgbClr val="1E293B"/>
                 </a:solidFill>
               </a:defRPr>
             </a:pPr>
             <a:r>
-              <a:t>• Anti-Dumping &amp; Indicative Duty Engine: Identifies anti-dumping notifications (e.g. India Notification 02/2022-Customs) and calculates BCD, SWS, and ADD duties.</a:t>
-            </a:r>
-          </a:p>
-          <a:p>
-            <a:pPr>
-              <a:spcAft>
-                <a:spcPts val="300"/>
-              </a:spcAft>
-              <a:defRPr sz="1050" b="0">
-                <a:solidFill>
-                  <a:srgbClr val="1E293B"/>
-                </a:solidFill>
-              </a:defRPr>
-            </a:pPr>
-            <a:r>
-              <a:t>• Interactive Visual Evidence Grounding: Maps every assessment finding to its exact source text and bounding box overlay on the original PDF.</a:t>
-            </a:r>
-          </a:p>
-          <a:p>
-            <a:pPr>
-              <a:spcAft>
-                <a:spcPts val="300"/>
-              </a:spcAft>
-              <a:defRPr sz="1050" b="0">
-                <a:solidFill>
-                  <a:srgbClr val="1E293B"/>
-                </a:solidFill>
-              </a:defRPr>
-            </a:pPr>
-            <a:r>
-              <a:t>• Human-in-the-Loop Corrections: Enables authorized CHAs to correct extracted fields with immediate zero-model recomputation and full audit tracking.</a:t>
-            </a:r>
-          </a:p>
-          <a:p>
-            <a:pPr>
-              <a:spcAft>
-                <a:spcPts val="300"/>
-              </a:spcAft>
-              <a:defRPr sz="1050" b="0">
-                <a:solidFill>
-                  <a:srgbClr val="1E293B"/>
-                </a:solidFill>
-              </a:defRPr>
-            </a:pPr>
-            <a:r>
+              <a:rPr dirty="0"/>
               <a:t>• Cryptographic Tamper-Evident Ledger: SHA-256 hash-chained iterations with ECDSA key signatures recording all agent actions and verdicts.</a:t>
             </a:r>
           </a:p>
@@ -10350,12 +10078,12 @@
 </p:sld>
 </file>
 
-<file path=ppt/slides/slide6.xml><?xml version="1.0" encoding="utf-8"?>
-<p:sld xmlns:a="http://schemas.openxmlformats.org/drawingml/2006/main" xmlns:r="http://schemas.openxmlformats.org/officeDocument/2006/relationships" xmlns:mc="http://schemas.openxmlformats.org/markup-compatibility/2006" xmlns:mv="urn:schemas-microsoft-com:mac:vml" xmlns:p="http://schemas.openxmlformats.org/presentationml/2006/main" xmlns:c="http://schemas.openxmlformats.org/drawingml/2006/chart" xmlns:dgm="http://schemas.openxmlformats.org/drawingml/2006/diagram" xmlns:o="urn:schemas-microsoft-com:office:office" xmlns:v="urn:schemas-microsoft-com:vml" xmlns:pvml="urn:schemas-microsoft-com:office:powerpoint" xmlns:com="http://schemas.openxmlformats.org/drawingml/2006/compatibility" xmlns:p14="http://schemas.microsoft.com/office/powerpoint/2010/main" xmlns:p15="http://schemas.microsoft.com/office/powerpoint/2012/main" xmlns:ahyp="http://schemas.microsoft.com/office/drawing/2018/hyperlinkcolor">
+<file path=ppt/slides/slide5.xml><?xml version="1.0" encoding="utf-8"?>
+<p:sld xmlns:a="http://schemas.openxmlformats.org/drawingml/2006/main" xmlns:r="http://schemas.openxmlformats.org/officeDocument/2006/relationships" xmlns:p="http://schemas.openxmlformats.org/presentationml/2006/main">
   <p:cSld>
     <p:spTree>
       <p:nvGrpSpPr>
-        <p:cNvPr id="91" name="Shape 91"/>
+        <p:cNvPr id="1" name="Shape 91"/>
         <p:cNvGrpSpPr/>
         <p:nvPr/>
       </p:nvGrpSpPr>
@@ -10377,7 +10105,7 @@
           <a:blip r:embed="rId3">
             <a:alphaModFix/>
           </a:blip>
-          <a:srcRect b="98001" l="0" r="0" t="0"/>
+          <a:srcRect b="98001"/>
           <a:stretch/>
         </p:blipFill>
         <p:spPr>
@@ -10444,23 +10172,20 @@
           </a:ln>
         </p:spPr>
         <p:txBody>
-          <a:bodyPr anchorCtr="0" anchor="ctr" bIns="91425" lIns="91425" spcFirstLastPara="1" rIns="91425" wrap="square" tIns="91425">
+          <a:bodyPr spcFirstLastPara="1" wrap="square" lIns="91425" tIns="91425" rIns="91425" bIns="91425" anchor="ctr" anchorCtr="0">
             <a:noAutofit/>
           </a:bodyPr>
           <a:lstStyle/>
           <a:p>
-            <a:pPr indent="0" lvl="0" marL="0" rtl="0" algn="ctr">
-              <a:spcBef>
-                <a:spcPts val="0"/>
-              </a:spcBef>
-              <a:spcAft>
-                <a:spcPts val="0"/>
-              </a:spcAft>
-              <a:buNone/>
-            </a:pPr>
-            <a:r>
-              <a:t/>
-            </a:r>
+            <a:pPr marL="0" lvl="0" indent="0" algn="ctr" rtl="0">
+              <a:spcBef>
+                <a:spcPts val="0"/>
+              </a:spcBef>
+              <a:spcAft>
+                <a:spcPts val="0"/>
+              </a:spcAft>
+              <a:buNone/>
+            </a:pPr>
             <a:endParaRPr/>
           </a:p>
         </p:txBody>
@@ -10485,22 +10210,22 @@
           </a:ln>
         </p:spPr>
         <p:txBody>
-          <a:bodyPr anchorCtr="0" anchor="t" bIns="91425" lIns="91425" spcFirstLastPara="1" rIns="91425" wrap="square" tIns="91425">
+          <a:bodyPr spcFirstLastPara="1" wrap="square" lIns="91425" tIns="91425" rIns="91425" bIns="91425" anchor="t" anchorCtr="0">
             <a:noAutofit/>
           </a:bodyPr>
           <a:lstStyle/>
           <a:p>
-            <a:pPr indent="0" lvl="0" marL="0" rtl="0" algn="l">
-              <a:spcBef>
-                <a:spcPts val="0"/>
-              </a:spcBef>
-              <a:spcAft>
-                <a:spcPts val="0"/>
-              </a:spcAft>
-              <a:buNone/>
-            </a:pPr>
-            <a:r>
-              <a:rPr lang="en-GB" sz="1600">
+            <a:pPr marL="0" lvl="0" indent="0" algn="l" rtl="0">
+              <a:spcBef>
+                <a:spcPts val="0"/>
+              </a:spcBef>
+              <a:spcAft>
+                <a:spcPts val="0"/>
+              </a:spcAft>
+              <a:buNone/>
+            </a:pPr>
+            <a:r>
+              <a:rPr lang="en-GB" sz="1600" dirty="0">
                 <a:latin typeface="Google Sans Flex Medium"/>
                 <a:ea typeface="Google Sans Flex Medium"/>
                 <a:cs typeface="Google Sans Flex Medium"/>
@@ -10508,7 +10233,7 @@
               </a:rPr>
               <a:t>Process flow diagram or Use-case diagram</a:t>
             </a:r>
-            <a:endParaRPr sz="1600">
+            <a:endParaRPr sz="1600" dirty="0">
               <a:latin typeface="Google Sans Flex Medium"/>
               <a:ea typeface="Google Sans Flex Medium"/>
               <a:cs typeface="Google Sans Flex Medium"/>
@@ -10525,8 +10250,8 @@
         </p:nvSpPr>
         <p:spPr>
           <a:xfrm>
-            <a:off x="731520" y="1645920"/>
-            <a:ext cx="10515600" cy="4754880"/>
+            <a:off x="160020" y="1082584"/>
+            <a:ext cx="8788037" cy="3477875"/>
           </a:xfrm>
           <a:prstGeom prst="rect">
             <a:avLst/>
@@ -10550,6 +10275,7 @@
               </a:defRPr>
             </a:pPr>
             <a:r>
+              <a:rPr dirty="0"/>
               <a:t>End-to-End Trade Document Assessment Workflow:</a:t>
             </a:r>
           </a:p>
@@ -10565,6 +10291,7 @@
               </a:defRPr>
             </a:pPr>
             <a:r>
+              <a:rPr dirty="0"/>
               <a:t>• Step 1: Document Upload &amp; Preprocessing → CHA uploads PDF trade documents. System hashes files, normalizes PDF canvases, and extracts page-level metadata.</a:t>
             </a:r>
           </a:p>
@@ -10580,7 +10307,16 @@
               </a:defRPr>
             </a:pPr>
             <a:r>
-              <a:t>• Step 2: Multimodal Gemini 2.5 Flash Extraction → Gemini 2.5 Flash analyzes documents concurrently with structured Pydantic schemas and prompt-injection guardrails, producing normalized JSON with bounding boxes.</a:t>
+              <a:rPr dirty="0"/>
+              <a:t>• Step 2: Multimodal Gemini 2.5 Flash Extraction → Gemini 2.5 Flash analyzes documents concurrently with structured </a:t>
+            </a:r>
+            <a:r>
+              <a:rPr dirty="0" err="1"/>
+              <a:t>Pydantic</a:t>
+            </a:r>
+            <a:r>
+              <a:rPr dirty="0"/>
+              <a:t> schemas and prompt-injection guardrails, producing normalized JSON with bounding boxes.</a:t>
             </a:r>
           </a:p>
           <a:p>
@@ -10595,6 +10331,7 @@
               </a:defRPr>
             </a:pPr>
             <a:r>
+              <a:rPr dirty="0"/>
               <a:t>• Step 3: Deterministic Discrepancy Checks → Rule engine reconciles gross/net weights across Invoice, B/L, and Packing List. Validates container IDs, shipment dates, and delivery terms.</a:t>
             </a:r>
           </a:p>
@@ -10610,6 +10347,7 @@
               </a:defRPr>
             </a:pPr>
             <a:r>
+              <a:rPr dirty="0"/>
               <a:t>• Step 4: Specialized Metallurgy &amp; HS Verification → Validates chemical elements on Mill Test Certificate against Chapter 73 HS definitions; detects contradictions (e.g. HS 7304 seamless pipe claims).</a:t>
             </a:r>
           </a:p>
@@ -10625,6 +10363,7 @@
               </a:defRPr>
             </a:pPr>
             <a:r>
+              <a:rPr dirty="0"/>
               <a:t>• Step 5: Valuation &amp; Trade Remedies Calculation → Calculates CIF assessable value, Basic Customs Duty (BCD), Social Welfare Surcharge (SWS), and country-specific Anti-Dumping Duty (ADD).</a:t>
             </a:r>
           </a:p>
@@ -10640,7 +10379,16 @@
               </a:defRPr>
             </a:pPr>
             <a:r>
-              <a:t>• Step 6: Cryptographic Audit Signing → System builds SHA-256 chained hash of iteration state and signs with ECDSA P-256 key into Firestore immutable ledger.</a:t>
+              <a:rPr dirty="0"/>
+              <a:t>• Step 6: Cryptographic Audit Signing → System builds SHA-256 chained hash of iteration state and signs with ECDSA P-256 key into </a:t>
+            </a:r>
+            <a:r>
+              <a:rPr dirty="0" err="1"/>
+              <a:t>Firestore</a:t>
+            </a:r>
+            <a:r>
+              <a:rPr dirty="0"/>
+              <a:t> immutable ledger.</a:t>
             </a:r>
           </a:p>
           <a:p>
@@ -10655,6 +10403,7 @@
               </a:defRPr>
             </a:pPr>
             <a:r>
+              <a:rPr dirty="0"/>
               <a:t>• Step 7: Interactive CHA Review &amp; Correction → Broker reviews visual highlights on PDF viewer. If an extracted value needs adjustment, the agent corrects it and runs instant deterministic recompute.</a:t>
             </a:r>
           </a:p>
@@ -10668,12 +10417,12 @@
 </p:sld>
 </file>
 
-<file path=ppt/slides/slide7.xml><?xml version="1.0" encoding="utf-8"?>
-<p:sld xmlns:a="http://schemas.openxmlformats.org/drawingml/2006/main" xmlns:r="http://schemas.openxmlformats.org/officeDocument/2006/relationships" xmlns:mc="http://schemas.openxmlformats.org/markup-compatibility/2006" xmlns:mv="urn:schemas-microsoft-com:mac:vml" xmlns:p="http://schemas.openxmlformats.org/presentationml/2006/main" xmlns:c="http://schemas.openxmlformats.org/drawingml/2006/chart" xmlns:dgm="http://schemas.openxmlformats.org/drawingml/2006/diagram" xmlns:o="urn:schemas-microsoft-com:office:office" xmlns:v="urn:schemas-microsoft-com:vml" xmlns:pvml="urn:schemas-microsoft-com:office:powerpoint" xmlns:com="http://schemas.openxmlformats.org/drawingml/2006/compatibility" xmlns:p14="http://schemas.microsoft.com/office/powerpoint/2010/main" xmlns:p15="http://schemas.microsoft.com/office/powerpoint/2012/main" xmlns:ahyp="http://schemas.microsoft.com/office/drawing/2018/hyperlinkcolor">
+<file path=ppt/slides/slide6.xml><?xml version="1.0" encoding="utf-8"?>
+<p:sld xmlns:a="http://schemas.openxmlformats.org/drawingml/2006/main" xmlns:r="http://schemas.openxmlformats.org/officeDocument/2006/relationships" xmlns:p="http://schemas.openxmlformats.org/presentationml/2006/main">
   <p:cSld>
     <p:spTree>
       <p:nvGrpSpPr>
-        <p:cNvPr id="99" name="Shape 99"/>
+        <p:cNvPr id="1" name="Shape 99"/>
         <p:cNvGrpSpPr/>
         <p:nvPr/>
       </p:nvGrpSpPr>
@@ -10695,7 +10444,7 @@
           <a:blip r:embed="rId3">
             <a:alphaModFix/>
           </a:blip>
-          <a:srcRect b="98001" l="0" r="0" t="0"/>
+          <a:srcRect b="98001"/>
           <a:stretch/>
         </p:blipFill>
         <p:spPr>
@@ -10762,23 +10511,20 @@
           </a:ln>
         </p:spPr>
         <p:txBody>
-          <a:bodyPr anchorCtr="0" anchor="ctr" bIns="91425" lIns="91425" spcFirstLastPara="1" rIns="91425" wrap="square" tIns="91425">
+          <a:bodyPr spcFirstLastPara="1" wrap="square" lIns="91425" tIns="91425" rIns="91425" bIns="91425" anchor="ctr" anchorCtr="0">
             <a:noAutofit/>
           </a:bodyPr>
           <a:lstStyle/>
           <a:p>
-            <a:pPr indent="0" lvl="0" marL="0" rtl="0" algn="ctr">
-              <a:spcBef>
-                <a:spcPts val="0"/>
-              </a:spcBef>
-              <a:spcAft>
-                <a:spcPts val="0"/>
-              </a:spcAft>
-              <a:buNone/>
-            </a:pPr>
-            <a:r>
-              <a:t/>
-            </a:r>
+            <a:pPr marL="0" lvl="0" indent="0" algn="ctr" rtl="0">
+              <a:spcBef>
+                <a:spcPts val="0"/>
+              </a:spcBef>
+              <a:spcAft>
+                <a:spcPts val="0"/>
+              </a:spcAft>
+              <a:buNone/>
+            </a:pPr>
             <a:endParaRPr/>
           </a:p>
         </p:txBody>
@@ -10803,22 +10549,22 @@
           </a:ln>
         </p:spPr>
         <p:txBody>
-          <a:bodyPr anchorCtr="0" anchor="t" bIns="91425" lIns="91425" spcFirstLastPara="1" rIns="91425" wrap="square" tIns="91425">
+          <a:bodyPr spcFirstLastPara="1" wrap="square" lIns="91425" tIns="91425" rIns="91425" bIns="91425" anchor="t" anchorCtr="0">
             <a:noAutofit/>
           </a:bodyPr>
           <a:lstStyle/>
           <a:p>
-            <a:pPr indent="0" lvl="0" marL="0" rtl="0" algn="l">
-              <a:spcBef>
-                <a:spcPts val="0"/>
-              </a:spcBef>
-              <a:spcAft>
-                <a:spcPts val="0"/>
-              </a:spcAft>
-              <a:buNone/>
-            </a:pPr>
-            <a:r>
-              <a:rPr lang="en-GB" sz="1600">
+            <a:pPr marL="0" lvl="0" indent="0" algn="l" rtl="0">
+              <a:spcBef>
+                <a:spcPts val="0"/>
+              </a:spcBef>
+              <a:spcAft>
+                <a:spcPts val="0"/>
+              </a:spcAft>
+              <a:buNone/>
+            </a:pPr>
+            <a:r>
+              <a:rPr lang="en-GB" sz="1600" dirty="0">
                 <a:latin typeface="Google Sans Flex Medium"/>
                 <a:ea typeface="Google Sans Flex Medium"/>
                 <a:cs typeface="Google Sans Flex Medium"/>
@@ -10826,7 +10572,7 @@
               </a:rPr>
               <a:t>Wireframes/Mock diagrams of the proposed solution (optional)</a:t>
             </a:r>
-            <a:endParaRPr sz="1600">
+            <a:endParaRPr sz="1600" dirty="0">
               <a:latin typeface="Google Sans Flex Medium"/>
               <a:ea typeface="Google Sans Flex Medium"/>
               <a:cs typeface="Google Sans Flex Medium"/>
@@ -10843,8 +10589,8 @@
         </p:nvSpPr>
         <p:spPr>
           <a:xfrm>
-            <a:off x="731520" y="1645920"/>
-            <a:ext cx="10515600" cy="4754880"/>
+            <a:off x="265350" y="1090749"/>
+            <a:ext cx="8613300" cy="3424014"/>
           </a:xfrm>
           <a:prstGeom prst="rect">
             <a:avLst/>
@@ -10868,7 +10614,12 @@
               </a:defRPr>
             </a:pPr>
             <a:r>
-              <a:t>CargoClear 3-Pane Responsive Workbench Design:</a:t>
+              <a:rPr dirty="0" err="1"/>
+              <a:t>CargoClear</a:t>
+            </a:r>
+            <a:r>
+              <a:rPr dirty="0"/>
+              <a:t> 3-Pane Responsive Workbench Design:</a:t>
             </a:r>
           </a:p>
           <a:p>
@@ -10883,6 +10634,7 @@
               </a:defRPr>
             </a:pPr>
             <a:r>
+              <a:rPr dirty="0"/>
               <a:t>Left Navigation &amp; Document Tray (Width: 20%)</a:t>
             </a:r>
           </a:p>
@@ -10898,6 +10650,7 @@
               </a:defRPr>
             </a:pPr>
             <a:r>
+              <a:rPr dirty="0"/>
               <a:t>   • Document thumbnail gallery with classified document type badges (Invoice, B/L, Packing List, Mill Test Certificate).</a:t>
             </a:r>
           </a:p>
@@ -10913,7 +10666,16 @@
               </a:defRPr>
             </a:pPr>
             <a:r>
-              <a:t>   • Real-time upload dropzone supporting drag-and-drop PDF ingestion with live upload progress tracking.</a:t>
+              <a:rPr dirty="0"/>
+              <a:t>   • Real-time upload </a:t>
+            </a:r>
+            <a:r>
+              <a:rPr dirty="0" err="1"/>
+              <a:t>dropzone</a:t>
+            </a:r>
+            <a:r>
+              <a:rPr dirty="0"/>
+              <a:t> supporting drag-and-drop PDF ingestion with live upload progress tracking.</a:t>
             </a:r>
           </a:p>
           <a:p>
@@ -10928,6 +10690,7 @@
               </a:defRPr>
             </a:pPr>
             <a:r>
+              <a:rPr dirty="0"/>
               <a:t>   • Quick-action bundle switcher and destination selector (Singapore SG / India IN).</a:t>
             </a:r>
           </a:p>
@@ -10943,6 +10706,7 @@
               </a:defRPr>
             </a:pPr>
             <a:r>
+              <a:rPr dirty="0"/>
               <a:t>Center High-Fidelity PDF Viewer (Width: 50%)</a:t>
             </a:r>
           </a:p>
@@ -10958,6 +10722,7 @@
               </a:defRPr>
             </a:pPr>
             <a:r>
+              <a:rPr dirty="0"/>
               <a:t>   • Client-side PDF rendering canvas powered by PDF.js with smooth zooming, page navigation, and text selection.</a:t>
             </a:r>
           </a:p>
@@ -10973,6 +10738,7 @@
               </a:defRPr>
             </a:pPr>
             <a:r>
+              <a:rPr dirty="0"/>
               <a:t>   • Interactive SVG bounding box overlay layer highlighting exact evidence coordinates with color-coded severity.</a:t>
             </a:r>
           </a:p>
@@ -10988,6 +10754,7 @@
               </a:defRPr>
             </a:pPr>
             <a:r>
+              <a:rPr dirty="0"/>
               <a:t>   • Finding-to-document deep linking: clicking an audit finding automatically focuses the corresponding PDF page and box.</a:t>
             </a:r>
           </a:p>
@@ -11003,6 +10770,7 @@
               </a:defRPr>
             </a:pPr>
             <a:r>
+              <a:rPr dirty="0"/>
               <a:t>Right Assessment &amp; Audit Panel (Width: 30%)</a:t>
             </a:r>
           </a:p>
@@ -11018,6 +10786,7 @@
               </a:defRPr>
             </a:pPr>
             <a:r>
+              <a:rPr dirty="0"/>
               <a:t>   • Assessment Verdict Pill: Compliant / Missing Evidence / Material Contradiction / Specialist Review Required.</a:t>
             </a:r>
           </a:p>
@@ -11033,6 +10802,7 @@
               </a:defRPr>
             </a:pPr>
             <a:r>
+              <a:rPr dirty="0"/>
               <a:t>   • Compliance Checklist: Collapsible findings cards detailing discrepancies, rule IDs, tolerances, and delta values.</a:t>
             </a:r>
           </a:p>
@@ -11048,6 +10818,7 @@
               </a:defRPr>
             </a:pPr>
             <a:r>
+              <a:rPr dirty="0"/>
               <a:t>   • Indicative Duty Breakdown: Itemized valuation calculation with BCD, SWS, and Anti-Dumping Duty disclosures.</a:t>
             </a:r>
           </a:p>
@@ -11063,6 +10834,7 @@
               </a:defRPr>
             </a:pPr>
             <a:r>
+              <a:rPr dirty="0"/>
               <a:t>   • Human Corrections &amp; Tamper-Evident Audit Timeline: Interactive field override forms and signed event ledger.</a:t>
             </a:r>
           </a:p>
@@ -11076,12 +10848,12 @@
 </p:sld>
 </file>
 
-<file path=ppt/slides/slide8.xml><?xml version="1.0" encoding="utf-8"?>
-<p:sld xmlns:a="http://schemas.openxmlformats.org/drawingml/2006/main" xmlns:r="http://schemas.openxmlformats.org/officeDocument/2006/relationships" xmlns:mc="http://schemas.openxmlformats.org/markup-compatibility/2006" xmlns:mv="urn:schemas-microsoft-com:mac:vml" xmlns:p="http://schemas.openxmlformats.org/presentationml/2006/main" xmlns:c="http://schemas.openxmlformats.org/drawingml/2006/chart" xmlns:dgm="http://schemas.openxmlformats.org/drawingml/2006/diagram" xmlns:o="urn:schemas-microsoft-com:office:office" xmlns:v="urn:schemas-microsoft-com:vml" xmlns:pvml="urn:schemas-microsoft-com:office:powerpoint" xmlns:com="http://schemas.openxmlformats.org/drawingml/2006/compatibility" xmlns:p14="http://schemas.microsoft.com/office/powerpoint/2010/main" xmlns:p15="http://schemas.microsoft.com/office/powerpoint/2012/main" xmlns:ahyp="http://schemas.microsoft.com/office/drawing/2018/hyperlinkcolor">
+<file path=ppt/slides/slide7.xml><?xml version="1.0" encoding="utf-8"?>
+<p:sld xmlns:a="http://schemas.openxmlformats.org/drawingml/2006/main" xmlns:r="http://schemas.openxmlformats.org/officeDocument/2006/relationships" xmlns:p="http://schemas.openxmlformats.org/presentationml/2006/main">
   <p:cSld>
     <p:spTree>
       <p:nvGrpSpPr>
-        <p:cNvPr id="107" name="Shape 107"/>
+        <p:cNvPr id="1" name="Shape 107"/>
         <p:cNvGrpSpPr/>
         <p:nvPr/>
       </p:nvGrpSpPr>
@@ -11103,7 +10875,7 @@
           <a:blip r:embed="rId3">
             <a:alphaModFix/>
           </a:blip>
-          <a:srcRect b="98001" l="0" r="0" t="0"/>
+          <a:srcRect b="98001"/>
           <a:stretch/>
         </p:blipFill>
         <p:spPr>
@@ -11170,23 +10942,20 @@
           </a:ln>
         </p:spPr>
         <p:txBody>
-          <a:bodyPr anchorCtr="0" anchor="ctr" bIns="91425" lIns="91425" spcFirstLastPara="1" rIns="91425" wrap="square" tIns="91425">
+          <a:bodyPr spcFirstLastPara="1" wrap="square" lIns="91425" tIns="91425" rIns="91425" bIns="91425" anchor="ctr" anchorCtr="0">
             <a:noAutofit/>
           </a:bodyPr>
           <a:lstStyle/>
           <a:p>
-            <a:pPr indent="0" lvl="0" marL="0" rtl="0" algn="ctr">
-              <a:spcBef>
-                <a:spcPts val="0"/>
-              </a:spcBef>
-              <a:spcAft>
-                <a:spcPts val="0"/>
-              </a:spcAft>
-              <a:buNone/>
-            </a:pPr>
-            <a:r>
-              <a:t/>
-            </a:r>
+            <a:pPr marL="0" lvl="0" indent="0" algn="ctr" rtl="0">
+              <a:spcBef>
+                <a:spcPts val="0"/>
+              </a:spcBef>
+              <a:spcAft>
+                <a:spcPts val="0"/>
+              </a:spcAft>
+              <a:buNone/>
+            </a:pPr>
             <a:endParaRPr/>
           </a:p>
         </p:txBody>
@@ -11211,12 +10980,12 @@
           </a:ln>
         </p:spPr>
         <p:txBody>
-          <a:bodyPr anchorCtr="0" anchor="t" bIns="91425" lIns="91425" spcFirstLastPara="1" rIns="91425" wrap="square" tIns="91425">
+          <a:bodyPr spcFirstLastPara="1" wrap="square" lIns="91425" tIns="91425" rIns="91425" bIns="91425" anchor="t" anchorCtr="0">
             <a:noAutofit/>
           </a:bodyPr>
           <a:lstStyle/>
           <a:p>
-            <a:pPr indent="0" lvl="0" marL="0" rtl="0" algn="l">
+            <a:pPr marL="0" lvl="0" indent="0" algn="l" rtl="0">
               <a:spcBef>
                 <a:spcPts val="0"/>
               </a:spcBef>
@@ -11251,8 +11020,8 @@
         </p:nvSpPr>
         <p:spPr>
           <a:xfrm>
-            <a:off x="731520" y="1645920"/>
-            <a:ext cx="10515600" cy="4754880"/>
+            <a:off x="265350" y="1164228"/>
+            <a:ext cx="8298986" cy="2662267"/>
           </a:xfrm>
           <a:prstGeom prst="rect">
             <a:avLst/>
@@ -11276,6 +11045,7 @@
               </a:defRPr>
             </a:pPr>
             <a:r>
+              <a:rPr dirty="0"/>
               <a:t>Google Cloud Serverless Architecture:</a:t>
             </a:r>
           </a:p>
@@ -11291,6 +11061,7 @@
               </a:defRPr>
             </a:pPr>
             <a:r>
+              <a:rPr dirty="0"/>
               <a:t>• Presentation &amp; BFF Layer (Cloud Run): Next.js 15 App Router providing secure server-side API proxying, Server-Sent Events (SSE) streaming, Google OAuth SSO, and responsive Radix UI components.</a:t>
             </a:r>
           </a:p>
@@ -11306,7 +11077,16 @@
               </a:defRPr>
             </a:pPr>
             <a:r>
-              <a:t>• Application &amp; Orchestration API (Cloud Run): FastAPI asynchronous service executing the multi-stage assessment pipeline (preprocess, extract, discrepancy, ground, confidence, synthesize, finalize).</a:t>
+              <a:rPr dirty="0"/>
+              <a:t>• Application &amp; Orchestration API (Cloud Run): </a:t>
+            </a:r>
+            <a:r>
+              <a:rPr dirty="0" err="1"/>
+              <a:t>FastAPI</a:t>
+            </a:r>
+            <a:r>
+              <a:rPr dirty="0"/>
+              <a:t> asynchronous service executing the multi-stage assessment pipeline (preprocess, extract, discrepancy, ground, confidence, synthesize, finalize).</a:t>
             </a:r>
           </a:p>
           <a:p>
@@ -11321,7 +11101,16 @@
               </a:defRPr>
             </a:pPr>
             <a:r>
-              <a:t>• AI &amp; Multimodal Intelligence (Vertex AI): Google Gemini 2.5 Flash processing high-resolution trade documents concurrently with structured Pydantic schema generation and prompt-injection defense.</a:t>
+              <a:rPr dirty="0"/>
+              <a:t>• AI &amp; Multimodal Intelligence (Vertex AI): Google Gemini 2.5 Flash processing high-resolution trade documents concurrently with structured </a:t>
+            </a:r>
+            <a:r>
+              <a:rPr dirty="0" err="1"/>
+              <a:t>Pydantic</a:t>
+            </a:r>
+            <a:r>
+              <a:rPr dirty="0"/>
+              <a:t> schema generation and prompt-injection defense.</a:t>
             </a:r>
           </a:p>
           <a:p>
@@ -11336,7 +11125,32 @@
               </a:defRPr>
             </a:pPr>
             <a:r>
-              <a:t>• Storage &amp; Cryptographic State (Firestore &amp; GCS): Encrypted Cloud Storage bucket (cargoclear-raw-pdfs) for trade documents; Firestore for bundles, assessments, and tamper-evident SHA-256 audit ledgers.</a:t>
+              <a:rPr dirty="0"/>
+              <a:t>• Storage &amp; Cryptographic State (</a:t>
+            </a:r>
+            <a:r>
+              <a:rPr dirty="0" err="1"/>
+              <a:t>Firestore</a:t>
+            </a:r>
+            <a:r>
+              <a:rPr dirty="0"/>
+              <a:t> &amp; GCS): Encrypted Cloud Storage bucket (</a:t>
+            </a:r>
+            <a:r>
+              <a:rPr dirty="0" err="1"/>
+              <a:t>cargoclear</a:t>
+            </a:r>
+            <a:r>
+              <a:rPr dirty="0"/>
+              <a:t>-raw-pdfs) for trade documents; </a:t>
+            </a:r>
+            <a:r>
+              <a:rPr dirty="0" err="1"/>
+              <a:t>Firestore</a:t>
+            </a:r>
+            <a:r>
+              <a:rPr dirty="0"/>
+              <a:t> for bundles, assessments, and tamper-evident SHA-256 audit ledgers.</a:t>
             </a:r>
           </a:p>
           <a:p>
@@ -11351,7 +11165,24 @@
               </a:defRPr>
             </a:pPr>
             <a:r>
-              <a:t>• Tariff Knowledge &amp; Reference Store (BigQuery): BigQuery vector dataset housing Harmonized System (HS) trade schedules, AHTN codes, anti-dumping notifications, and embedding models.</a:t>
+              <a:rPr dirty="0"/>
+              <a:t>• Tariff Knowledge &amp; Reference Store (</a:t>
+            </a:r>
+            <a:r>
+              <a:rPr dirty="0" err="1"/>
+              <a:t>BigQuery</a:t>
+            </a:r>
+            <a:r>
+              <a:rPr dirty="0"/>
+              <a:t>): </a:t>
+            </a:r>
+            <a:r>
+              <a:rPr dirty="0" err="1"/>
+              <a:t>BigQuery</a:t>
+            </a:r>
+            <a:r>
+              <a:rPr dirty="0"/>
+              <a:t> vector dataset housing Harmonized System (HS) trade schedules, AHTN codes, anti-dumping notifications, and embedding models.</a:t>
             </a:r>
           </a:p>
         </p:txBody>
@@ -11364,12 +11195,12 @@
 </p:sld>
 </file>
 
-<file path=ppt/slides/slide9.xml><?xml version="1.0" encoding="utf-8"?>
-<p:sld xmlns:a="http://schemas.openxmlformats.org/drawingml/2006/main" xmlns:r="http://schemas.openxmlformats.org/officeDocument/2006/relationships" xmlns:mc="http://schemas.openxmlformats.org/markup-compatibility/2006" xmlns:mv="urn:schemas-microsoft-com:mac:vml" xmlns:p="http://schemas.openxmlformats.org/presentationml/2006/main" xmlns:c="http://schemas.openxmlformats.org/drawingml/2006/chart" xmlns:dgm="http://schemas.openxmlformats.org/drawingml/2006/diagram" xmlns:o="urn:schemas-microsoft-com:office:office" xmlns:v="urn:schemas-microsoft-com:vml" xmlns:pvml="urn:schemas-microsoft-com:office:powerpoint" xmlns:com="http://schemas.openxmlformats.org/drawingml/2006/compatibility" xmlns:p14="http://schemas.microsoft.com/office/powerpoint/2010/main" xmlns:p15="http://schemas.microsoft.com/office/powerpoint/2012/main" xmlns:ahyp="http://schemas.microsoft.com/office/drawing/2018/hyperlinkcolor">
+<file path=ppt/slides/slide8.xml><?xml version="1.0" encoding="utf-8"?>
+<p:sld xmlns:a="http://schemas.openxmlformats.org/drawingml/2006/main" xmlns:r="http://schemas.openxmlformats.org/officeDocument/2006/relationships" xmlns:p="http://schemas.openxmlformats.org/presentationml/2006/main">
   <p:cSld>
     <p:spTree>
       <p:nvGrpSpPr>
-        <p:cNvPr id="115" name="Shape 115"/>
+        <p:cNvPr id="1" name="Shape 115"/>
         <p:cNvGrpSpPr/>
         <p:nvPr/>
       </p:nvGrpSpPr>
@@ -11391,7 +11222,7 @@
           <a:blip r:embed="rId3">
             <a:alphaModFix/>
           </a:blip>
-          <a:srcRect b="98001" l="0" r="0" t="0"/>
+          <a:srcRect b="98001"/>
           <a:stretch/>
         </p:blipFill>
         <p:spPr>
@@ -11458,23 +11289,20 @@
           </a:ln>
         </p:spPr>
         <p:txBody>
-          <a:bodyPr anchorCtr="0" anchor="ctr" bIns="91425" lIns="91425" spcFirstLastPara="1" rIns="91425" wrap="square" tIns="91425">
+          <a:bodyPr spcFirstLastPara="1" wrap="square" lIns="91425" tIns="91425" rIns="91425" bIns="91425" anchor="ctr" anchorCtr="0">
             <a:noAutofit/>
           </a:bodyPr>
           <a:lstStyle/>
           <a:p>
-            <a:pPr indent="0" lvl="0" marL="0" rtl="0" algn="ctr">
-              <a:spcBef>
-                <a:spcPts val="0"/>
-              </a:spcBef>
-              <a:spcAft>
-                <a:spcPts val="0"/>
-              </a:spcAft>
-              <a:buNone/>
-            </a:pPr>
-            <a:r>
-              <a:t/>
-            </a:r>
+            <a:pPr marL="0" lvl="0" indent="0" algn="ctr" rtl="0">
+              <a:spcBef>
+                <a:spcPts val="0"/>
+              </a:spcBef>
+              <a:spcAft>
+                <a:spcPts val="0"/>
+              </a:spcAft>
+              <a:buNone/>
+            </a:pPr>
             <a:endParaRPr/>
           </a:p>
         </p:txBody>
@@ -11499,12 +11327,12 @@
           </a:ln>
         </p:spPr>
         <p:txBody>
-          <a:bodyPr anchorCtr="0" anchor="t" bIns="91425" lIns="91425" spcFirstLastPara="1" rIns="91425" wrap="square" tIns="91425">
+          <a:bodyPr spcFirstLastPara="1" wrap="square" lIns="91425" tIns="91425" rIns="91425" bIns="91425" anchor="t" anchorCtr="0">
             <a:noAutofit/>
           </a:bodyPr>
           <a:lstStyle/>
           <a:p>
-            <a:pPr indent="0" lvl="0" marL="0" rtl="0" algn="l">
+            <a:pPr marL="0" lvl="0" indent="0" algn="l" rtl="0">
               <a:spcBef>
                 <a:spcPts val="0"/>
               </a:spcBef>
@@ -11539,8 +11367,8 @@
         </p:nvSpPr>
         <p:spPr>
           <a:xfrm>
-            <a:off x="731520" y="1645920"/>
-            <a:ext cx="10515600" cy="4754880"/>
+            <a:off x="265350" y="1071339"/>
+            <a:ext cx="8200209" cy="2677656"/>
           </a:xfrm>
           <a:prstGeom prst="rect">
             <a:avLst/>
@@ -11557,6 +11385,369 @@
               <a:spcAft>
                 <a:spcPts val="600"/>
               </a:spcAft>
+              <a:defRPr sz="1200" b="0">
+                <a:solidFill>
+                  <a:srgbClr val="1E293B"/>
+                </a:solidFill>
+              </a:defRPr>
+            </a:pPr>
+            <a:r>
+              <a:rPr dirty="0"/>
+              <a:t>• Frontend Application: Next.js 15.5 (App Router), React 19, TypeScript, Tailwind CSS, PDF.js 4.9, Radix UI Primitives, Server-Sent Events (SSE).</a:t>
+            </a:r>
+          </a:p>
+          <a:p>
+            <a:pPr>
+              <a:spcAft>
+                <a:spcPts val="600"/>
+              </a:spcAft>
+              <a:defRPr sz="1200" b="0">
+                <a:solidFill>
+                  <a:srgbClr val="1E293B"/>
+                </a:solidFill>
+              </a:defRPr>
+            </a:pPr>
+            <a:r>
+              <a:rPr dirty="0"/>
+              <a:t>• Backend Services: Python 3.12, </a:t>
+            </a:r>
+            <a:r>
+              <a:rPr dirty="0" err="1"/>
+              <a:t>FastAPI</a:t>
+            </a:r>
+            <a:r>
+              <a:rPr dirty="0"/>
+              <a:t>, </a:t>
+            </a:r>
+            <a:r>
+              <a:rPr dirty="0" err="1"/>
+              <a:t>Pydantic</a:t>
+            </a:r>
+            <a:r>
+              <a:rPr dirty="0"/>
+              <a:t> v2, </a:t>
+            </a:r>
+            <a:r>
+              <a:rPr dirty="0" err="1"/>
+              <a:t>PyMuPDF</a:t>
+            </a:r>
+            <a:r>
+              <a:rPr dirty="0"/>
+              <a:t>, </a:t>
+            </a:r>
+            <a:r>
+              <a:rPr dirty="0" err="1"/>
+              <a:t>Structlog</a:t>
+            </a:r>
+            <a:r>
+              <a:rPr dirty="0"/>
+              <a:t>, </a:t>
+            </a:r>
+            <a:r>
+              <a:rPr dirty="0" err="1"/>
+              <a:t>AsyncIO</a:t>
+            </a:r>
+            <a:r>
+              <a:rPr dirty="0"/>
+              <a:t> Concurrent Task Pools.</a:t>
+            </a:r>
+          </a:p>
+          <a:p>
+            <a:pPr>
+              <a:spcAft>
+                <a:spcPts val="600"/>
+              </a:spcAft>
+              <a:defRPr sz="1200" b="0">
+                <a:solidFill>
+                  <a:srgbClr val="1E293B"/>
+                </a:solidFill>
+              </a:defRPr>
+            </a:pPr>
+            <a:r>
+              <a:rPr dirty="0"/>
+              <a:t>• AI / Foundation Models: Google Gemini 2.5 Flash via Google GenAI SDK, Structured JSON Outputs, Vertex AI Embeddings.</a:t>
+            </a:r>
+          </a:p>
+          <a:p>
+            <a:pPr>
+              <a:spcAft>
+                <a:spcPts val="600"/>
+              </a:spcAft>
+              <a:defRPr sz="1200" b="0">
+                <a:solidFill>
+                  <a:srgbClr val="1E293B"/>
+                </a:solidFill>
+              </a:defRPr>
+            </a:pPr>
+            <a:r>
+              <a:rPr dirty="0"/>
+              <a:t>• Database &amp; Persistence: Google Cloud </a:t>
+            </a:r>
+            <a:r>
+              <a:rPr dirty="0" err="1"/>
+              <a:t>Firestore</a:t>
+            </a:r>
+            <a:r>
+              <a:rPr dirty="0"/>
+              <a:t> (Datastore Mode for ACID bundle/iteration storage), Google Cloud Storage (PDF storage).</a:t>
+            </a:r>
+          </a:p>
+          <a:p>
+            <a:pPr>
+              <a:spcAft>
+                <a:spcPts val="600"/>
+              </a:spcAft>
+              <a:defRPr sz="1200" b="0">
+                <a:solidFill>
+                  <a:srgbClr val="1E293B"/>
+                </a:solidFill>
+              </a:defRPr>
+            </a:pPr>
+            <a:r>
+              <a:rPr dirty="0"/>
+              <a:t>• Data Warehouse &amp; Tariff Rules: Google Cloud </a:t>
+            </a:r>
+            <a:r>
+              <a:rPr dirty="0" err="1"/>
+              <a:t>BigQuery</a:t>
+            </a:r>
+            <a:r>
+              <a:rPr dirty="0"/>
+              <a:t> (AHTN tariff schedules, HS code vector embeddings).</a:t>
+            </a:r>
+          </a:p>
+          <a:p>
+            <a:pPr>
+              <a:spcAft>
+                <a:spcPts val="600"/>
+              </a:spcAft>
+              <a:defRPr sz="1200" b="0">
+                <a:solidFill>
+                  <a:srgbClr val="1E293B"/>
+                </a:solidFill>
+              </a:defRPr>
+            </a:pPr>
+            <a:r>
+              <a:rPr dirty="0"/>
+              <a:t>• Cloud Infrastructure: Google Cloud Run (asia-south1 region, containerized multi-stage builds, auto-scaling).</a:t>
+            </a:r>
+          </a:p>
+          <a:p>
+            <a:pPr>
+              <a:spcAft>
+                <a:spcPts val="600"/>
+              </a:spcAft>
+              <a:defRPr sz="1200" b="0">
+                <a:solidFill>
+                  <a:srgbClr val="1E293B"/>
+                </a:solidFill>
+              </a:defRPr>
+            </a:pPr>
+            <a:r>
+              <a:rPr dirty="0"/>
+              <a:t>• Security &amp; Cryptography: Google OAuth 2.0 / Firebase Auth, ECDSA P-256 Digital Signatures, SHA-256 Immutable Audit Hash-Chaining.</a:t>
+            </a:r>
+          </a:p>
+        </p:txBody>
+      </p:sp>
+    </p:spTree>
+  </p:cSld>
+  <p:clrMapOvr>
+    <a:masterClrMapping/>
+  </p:clrMapOvr>
+</p:sld>
+</file>
+
+<file path=ppt/slides/slide9.xml><?xml version="1.0" encoding="utf-8"?>
+<p:sld xmlns:a="http://schemas.openxmlformats.org/drawingml/2006/main" xmlns:r="http://schemas.openxmlformats.org/officeDocument/2006/relationships" xmlns:p="http://schemas.openxmlformats.org/presentationml/2006/main">
+  <p:cSld>
+    <p:spTree>
+      <p:nvGrpSpPr>
+        <p:cNvPr id="1" name="Shape 123"/>
+        <p:cNvGrpSpPr/>
+        <p:nvPr/>
+      </p:nvGrpSpPr>
+      <p:grpSpPr>
+        <a:xfrm>
+          <a:off x="0" y="0"/>
+          <a:ext cx="0" cy="0"/>
+          <a:chOff x="0" y="0"/>
+          <a:chExt cx="0" cy="0"/>
+        </a:xfrm>
+      </p:grpSpPr>
+      <p:pic>
+        <p:nvPicPr>
+          <p:cNvPr id="124" name="Google Shape;124;p22" title="Frame 144.png"/>
+          <p:cNvPicPr preferRelativeResize="0"/>
+          <p:nvPr/>
+        </p:nvPicPr>
+        <p:blipFill rotWithShape="1">
+          <a:blip r:embed="rId3">
+            <a:alphaModFix/>
+          </a:blip>
+          <a:srcRect b="98001"/>
+          <a:stretch/>
+        </p:blipFill>
+        <p:spPr>
+          <a:xfrm>
+            <a:off x="0" y="5093562"/>
+            <a:ext cx="9144000" cy="54275"/>
+          </a:xfrm>
+          <a:prstGeom prst="rect">
+            <a:avLst/>
+          </a:prstGeom>
+          <a:noFill/>
+          <a:ln>
+            <a:noFill/>
+          </a:ln>
+        </p:spPr>
+      </p:pic>
+      <p:pic>
+        <p:nvPicPr>
+          <p:cNvPr id="125" name="Google Shape;125;p22" title="Group 427319979.png"/>
+          <p:cNvPicPr preferRelativeResize="0"/>
+          <p:nvPr/>
+        </p:nvPicPr>
+        <p:blipFill>
+          <a:blip r:embed="rId4">
+            <a:alphaModFix/>
+          </a:blip>
+          <a:stretch>
+            <a:fillRect/>
+          </a:stretch>
+        </p:blipFill>
+        <p:spPr>
+          <a:xfrm>
+            <a:off x="0" y="1"/>
+            <a:ext cx="9144000" cy="507359"/>
+          </a:xfrm>
+          <a:prstGeom prst="rect">
+            <a:avLst/>
+          </a:prstGeom>
+          <a:noFill/>
+          <a:ln>
+            <a:noFill/>
+          </a:ln>
+        </p:spPr>
+      </p:pic>
+      <p:sp>
+        <p:nvSpPr>
+          <p:cNvPr id="126" name="Google Shape;126;p22"/>
+          <p:cNvSpPr/>
+          <p:nvPr/>
+        </p:nvSpPr>
+        <p:spPr>
+          <a:xfrm>
+            <a:off x="-29250" y="5071875"/>
+            <a:ext cx="9173400" cy="97800"/>
+          </a:xfrm>
+          <a:prstGeom prst="rect">
+            <a:avLst/>
+          </a:prstGeom>
+          <a:solidFill>
+            <a:schemeClr val="dk1"/>
+          </a:solidFill>
+          <a:ln>
+            <a:noFill/>
+          </a:ln>
+        </p:spPr>
+        <p:txBody>
+          <a:bodyPr spcFirstLastPara="1" wrap="square" lIns="91425" tIns="91425" rIns="91425" bIns="91425" anchor="ctr" anchorCtr="0">
+            <a:noAutofit/>
+          </a:bodyPr>
+          <a:lstStyle/>
+          <a:p>
+            <a:pPr marL="0" lvl="0" indent="0" algn="ctr" rtl="0">
+              <a:spcBef>
+                <a:spcPts val="0"/>
+              </a:spcBef>
+              <a:spcAft>
+                <a:spcPts val="0"/>
+              </a:spcAft>
+              <a:buNone/>
+            </a:pPr>
+            <a:endParaRPr/>
+          </a:p>
+        </p:txBody>
+      </p:sp>
+      <p:sp>
+        <p:nvSpPr>
+          <p:cNvPr id="127" name="Google Shape;127;p22"/>
+          <p:cNvSpPr txBox="1"/>
+          <p:nvPr/>
+        </p:nvSpPr>
+        <p:spPr>
+          <a:xfrm>
+            <a:off x="265350" y="663825"/>
+            <a:ext cx="8943000" cy="561900"/>
+          </a:xfrm>
+          <a:prstGeom prst="rect">
+            <a:avLst/>
+          </a:prstGeom>
+          <a:noFill/>
+          <a:ln>
+            <a:noFill/>
+          </a:ln>
+        </p:spPr>
+        <p:txBody>
+          <a:bodyPr spcFirstLastPara="1" wrap="square" lIns="91425" tIns="91425" rIns="91425" bIns="91425" anchor="t" anchorCtr="0">
+            <a:noAutofit/>
+          </a:bodyPr>
+          <a:lstStyle/>
+          <a:p>
+            <a:pPr marL="0" lvl="0" indent="0" algn="l" rtl="0">
+              <a:spcBef>
+                <a:spcPts val="0"/>
+              </a:spcBef>
+              <a:spcAft>
+                <a:spcPts val="0"/>
+              </a:spcAft>
+              <a:buNone/>
+            </a:pPr>
+            <a:r>
+              <a:rPr lang="en-GB" sz="1600">
+                <a:latin typeface="Google Sans Flex Medium"/>
+                <a:ea typeface="Google Sans Flex Medium"/>
+                <a:cs typeface="Google Sans Flex Medium"/>
+                <a:sym typeface="Google Sans Flex Medium"/>
+              </a:rPr>
+              <a:t>Estimated implementation cost (optional)</a:t>
+            </a:r>
+            <a:endParaRPr sz="1600">
+              <a:latin typeface="Google Sans Flex Medium"/>
+              <a:ea typeface="Google Sans Flex Medium"/>
+              <a:cs typeface="Google Sans Flex Medium"/>
+              <a:sym typeface="Google Sans Flex Medium"/>
+            </a:endParaRPr>
+          </a:p>
+        </p:txBody>
+      </p:sp>
+      <p:sp>
+        <p:nvSpPr>
+          <p:cNvPr id="128" name="TextBox 127"/>
+          <p:cNvSpPr txBox="1"/>
+          <p:nvPr/>
+        </p:nvSpPr>
+        <p:spPr>
+          <a:xfrm>
+            <a:off x="355962" y="1280000"/>
+            <a:ext cx="8053251" cy="2846933"/>
+          </a:xfrm>
+          <a:prstGeom prst="rect">
+            <a:avLst/>
+          </a:prstGeom>
+          <a:noFill/>
+        </p:spPr>
+        <p:txBody>
+          <a:bodyPr wrap="square" tIns="91440" bIns="91440">
+            <a:spAutoFit/>
+          </a:bodyPr>
+          <a:lstStyle/>
+          <a:p>
+            <a:pPr>
+              <a:spcAft>
+                <a:spcPts val="600"/>
+              </a:spcAft>
               <a:defRPr sz="1600" b="1">
                 <a:solidFill>
                   <a:srgbClr val="0F172A"/>
@@ -11564,7 +11755,8 @@
               </a:defRPr>
             </a:pPr>
             <a:r>
-              <a:t>Verified Production Technology Stack:</a:t>
+              <a:rPr dirty="0"/>
+              <a:t>Serverless Pay-Per-Use Cost Model (Zero Idle Costs):</a:t>
             </a:r>
           </a:p>
           <a:p>
@@ -11579,7 +11771,8 @@
               </a:defRPr>
             </a:pPr>
             <a:r>
-              <a:t>• Frontend Application: Next.js 15.5 (App Router), React 19, TypeScript, Tailwind CSS, PDF.js 4.9, Radix UI Primitives, Server-Sent Events (SSE).</a:t>
+              <a:rPr dirty="0"/>
+              <a:t>• Cloud Run Frontend &amp; API Services: Runs on Google Cloud Run with scale-to-zero. Baseline free tier covers 2 million requests/month. Projected cost for production pilot: ~$15.00 – $25.00 / month.</a:t>
             </a:r>
           </a:p>
           <a:p>
@@ -11594,7 +11787,8 @@
               </a:defRPr>
             </a:pPr>
             <a:r>
-              <a:t>• Backend Services: Python 3.12, FastAPI, Pydantic v2, PyMuPDF, Structlog, AsyncIO Concurrent Task Pools.</a:t>
+              <a:rPr dirty="0"/>
+              <a:t>• Google Gemini 2.5 Flash Inference: Pricing: $0.075 / 1M input tokens, $0.30 / 1M output tokens. An average 4-document trade bundle consumes ~4,500 input tokens and ~1,800 output tokens. Cost per bundle assessment: ~$0.00088 (&lt; 0.1¢). For 5,000 monthly shipments: ~$4.40 / month.</a:t>
             </a:r>
           </a:p>
           <a:p>
@@ -11609,7 +11803,24 @@
               </a:defRPr>
             </a:pPr>
             <a:r>
-              <a:t>• AI / Foundation Models: Google Gemini 2.5 Flash via Google GenAI SDK, Structured JSON Outputs, Vertex AI Embeddings.</a:t>
+              <a:rPr dirty="0"/>
+              <a:t>• Cloud Storage &amp; </a:t>
+            </a:r>
+            <a:r>
+              <a:rPr dirty="0" err="1"/>
+              <a:t>Firestore</a:t>
+            </a:r>
+            <a:r>
+              <a:rPr dirty="0"/>
+              <a:t> Ledger: Document storage (10 MB/shipment) + </a:t>
+            </a:r>
+            <a:r>
+              <a:rPr dirty="0" err="1"/>
+              <a:t>Firestore</a:t>
+            </a:r>
+            <a:r>
+              <a:rPr dirty="0"/>
+              <a:t> read/write operations for audit ledger. Projected cost: ~$5.00 – $10.00 / month.</a:t>
             </a:r>
           </a:p>
           <a:p>
@@ -11624,7 +11835,24 @@
               </a:defRPr>
             </a:pPr>
             <a:r>
-              <a:t>• Database &amp; Persistence: Google Cloud Firestore (Datastore Mode for ACID bundle/iteration storage), Google Cloud Storage (PDF storage).</a:t>
+              <a:rPr dirty="0"/>
+              <a:t>• </a:t>
+            </a:r>
+            <a:r>
+              <a:rPr dirty="0" err="1"/>
+              <a:t>BigQuery</a:t>
+            </a:r>
+            <a:r>
+              <a:rPr dirty="0"/>
+              <a:t> Reference Queries: Tariff schedule lookups cached in-memory with </a:t>
+            </a:r>
+            <a:r>
+              <a:rPr dirty="0" err="1"/>
+              <a:t>BigQuery</a:t>
+            </a:r>
+            <a:r>
+              <a:rPr dirty="0"/>
+              <a:t> vector search. Projected cost: ~$2.00 – $5.00 / month.</a:t>
             </a:r>
           </a:p>
           <a:p>
@@ -11639,37 +11867,8 @@
               </a:defRPr>
             </a:pPr>
             <a:r>
-              <a:t>• Data Warehouse &amp; Tariff Rules: Google Cloud BigQuery (AHTN tariff schedules, HS code vector embeddings).</a:t>
-            </a:r>
-          </a:p>
-          <a:p>
-            <a:pPr>
-              <a:spcAft>
-                <a:spcPts val="600"/>
-              </a:spcAft>
-              <a:defRPr sz="1200" b="0">
-                <a:solidFill>
-                  <a:srgbClr val="1E293B"/>
-                </a:solidFill>
-              </a:defRPr>
-            </a:pPr>
-            <a:r>
-              <a:t>• Cloud Infrastructure: Google Cloud Run (asia-south1 region, containerized multi-stage builds, auto-scaling).</a:t>
-            </a:r>
-          </a:p>
-          <a:p>
-            <a:pPr>
-              <a:spcAft>
-                <a:spcPts val="600"/>
-              </a:spcAft>
-              <a:defRPr sz="1200" b="0">
-                <a:solidFill>
-                  <a:srgbClr val="1E293B"/>
-                </a:solidFill>
-              </a:defRPr>
-            </a:pPr>
-            <a:r>
-              <a:t>• Security &amp; Cryptography: Google OAuth 2.0 / Firebase Auth, ECDSA P-256 Digital Signatures, SHA-256 Immutable Audit Hash-Chaining.</a:t>
+              <a:rPr dirty="0"/>
+              <a:t>• Total Estimated Monthly Operating Cost: Estimated total for 5,000 full shipment bundle assessments: ~$26.40 – $44.40 / month (less than $0.01 per clearance assessment!).</a:t>
             </a:r>
           </a:p>
         </p:txBody>
@@ -11683,7 +11882,7 @@
 </file>
 
 <file path=ppt/theme/theme1.xml><?xml version="1.0" encoding="utf-8"?>
-<a:theme xmlns:a="http://schemas.openxmlformats.org/drawingml/2006/main" xmlns:r="http://schemas.openxmlformats.org/officeDocument/2006/relationships" name="Simple Light">
+<a:theme xmlns:a="http://schemas.openxmlformats.org/drawingml/2006/main" name="Simple Light">
   <a:themeElements>
     <a:clrScheme name="Simple Light">
       <a:dk1>
@@ -11958,11 +12157,13 @@
       </a:bgFillStyleLst>
     </a:fmtScheme>
   </a:themeElements>
+  <a:objectDefaults/>
+  <a:extraClrSchemeLst/>
 </a:theme>
 </file>
 
 <file path=ppt/theme/theme2.xml><?xml version="1.0" encoding="utf-8"?>
-<a:theme xmlns:a="http://schemas.openxmlformats.org/drawingml/2006/main" xmlns:r="http://schemas.openxmlformats.org/officeDocument/2006/relationships">
+<a:theme xmlns:a="http://schemas.openxmlformats.org/drawingml/2006/main">
   <a:themeElements>
     <a:clrScheme name="Default">
       <a:dk1>
@@ -12237,5 +12438,7 @@
       </a:bgFillStyleLst>
     </a:fmtScheme>
   </a:themeElements>
+  <a:objectDefaults/>
+  <a:extraClrSchemeLst/>
 </a:theme>
 </file>